--- a/psychologicalReview/figures/targetFindingFigNEW.pptx
+++ b/psychologicalReview/figures/targetFindingFigNEW.pptx
@@ -2,7 +2,7 @@
 <file path=ppt/presentation.xml><?xml version="1.0" encoding="utf-8"?>
 <p:presentation xmlns:a="http://schemas.openxmlformats.org/drawingml/2006/main" xmlns:r="http://schemas.openxmlformats.org/officeDocument/2006/relationships" xmlns:p="http://schemas.openxmlformats.org/presentationml/2006/main" saveSubsetFonts="1">
   <p:sldMasterIdLst>
-    <p:sldMasterId id="2147483648" r:id="rId4"/>
+    <p:sldMasterId id="2147483708" r:id="rId4"/>
   </p:sldMasterIdLst>
   <p:notesMasterIdLst>
     <p:notesMasterId r:id="rId7"/>
@@ -11,13 +11,13 @@
     <p:sldId id="256" r:id="rId5"/>
     <p:sldId id="257" r:id="rId6"/>
   </p:sldIdLst>
-  <p:sldSz cx="12192000" cy="6858000"/>
+  <p:sldSz cx="43200638" cy="18000663"/>
   <p:notesSz cx="6858000" cy="9144000"/>
   <p:defaultTextStyle>
     <a:defPPr>
       <a:defRPr lang="en-US"/>
     </a:defPPr>
-    <a:lvl1pPr marL="0" algn="l" defTabSz="914400" rtl="0" eaLnBrk="1" latinLnBrk="0" hangingPunct="1">
+    <a:lvl1pPr marL="0" algn="l" defTabSz="457200" rtl="0" eaLnBrk="1" latinLnBrk="0" hangingPunct="1">
       <a:defRPr sz="1800" kern="1200">
         <a:solidFill>
           <a:schemeClr val="tx1"/>
@@ -27,7 +27,7 @@
         <a:cs typeface="+mn-cs"/>
       </a:defRPr>
     </a:lvl1pPr>
-    <a:lvl2pPr marL="457200" algn="l" defTabSz="914400" rtl="0" eaLnBrk="1" latinLnBrk="0" hangingPunct="1">
+    <a:lvl2pPr marL="457200" algn="l" defTabSz="457200" rtl="0" eaLnBrk="1" latinLnBrk="0" hangingPunct="1">
       <a:defRPr sz="1800" kern="1200">
         <a:solidFill>
           <a:schemeClr val="tx1"/>
@@ -37,7 +37,7 @@
         <a:cs typeface="+mn-cs"/>
       </a:defRPr>
     </a:lvl2pPr>
-    <a:lvl3pPr marL="914400" algn="l" defTabSz="914400" rtl="0" eaLnBrk="1" latinLnBrk="0" hangingPunct="1">
+    <a:lvl3pPr marL="914400" algn="l" defTabSz="457200" rtl="0" eaLnBrk="1" latinLnBrk="0" hangingPunct="1">
       <a:defRPr sz="1800" kern="1200">
         <a:solidFill>
           <a:schemeClr val="tx1"/>
@@ -47,7 +47,7 @@
         <a:cs typeface="+mn-cs"/>
       </a:defRPr>
     </a:lvl3pPr>
-    <a:lvl4pPr marL="1371600" algn="l" defTabSz="914400" rtl="0" eaLnBrk="1" latinLnBrk="0" hangingPunct="1">
+    <a:lvl4pPr marL="1371600" algn="l" defTabSz="457200" rtl="0" eaLnBrk="1" latinLnBrk="0" hangingPunct="1">
       <a:defRPr sz="1800" kern="1200">
         <a:solidFill>
           <a:schemeClr val="tx1"/>
@@ -57,7 +57,7 @@
         <a:cs typeface="+mn-cs"/>
       </a:defRPr>
     </a:lvl4pPr>
-    <a:lvl5pPr marL="1828800" algn="l" defTabSz="914400" rtl="0" eaLnBrk="1" latinLnBrk="0" hangingPunct="1">
+    <a:lvl5pPr marL="1828800" algn="l" defTabSz="457200" rtl="0" eaLnBrk="1" latinLnBrk="0" hangingPunct="1">
       <a:defRPr sz="1800" kern="1200">
         <a:solidFill>
           <a:schemeClr val="tx1"/>
@@ -67,7 +67,7 @@
         <a:cs typeface="+mn-cs"/>
       </a:defRPr>
     </a:lvl5pPr>
-    <a:lvl6pPr marL="2286000" algn="l" defTabSz="914400" rtl="0" eaLnBrk="1" latinLnBrk="0" hangingPunct="1">
+    <a:lvl6pPr marL="2286000" algn="l" defTabSz="457200" rtl="0" eaLnBrk="1" latinLnBrk="0" hangingPunct="1">
       <a:defRPr sz="1800" kern="1200">
         <a:solidFill>
           <a:schemeClr val="tx1"/>
@@ -77,7 +77,7 @@
         <a:cs typeface="+mn-cs"/>
       </a:defRPr>
     </a:lvl6pPr>
-    <a:lvl7pPr marL="2743200" algn="l" defTabSz="914400" rtl="0" eaLnBrk="1" latinLnBrk="0" hangingPunct="1">
+    <a:lvl7pPr marL="2743200" algn="l" defTabSz="457200" rtl="0" eaLnBrk="1" latinLnBrk="0" hangingPunct="1">
       <a:defRPr sz="1800" kern="1200">
         <a:solidFill>
           <a:schemeClr val="tx1"/>
@@ -87,7 +87,7 @@
         <a:cs typeface="+mn-cs"/>
       </a:defRPr>
     </a:lvl7pPr>
-    <a:lvl8pPr marL="3200400" algn="l" defTabSz="914400" rtl="0" eaLnBrk="1" latinLnBrk="0" hangingPunct="1">
+    <a:lvl8pPr marL="3200400" algn="l" defTabSz="457200" rtl="0" eaLnBrk="1" latinLnBrk="0" hangingPunct="1">
       <a:defRPr sz="1800" kern="1200">
         <a:solidFill>
           <a:schemeClr val="tx1"/>
@@ -97,7 +97,7 @@
         <a:cs typeface="+mn-cs"/>
       </a:defRPr>
     </a:lvl8pPr>
-    <a:lvl9pPr marL="3657600" algn="l" defTabSz="914400" rtl="0" eaLnBrk="1" latinLnBrk="0" hangingPunct="1">
+    <a:lvl9pPr marL="3657600" algn="l" defTabSz="457200" rtl="0" eaLnBrk="1" latinLnBrk="0" hangingPunct="1">
       <a:defRPr sz="1800" kern="1200">
         <a:solidFill>
           <a:schemeClr val="tx1"/>
@@ -108,6 +108,11 @@
       </a:defRPr>
     </a:lvl9pPr>
   </p:defaultTextStyle>
+  <p:extLst>
+    <p:ext uri="{EFAFB233-063F-42B5-8137-9DF3F51BA10A}">
+      <p15:sldGuideLst xmlns:p15="http://schemas.microsoft.com/office/powerpoint/2012/main"/>
+    </p:ext>
+  </p:extLst>
 </p:presentation>
 </file>
 
@@ -211,8 +216,8 @@
         </p:nvSpPr>
         <p:spPr>
           <a:xfrm>
-            <a:off x="685800" y="1143000"/>
-            <a:ext cx="5486400" cy="3086100"/>
+            <a:off x="-273050" y="1143000"/>
+            <a:ext cx="7404100" cy="3086100"/>
           </a:xfrm>
           <a:prstGeom prst="rect">
             <a:avLst/>
@@ -487,7 +492,12 @@
             <p:ph type="sldImg"/>
           </p:nvPr>
         </p:nvSpPr>
-        <p:spPr/>
+        <p:spPr>
+          <a:xfrm>
+            <a:off x="-273050" y="1143000"/>
+            <a:ext cx="7404100" cy="3086100"/>
+          </a:xfrm>
+        </p:spPr>
       </p:sp>
       <p:sp>
         <p:nvSpPr>
@@ -563,13 +573,7 @@
       </p:grpSpPr>
       <p:sp>
         <p:nvSpPr>
-          <p:cNvPr id="2" name="Title 1">
-            <a:extLst>
-              <a:ext uri="{FF2B5EF4-FFF2-40B4-BE49-F238E27FC236}">
-                <a16:creationId xmlns:a16="http://schemas.microsoft.com/office/drawing/2014/main" id="{F6599F71-0A83-CFE8-E6B3-41BE27FA5F6B}"/>
-              </a:ext>
-            </a:extLst>
-          </p:cNvPr>
+          <p:cNvPr id="2" name="Title 1"/>
           <p:cNvSpPr>
             <a:spLocks noGrp="1"/>
           </p:cNvSpPr>
@@ -579,15 +583,15 @@
         </p:nvSpPr>
         <p:spPr>
           <a:xfrm>
-            <a:off x="1524000" y="1122363"/>
-            <a:ext cx="9144000" cy="2387600"/>
+            <a:off x="5400080" y="2945943"/>
+            <a:ext cx="32400479" cy="6266897"/>
           </a:xfrm>
         </p:spPr>
         <p:txBody>
           <a:bodyPr anchor="b"/>
           <a:lstStyle>
             <a:lvl1pPr algn="ctr">
-              <a:defRPr sz="6000"/>
+              <a:defRPr sz="15749"/>
             </a:lvl1pPr>
           </a:lstStyle>
           <a:p>
@@ -595,18 +599,13 @@
               <a:rPr lang="en-US"/>
               <a:t>Click to edit Master title style</a:t>
             </a:r>
-          </a:p>
-        </p:txBody>
-      </p:sp>
-      <p:sp>
-        <p:nvSpPr>
-          <p:cNvPr id="3" name="Subtitle 2">
-            <a:extLst>
-              <a:ext uri="{FF2B5EF4-FFF2-40B4-BE49-F238E27FC236}">
-                <a16:creationId xmlns:a16="http://schemas.microsoft.com/office/drawing/2014/main" id="{65B1735D-3EB3-8230-A9CB-B083BEAA0A40}"/>
-              </a:ext>
-            </a:extLst>
-          </p:cNvPr>
+            <a:endParaRPr lang="en-US" dirty="0"/>
+          </a:p>
+        </p:txBody>
+      </p:sp>
+      <p:sp>
+        <p:nvSpPr>
+          <p:cNvPr id="3" name="Subtitle 2"/>
           <p:cNvSpPr>
             <a:spLocks noGrp="1"/>
           </p:cNvSpPr>
@@ -616,8 +615,8 @@
         </p:nvSpPr>
         <p:spPr>
           <a:xfrm>
-            <a:off x="1524000" y="3602038"/>
-            <a:ext cx="9144000" cy="1655762"/>
+            <a:off x="5400080" y="9454516"/>
+            <a:ext cx="32400479" cy="4345992"/>
           </a:xfrm>
         </p:spPr>
         <p:txBody>
@@ -625,39 +624,39 @@
           <a:lstStyle>
             <a:lvl1pPr marL="0" indent="0" algn="ctr">
               <a:buNone/>
-              <a:defRPr sz="2400"/>
+              <a:defRPr sz="6300"/>
             </a:lvl1pPr>
-            <a:lvl2pPr marL="457200" indent="0" algn="ctr">
+            <a:lvl2pPr marL="1200059" indent="0" algn="ctr">
               <a:buNone/>
-              <a:defRPr sz="2000"/>
+              <a:defRPr sz="5250"/>
             </a:lvl2pPr>
-            <a:lvl3pPr marL="914400" indent="0" algn="ctr">
+            <a:lvl3pPr marL="2400117" indent="0" algn="ctr">
               <a:buNone/>
-              <a:defRPr sz="1800"/>
+              <a:defRPr sz="4725"/>
             </a:lvl3pPr>
-            <a:lvl4pPr marL="1371600" indent="0" algn="ctr">
+            <a:lvl4pPr marL="3600176" indent="0" algn="ctr">
               <a:buNone/>
-              <a:defRPr sz="1600"/>
+              <a:defRPr sz="4200"/>
             </a:lvl4pPr>
-            <a:lvl5pPr marL="1828800" indent="0" algn="ctr">
+            <a:lvl5pPr marL="4800234" indent="0" algn="ctr">
               <a:buNone/>
-              <a:defRPr sz="1600"/>
+              <a:defRPr sz="4200"/>
             </a:lvl5pPr>
-            <a:lvl6pPr marL="2286000" indent="0" algn="ctr">
+            <a:lvl6pPr marL="6000293" indent="0" algn="ctr">
               <a:buNone/>
-              <a:defRPr sz="1600"/>
+              <a:defRPr sz="4200"/>
             </a:lvl6pPr>
-            <a:lvl7pPr marL="2743200" indent="0" algn="ctr">
+            <a:lvl7pPr marL="7200351" indent="0" algn="ctr">
               <a:buNone/>
-              <a:defRPr sz="1600"/>
+              <a:defRPr sz="4200"/>
             </a:lvl7pPr>
-            <a:lvl8pPr marL="3200400" indent="0" algn="ctr">
+            <a:lvl8pPr marL="8400410" indent="0" algn="ctr">
               <a:buNone/>
-              <a:defRPr sz="1600"/>
+              <a:defRPr sz="4200"/>
             </a:lvl8pPr>
-            <a:lvl9pPr marL="3657600" indent="0" algn="ctr">
+            <a:lvl9pPr marL="9600468" indent="0" algn="ctr">
               <a:buNone/>
-              <a:defRPr sz="1600"/>
+              <a:defRPr sz="4200"/>
             </a:lvl9pPr>
           </a:lstStyle>
           <a:p>
@@ -665,18 +664,13 @@
               <a:rPr lang="en-US"/>
               <a:t>Click to edit Master subtitle style</a:t>
             </a:r>
-          </a:p>
-        </p:txBody>
-      </p:sp>
-      <p:sp>
-        <p:nvSpPr>
-          <p:cNvPr id="4" name="Date Placeholder 3">
-            <a:extLst>
-              <a:ext uri="{FF2B5EF4-FFF2-40B4-BE49-F238E27FC236}">
-                <a16:creationId xmlns:a16="http://schemas.microsoft.com/office/drawing/2014/main" id="{9B1D1C55-C147-5B64-836B-3E059101D521}"/>
-              </a:ext>
-            </a:extLst>
-          </p:cNvPr>
+            <a:endParaRPr lang="en-US" dirty="0"/>
+          </a:p>
+        </p:txBody>
+      </p:sp>
+      <p:sp>
+        <p:nvSpPr>
+          <p:cNvPr id="4" name="Date Placeholder 3"/>
           <p:cNvSpPr>
             <a:spLocks noGrp="1"/>
           </p:cNvSpPr>
@@ -691,7 +685,7 @@
           <a:p>
             <a:fld id="{7744C1DF-C9B9-4C32-9FF4-A604B0E589BF}" type="datetimeFigureOut">
               <a:rPr lang="en-US" smtClean="0"/>
-              <a:t>6/5/2026</a:t>
+              <a:t>6/6/2026</a:t>
             </a:fld>
             <a:endParaRPr lang="en-US"/>
           </a:p>
@@ -699,13 +693,7 @@
       </p:sp>
       <p:sp>
         <p:nvSpPr>
-          <p:cNvPr id="5" name="Footer Placeholder 4">
-            <a:extLst>
-              <a:ext uri="{FF2B5EF4-FFF2-40B4-BE49-F238E27FC236}">
-                <a16:creationId xmlns:a16="http://schemas.microsoft.com/office/drawing/2014/main" id="{7D5854BA-3CA0-FF1F-46A2-E0D53707F60E}"/>
-              </a:ext>
-            </a:extLst>
-          </p:cNvPr>
+          <p:cNvPr id="5" name="Footer Placeholder 4"/>
           <p:cNvSpPr>
             <a:spLocks noGrp="1"/>
           </p:cNvSpPr>
@@ -724,13 +712,7 @@
       </p:sp>
       <p:sp>
         <p:nvSpPr>
-          <p:cNvPr id="6" name="Slide Number Placeholder 5">
-            <a:extLst>
-              <a:ext uri="{FF2B5EF4-FFF2-40B4-BE49-F238E27FC236}">
-                <a16:creationId xmlns:a16="http://schemas.microsoft.com/office/drawing/2014/main" id="{FA64EC45-D604-D3E5-316D-F95269630F40}"/>
-              </a:ext>
-            </a:extLst>
-          </p:cNvPr>
+          <p:cNvPr id="6" name="Slide Number Placeholder 5"/>
           <p:cNvSpPr>
             <a:spLocks noGrp="1"/>
           </p:cNvSpPr>
@@ -754,7 +736,7 @@
     </p:spTree>
     <p:extLst>
       <p:ext uri="{BB962C8B-B14F-4D97-AF65-F5344CB8AC3E}">
-        <p14:creationId xmlns:p14="http://schemas.microsoft.com/office/powerpoint/2010/main" val="3054795269"/>
+        <p14:creationId xmlns:p14="http://schemas.microsoft.com/office/powerpoint/2010/main" val="1786825571"/>
       </p:ext>
     </p:extLst>
   </p:cSld>
@@ -783,13 +765,7 @@
       </p:grpSpPr>
       <p:sp>
         <p:nvSpPr>
-          <p:cNvPr id="2" name="Title 1">
-            <a:extLst>
-              <a:ext uri="{FF2B5EF4-FFF2-40B4-BE49-F238E27FC236}">
-                <a16:creationId xmlns:a16="http://schemas.microsoft.com/office/drawing/2014/main" id="{57C07061-8A28-2F2E-88F1-81721766ABEA}"/>
-              </a:ext>
-            </a:extLst>
-          </p:cNvPr>
+          <p:cNvPr id="2" name="Title 1"/>
           <p:cNvSpPr>
             <a:spLocks noGrp="1"/>
           </p:cNvSpPr>
@@ -806,18 +782,13 @@
               <a:rPr lang="en-US"/>
               <a:t>Click to edit Master title style</a:t>
             </a:r>
-          </a:p>
-        </p:txBody>
-      </p:sp>
-      <p:sp>
-        <p:nvSpPr>
-          <p:cNvPr id="3" name="Vertical Text Placeholder 2">
-            <a:extLst>
-              <a:ext uri="{FF2B5EF4-FFF2-40B4-BE49-F238E27FC236}">
-                <a16:creationId xmlns:a16="http://schemas.microsoft.com/office/drawing/2014/main" id="{63F6759A-4AD5-7EDD-19A1-669BD0C4FE53}"/>
-              </a:ext>
-            </a:extLst>
-          </p:cNvPr>
+            <a:endParaRPr lang="en-US" dirty="0"/>
+          </a:p>
+        </p:txBody>
+      </p:sp>
+      <p:sp>
+        <p:nvSpPr>
+          <p:cNvPr id="3" name="Vertical Text Placeholder 2"/>
           <p:cNvSpPr>
             <a:spLocks noGrp="1"/>
           </p:cNvSpPr>
@@ -863,18 +834,13 @@
               <a:rPr lang="en-US"/>
               <a:t>Fifth level</a:t>
             </a:r>
-          </a:p>
-        </p:txBody>
-      </p:sp>
-      <p:sp>
-        <p:nvSpPr>
-          <p:cNvPr id="4" name="Date Placeholder 3">
-            <a:extLst>
-              <a:ext uri="{FF2B5EF4-FFF2-40B4-BE49-F238E27FC236}">
-                <a16:creationId xmlns:a16="http://schemas.microsoft.com/office/drawing/2014/main" id="{1E1E83A5-1230-5C61-757B-0E99E25F5EBE}"/>
-              </a:ext>
-            </a:extLst>
-          </p:cNvPr>
+            <a:endParaRPr lang="en-US" dirty="0"/>
+          </a:p>
+        </p:txBody>
+      </p:sp>
+      <p:sp>
+        <p:nvSpPr>
+          <p:cNvPr id="4" name="Date Placeholder 3"/>
           <p:cNvSpPr>
             <a:spLocks noGrp="1"/>
           </p:cNvSpPr>
@@ -889,7 +855,7 @@
           <a:p>
             <a:fld id="{7744C1DF-C9B9-4C32-9FF4-A604B0E589BF}" type="datetimeFigureOut">
               <a:rPr lang="en-US" smtClean="0"/>
-              <a:t>6/5/2026</a:t>
+              <a:t>6/6/2026</a:t>
             </a:fld>
             <a:endParaRPr lang="en-US"/>
           </a:p>
@@ -897,13 +863,7 @@
       </p:sp>
       <p:sp>
         <p:nvSpPr>
-          <p:cNvPr id="5" name="Footer Placeholder 4">
-            <a:extLst>
-              <a:ext uri="{FF2B5EF4-FFF2-40B4-BE49-F238E27FC236}">
-                <a16:creationId xmlns:a16="http://schemas.microsoft.com/office/drawing/2014/main" id="{2056E691-57AD-C435-953B-717BC82943C9}"/>
-              </a:ext>
-            </a:extLst>
-          </p:cNvPr>
+          <p:cNvPr id="5" name="Footer Placeholder 4"/>
           <p:cNvSpPr>
             <a:spLocks noGrp="1"/>
           </p:cNvSpPr>
@@ -922,13 +882,7 @@
       </p:sp>
       <p:sp>
         <p:nvSpPr>
-          <p:cNvPr id="6" name="Slide Number Placeholder 5">
-            <a:extLst>
-              <a:ext uri="{FF2B5EF4-FFF2-40B4-BE49-F238E27FC236}">
-                <a16:creationId xmlns:a16="http://schemas.microsoft.com/office/drawing/2014/main" id="{CD13D388-DB92-62DF-4ADC-86E5B155C29B}"/>
-              </a:ext>
-            </a:extLst>
-          </p:cNvPr>
+          <p:cNvPr id="6" name="Slide Number Placeholder 5"/>
           <p:cNvSpPr>
             <a:spLocks noGrp="1"/>
           </p:cNvSpPr>
@@ -952,7 +906,7 @@
     </p:spTree>
     <p:extLst>
       <p:ext uri="{BB962C8B-B14F-4D97-AF65-F5344CB8AC3E}">
-        <p14:creationId xmlns:p14="http://schemas.microsoft.com/office/powerpoint/2010/main" val="1669054162"/>
+        <p14:creationId xmlns:p14="http://schemas.microsoft.com/office/powerpoint/2010/main" val="1791993838"/>
       </p:ext>
     </p:extLst>
   </p:cSld>
@@ -981,13 +935,7 @@
       </p:grpSpPr>
       <p:sp>
         <p:nvSpPr>
-          <p:cNvPr id="2" name="Vertical Title 1">
-            <a:extLst>
-              <a:ext uri="{FF2B5EF4-FFF2-40B4-BE49-F238E27FC236}">
-                <a16:creationId xmlns:a16="http://schemas.microsoft.com/office/drawing/2014/main" id="{B9696693-46BE-0CB0-BA18-53085FB6F0E2}"/>
-              </a:ext>
-            </a:extLst>
-          </p:cNvPr>
+          <p:cNvPr id="2" name="Vertical Title 1"/>
           <p:cNvSpPr>
             <a:spLocks noGrp="1"/>
           </p:cNvSpPr>
@@ -997,8 +945,8 @@
         </p:nvSpPr>
         <p:spPr>
           <a:xfrm>
-            <a:off x="8724900" y="365125"/>
-            <a:ext cx="2628900" cy="5811838"/>
+            <a:off x="30915456" y="958369"/>
+            <a:ext cx="9315138" cy="15254730"/>
           </a:xfrm>
         </p:spPr>
         <p:txBody>
@@ -1009,18 +957,13 @@
               <a:rPr lang="en-US"/>
               <a:t>Click to edit Master title style</a:t>
             </a:r>
-          </a:p>
-        </p:txBody>
-      </p:sp>
-      <p:sp>
-        <p:nvSpPr>
-          <p:cNvPr id="3" name="Vertical Text Placeholder 2">
-            <a:extLst>
-              <a:ext uri="{FF2B5EF4-FFF2-40B4-BE49-F238E27FC236}">
-                <a16:creationId xmlns:a16="http://schemas.microsoft.com/office/drawing/2014/main" id="{D93AC48C-4ACD-D612-E394-F72DC8E2387E}"/>
-              </a:ext>
-            </a:extLst>
-          </p:cNvPr>
+            <a:endParaRPr lang="en-US" dirty="0"/>
+          </a:p>
+        </p:txBody>
+      </p:sp>
+      <p:sp>
+        <p:nvSpPr>
+          <p:cNvPr id="3" name="Vertical Text Placeholder 2"/>
           <p:cNvSpPr>
             <a:spLocks noGrp="1"/>
           </p:cNvSpPr>
@@ -1030,8 +973,8 @@
         </p:nvSpPr>
         <p:spPr>
           <a:xfrm>
-            <a:off x="838200" y="365125"/>
-            <a:ext cx="7734300" cy="5811838"/>
+            <a:off x="2970044" y="958369"/>
+            <a:ext cx="27405405" cy="15254730"/>
           </a:xfrm>
         </p:spPr>
         <p:txBody>
@@ -1071,18 +1014,13 @@
               <a:rPr lang="en-US"/>
               <a:t>Fifth level</a:t>
             </a:r>
-          </a:p>
-        </p:txBody>
-      </p:sp>
-      <p:sp>
-        <p:nvSpPr>
-          <p:cNvPr id="4" name="Date Placeholder 3">
-            <a:extLst>
-              <a:ext uri="{FF2B5EF4-FFF2-40B4-BE49-F238E27FC236}">
-                <a16:creationId xmlns:a16="http://schemas.microsoft.com/office/drawing/2014/main" id="{07B6D366-6FD6-395D-6740-9F37A25036C3}"/>
-              </a:ext>
-            </a:extLst>
-          </p:cNvPr>
+            <a:endParaRPr lang="en-US" dirty="0"/>
+          </a:p>
+        </p:txBody>
+      </p:sp>
+      <p:sp>
+        <p:nvSpPr>
+          <p:cNvPr id="4" name="Date Placeholder 3"/>
           <p:cNvSpPr>
             <a:spLocks noGrp="1"/>
           </p:cNvSpPr>
@@ -1097,7 +1035,7 @@
           <a:p>
             <a:fld id="{7744C1DF-C9B9-4C32-9FF4-A604B0E589BF}" type="datetimeFigureOut">
               <a:rPr lang="en-US" smtClean="0"/>
-              <a:t>6/5/2026</a:t>
+              <a:t>6/6/2026</a:t>
             </a:fld>
             <a:endParaRPr lang="en-US"/>
           </a:p>
@@ -1105,13 +1043,7 @@
       </p:sp>
       <p:sp>
         <p:nvSpPr>
-          <p:cNvPr id="5" name="Footer Placeholder 4">
-            <a:extLst>
-              <a:ext uri="{FF2B5EF4-FFF2-40B4-BE49-F238E27FC236}">
-                <a16:creationId xmlns:a16="http://schemas.microsoft.com/office/drawing/2014/main" id="{935B482F-EC7B-2B9E-AF10-BE248CE5E4C4}"/>
-              </a:ext>
-            </a:extLst>
-          </p:cNvPr>
+          <p:cNvPr id="5" name="Footer Placeholder 4"/>
           <p:cNvSpPr>
             <a:spLocks noGrp="1"/>
           </p:cNvSpPr>
@@ -1130,13 +1062,7 @@
       </p:sp>
       <p:sp>
         <p:nvSpPr>
-          <p:cNvPr id="6" name="Slide Number Placeholder 5">
-            <a:extLst>
-              <a:ext uri="{FF2B5EF4-FFF2-40B4-BE49-F238E27FC236}">
-                <a16:creationId xmlns:a16="http://schemas.microsoft.com/office/drawing/2014/main" id="{37D72811-4C4B-6F93-E6A6-9FCF1A0D51C4}"/>
-              </a:ext>
-            </a:extLst>
-          </p:cNvPr>
+          <p:cNvPr id="6" name="Slide Number Placeholder 5"/>
           <p:cNvSpPr>
             <a:spLocks noGrp="1"/>
           </p:cNvSpPr>
@@ -1160,7 +1086,7 @@
     </p:spTree>
     <p:extLst>
       <p:ext uri="{BB962C8B-B14F-4D97-AF65-F5344CB8AC3E}">
-        <p14:creationId xmlns:p14="http://schemas.microsoft.com/office/powerpoint/2010/main" val="3124207351"/>
+        <p14:creationId xmlns:p14="http://schemas.microsoft.com/office/powerpoint/2010/main" val="1452098757"/>
       </p:ext>
     </p:extLst>
   </p:cSld>
@@ -1189,13 +1115,7 @@
       </p:grpSpPr>
       <p:sp>
         <p:nvSpPr>
-          <p:cNvPr id="2" name="Title 1">
-            <a:extLst>
-              <a:ext uri="{FF2B5EF4-FFF2-40B4-BE49-F238E27FC236}">
-                <a16:creationId xmlns:a16="http://schemas.microsoft.com/office/drawing/2014/main" id="{DA30C136-671D-41B8-649E-8A4F5580C2A4}"/>
-              </a:ext>
-            </a:extLst>
-          </p:cNvPr>
+          <p:cNvPr id="2" name="Title 1"/>
           <p:cNvSpPr>
             <a:spLocks noGrp="1"/>
           </p:cNvSpPr>
@@ -1212,18 +1132,13 @@
               <a:rPr lang="en-US"/>
               <a:t>Click to edit Master title style</a:t>
             </a:r>
-          </a:p>
-        </p:txBody>
-      </p:sp>
-      <p:sp>
-        <p:nvSpPr>
-          <p:cNvPr id="3" name="Content Placeholder 2">
-            <a:extLst>
-              <a:ext uri="{FF2B5EF4-FFF2-40B4-BE49-F238E27FC236}">
-                <a16:creationId xmlns:a16="http://schemas.microsoft.com/office/drawing/2014/main" id="{D48B2427-8AB5-52A3-DF6D-2B5E1C818C42}"/>
-              </a:ext>
-            </a:extLst>
-          </p:cNvPr>
+            <a:endParaRPr lang="en-US" dirty="0"/>
+          </a:p>
+        </p:txBody>
+      </p:sp>
+      <p:sp>
+        <p:nvSpPr>
+          <p:cNvPr id="3" name="Content Placeholder 2"/>
           <p:cNvSpPr>
             <a:spLocks noGrp="1"/>
           </p:cNvSpPr>
@@ -1269,18 +1184,13 @@
               <a:rPr lang="en-US"/>
               <a:t>Fifth level</a:t>
             </a:r>
-          </a:p>
-        </p:txBody>
-      </p:sp>
-      <p:sp>
-        <p:nvSpPr>
-          <p:cNvPr id="4" name="Date Placeholder 3">
-            <a:extLst>
-              <a:ext uri="{FF2B5EF4-FFF2-40B4-BE49-F238E27FC236}">
-                <a16:creationId xmlns:a16="http://schemas.microsoft.com/office/drawing/2014/main" id="{42B433B6-B09D-4E6B-70D9-82258E97EC65}"/>
-              </a:ext>
-            </a:extLst>
-          </p:cNvPr>
+            <a:endParaRPr lang="en-US" dirty="0"/>
+          </a:p>
+        </p:txBody>
+      </p:sp>
+      <p:sp>
+        <p:nvSpPr>
+          <p:cNvPr id="4" name="Date Placeholder 3"/>
           <p:cNvSpPr>
             <a:spLocks noGrp="1"/>
           </p:cNvSpPr>
@@ -1295,7 +1205,7 @@
           <a:p>
             <a:fld id="{7744C1DF-C9B9-4C32-9FF4-A604B0E589BF}" type="datetimeFigureOut">
               <a:rPr lang="en-US" smtClean="0"/>
-              <a:t>6/5/2026</a:t>
+              <a:t>6/6/2026</a:t>
             </a:fld>
             <a:endParaRPr lang="en-US"/>
           </a:p>
@@ -1303,13 +1213,7 @@
       </p:sp>
       <p:sp>
         <p:nvSpPr>
-          <p:cNvPr id="5" name="Footer Placeholder 4">
-            <a:extLst>
-              <a:ext uri="{FF2B5EF4-FFF2-40B4-BE49-F238E27FC236}">
-                <a16:creationId xmlns:a16="http://schemas.microsoft.com/office/drawing/2014/main" id="{92AD46C4-D134-415B-75D4-1C1868E34A64}"/>
-              </a:ext>
-            </a:extLst>
-          </p:cNvPr>
+          <p:cNvPr id="5" name="Footer Placeholder 4"/>
           <p:cNvSpPr>
             <a:spLocks noGrp="1"/>
           </p:cNvSpPr>
@@ -1328,13 +1232,7 @@
       </p:sp>
       <p:sp>
         <p:nvSpPr>
-          <p:cNvPr id="6" name="Slide Number Placeholder 5">
-            <a:extLst>
-              <a:ext uri="{FF2B5EF4-FFF2-40B4-BE49-F238E27FC236}">
-                <a16:creationId xmlns:a16="http://schemas.microsoft.com/office/drawing/2014/main" id="{A8FF7AB9-DEBB-B986-F7A4-8D82CD27CA9B}"/>
-              </a:ext>
-            </a:extLst>
-          </p:cNvPr>
+          <p:cNvPr id="6" name="Slide Number Placeholder 5"/>
           <p:cNvSpPr>
             <a:spLocks noGrp="1"/>
           </p:cNvSpPr>
@@ -1358,7 +1256,7 @@
     </p:spTree>
     <p:extLst>
       <p:ext uri="{BB962C8B-B14F-4D97-AF65-F5344CB8AC3E}">
-        <p14:creationId xmlns:p14="http://schemas.microsoft.com/office/powerpoint/2010/main" val="1863859779"/>
+        <p14:creationId xmlns:p14="http://schemas.microsoft.com/office/powerpoint/2010/main" val="260082861"/>
       </p:ext>
     </p:extLst>
   </p:cSld>
@@ -1387,13 +1285,7 @@
       </p:grpSpPr>
       <p:sp>
         <p:nvSpPr>
-          <p:cNvPr id="2" name="Title 1">
-            <a:extLst>
-              <a:ext uri="{FF2B5EF4-FFF2-40B4-BE49-F238E27FC236}">
-                <a16:creationId xmlns:a16="http://schemas.microsoft.com/office/drawing/2014/main" id="{3F3379CE-AF5E-5081-661A-9578CBA6C8BE}"/>
-              </a:ext>
-            </a:extLst>
-          </p:cNvPr>
+          <p:cNvPr id="2" name="Title 1"/>
           <p:cNvSpPr>
             <a:spLocks noGrp="1"/>
           </p:cNvSpPr>
@@ -1403,15 +1295,15 @@
         </p:nvSpPr>
         <p:spPr>
           <a:xfrm>
-            <a:off x="831850" y="1709738"/>
-            <a:ext cx="10515600" cy="2852737"/>
+            <a:off x="2947544" y="4487668"/>
+            <a:ext cx="37260550" cy="7487774"/>
           </a:xfrm>
         </p:spPr>
         <p:txBody>
           <a:bodyPr anchor="b"/>
           <a:lstStyle>
             <a:lvl1pPr>
-              <a:defRPr sz="6000"/>
+              <a:defRPr sz="15749"/>
             </a:lvl1pPr>
           </a:lstStyle>
           <a:p>
@@ -1419,18 +1311,13 @@
               <a:rPr lang="en-US"/>
               <a:t>Click to edit Master title style</a:t>
             </a:r>
-          </a:p>
-        </p:txBody>
-      </p:sp>
-      <p:sp>
-        <p:nvSpPr>
-          <p:cNvPr id="3" name="Text Placeholder 2">
-            <a:extLst>
-              <a:ext uri="{FF2B5EF4-FFF2-40B4-BE49-F238E27FC236}">
-                <a16:creationId xmlns:a16="http://schemas.microsoft.com/office/drawing/2014/main" id="{C8BF7EFE-6AF1-D604-083F-96FAF221553C}"/>
-              </a:ext>
-            </a:extLst>
-          </p:cNvPr>
+            <a:endParaRPr lang="en-US" dirty="0"/>
+          </a:p>
+        </p:txBody>
+      </p:sp>
+      <p:sp>
+        <p:nvSpPr>
+          <p:cNvPr id="3" name="Text Placeholder 2"/>
           <p:cNvSpPr>
             <a:spLocks noGrp="1"/>
           </p:cNvSpPr>
@@ -1440,8 +1327,8 @@
         </p:nvSpPr>
         <p:spPr>
           <a:xfrm>
-            <a:off x="831850" y="4589463"/>
-            <a:ext cx="10515600" cy="1500187"/>
+            <a:off x="2947544" y="12046280"/>
+            <a:ext cx="37260550" cy="3937644"/>
           </a:xfrm>
         </p:spPr>
         <p:txBody>
@@ -1449,7 +1336,7 @@
           <a:lstStyle>
             <a:lvl1pPr marL="0" indent="0">
               <a:buNone/>
-              <a:defRPr sz="2400">
+              <a:defRPr sz="6300">
                 <a:solidFill>
                   <a:schemeClr val="tx1">
                     <a:tint val="82000"/>
@@ -1457,9 +1344,9 @@
                 </a:solidFill>
               </a:defRPr>
             </a:lvl1pPr>
-            <a:lvl2pPr marL="457200" indent="0">
+            <a:lvl2pPr marL="1200059" indent="0">
               <a:buNone/>
-              <a:defRPr sz="2000">
+              <a:defRPr sz="5250">
                 <a:solidFill>
                   <a:schemeClr val="tx1">
                     <a:tint val="82000"/>
@@ -1467,9 +1354,9 @@
                 </a:solidFill>
               </a:defRPr>
             </a:lvl2pPr>
-            <a:lvl3pPr marL="914400" indent="0">
+            <a:lvl3pPr marL="2400117" indent="0">
               <a:buNone/>
-              <a:defRPr sz="1800">
+              <a:defRPr sz="4725">
                 <a:solidFill>
                   <a:schemeClr val="tx1">
                     <a:tint val="82000"/>
@@ -1477,9 +1364,9 @@
                 </a:solidFill>
               </a:defRPr>
             </a:lvl3pPr>
-            <a:lvl4pPr marL="1371600" indent="0">
+            <a:lvl4pPr marL="3600176" indent="0">
               <a:buNone/>
-              <a:defRPr sz="1600">
+              <a:defRPr sz="4200">
                 <a:solidFill>
                   <a:schemeClr val="tx1">
                     <a:tint val="82000"/>
@@ -1487,9 +1374,9 @@
                 </a:solidFill>
               </a:defRPr>
             </a:lvl4pPr>
-            <a:lvl5pPr marL="1828800" indent="0">
+            <a:lvl5pPr marL="4800234" indent="0">
               <a:buNone/>
-              <a:defRPr sz="1600">
+              <a:defRPr sz="4200">
                 <a:solidFill>
                   <a:schemeClr val="tx1">
                     <a:tint val="82000"/>
@@ -1497,9 +1384,9 @@
                 </a:solidFill>
               </a:defRPr>
             </a:lvl5pPr>
-            <a:lvl6pPr marL="2286000" indent="0">
+            <a:lvl6pPr marL="6000293" indent="0">
               <a:buNone/>
-              <a:defRPr sz="1600">
+              <a:defRPr sz="4200">
                 <a:solidFill>
                   <a:schemeClr val="tx1">
                     <a:tint val="82000"/>
@@ -1507,9 +1394,9 @@
                 </a:solidFill>
               </a:defRPr>
             </a:lvl6pPr>
-            <a:lvl7pPr marL="2743200" indent="0">
+            <a:lvl7pPr marL="7200351" indent="0">
               <a:buNone/>
-              <a:defRPr sz="1600">
+              <a:defRPr sz="4200">
                 <a:solidFill>
                   <a:schemeClr val="tx1">
                     <a:tint val="82000"/>
@@ -1517,9 +1404,9 @@
                 </a:solidFill>
               </a:defRPr>
             </a:lvl7pPr>
-            <a:lvl8pPr marL="3200400" indent="0">
+            <a:lvl8pPr marL="8400410" indent="0">
               <a:buNone/>
-              <a:defRPr sz="1600">
+              <a:defRPr sz="4200">
                 <a:solidFill>
                   <a:schemeClr val="tx1">
                     <a:tint val="82000"/>
@@ -1527,9 +1414,9 @@
                 </a:solidFill>
               </a:defRPr>
             </a:lvl8pPr>
-            <a:lvl9pPr marL="3657600" indent="0">
+            <a:lvl9pPr marL="9600468" indent="0">
               <a:buNone/>
-              <a:defRPr sz="1600">
+              <a:defRPr sz="4200">
                 <a:solidFill>
                   <a:schemeClr val="tx1">
                     <a:tint val="82000"/>
@@ -1549,13 +1436,7 @@
       </p:sp>
       <p:sp>
         <p:nvSpPr>
-          <p:cNvPr id="4" name="Date Placeholder 3">
-            <a:extLst>
-              <a:ext uri="{FF2B5EF4-FFF2-40B4-BE49-F238E27FC236}">
-                <a16:creationId xmlns:a16="http://schemas.microsoft.com/office/drawing/2014/main" id="{90FFE836-A0ED-3D25-B169-628BB6C1B6FF}"/>
-              </a:ext>
-            </a:extLst>
-          </p:cNvPr>
+          <p:cNvPr id="4" name="Date Placeholder 3"/>
           <p:cNvSpPr>
             <a:spLocks noGrp="1"/>
           </p:cNvSpPr>
@@ -1570,7 +1451,7 @@
           <a:p>
             <a:fld id="{7744C1DF-C9B9-4C32-9FF4-A604B0E589BF}" type="datetimeFigureOut">
               <a:rPr lang="en-US" smtClean="0"/>
-              <a:t>6/5/2026</a:t>
+              <a:t>6/6/2026</a:t>
             </a:fld>
             <a:endParaRPr lang="en-US"/>
           </a:p>
@@ -1578,13 +1459,7 @@
       </p:sp>
       <p:sp>
         <p:nvSpPr>
-          <p:cNvPr id="5" name="Footer Placeholder 4">
-            <a:extLst>
-              <a:ext uri="{FF2B5EF4-FFF2-40B4-BE49-F238E27FC236}">
-                <a16:creationId xmlns:a16="http://schemas.microsoft.com/office/drawing/2014/main" id="{07E7B385-B38D-BAAE-C1E1-4A3C7689B3F9}"/>
-              </a:ext>
-            </a:extLst>
-          </p:cNvPr>
+          <p:cNvPr id="5" name="Footer Placeholder 4"/>
           <p:cNvSpPr>
             <a:spLocks noGrp="1"/>
           </p:cNvSpPr>
@@ -1603,13 +1478,7 @@
       </p:sp>
       <p:sp>
         <p:nvSpPr>
-          <p:cNvPr id="6" name="Slide Number Placeholder 5">
-            <a:extLst>
-              <a:ext uri="{FF2B5EF4-FFF2-40B4-BE49-F238E27FC236}">
-                <a16:creationId xmlns:a16="http://schemas.microsoft.com/office/drawing/2014/main" id="{B02DDA2D-EB33-A96D-4E49-F53680A9E639}"/>
-              </a:ext>
-            </a:extLst>
-          </p:cNvPr>
+          <p:cNvPr id="6" name="Slide Number Placeholder 5"/>
           <p:cNvSpPr>
             <a:spLocks noGrp="1"/>
           </p:cNvSpPr>
@@ -1633,7 +1502,7 @@
     </p:spTree>
     <p:extLst>
       <p:ext uri="{BB962C8B-B14F-4D97-AF65-F5344CB8AC3E}">
-        <p14:creationId xmlns:p14="http://schemas.microsoft.com/office/powerpoint/2010/main" val="1845820980"/>
+        <p14:creationId xmlns:p14="http://schemas.microsoft.com/office/powerpoint/2010/main" val="2605932632"/>
       </p:ext>
     </p:extLst>
   </p:cSld>
@@ -1662,13 +1531,7 @@
       </p:grpSpPr>
       <p:sp>
         <p:nvSpPr>
-          <p:cNvPr id="2" name="Title 1">
-            <a:extLst>
-              <a:ext uri="{FF2B5EF4-FFF2-40B4-BE49-F238E27FC236}">
-                <a16:creationId xmlns:a16="http://schemas.microsoft.com/office/drawing/2014/main" id="{7BFDA3E3-5290-FE0E-A2F4-B94C0F8DEB2B}"/>
-              </a:ext>
-            </a:extLst>
-          </p:cNvPr>
+          <p:cNvPr id="2" name="Title 1"/>
           <p:cNvSpPr>
             <a:spLocks noGrp="1"/>
           </p:cNvSpPr>
@@ -1685,18 +1548,13 @@
               <a:rPr lang="en-US"/>
               <a:t>Click to edit Master title style</a:t>
             </a:r>
-          </a:p>
-        </p:txBody>
-      </p:sp>
-      <p:sp>
-        <p:nvSpPr>
-          <p:cNvPr id="3" name="Content Placeholder 2">
-            <a:extLst>
-              <a:ext uri="{FF2B5EF4-FFF2-40B4-BE49-F238E27FC236}">
-                <a16:creationId xmlns:a16="http://schemas.microsoft.com/office/drawing/2014/main" id="{11B8ED10-F0D2-BBFF-7F80-30DDD856B8E4}"/>
-              </a:ext>
-            </a:extLst>
-          </p:cNvPr>
+            <a:endParaRPr lang="en-US" dirty="0"/>
+          </a:p>
+        </p:txBody>
+      </p:sp>
+      <p:sp>
+        <p:nvSpPr>
+          <p:cNvPr id="3" name="Content Placeholder 2"/>
           <p:cNvSpPr>
             <a:spLocks noGrp="1"/>
           </p:cNvSpPr>
@@ -1706,8 +1564,8 @@
         </p:nvSpPr>
         <p:spPr>
           <a:xfrm>
-            <a:off x="838200" y="1825625"/>
-            <a:ext cx="5181600" cy="4351338"/>
+            <a:off x="2970044" y="4791843"/>
+            <a:ext cx="18360271" cy="11421255"/>
           </a:xfrm>
         </p:spPr>
         <p:txBody>
@@ -1747,18 +1605,13 @@
               <a:rPr lang="en-US"/>
               <a:t>Fifth level</a:t>
             </a:r>
-          </a:p>
-        </p:txBody>
-      </p:sp>
-      <p:sp>
-        <p:nvSpPr>
-          <p:cNvPr id="4" name="Content Placeholder 3">
-            <a:extLst>
-              <a:ext uri="{FF2B5EF4-FFF2-40B4-BE49-F238E27FC236}">
-                <a16:creationId xmlns:a16="http://schemas.microsoft.com/office/drawing/2014/main" id="{56E91F5B-19FE-9BDE-C374-457AA18FF1A1}"/>
-              </a:ext>
-            </a:extLst>
-          </p:cNvPr>
+            <a:endParaRPr lang="en-US" dirty="0"/>
+          </a:p>
+        </p:txBody>
+      </p:sp>
+      <p:sp>
+        <p:nvSpPr>
+          <p:cNvPr id="4" name="Content Placeholder 3"/>
           <p:cNvSpPr>
             <a:spLocks noGrp="1"/>
           </p:cNvSpPr>
@@ -1768,8 +1621,8 @@
         </p:nvSpPr>
         <p:spPr>
           <a:xfrm>
-            <a:off x="6172200" y="1825625"/>
-            <a:ext cx="5181600" cy="4351338"/>
+            <a:off x="21870323" y="4791843"/>
+            <a:ext cx="18360271" cy="11421255"/>
           </a:xfrm>
         </p:spPr>
         <p:txBody>
@@ -1809,18 +1662,13 @@
               <a:rPr lang="en-US"/>
               <a:t>Fifth level</a:t>
             </a:r>
-          </a:p>
-        </p:txBody>
-      </p:sp>
-      <p:sp>
-        <p:nvSpPr>
-          <p:cNvPr id="5" name="Date Placeholder 4">
-            <a:extLst>
-              <a:ext uri="{FF2B5EF4-FFF2-40B4-BE49-F238E27FC236}">
-                <a16:creationId xmlns:a16="http://schemas.microsoft.com/office/drawing/2014/main" id="{5CD13B22-69A9-C1C1-0DA0-D12CA514B92C}"/>
-              </a:ext>
-            </a:extLst>
-          </p:cNvPr>
+            <a:endParaRPr lang="en-US" dirty="0"/>
+          </a:p>
+        </p:txBody>
+      </p:sp>
+      <p:sp>
+        <p:nvSpPr>
+          <p:cNvPr id="5" name="Date Placeholder 4"/>
           <p:cNvSpPr>
             <a:spLocks noGrp="1"/>
           </p:cNvSpPr>
@@ -1835,7 +1683,7 @@
           <a:p>
             <a:fld id="{7744C1DF-C9B9-4C32-9FF4-A604B0E589BF}" type="datetimeFigureOut">
               <a:rPr lang="en-US" smtClean="0"/>
-              <a:t>6/5/2026</a:t>
+              <a:t>6/6/2026</a:t>
             </a:fld>
             <a:endParaRPr lang="en-US"/>
           </a:p>
@@ -1843,13 +1691,7 @@
       </p:sp>
       <p:sp>
         <p:nvSpPr>
-          <p:cNvPr id="6" name="Footer Placeholder 5">
-            <a:extLst>
-              <a:ext uri="{FF2B5EF4-FFF2-40B4-BE49-F238E27FC236}">
-                <a16:creationId xmlns:a16="http://schemas.microsoft.com/office/drawing/2014/main" id="{A592D928-C759-5351-3AC8-1CD081536D4A}"/>
-              </a:ext>
-            </a:extLst>
-          </p:cNvPr>
+          <p:cNvPr id="6" name="Footer Placeholder 5"/>
           <p:cNvSpPr>
             <a:spLocks noGrp="1"/>
           </p:cNvSpPr>
@@ -1868,13 +1710,7 @@
       </p:sp>
       <p:sp>
         <p:nvSpPr>
-          <p:cNvPr id="7" name="Slide Number Placeholder 6">
-            <a:extLst>
-              <a:ext uri="{FF2B5EF4-FFF2-40B4-BE49-F238E27FC236}">
-                <a16:creationId xmlns:a16="http://schemas.microsoft.com/office/drawing/2014/main" id="{AA0B8D48-1573-94CC-19E9-CD2B770B829B}"/>
-              </a:ext>
-            </a:extLst>
-          </p:cNvPr>
+          <p:cNvPr id="7" name="Slide Number Placeholder 6"/>
           <p:cNvSpPr>
             <a:spLocks noGrp="1"/>
           </p:cNvSpPr>
@@ -1898,7 +1734,7 @@
     </p:spTree>
     <p:extLst>
       <p:ext uri="{BB962C8B-B14F-4D97-AF65-F5344CB8AC3E}">
-        <p14:creationId xmlns:p14="http://schemas.microsoft.com/office/powerpoint/2010/main" val="3132799796"/>
+        <p14:creationId xmlns:p14="http://schemas.microsoft.com/office/powerpoint/2010/main" val="3056656263"/>
       </p:ext>
     </p:extLst>
   </p:cSld>
@@ -1927,13 +1763,7 @@
       </p:grpSpPr>
       <p:sp>
         <p:nvSpPr>
-          <p:cNvPr id="2" name="Title 1">
-            <a:extLst>
-              <a:ext uri="{FF2B5EF4-FFF2-40B4-BE49-F238E27FC236}">
-                <a16:creationId xmlns:a16="http://schemas.microsoft.com/office/drawing/2014/main" id="{F7A6D1DD-2603-E04A-A970-2D1333D141BD}"/>
-              </a:ext>
-            </a:extLst>
-          </p:cNvPr>
+          <p:cNvPr id="2" name="Title 1"/>
           <p:cNvSpPr>
             <a:spLocks noGrp="1"/>
           </p:cNvSpPr>
@@ -1943,8 +1773,8 @@
         </p:nvSpPr>
         <p:spPr>
           <a:xfrm>
-            <a:off x="839788" y="365125"/>
-            <a:ext cx="10515600" cy="1325563"/>
+            <a:off x="2975671" y="958370"/>
+            <a:ext cx="37260550" cy="3479296"/>
           </a:xfrm>
         </p:spPr>
         <p:txBody>
@@ -1955,18 +1785,13 @@
               <a:rPr lang="en-US"/>
               <a:t>Click to edit Master title style</a:t>
             </a:r>
-          </a:p>
-        </p:txBody>
-      </p:sp>
-      <p:sp>
-        <p:nvSpPr>
-          <p:cNvPr id="3" name="Text Placeholder 2">
-            <a:extLst>
-              <a:ext uri="{FF2B5EF4-FFF2-40B4-BE49-F238E27FC236}">
-                <a16:creationId xmlns:a16="http://schemas.microsoft.com/office/drawing/2014/main" id="{F6A72E68-B350-8BDC-C0B9-CF4F7FAFC267}"/>
-              </a:ext>
-            </a:extLst>
-          </p:cNvPr>
+            <a:endParaRPr lang="en-US" dirty="0"/>
+          </a:p>
+        </p:txBody>
+      </p:sp>
+      <p:sp>
+        <p:nvSpPr>
+          <p:cNvPr id="3" name="Text Placeholder 2"/>
           <p:cNvSpPr>
             <a:spLocks noGrp="1"/>
           </p:cNvSpPr>
@@ -1976,8 +1801,8 @@
         </p:nvSpPr>
         <p:spPr>
           <a:xfrm>
-            <a:off x="839788" y="1681163"/>
-            <a:ext cx="5157787" cy="823912"/>
+            <a:off x="2975673" y="4412664"/>
+            <a:ext cx="18275893" cy="2162578"/>
           </a:xfrm>
         </p:spPr>
         <p:txBody>
@@ -1985,39 +1810,39 @@
           <a:lstStyle>
             <a:lvl1pPr marL="0" indent="0">
               <a:buNone/>
-              <a:defRPr sz="2400" b="1"/>
+              <a:defRPr sz="6300" b="1"/>
             </a:lvl1pPr>
-            <a:lvl2pPr marL="457200" indent="0">
+            <a:lvl2pPr marL="1200059" indent="0">
               <a:buNone/>
-              <a:defRPr sz="2000" b="1"/>
+              <a:defRPr sz="5250" b="1"/>
             </a:lvl2pPr>
-            <a:lvl3pPr marL="914400" indent="0">
+            <a:lvl3pPr marL="2400117" indent="0">
               <a:buNone/>
-              <a:defRPr sz="1800" b="1"/>
+              <a:defRPr sz="4725" b="1"/>
             </a:lvl3pPr>
-            <a:lvl4pPr marL="1371600" indent="0">
+            <a:lvl4pPr marL="3600176" indent="0">
               <a:buNone/>
-              <a:defRPr sz="1600" b="1"/>
+              <a:defRPr sz="4200" b="1"/>
             </a:lvl4pPr>
-            <a:lvl5pPr marL="1828800" indent="0">
+            <a:lvl5pPr marL="4800234" indent="0">
               <a:buNone/>
-              <a:defRPr sz="1600" b="1"/>
+              <a:defRPr sz="4200" b="1"/>
             </a:lvl5pPr>
-            <a:lvl6pPr marL="2286000" indent="0">
+            <a:lvl6pPr marL="6000293" indent="0">
               <a:buNone/>
-              <a:defRPr sz="1600" b="1"/>
+              <a:defRPr sz="4200" b="1"/>
             </a:lvl6pPr>
-            <a:lvl7pPr marL="2743200" indent="0">
+            <a:lvl7pPr marL="7200351" indent="0">
               <a:buNone/>
-              <a:defRPr sz="1600" b="1"/>
+              <a:defRPr sz="4200" b="1"/>
             </a:lvl7pPr>
-            <a:lvl8pPr marL="3200400" indent="0">
+            <a:lvl8pPr marL="8400410" indent="0">
               <a:buNone/>
-              <a:defRPr sz="1600" b="1"/>
+              <a:defRPr sz="4200" b="1"/>
             </a:lvl8pPr>
-            <a:lvl9pPr marL="3657600" indent="0">
+            <a:lvl9pPr marL="9600468" indent="0">
               <a:buNone/>
-              <a:defRPr sz="1600" b="1"/>
+              <a:defRPr sz="4200" b="1"/>
             </a:lvl9pPr>
           </a:lstStyle>
           <a:p>
@@ -2031,13 +1856,7 @@
       </p:sp>
       <p:sp>
         <p:nvSpPr>
-          <p:cNvPr id="4" name="Content Placeholder 3">
-            <a:extLst>
-              <a:ext uri="{FF2B5EF4-FFF2-40B4-BE49-F238E27FC236}">
-                <a16:creationId xmlns:a16="http://schemas.microsoft.com/office/drawing/2014/main" id="{F4E3C79B-1B26-3F9F-C8F1-738BF9F3D501}"/>
-              </a:ext>
-            </a:extLst>
-          </p:cNvPr>
+          <p:cNvPr id="4" name="Content Placeholder 3"/>
           <p:cNvSpPr>
             <a:spLocks noGrp="1"/>
           </p:cNvSpPr>
@@ -2047,8 +1866,8 @@
         </p:nvSpPr>
         <p:spPr>
           <a:xfrm>
-            <a:off x="839788" y="2505075"/>
-            <a:ext cx="5157787" cy="3684588"/>
+            <a:off x="2975673" y="6575242"/>
+            <a:ext cx="18275893" cy="9671191"/>
           </a:xfrm>
         </p:spPr>
         <p:txBody>
@@ -2088,18 +1907,13 @@
               <a:rPr lang="en-US"/>
               <a:t>Fifth level</a:t>
             </a:r>
-          </a:p>
-        </p:txBody>
-      </p:sp>
-      <p:sp>
-        <p:nvSpPr>
-          <p:cNvPr id="5" name="Text Placeholder 4">
-            <a:extLst>
-              <a:ext uri="{FF2B5EF4-FFF2-40B4-BE49-F238E27FC236}">
-                <a16:creationId xmlns:a16="http://schemas.microsoft.com/office/drawing/2014/main" id="{2EE48576-0B0A-B3C3-EE40-32688E8C455F}"/>
-              </a:ext>
-            </a:extLst>
-          </p:cNvPr>
+            <a:endParaRPr lang="en-US" dirty="0"/>
+          </a:p>
+        </p:txBody>
+      </p:sp>
+      <p:sp>
+        <p:nvSpPr>
+          <p:cNvPr id="5" name="Text Placeholder 4"/>
           <p:cNvSpPr>
             <a:spLocks noGrp="1"/>
           </p:cNvSpPr>
@@ -2109,8 +1923,8 @@
         </p:nvSpPr>
         <p:spPr>
           <a:xfrm>
-            <a:off x="6172200" y="1681163"/>
-            <a:ext cx="5183188" cy="823912"/>
+            <a:off x="21870323" y="4412664"/>
+            <a:ext cx="18365898" cy="2162578"/>
           </a:xfrm>
         </p:spPr>
         <p:txBody>
@@ -2118,39 +1932,39 @@
           <a:lstStyle>
             <a:lvl1pPr marL="0" indent="0">
               <a:buNone/>
-              <a:defRPr sz="2400" b="1"/>
+              <a:defRPr sz="6300" b="1"/>
             </a:lvl1pPr>
-            <a:lvl2pPr marL="457200" indent="0">
+            <a:lvl2pPr marL="1200059" indent="0">
               <a:buNone/>
-              <a:defRPr sz="2000" b="1"/>
+              <a:defRPr sz="5250" b="1"/>
             </a:lvl2pPr>
-            <a:lvl3pPr marL="914400" indent="0">
+            <a:lvl3pPr marL="2400117" indent="0">
               <a:buNone/>
-              <a:defRPr sz="1800" b="1"/>
+              <a:defRPr sz="4725" b="1"/>
             </a:lvl3pPr>
-            <a:lvl4pPr marL="1371600" indent="0">
+            <a:lvl4pPr marL="3600176" indent="0">
               <a:buNone/>
-              <a:defRPr sz="1600" b="1"/>
+              <a:defRPr sz="4200" b="1"/>
             </a:lvl4pPr>
-            <a:lvl5pPr marL="1828800" indent="0">
+            <a:lvl5pPr marL="4800234" indent="0">
               <a:buNone/>
-              <a:defRPr sz="1600" b="1"/>
+              <a:defRPr sz="4200" b="1"/>
             </a:lvl5pPr>
-            <a:lvl6pPr marL="2286000" indent="0">
+            <a:lvl6pPr marL="6000293" indent="0">
               <a:buNone/>
-              <a:defRPr sz="1600" b="1"/>
+              <a:defRPr sz="4200" b="1"/>
             </a:lvl6pPr>
-            <a:lvl7pPr marL="2743200" indent="0">
+            <a:lvl7pPr marL="7200351" indent="0">
               <a:buNone/>
-              <a:defRPr sz="1600" b="1"/>
+              <a:defRPr sz="4200" b="1"/>
             </a:lvl7pPr>
-            <a:lvl8pPr marL="3200400" indent="0">
+            <a:lvl8pPr marL="8400410" indent="0">
               <a:buNone/>
-              <a:defRPr sz="1600" b="1"/>
+              <a:defRPr sz="4200" b="1"/>
             </a:lvl8pPr>
-            <a:lvl9pPr marL="3657600" indent="0">
+            <a:lvl9pPr marL="9600468" indent="0">
               <a:buNone/>
-              <a:defRPr sz="1600" b="1"/>
+              <a:defRPr sz="4200" b="1"/>
             </a:lvl9pPr>
           </a:lstStyle>
           <a:p>
@@ -2164,13 +1978,7 @@
       </p:sp>
       <p:sp>
         <p:nvSpPr>
-          <p:cNvPr id="6" name="Content Placeholder 5">
-            <a:extLst>
-              <a:ext uri="{FF2B5EF4-FFF2-40B4-BE49-F238E27FC236}">
-                <a16:creationId xmlns:a16="http://schemas.microsoft.com/office/drawing/2014/main" id="{4F5571A7-ECDD-BB60-0C60-CDCEFC4269C4}"/>
-              </a:ext>
-            </a:extLst>
-          </p:cNvPr>
+          <p:cNvPr id="6" name="Content Placeholder 5"/>
           <p:cNvSpPr>
             <a:spLocks noGrp="1"/>
           </p:cNvSpPr>
@@ -2180,8 +1988,8 @@
         </p:nvSpPr>
         <p:spPr>
           <a:xfrm>
-            <a:off x="6172200" y="2505075"/>
-            <a:ext cx="5183188" cy="3684588"/>
+            <a:off x="21870323" y="6575242"/>
+            <a:ext cx="18365898" cy="9671191"/>
           </a:xfrm>
         </p:spPr>
         <p:txBody>
@@ -2221,18 +2029,13 @@
               <a:rPr lang="en-US"/>
               <a:t>Fifth level</a:t>
             </a:r>
-          </a:p>
-        </p:txBody>
-      </p:sp>
-      <p:sp>
-        <p:nvSpPr>
-          <p:cNvPr id="7" name="Date Placeholder 6">
-            <a:extLst>
-              <a:ext uri="{FF2B5EF4-FFF2-40B4-BE49-F238E27FC236}">
-                <a16:creationId xmlns:a16="http://schemas.microsoft.com/office/drawing/2014/main" id="{918BFC33-6AD8-018F-7573-0746874F2FEE}"/>
-              </a:ext>
-            </a:extLst>
-          </p:cNvPr>
+            <a:endParaRPr lang="en-US" dirty="0"/>
+          </a:p>
+        </p:txBody>
+      </p:sp>
+      <p:sp>
+        <p:nvSpPr>
+          <p:cNvPr id="7" name="Date Placeholder 6"/>
           <p:cNvSpPr>
             <a:spLocks noGrp="1"/>
           </p:cNvSpPr>
@@ -2247,7 +2050,7 @@
           <a:p>
             <a:fld id="{7744C1DF-C9B9-4C32-9FF4-A604B0E589BF}" type="datetimeFigureOut">
               <a:rPr lang="en-US" smtClean="0"/>
-              <a:t>6/5/2026</a:t>
+              <a:t>6/6/2026</a:t>
             </a:fld>
             <a:endParaRPr lang="en-US"/>
           </a:p>
@@ -2255,13 +2058,7 @@
       </p:sp>
       <p:sp>
         <p:nvSpPr>
-          <p:cNvPr id="8" name="Footer Placeholder 7">
-            <a:extLst>
-              <a:ext uri="{FF2B5EF4-FFF2-40B4-BE49-F238E27FC236}">
-                <a16:creationId xmlns:a16="http://schemas.microsoft.com/office/drawing/2014/main" id="{6800719D-80B5-2546-68EF-44FBF2B723A8}"/>
-              </a:ext>
-            </a:extLst>
-          </p:cNvPr>
+          <p:cNvPr id="8" name="Footer Placeholder 7"/>
           <p:cNvSpPr>
             <a:spLocks noGrp="1"/>
           </p:cNvSpPr>
@@ -2280,13 +2077,7 @@
       </p:sp>
       <p:sp>
         <p:nvSpPr>
-          <p:cNvPr id="9" name="Slide Number Placeholder 8">
-            <a:extLst>
-              <a:ext uri="{FF2B5EF4-FFF2-40B4-BE49-F238E27FC236}">
-                <a16:creationId xmlns:a16="http://schemas.microsoft.com/office/drawing/2014/main" id="{57AB0AFE-B472-F70D-1EAE-F24F12F7EF88}"/>
-              </a:ext>
-            </a:extLst>
-          </p:cNvPr>
+          <p:cNvPr id="9" name="Slide Number Placeholder 8"/>
           <p:cNvSpPr>
             <a:spLocks noGrp="1"/>
           </p:cNvSpPr>
@@ -2310,7 +2101,7 @@
     </p:spTree>
     <p:extLst>
       <p:ext uri="{BB962C8B-B14F-4D97-AF65-F5344CB8AC3E}">
-        <p14:creationId xmlns:p14="http://schemas.microsoft.com/office/powerpoint/2010/main" val="3160369541"/>
+        <p14:creationId xmlns:p14="http://schemas.microsoft.com/office/powerpoint/2010/main" val="4214073185"/>
       </p:ext>
     </p:extLst>
   </p:cSld>
@@ -2339,13 +2130,7 @@
       </p:grpSpPr>
       <p:sp>
         <p:nvSpPr>
-          <p:cNvPr id="2" name="Title 1">
-            <a:extLst>
-              <a:ext uri="{FF2B5EF4-FFF2-40B4-BE49-F238E27FC236}">
-                <a16:creationId xmlns:a16="http://schemas.microsoft.com/office/drawing/2014/main" id="{3F7846F5-2496-AED5-3CA5-6C0CCEEFF537}"/>
-              </a:ext>
-            </a:extLst>
-          </p:cNvPr>
+          <p:cNvPr id="2" name="Title 1"/>
           <p:cNvSpPr>
             <a:spLocks noGrp="1"/>
           </p:cNvSpPr>
@@ -2362,18 +2147,13 @@
               <a:rPr lang="en-US"/>
               <a:t>Click to edit Master title style</a:t>
             </a:r>
-          </a:p>
-        </p:txBody>
-      </p:sp>
-      <p:sp>
-        <p:nvSpPr>
-          <p:cNvPr id="3" name="Date Placeholder 2">
-            <a:extLst>
-              <a:ext uri="{FF2B5EF4-FFF2-40B4-BE49-F238E27FC236}">
-                <a16:creationId xmlns:a16="http://schemas.microsoft.com/office/drawing/2014/main" id="{7CEF3B25-E7CD-6BF9-39CB-1484C58D1A82}"/>
-              </a:ext>
-            </a:extLst>
-          </p:cNvPr>
+            <a:endParaRPr lang="en-US" dirty="0"/>
+          </a:p>
+        </p:txBody>
+      </p:sp>
+      <p:sp>
+        <p:nvSpPr>
+          <p:cNvPr id="3" name="Date Placeholder 2"/>
           <p:cNvSpPr>
             <a:spLocks noGrp="1"/>
           </p:cNvSpPr>
@@ -2388,7 +2168,7 @@
           <a:p>
             <a:fld id="{7744C1DF-C9B9-4C32-9FF4-A604B0E589BF}" type="datetimeFigureOut">
               <a:rPr lang="en-US" smtClean="0"/>
-              <a:t>6/5/2026</a:t>
+              <a:t>6/6/2026</a:t>
             </a:fld>
             <a:endParaRPr lang="en-US"/>
           </a:p>
@@ -2396,13 +2176,7 @@
       </p:sp>
       <p:sp>
         <p:nvSpPr>
-          <p:cNvPr id="4" name="Footer Placeholder 3">
-            <a:extLst>
-              <a:ext uri="{FF2B5EF4-FFF2-40B4-BE49-F238E27FC236}">
-                <a16:creationId xmlns:a16="http://schemas.microsoft.com/office/drawing/2014/main" id="{C87D112C-A463-CFC7-66C2-D046C544296A}"/>
-              </a:ext>
-            </a:extLst>
-          </p:cNvPr>
+          <p:cNvPr id="4" name="Footer Placeholder 3"/>
           <p:cNvSpPr>
             <a:spLocks noGrp="1"/>
           </p:cNvSpPr>
@@ -2421,13 +2195,7 @@
       </p:sp>
       <p:sp>
         <p:nvSpPr>
-          <p:cNvPr id="5" name="Slide Number Placeholder 4">
-            <a:extLst>
-              <a:ext uri="{FF2B5EF4-FFF2-40B4-BE49-F238E27FC236}">
-                <a16:creationId xmlns:a16="http://schemas.microsoft.com/office/drawing/2014/main" id="{6B96F357-486F-ED28-F2A2-D85E7039C0FD}"/>
-              </a:ext>
-            </a:extLst>
-          </p:cNvPr>
+          <p:cNvPr id="5" name="Slide Number Placeholder 4"/>
           <p:cNvSpPr>
             <a:spLocks noGrp="1"/>
           </p:cNvSpPr>
@@ -2451,7 +2219,7 @@
     </p:spTree>
     <p:extLst>
       <p:ext uri="{BB962C8B-B14F-4D97-AF65-F5344CB8AC3E}">
-        <p14:creationId xmlns:p14="http://schemas.microsoft.com/office/powerpoint/2010/main" val="809852310"/>
+        <p14:creationId xmlns:p14="http://schemas.microsoft.com/office/powerpoint/2010/main" val="18175072"/>
       </p:ext>
     </p:extLst>
   </p:cSld>
@@ -2480,13 +2248,7 @@
       </p:grpSpPr>
       <p:sp>
         <p:nvSpPr>
-          <p:cNvPr id="2" name="Date Placeholder 1">
-            <a:extLst>
-              <a:ext uri="{FF2B5EF4-FFF2-40B4-BE49-F238E27FC236}">
-                <a16:creationId xmlns:a16="http://schemas.microsoft.com/office/drawing/2014/main" id="{ABD8B254-AE8A-EA0F-9CF4-1A54DECC2836}"/>
-              </a:ext>
-            </a:extLst>
-          </p:cNvPr>
+          <p:cNvPr id="2" name="Date Placeholder 1"/>
           <p:cNvSpPr>
             <a:spLocks noGrp="1"/>
           </p:cNvSpPr>
@@ -2501,7 +2263,7 @@
           <a:p>
             <a:fld id="{7744C1DF-C9B9-4C32-9FF4-A604B0E589BF}" type="datetimeFigureOut">
               <a:rPr lang="en-US" smtClean="0"/>
-              <a:t>6/5/2026</a:t>
+              <a:t>6/6/2026</a:t>
             </a:fld>
             <a:endParaRPr lang="en-US"/>
           </a:p>
@@ -2509,13 +2271,7 @@
       </p:sp>
       <p:sp>
         <p:nvSpPr>
-          <p:cNvPr id="3" name="Footer Placeholder 2">
-            <a:extLst>
-              <a:ext uri="{FF2B5EF4-FFF2-40B4-BE49-F238E27FC236}">
-                <a16:creationId xmlns:a16="http://schemas.microsoft.com/office/drawing/2014/main" id="{3524D0A0-C462-9E3D-A59F-51819B4B2B86}"/>
-              </a:ext>
-            </a:extLst>
-          </p:cNvPr>
+          <p:cNvPr id="3" name="Footer Placeholder 2"/>
           <p:cNvSpPr>
             <a:spLocks noGrp="1"/>
           </p:cNvSpPr>
@@ -2534,13 +2290,7 @@
       </p:sp>
       <p:sp>
         <p:nvSpPr>
-          <p:cNvPr id="4" name="Slide Number Placeholder 3">
-            <a:extLst>
-              <a:ext uri="{FF2B5EF4-FFF2-40B4-BE49-F238E27FC236}">
-                <a16:creationId xmlns:a16="http://schemas.microsoft.com/office/drawing/2014/main" id="{AAB90A1F-7CA6-3A33-BAE5-AE40417DFE34}"/>
-              </a:ext>
-            </a:extLst>
-          </p:cNvPr>
+          <p:cNvPr id="4" name="Slide Number Placeholder 3"/>
           <p:cNvSpPr>
             <a:spLocks noGrp="1"/>
           </p:cNvSpPr>
@@ -2564,7 +2314,7 @@
     </p:spTree>
     <p:extLst>
       <p:ext uri="{BB962C8B-B14F-4D97-AF65-F5344CB8AC3E}">
-        <p14:creationId xmlns:p14="http://schemas.microsoft.com/office/powerpoint/2010/main" val="1110355119"/>
+        <p14:creationId xmlns:p14="http://schemas.microsoft.com/office/powerpoint/2010/main" val="2155598862"/>
       </p:ext>
     </p:extLst>
   </p:cSld>
@@ -2593,13 +2343,7 @@
       </p:grpSpPr>
       <p:sp>
         <p:nvSpPr>
-          <p:cNvPr id="2" name="Title 1">
-            <a:extLst>
-              <a:ext uri="{FF2B5EF4-FFF2-40B4-BE49-F238E27FC236}">
-                <a16:creationId xmlns:a16="http://schemas.microsoft.com/office/drawing/2014/main" id="{68A69950-86DF-6EA3-BBD3-1EDB0219EB4D}"/>
-              </a:ext>
-            </a:extLst>
-          </p:cNvPr>
+          <p:cNvPr id="2" name="Title 1"/>
           <p:cNvSpPr>
             <a:spLocks noGrp="1"/>
           </p:cNvSpPr>
@@ -2609,15 +2353,15 @@
         </p:nvSpPr>
         <p:spPr>
           <a:xfrm>
-            <a:off x="839788" y="457200"/>
-            <a:ext cx="3932237" cy="1600200"/>
+            <a:off x="2975672" y="1200044"/>
+            <a:ext cx="13933329" cy="4200155"/>
           </a:xfrm>
         </p:spPr>
         <p:txBody>
           <a:bodyPr anchor="b"/>
           <a:lstStyle>
             <a:lvl1pPr>
-              <a:defRPr sz="3200"/>
+              <a:defRPr sz="8399"/>
             </a:lvl1pPr>
           </a:lstStyle>
           <a:p>
@@ -2625,18 +2369,13 @@
               <a:rPr lang="en-US"/>
               <a:t>Click to edit Master title style</a:t>
             </a:r>
-          </a:p>
-        </p:txBody>
-      </p:sp>
-      <p:sp>
-        <p:nvSpPr>
-          <p:cNvPr id="3" name="Content Placeholder 2">
-            <a:extLst>
-              <a:ext uri="{FF2B5EF4-FFF2-40B4-BE49-F238E27FC236}">
-                <a16:creationId xmlns:a16="http://schemas.microsoft.com/office/drawing/2014/main" id="{8D8714F3-6D65-F5E0-A708-D241FC871CFD}"/>
-              </a:ext>
-            </a:extLst>
-          </p:cNvPr>
+            <a:endParaRPr lang="en-US" dirty="0"/>
+          </a:p>
+        </p:txBody>
+      </p:sp>
+      <p:sp>
+        <p:nvSpPr>
+          <p:cNvPr id="3" name="Content Placeholder 2"/>
           <p:cNvSpPr>
             <a:spLocks noGrp="1"/>
           </p:cNvSpPr>
@@ -2646,39 +2385,39 @@
         </p:nvSpPr>
         <p:spPr>
           <a:xfrm>
-            <a:off x="5183188" y="987425"/>
-            <a:ext cx="6172200" cy="4873625"/>
+            <a:off x="18365898" y="2591763"/>
+            <a:ext cx="21870323" cy="12792138"/>
           </a:xfrm>
         </p:spPr>
         <p:txBody>
           <a:bodyPr/>
           <a:lstStyle>
             <a:lvl1pPr>
-              <a:defRPr sz="3200"/>
+              <a:defRPr sz="8399"/>
             </a:lvl1pPr>
             <a:lvl2pPr>
-              <a:defRPr sz="2800"/>
+              <a:defRPr sz="7349"/>
             </a:lvl2pPr>
             <a:lvl3pPr>
-              <a:defRPr sz="2400"/>
+              <a:defRPr sz="6300"/>
             </a:lvl3pPr>
             <a:lvl4pPr>
-              <a:defRPr sz="2000"/>
+              <a:defRPr sz="5250"/>
             </a:lvl4pPr>
             <a:lvl5pPr>
-              <a:defRPr sz="2000"/>
+              <a:defRPr sz="5250"/>
             </a:lvl5pPr>
             <a:lvl6pPr>
-              <a:defRPr sz="2000"/>
+              <a:defRPr sz="5250"/>
             </a:lvl6pPr>
             <a:lvl7pPr>
-              <a:defRPr sz="2000"/>
+              <a:defRPr sz="5250"/>
             </a:lvl7pPr>
             <a:lvl8pPr>
-              <a:defRPr sz="2000"/>
+              <a:defRPr sz="5250"/>
             </a:lvl8pPr>
             <a:lvl9pPr>
-              <a:defRPr sz="2000"/>
+              <a:defRPr sz="5250"/>
             </a:lvl9pPr>
           </a:lstStyle>
           <a:p>
@@ -2715,18 +2454,13 @@
               <a:rPr lang="en-US"/>
               <a:t>Fifth level</a:t>
             </a:r>
-          </a:p>
-        </p:txBody>
-      </p:sp>
-      <p:sp>
-        <p:nvSpPr>
-          <p:cNvPr id="4" name="Text Placeholder 3">
-            <a:extLst>
-              <a:ext uri="{FF2B5EF4-FFF2-40B4-BE49-F238E27FC236}">
-                <a16:creationId xmlns:a16="http://schemas.microsoft.com/office/drawing/2014/main" id="{BDC93564-9FA1-D928-A0BD-A7C44FA64962}"/>
-              </a:ext>
-            </a:extLst>
-          </p:cNvPr>
+            <a:endParaRPr lang="en-US" dirty="0"/>
+          </a:p>
+        </p:txBody>
+      </p:sp>
+      <p:sp>
+        <p:nvSpPr>
+          <p:cNvPr id="4" name="Text Placeholder 3"/>
           <p:cNvSpPr>
             <a:spLocks noGrp="1"/>
           </p:cNvSpPr>
@@ -2736,8 +2470,8 @@
         </p:nvSpPr>
         <p:spPr>
           <a:xfrm>
-            <a:off x="839788" y="2057400"/>
-            <a:ext cx="3932237" cy="3811588"/>
+            <a:off x="2975672" y="5400199"/>
+            <a:ext cx="13933329" cy="10004536"/>
           </a:xfrm>
         </p:spPr>
         <p:txBody>
@@ -2745,39 +2479,39 @@
           <a:lstStyle>
             <a:lvl1pPr marL="0" indent="0">
               <a:buNone/>
-              <a:defRPr sz="1600"/>
+              <a:defRPr sz="4200"/>
             </a:lvl1pPr>
-            <a:lvl2pPr marL="457200" indent="0">
+            <a:lvl2pPr marL="1200059" indent="0">
               <a:buNone/>
-              <a:defRPr sz="1400"/>
+              <a:defRPr sz="3675"/>
             </a:lvl2pPr>
-            <a:lvl3pPr marL="914400" indent="0">
+            <a:lvl3pPr marL="2400117" indent="0">
               <a:buNone/>
-              <a:defRPr sz="1200"/>
+              <a:defRPr sz="3150"/>
             </a:lvl3pPr>
-            <a:lvl4pPr marL="1371600" indent="0">
+            <a:lvl4pPr marL="3600176" indent="0">
               <a:buNone/>
-              <a:defRPr sz="1000"/>
+              <a:defRPr sz="2625"/>
             </a:lvl4pPr>
-            <a:lvl5pPr marL="1828800" indent="0">
+            <a:lvl5pPr marL="4800234" indent="0">
               <a:buNone/>
-              <a:defRPr sz="1000"/>
+              <a:defRPr sz="2625"/>
             </a:lvl5pPr>
-            <a:lvl6pPr marL="2286000" indent="0">
+            <a:lvl6pPr marL="6000293" indent="0">
               <a:buNone/>
-              <a:defRPr sz="1000"/>
+              <a:defRPr sz="2625"/>
             </a:lvl6pPr>
-            <a:lvl7pPr marL="2743200" indent="0">
+            <a:lvl7pPr marL="7200351" indent="0">
               <a:buNone/>
-              <a:defRPr sz="1000"/>
+              <a:defRPr sz="2625"/>
             </a:lvl7pPr>
-            <a:lvl8pPr marL="3200400" indent="0">
+            <a:lvl8pPr marL="8400410" indent="0">
               <a:buNone/>
-              <a:defRPr sz="1000"/>
+              <a:defRPr sz="2625"/>
             </a:lvl8pPr>
-            <a:lvl9pPr marL="3657600" indent="0">
+            <a:lvl9pPr marL="9600468" indent="0">
               <a:buNone/>
-              <a:defRPr sz="1000"/>
+              <a:defRPr sz="2625"/>
             </a:lvl9pPr>
           </a:lstStyle>
           <a:p>
@@ -2791,13 +2525,7 @@
       </p:sp>
       <p:sp>
         <p:nvSpPr>
-          <p:cNvPr id="5" name="Date Placeholder 4">
-            <a:extLst>
-              <a:ext uri="{FF2B5EF4-FFF2-40B4-BE49-F238E27FC236}">
-                <a16:creationId xmlns:a16="http://schemas.microsoft.com/office/drawing/2014/main" id="{AB034370-2C19-38E5-8538-FA62EB4A016A}"/>
-              </a:ext>
-            </a:extLst>
-          </p:cNvPr>
+          <p:cNvPr id="5" name="Date Placeholder 4"/>
           <p:cNvSpPr>
             <a:spLocks noGrp="1"/>
           </p:cNvSpPr>
@@ -2812,7 +2540,7 @@
           <a:p>
             <a:fld id="{7744C1DF-C9B9-4C32-9FF4-A604B0E589BF}" type="datetimeFigureOut">
               <a:rPr lang="en-US" smtClean="0"/>
-              <a:t>6/5/2026</a:t>
+              <a:t>6/6/2026</a:t>
             </a:fld>
             <a:endParaRPr lang="en-US"/>
           </a:p>
@@ -2820,13 +2548,7 @@
       </p:sp>
       <p:sp>
         <p:nvSpPr>
-          <p:cNvPr id="6" name="Footer Placeholder 5">
-            <a:extLst>
-              <a:ext uri="{FF2B5EF4-FFF2-40B4-BE49-F238E27FC236}">
-                <a16:creationId xmlns:a16="http://schemas.microsoft.com/office/drawing/2014/main" id="{F19483FA-14CA-1777-1382-AF58590354F5}"/>
-              </a:ext>
-            </a:extLst>
-          </p:cNvPr>
+          <p:cNvPr id="6" name="Footer Placeholder 5"/>
           <p:cNvSpPr>
             <a:spLocks noGrp="1"/>
           </p:cNvSpPr>
@@ -2845,13 +2567,7 @@
       </p:sp>
       <p:sp>
         <p:nvSpPr>
-          <p:cNvPr id="7" name="Slide Number Placeholder 6">
-            <a:extLst>
-              <a:ext uri="{FF2B5EF4-FFF2-40B4-BE49-F238E27FC236}">
-                <a16:creationId xmlns:a16="http://schemas.microsoft.com/office/drawing/2014/main" id="{888B3919-021F-B510-C328-4199A4B0C7F7}"/>
-              </a:ext>
-            </a:extLst>
-          </p:cNvPr>
+          <p:cNvPr id="7" name="Slide Number Placeholder 6"/>
           <p:cNvSpPr>
             <a:spLocks noGrp="1"/>
           </p:cNvSpPr>
@@ -2875,7 +2591,7 @@
     </p:spTree>
     <p:extLst>
       <p:ext uri="{BB962C8B-B14F-4D97-AF65-F5344CB8AC3E}">
-        <p14:creationId xmlns:p14="http://schemas.microsoft.com/office/powerpoint/2010/main" val="3507138217"/>
+        <p14:creationId xmlns:p14="http://schemas.microsoft.com/office/powerpoint/2010/main" val="2690144313"/>
       </p:ext>
     </p:extLst>
   </p:cSld>
@@ -2904,13 +2620,7 @@
       </p:grpSpPr>
       <p:sp>
         <p:nvSpPr>
-          <p:cNvPr id="2" name="Title 1">
-            <a:extLst>
-              <a:ext uri="{FF2B5EF4-FFF2-40B4-BE49-F238E27FC236}">
-                <a16:creationId xmlns:a16="http://schemas.microsoft.com/office/drawing/2014/main" id="{AD9C5158-3C8B-45F8-100F-64CC934E0BB6}"/>
-              </a:ext>
-            </a:extLst>
-          </p:cNvPr>
+          <p:cNvPr id="2" name="Title 1"/>
           <p:cNvSpPr>
             <a:spLocks noGrp="1"/>
           </p:cNvSpPr>
@@ -2920,15 +2630,15 @@
         </p:nvSpPr>
         <p:spPr>
           <a:xfrm>
-            <a:off x="839788" y="457200"/>
-            <a:ext cx="3932237" cy="1600200"/>
+            <a:off x="2975672" y="1200044"/>
+            <a:ext cx="13933329" cy="4200155"/>
           </a:xfrm>
         </p:spPr>
         <p:txBody>
           <a:bodyPr anchor="b"/>
           <a:lstStyle>
             <a:lvl1pPr>
-              <a:defRPr sz="3200"/>
+              <a:defRPr sz="8399"/>
             </a:lvl1pPr>
           </a:lstStyle>
           <a:p>
@@ -2936,20 +2646,15 @@
               <a:rPr lang="en-US"/>
               <a:t>Click to edit Master title style</a:t>
             </a:r>
-          </a:p>
-        </p:txBody>
-      </p:sp>
-      <p:sp>
-        <p:nvSpPr>
-          <p:cNvPr id="3" name="Picture Placeholder 2">
-            <a:extLst>
-              <a:ext uri="{FF2B5EF4-FFF2-40B4-BE49-F238E27FC236}">
-                <a16:creationId xmlns:a16="http://schemas.microsoft.com/office/drawing/2014/main" id="{BE3FC7D2-2CEA-5938-EB96-E846870A777A}"/>
-              </a:ext>
-            </a:extLst>
-          </p:cNvPr>
+            <a:endParaRPr lang="en-US" dirty="0"/>
+          </a:p>
+        </p:txBody>
+      </p:sp>
+      <p:sp>
+        <p:nvSpPr>
+          <p:cNvPr id="3" name="Picture Placeholder 2"/>
           <p:cNvSpPr>
-            <a:spLocks noGrp="1"/>
+            <a:spLocks noGrp="1" noChangeAspect="1"/>
           </p:cNvSpPr>
           <p:nvPr>
             <p:ph type="pic" idx="1"/>
@@ -2957,64 +2662,62 @@
         </p:nvSpPr>
         <p:spPr>
           <a:xfrm>
-            <a:off x="5183188" y="987425"/>
-            <a:ext cx="6172200" cy="4873625"/>
-          </a:xfrm>
-        </p:spPr>
-        <p:txBody>
-          <a:bodyPr/>
+            <a:off x="18365898" y="2591763"/>
+            <a:ext cx="21870323" cy="12792138"/>
+          </a:xfrm>
+        </p:spPr>
+        <p:txBody>
+          <a:bodyPr anchor="t"/>
           <a:lstStyle>
             <a:lvl1pPr marL="0" indent="0">
               <a:buNone/>
-              <a:defRPr sz="3200"/>
+              <a:defRPr sz="8399"/>
             </a:lvl1pPr>
-            <a:lvl2pPr marL="457200" indent="0">
+            <a:lvl2pPr marL="1200059" indent="0">
               <a:buNone/>
-              <a:defRPr sz="2800"/>
+              <a:defRPr sz="7349"/>
             </a:lvl2pPr>
-            <a:lvl3pPr marL="914400" indent="0">
+            <a:lvl3pPr marL="2400117" indent="0">
               <a:buNone/>
-              <a:defRPr sz="2400"/>
+              <a:defRPr sz="6300"/>
             </a:lvl3pPr>
-            <a:lvl4pPr marL="1371600" indent="0">
+            <a:lvl4pPr marL="3600176" indent="0">
               <a:buNone/>
-              <a:defRPr sz="2000"/>
+              <a:defRPr sz="5250"/>
             </a:lvl4pPr>
-            <a:lvl5pPr marL="1828800" indent="0">
+            <a:lvl5pPr marL="4800234" indent="0">
               <a:buNone/>
-              <a:defRPr sz="2000"/>
+              <a:defRPr sz="5250"/>
             </a:lvl5pPr>
-            <a:lvl6pPr marL="2286000" indent="0">
+            <a:lvl6pPr marL="6000293" indent="0">
               <a:buNone/>
-              <a:defRPr sz="2000"/>
+              <a:defRPr sz="5250"/>
             </a:lvl6pPr>
-            <a:lvl7pPr marL="2743200" indent="0">
+            <a:lvl7pPr marL="7200351" indent="0">
               <a:buNone/>
-              <a:defRPr sz="2000"/>
+              <a:defRPr sz="5250"/>
             </a:lvl7pPr>
-            <a:lvl8pPr marL="3200400" indent="0">
+            <a:lvl8pPr marL="8400410" indent="0">
               <a:buNone/>
-              <a:defRPr sz="2000"/>
+              <a:defRPr sz="5250"/>
             </a:lvl8pPr>
-            <a:lvl9pPr marL="3657600" indent="0">
+            <a:lvl9pPr marL="9600468" indent="0">
               <a:buNone/>
-              <a:defRPr sz="2000"/>
+              <a:defRPr sz="5250"/>
             </a:lvl9pPr>
           </a:lstStyle>
           <a:p>
-            <a:endParaRPr lang="en-US"/>
-          </a:p>
-        </p:txBody>
-      </p:sp>
-      <p:sp>
-        <p:nvSpPr>
-          <p:cNvPr id="4" name="Text Placeholder 3">
-            <a:extLst>
-              <a:ext uri="{FF2B5EF4-FFF2-40B4-BE49-F238E27FC236}">
-                <a16:creationId xmlns:a16="http://schemas.microsoft.com/office/drawing/2014/main" id="{BC666749-8366-D7D1-3C8D-B77C32A55491}"/>
-              </a:ext>
-            </a:extLst>
-          </p:cNvPr>
+            <a:r>
+              <a:rPr lang="en-US"/>
+              <a:t>Click icon to add picture</a:t>
+            </a:r>
+            <a:endParaRPr lang="en-US" dirty="0"/>
+          </a:p>
+        </p:txBody>
+      </p:sp>
+      <p:sp>
+        <p:nvSpPr>
+          <p:cNvPr id="4" name="Text Placeholder 3"/>
           <p:cNvSpPr>
             <a:spLocks noGrp="1"/>
           </p:cNvSpPr>
@@ -3024,8 +2727,8 @@
         </p:nvSpPr>
         <p:spPr>
           <a:xfrm>
-            <a:off x="839788" y="2057400"/>
-            <a:ext cx="3932237" cy="3811588"/>
+            <a:off x="2975672" y="5400199"/>
+            <a:ext cx="13933329" cy="10004536"/>
           </a:xfrm>
         </p:spPr>
         <p:txBody>
@@ -3033,39 +2736,39 @@
           <a:lstStyle>
             <a:lvl1pPr marL="0" indent="0">
               <a:buNone/>
-              <a:defRPr sz="1600"/>
+              <a:defRPr sz="4200"/>
             </a:lvl1pPr>
-            <a:lvl2pPr marL="457200" indent="0">
+            <a:lvl2pPr marL="1200059" indent="0">
               <a:buNone/>
-              <a:defRPr sz="1400"/>
+              <a:defRPr sz="3675"/>
             </a:lvl2pPr>
-            <a:lvl3pPr marL="914400" indent="0">
+            <a:lvl3pPr marL="2400117" indent="0">
               <a:buNone/>
-              <a:defRPr sz="1200"/>
+              <a:defRPr sz="3150"/>
             </a:lvl3pPr>
-            <a:lvl4pPr marL="1371600" indent="0">
+            <a:lvl4pPr marL="3600176" indent="0">
               <a:buNone/>
-              <a:defRPr sz="1000"/>
+              <a:defRPr sz="2625"/>
             </a:lvl4pPr>
-            <a:lvl5pPr marL="1828800" indent="0">
+            <a:lvl5pPr marL="4800234" indent="0">
               <a:buNone/>
-              <a:defRPr sz="1000"/>
+              <a:defRPr sz="2625"/>
             </a:lvl5pPr>
-            <a:lvl6pPr marL="2286000" indent="0">
+            <a:lvl6pPr marL="6000293" indent="0">
               <a:buNone/>
-              <a:defRPr sz="1000"/>
+              <a:defRPr sz="2625"/>
             </a:lvl6pPr>
-            <a:lvl7pPr marL="2743200" indent="0">
+            <a:lvl7pPr marL="7200351" indent="0">
               <a:buNone/>
-              <a:defRPr sz="1000"/>
+              <a:defRPr sz="2625"/>
             </a:lvl7pPr>
-            <a:lvl8pPr marL="3200400" indent="0">
+            <a:lvl8pPr marL="8400410" indent="0">
               <a:buNone/>
-              <a:defRPr sz="1000"/>
+              <a:defRPr sz="2625"/>
             </a:lvl8pPr>
-            <a:lvl9pPr marL="3657600" indent="0">
+            <a:lvl9pPr marL="9600468" indent="0">
               <a:buNone/>
-              <a:defRPr sz="1000"/>
+              <a:defRPr sz="2625"/>
             </a:lvl9pPr>
           </a:lstStyle>
           <a:p>
@@ -3079,13 +2782,7 @@
       </p:sp>
       <p:sp>
         <p:nvSpPr>
-          <p:cNvPr id="5" name="Date Placeholder 4">
-            <a:extLst>
-              <a:ext uri="{FF2B5EF4-FFF2-40B4-BE49-F238E27FC236}">
-                <a16:creationId xmlns:a16="http://schemas.microsoft.com/office/drawing/2014/main" id="{7DDDADB0-838E-836B-6BA1-01B0FA568966}"/>
-              </a:ext>
-            </a:extLst>
-          </p:cNvPr>
+          <p:cNvPr id="5" name="Date Placeholder 4"/>
           <p:cNvSpPr>
             <a:spLocks noGrp="1"/>
           </p:cNvSpPr>
@@ -3100,7 +2797,7 @@
           <a:p>
             <a:fld id="{7744C1DF-C9B9-4C32-9FF4-A604B0E589BF}" type="datetimeFigureOut">
               <a:rPr lang="en-US" smtClean="0"/>
-              <a:t>6/5/2026</a:t>
+              <a:t>6/6/2026</a:t>
             </a:fld>
             <a:endParaRPr lang="en-US"/>
           </a:p>
@@ -3108,13 +2805,7 @@
       </p:sp>
       <p:sp>
         <p:nvSpPr>
-          <p:cNvPr id="6" name="Footer Placeholder 5">
-            <a:extLst>
-              <a:ext uri="{FF2B5EF4-FFF2-40B4-BE49-F238E27FC236}">
-                <a16:creationId xmlns:a16="http://schemas.microsoft.com/office/drawing/2014/main" id="{D8044F35-74EA-A798-CCF7-DA3E524D2165}"/>
-              </a:ext>
-            </a:extLst>
-          </p:cNvPr>
+          <p:cNvPr id="6" name="Footer Placeholder 5"/>
           <p:cNvSpPr>
             <a:spLocks noGrp="1"/>
           </p:cNvSpPr>
@@ -3133,13 +2824,7 @@
       </p:sp>
       <p:sp>
         <p:nvSpPr>
-          <p:cNvPr id="7" name="Slide Number Placeholder 6">
-            <a:extLst>
-              <a:ext uri="{FF2B5EF4-FFF2-40B4-BE49-F238E27FC236}">
-                <a16:creationId xmlns:a16="http://schemas.microsoft.com/office/drawing/2014/main" id="{63E934CF-0188-E8EC-5C62-4A4EFB9C913E}"/>
-              </a:ext>
-            </a:extLst>
-          </p:cNvPr>
+          <p:cNvPr id="7" name="Slide Number Placeholder 6"/>
           <p:cNvSpPr>
             <a:spLocks noGrp="1"/>
           </p:cNvSpPr>
@@ -3163,7 +2848,7 @@
     </p:spTree>
     <p:extLst>
       <p:ext uri="{BB962C8B-B14F-4D97-AF65-F5344CB8AC3E}">
-        <p14:creationId xmlns:p14="http://schemas.microsoft.com/office/powerpoint/2010/main" val="3972201898"/>
+        <p14:creationId xmlns:p14="http://schemas.microsoft.com/office/powerpoint/2010/main" val="3724731048"/>
       </p:ext>
     </p:extLst>
   </p:cSld>
@@ -3197,13 +2882,7 @@
       </p:grpSpPr>
       <p:sp>
         <p:nvSpPr>
-          <p:cNvPr id="2" name="Title Placeholder 1">
-            <a:extLst>
-              <a:ext uri="{FF2B5EF4-FFF2-40B4-BE49-F238E27FC236}">
-                <a16:creationId xmlns:a16="http://schemas.microsoft.com/office/drawing/2014/main" id="{9399F4DA-A8A0-BD4A-FD79-1B5AAF5C30DF}"/>
-              </a:ext>
-            </a:extLst>
-          </p:cNvPr>
+          <p:cNvPr id="2" name="Title Placeholder 1"/>
           <p:cNvSpPr>
             <a:spLocks noGrp="1"/>
           </p:cNvSpPr>
@@ -3213,8 +2892,8 @@
         </p:nvSpPr>
         <p:spPr>
           <a:xfrm>
-            <a:off x="838200" y="365125"/>
-            <a:ext cx="10515600" cy="1325563"/>
+            <a:off x="2970044" y="958370"/>
+            <a:ext cx="37260550" cy="3479296"/>
           </a:xfrm>
           <a:prstGeom prst="rect">
             <a:avLst/>
@@ -3230,18 +2909,13 @@
               <a:rPr lang="en-US"/>
               <a:t>Click to edit Master title style</a:t>
             </a:r>
-          </a:p>
-        </p:txBody>
-      </p:sp>
-      <p:sp>
-        <p:nvSpPr>
-          <p:cNvPr id="3" name="Text Placeholder 2">
-            <a:extLst>
-              <a:ext uri="{FF2B5EF4-FFF2-40B4-BE49-F238E27FC236}">
-                <a16:creationId xmlns:a16="http://schemas.microsoft.com/office/drawing/2014/main" id="{5DF5BB3A-6272-25D2-8DF8-C180BE3EA1A7}"/>
-              </a:ext>
-            </a:extLst>
-          </p:cNvPr>
+            <a:endParaRPr lang="en-US" dirty="0"/>
+          </a:p>
+        </p:txBody>
+      </p:sp>
+      <p:sp>
+        <p:nvSpPr>
+          <p:cNvPr id="3" name="Text Placeholder 2"/>
           <p:cNvSpPr>
             <a:spLocks noGrp="1"/>
           </p:cNvSpPr>
@@ -3251,8 +2925,8 @@
         </p:nvSpPr>
         <p:spPr>
           <a:xfrm>
-            <a:off x="838200" y="1825625"/>
-            <a:ext cx="10515600" cy="4351338"/>
+            <a:off x="2970044" y="4791843"/>
+            <a:ext cx="37260550" cy="11421255"/>
           </a:xfrm>
           <a:prstGeom prst="rect">
             <a:avLst/>
@@ -3297,18 +2971,13 @@
               <a:rPr lang="en-US"/>
               <a:t>Fifth level</a:t>
             </a:r>
-          </a:p>
-        </p:txBody>
-      </p:sp>
-      <p:sp>
-        <p:nvSpPr>
-          <p:cNvPr id="4" name="Date Placeholder 3">
-            <a:extLst>
-              <a:ext uri="{FF2B5EF4-FFF2-40B4-BE49-F238E27FC236}">
-                <a16:creationId xmlns:a16="http://schemas.microsoft.com/office/drawing/2014/main" id="{1F5DC83F-DD5B-98BB-B8AE-8BC8C38A77B3}"/>
-              </a:ext>
-            </a:extLst>
-          </p:cNvPr>
+            <a:endParaRPr lang="en-US" dirty="0"/>
+          </a:p>
+        </p:txBody>
+      </p:sp>
+      <p:sp>
+        <p:nvSpPr>
+          <p:cNvPr id="4" name="Date Placeholder 3"/>
           <p:cNvSpPr>
             <a:spLocks noGrp="1"/>
           </p:cNvSpPr>
@@ -3318,8 +2987,8 @@
         </p:nvSpPr>
         <p:spPr>
           <a:xfrm>
-            <a:off x="838200" y="6356350"/>
-            <a:ext cx="2743200" cy="365125"/>
+            <a:off x="2970044" y="16683949"/>
+            <a:ext cx="9720144" cy="958369"/>
           </a:xfrm>
           <a:prstGeom prst="rect">
             <a:avLst/>
@@ -3329,7 +2998,7 @@
           <a:bodyPr vert="horz" lIns="91440" tIns="45720" rIns="91440" bIns="45720" rtlCol="0" anchor="ctr"/>
           <a:lstStyle>
             <a:lvl1pPr algn="l">
-              <a:defRPr sz="1200">
+              <a:defRPr sz="3150">
                 <a:solidFill>
                   <a:schemeClr val="tx1">
                     <a:tint val="82000"/>
@@ -3341,7 +3010,7 @@
           <a:p>
             <a:fld id="{7744C1DF-C9B9-4C32-9FF4-A604B0E589BF}" type="datetimeFigureOut">
               <a:rPr lang="en-US" smtClean="0"/>
-              <a:t>6/5/2026</a:t>
+              <a:t>6/6/2026</a:t>
             </a:fld>
             <a:endParaRPr lang="en-US"/>
           </a:p>
@@ -3349,13 +3018,7 @@
       </p:sp>
       <p:sp>
         <p:nvSpPr>
-          <p:cNvPr id="5" name="Footer Placeholder 4">
-            <a:extLst>
-              <a:ext uri="{FF2B5EF4-FFF2-40B4-BE49-F238E27FC236}">
-                <a16:creationId xmlns:a16="http://schemas.microsoft.com/office/drawing/2014/main" id="{8FA06ED4-CA14-F52B-49CB-0C5D72393A40}"/>
-              </a:ext>
-            </a:extLst>
-          </p:cNvPr>
+          <p:cNvPr id="5" name="Footer Placeholder 4"/>
           <p:cNvSpPr>
             <a:spLocks noGrp="1"/>
           </p:cNvSpPr>
@@ -3365,8 +3028,8 @@
         </p:nvSpPr>
         <p:spPr>
           <a:xfrm>
-            <a:off x="4038600" y="6356350"/>
-            <a:ext cx="4114800" cy="365125"/>
+            <a:off x="14310212" y="16683949"/>
+            <a:ext cx="14580215" cy="958369"/>
           </a:xfrm>
           <a:prstGeom prst="rect">
             <a:avLst/>
@@ -3376,7 +3039,7 @@
           <a:bodyPr vert="horz" lIns="91440" tIns="45720" rIns="91440" bIns="45720" rtlCol="0" anchor="ctr"/>
           <a:lstStyle>
             <a:lvl1pPr algn="ctr">
-              <a:defRPr sz="1200">
+              <a:defRPr sz="3150">
                 <a:solidFill>
                   <a:schemeClr val="tx1">
                     <a:tint val="82000"/>
@@ -3392,13 +3055,7 @@
       </p:sp>
       <p:sp>
         <p:nvSpPr>
-          <p:cNvPr id="6" name="Slide Number Placeholder 5">
-            <a:extLst>
-              <a:ext uri="{FF2B5EF4-FFF2-40B4-BE49-F238E27FC236}">
-                <a16:creationId xmlns:a16="http://schemas.microsoft.com/office/drawing/2014/main" id="{23D14B23-7402-6B3F-4FB5-A61ADAA838A2}"/>
-              </a:ext>
-            </a:extLst>
-          </p:cNvPr>
+          <p:cNvPr id="6" name="Slide Number Placeholder 5"/>
           <p:cNvSpPr>
             <a:spLocks noGrp="1"/>
           </p:cNvSpPr>
@@ -3408,8 +3065,8 @@
         </p:nvSpPr>
         <p:spPr>
           <a:xfrm>
-            <a:off x="8610600" y="6356350"/>
-            <a:ext cx="2743200" cy="365125"/>
+            <a:off x="30510450" y="16683949"/>
+            <a:ext cx="9720144" cy="958369"/>
           </a:xfrm>
           <a:prstGeom prst="rect">
             <a:avLst/>
@@ -3419,7 +3076,7 @@
           <a:bodyPr vert="horz" lIns="91440" tIns="45720" rIns="91440" bIns="45720" rtlCol="0" anchor="ctr"/>
           <a:lstStyle>
             <a:lvl1pPr algn="r">
-              <a:defRPr sz="1200">
+              <a:defRPr sz="3150">
                 <a:solidFill>
                   <a:schemeClr val="tx1">
                     <a:tint val="82000"/>
@@ -3440,27 +3097,27 @@
     </p:spTree>
     <p:extLst>
       <p:ext uri="{BB962C8B-B14F-4D97-AF65-F5344CB8AC3E}">
-        <p14:creationId xmlns:p14="http://schemas.microsoft.com/office/powerpoint/2010/main" val="4162721264"/>
+        <p14:creationId xmlns:p14="http://schemas.microsoft.com/office/powerpoint/2010/main" val="353066365"/>
       </p:ext>
     </p:extLst>
   </p:cSld>
   <p:clrMap bg1="lt1" tx1="dk1" bg2="lt2" tx2="dk2" accent1="accent1" accent2="accent2" accent3="accent3" accent4="accent4" accent5="accent5" accent6="accent6" hlink="hlink" folHlink="folHlink"/>
   <p:sldLayoutIdLst>
-    <p:sldLayoutId id="2147483649" r:id="rId1"/>
-    <p:sldLayoutId id="2147483650" r:id="rId2"/>
-    <p:sldLayoutId id="2147483651" r:id="rId3"/>
-    <p:sldLayoutId id="2147483652" r:id="rId4"/>
-    <p:sldLayoutId id="2147483653" r:id="rId5"/>
-    <p:sldLayoutId id="2147483654" r:id="rId6"/>
-    <p:sldLayoutId id="2147483655" r:id="rId7"/>
-    <p:sldLayoutId id="2147483656" r:id="rId8"/>
-    <p:sldLayoutId id="2147483657" r:id="rId9"/>
-    <p:sldLayoutId id="2147483658" r:id="rId10"/>
-    <p:sldLayoutId id="2147483659" r:id="rId11"/>
+    <p:sldLayoutId id="2147483709" r:id="rId1"/>
+    <p:sldLayoutId id="2147483710" r:id="rId2"/>
+    <p:sldLayoutId id="2147483711" r:id="rId3"/>
+    <p:sldLayoutId id="2147483712" r:id="rId4"/>
+    <p:sldLayoutId id="2147483713" r:id="rId5"/>
+    <p:sldLayoutId id="2147483714" r:id="rId6"/>
+    <p:sldLayoutId id="2147483715" r:id="rId7"/>
+    <p:sldLayoutId id="2147483716" r:id="rId8"/>
+    <p:sldLayoutId id="2147483717" r:id="rId9"/>
+    <p:sldLayoutId id="2147483718" r:id="rId10"/>
+    <p:sldLayoutId id="2147483719" r:id="rId11"/>
   </p:sldLayoutIdLst>
   <p:txStyles>
     <p:titleStyle>
-      <a:lvl1pPr algn="l" defTabSz="914400" rtl="0" eaLnBrk="1" latinLnBrk="0" hangingPunct="1">
+      <a:lvl1pPr algn="l" defTabSz="2400117" rtl="0" eaLnBrk="1" latinLnBrk="0" hangingPunct="1">
         <a:lnSpc>
           <a:spcPct val="90000"/>
         </a:lnSpc>
@@ -3468,7 +3125,7 @@
           <a:spcPct val="0"/>
         </a:spcBef>
         <a:buNone/>
-        <a:defRPr sz="4400" kern="1200">
+        <a:defRPr sz="11549" kern="1200">
           <a:solidFill>
             <a:schemeClr val="tx1"/>
           </a:solidFill>
@@ -3479,16 +3136,16 @@
       </a:lvl1pPr>
     </p:titleStyle>
     <p:bodyStyle>
-      <a:lvl1pPr marL="228600" indent="-228600" algn="l" defTabSz="914400" rtl="0" eaLnBrk="1" latinLnBrk="0" hangingPunct="1">
+      <a:lvl1pPr marL="600029" indent="-600029" algn="l" defTabSz="2400117" rtl="0" eaLnBrk="1" latinLnBrk="0" hangingPunct="1">
         <a:lnSpc>
           <a:spcPct val="90000"/>
         </a:lnSpc>
         <a:spcBef>
-          <a:spcPts val="1000"/>
+          <a:spcPts val="2625"/>
         </a:spcBef>
         <a:buFont typeface="Arial" panose="020B0604020202020204" pitchFamily="34" charset="0"/>
         <a:buChar char="•"/>
-        <a:defRPr sz="2800" kern="1200">
+        <a:defRPr sz="7349" kern="1200">
           <a:solidFill>
             <a:schemeClr val="tx1"/>
           </a:solidFill>
@@ -3497,16 +3154,16 @@
           <a:cs typeface="+mn-cs"/>
         </a:defRPr>
       </a:lvl1pPr>
-      <a:lvl2pPr marL="685800" indent="-228600" algn="l" defTabSz="914400" rtl="0" eaLnBrk="1" latinLnBrk="0" hangingPunct="1">
+      <a:lvl2pPr marL="1800088" indent="-600029" algn="l" defTabSz="2400117" rtl="0" eaLnBrk="1" latinLnBrk="0" hangingPunct="1">
         <a:lnSpc>
           <a:spcPct val="90000"/>
         </a:lnSpc>
         <a:spcBef>
-          <a:spcPts val="500"/>
+          <a:spcPts val="1312"/>
         </a:spcBef>
         <a:buFont typeface="Arial" panose="020B0604020202020204" pitchFamily="34" charset="0"/>
         <a:buChar char="•"/>
-        <a:defRPr sz="2400" kern="1200">
+        <a:defRPr sz="6300" kern="1200">
           <a:solidFill>
             <a:schemeClr val="tx1"/>
           </a:solidFill>
@@ -3515,16 +3172,16 @@
           <a:cs typeface="+mn-cs"/>
         </a:defRPr>
       </a:lvl2pPr>
-      <a:lvl3pPr marL="1143000" indent="-228600" algn="l" defTabSz="914400" rtl="0" eaLnBrk="1" latinLnBrk="0" hangingPunct="1">
+      <a:lvl3pPr marL="3000146" indent="-600029" algn="l" defTabSz="2400117" rtl="0" eaLnBrk="1" latinLnBrk="0" hangingPunct="1">
         <a:lnSpc>
           <a:spcPct val="90000"/>
         </a:lnSpc>
         <a:spcBef>
-          <a:spcPts val="500"/>
+          <a:spcPts val="1312"/>
         </a:spcBef>
         <a:buFont typeface="Arial" panose="020B0604020202020204" pitchFamily="34" charset="0"/>
         <a:buChar char="•"/>
-        <a:defRPr sz="2000" kern="1200">
+        <a:defRPr sz="5250" kern="1200">
           <a:solidFill>
             <a:schemeClr val="tx1"/>
           </a:solidFill>
@@ -3533,16 +3190,16 @@
           <a:cs typeface="+mn-cs"/>
         </a:defRPr>
       </a:lvl3pPr>
-      <a:lvl4pPr marL="1600200" indent="-228600" algn="l" defTabSz="914400" rtl="0" eaLnBrk="1" latinLnBrk="0" hangingPunct="1">
+      <a:lvl4pPr marL="4200205" indent="-600029" algn="l" defTabSz="2400117" rtl="0" eaLnBrk="1" latinLnBrk="0" hangingPunct="1">
         <a:lnSpc>
           <a:spcPct val="90000"/>
         </a:lnSpc>
         <a:spcBef>
-          <a:spcPts val="500"/>
+          <a:spcPts val="1312"/>
         </a:spcBef>
         <a:buFont typeface="Arial" panose="020B0604020202020204" pitchFamily="34" charset="0"/>
         <a:buChar char="•"/>
-        <a:defRPr sz="1800" kern="1200">
+        <a:defRPr sz="4725" kern="1200">
           <a:solidFill>
             <a:schemeClr val="tx1"/>
           </a:solidFill>
@@ -3551,16 +3208,16 @@
           <a:cs typeface="+mn-cs"/>
         </a:defRPr>
       </a:lvl4pPr>
-      <a:lvl5pPr marL="2057400" indent="-228600" algn="l" defTabSz="914400" rtl="0" eaLnBrk="1" latinLnBrk="0" hangingPunct="1">
+      <a:lvl5pPr marL="5400264" indent="-600029" algn="l" defTabSz="2400117" rtl="0" eaLnBrk="1" latinLnBrk="0" hangingPunct="1">
         <a:lnSpc>
           <a:spcPct val="90000"/>
         </a:lnSpc>
         <a:spcBef>
-          <a:spcPts val="500"/>
+          <a:spcPts val="1312"/>
         </a:spcBef>
         <a:buFont typeface="Arial" panose="020B0604020202020204" pitchFamily="34" charset="0"/>
         <a:buChar char="•"/>
-        <a:defRPr sz="1800" kern="1200">
+        <a:defRPr sz="4725" kern="1200">
           <a:solidFill>
             <a:schemeClr val="tx1"/>
           </a:solidFill>
@@ -3569,16 +3226,16 @@
           <a:cs typeface="+mn-cs"/>
         </a:defRPr>
       </a:lvl5pPr>
-      <a:lvl6pPr marL="2514600" indent="-228600" algn="l" defTabSz="914400" rtl="0" eaLnBrk="1" latinLnBrk="0" hangingPunct="1">
+      <a:lvl6pPr marL="6600322" indent="-600029" algn="l" defTabSz="2400117" rtl="0" eaLnBrk="1" latinLnBrk="0" hangingPunct="1">
         <a:lnSpc>
           <a:spcPct val="90000"/>
         </a:lnSpc>
         <a:spcBef>
-          <a:spcPts val="500"/>
+          <a:spcPts val="1312"/>
         </a:spcBef>
         <a:buFont typeface="Arial" panose="020B0604020202020204" pitchFamily="34" charset="0"/>
         <a:buChar char="•"/>
-        <a:defRPr sz="1800" kern="1200">
+        <a:defRPr sz="4725" kern="1200">
           <a:solidFill>
             <a:schemeClr val="tx1"/>
           </a:solidFill>
@@ -3587,16 +3244,16 @@
           <a:cs typeface="+mn-cs"/>
         </a:defRPr>
       </a:lvl6pPr>
-      <a:lvl7pPr marL="2971800" indent="-228600" algn="l" defTabSz="914400" rtl="0" eaLnBrk="1" latinLnBrk="0" hangingPunct="1">
+      <a:lvl7pPr marL="7800381" indent="-600029" algn="l" defTabSz="2400117" rtl="0" eaLnBrk="1" latinLnBrk="0" hangingPunct="1">
         <a:lnSpc>
           <a:spcPct val="90000"/>
         </a:lnSpc>
         <a:spcBef>
-          <a:spcPts val="500"/>
+          <a:spcPts val="1312"/>
         </a:spcBef>
         <a:buFont typeface="Arial" panose="020B0604020202020204" pitchFamily="34" charset="0"/>
         <a:buChar char="•"/>
-        <a:defRPr sz="1800" kern="1200">
+        <a:defRPr sz="4725" kern="1200">
           <a:solidFill>
             <a:schemeClr val="tx1"/>
           </a:solidFill>
@@ -3605,16 +3262,16 @@
           <a:cs typeface="+mn-cs"/>
         </a:defRPr>
       </a:lvl7pPr>
-      <a:lvl8pPr marL="3429000" indent="-228600" algn="l" defTabSz="914400" rtl="0" eaLnBrk="1" latinLnBrk="0" hangingPunct="1">
+      <a:lvl8pPr marL="9000439" indent="-600029" algn="l" defTabSz="2400117" rtl="0" eaLnBrk="1" latinLnBrk="0" hangingPunct="1">
         <a:lnSpc>
           <a:spcPct val="90000"/>
         </a:lnSpc>
         <a:spcBef>
-          <a:spcPts val="500"/>
+          <a:spcPts val="1312"/>
         </a:spcBef>
         <a:buFont typeface="Arial" panose="020B0604020202020204" pitchFamily="34" charset="0"/>
         <a:buChar char="•"/>
-        <a:defRPr sz="1800" kern="1200">
+        <a:defRPr sz="4725" kern="1200">
           <a:solidFill>
             <a:schemeClr val="tx1"/>
           </a:solidFill>
@@ -3623,16 +3280,16 @@
           <a:cs typeface="+mn-cs"/>
         </a:defRPr>
       </a:lvl8pPr>
-      <a:lvl9pPr marL="3886200" indent="-228600" algn="l" defTabSz="914400" rtl="0" eaLnBrk="1" latinLnBrk="0" hangingPunct="1">
+      <a:lvl9pPr marL="10200498" indent="-600029" algn="l" defTabSz="2400117" rtl="0" eaLnBrk="1" latinLnBrk="0" hangingPunct="1">
         <a:lnSpc>
           <a:spcPct val="90000"/>
         </a:lnSpc>
         <a:spcBef>
-          <a:spcPts val="500"/>
+          <a:spcPts val="1312"/>
         </a:spcBef>
         <a:buFont typeface="Arial" panose="020B0604020202020204" pitchFamily="34" charset="0"/>
         <a:buChar char="•"/>
-        <a:defRPr sz="1800" kern="1200">
+        <a:defRPr sz="4725" kern="1200">
           <a:solidFill>
             <a:schemeClr val="tx1"/>
           </a:solidFill>
@@ -3646,8 +3303,8 @@
       <a:defPPr>
         <a:defRPr lang="en-US"/>
       </a:defPPr>
-      <a:lvl1pPr marL="0" algn="l" defTabSz="914400" rtl="0" eaLnBrk="1" latinLnBrk="0" hangingPunct="1">
-        <a:defRPr sz="1800" kern="1200">
+      <a:lvl1pPr marL="0" algn="l" defTabSz="2400117" rtl="0" eaLnBrk="1" latinLnBrk="0" hangingPunct="1">
+        <a:defRPr sz="4725" kern="1200">
           <a:solidFill>
             <a:schemeClr val="tx1"/>
           </a:solidFill>
@@ -3656,8 +3313,8 @@
           <a:cs typeface="+mn-cs"/>
         </a:defRPr>
       </a:lvl1pPr>
-      <a:lvl2pPr marL="457200" algn="l" defTabSz="914400" rtl="0" eaLnBrk="1" latinLnBrk="0" hangingPunct="1">
-        <a:defRPr sz="1800" kern="1200">
+      <a:lvl2pPr marL="1200059" algn="l" defTabSz="2400117" rtl="0" eaLnBrk="1" latinLnBrk="0" hangingPunct="1">
+        <a:defRPr sz="4725" kern="1200">
           <a:solidFill>
             <a:schemeClr val="tx1"/>
           </a:solidFill>
@@ -3666,8 +3323,8 @@
           <a:cs typeface="+mn-cs"/>
         </a:defRPr>
       </a:lvl2pPr>
-      <a:lvl3pPr marL="914400" algn="l" defTabSz="914400" rtl="0" eaLnBrk="1" latinLnBrk="0" hangingPunct="1">
-        <a:defRPr sz="1800" kern="1200">
+      <a:lvl3pPr marL="2400117" algn="l" defTabSz="2400117" rtl="0" eaLnBrk="1" latinLnBrk="0" hangingPunct="1">
+        <a:defRPr sz="4725" kern="1200">
           <a:solidFill>
             <a:schemeClr val="tx1"/>
           </a:solidFill>
@@ -3676,8 +3333,8 @@
           <a:cs typeface="+mn-cs"/>
         </a:defRPr>
       </a:lvl3pPr>
-      <a:lvl4pPr marL="1371600" algn="l" defTabSz="914400" rtl="0" eaLnBrk="1" latinLnBrk="0" hangingPunct="1">
-        <a:defRPr sz="1800" kern="1200">
+      <a:lvl4pPr marL="3600176" algn="l" defTabSz="2400117" rtl="0" eaLnBrk="1" latinLnBrk="0" hangingPunct="1">
+        <a:defRPr sz="4725" kern="1200">
           <a:solidFill>
             <a:schemeClr val="tx1"/>
           </a:solidFill>
@@ -3686,8 +3343,8 @@
           <a:cs typeface="+mn-cs"/>
         </a:defRPr>
       </a:lvl4pPr>
-      <a:lvl5pPr marL="1828800" algn="l" defTabSz="914400" rtl="0" eaLnBrk="1" latinLnBrk="0" hangingPunct="1">
-        <a:defRPr sz="1800" kern="1200">
+      <a:lvl5pPr marL="4800234" algn="l" defTabSz="2400117" rtl="0" eaLnBrk="1" latinLnBrk="0" hangingPunct="1">
+        <a:defRPr sz="4725" kern="1200">
           <a:solidFill>
             <a:schemeClr val="tx1"/>
           </a:solidFill>
@@ -3696,8 +3353,8 @@
           <a:cs typeface="+mn-cs"/>
         </a:defRPr>
       </a:lvl5pPr>
-      <a:lvl6pPr marL="2286000" algn="l" defTabSz="914400" rtl="0" eaLnBrk="1" latinLnBrk="0" hangingPunct="1">
-        <a:defRPr sz="1800" kern="1200">
+      <a:lvl6pPr marL="6000293" algn="l" defTabSz="2400117" rtl="0" eaLnBrk="1" latinLnBrk="0" hangingPunct="1">
+        <a:defRPr sz="4725" kern="1200">
           <a:solidFill>
             <a:schemeClr val="tx1"/>
           </a:solidFill>
@@ -3706,8 +3363,8 @@
           <a:cs typeface="+mn-cs"/>
         </a:defRPr>
       </a:lvl6pPr>
-      <a:lvl7pPr marL="2743200" algn="l" defTabSz="914400" rtl="0" eaLnBrk="1" latinLnBrk="0" hangingPunct="1">
-        <a:defRPr sz="1800" kern="1200">
+      <a:lvl7pPr marL="7200351" algn="l" defTabSz="2400117" rtl="0" eaLnBrk="1" latinLnBrk="0" hangingPunct="1">
+        <a:defRPr sz="4725" kern="1200">
           <a:solidFill>
             <a:schemeClr val="tx1"/>
           </a:solidFill>
@@ -3716,8 +3373,8 @@
           <a:cs typeface="+mn-cs"/>
         </a:defRPr>
       </a:lvl7pPr>
-      <a:lvl8pPr marL="3200400" algn="l" defTabSz="914400" rtl="0" eaLnBrk="1" latinLnBrk="0" hangingPunct="1">
-        <a:defRPr sz="1800" kern="1200">
+      <a:lvl8pPr marL="8400410" algn="l" defTabSz="2400117" rtl="0" eaLnBrk="1" latinLnBrk="0" hangingPunct="1">
+        <a:defRPr sz="4725" kern="1200">
           <a:solidFill>
             <a:schemeClr val="tx1"/>
           </a:solidFill>
@@ -3726,8 +3383,8 @@
           <a:cs typeface="+mn-cs"/>
         </a:defRPr>
       </a:lvl8pPr>
-      <a:lvl9pPr marL="3657600" algn="l" defTabSz="914400" rtl="0" eaLnBrk="1" latinLnBrk="0" hangingPunct="1">
-        <a:defRPr sz="1800" kern="1200">
+      <a:lvl9pPr marL="9600468" algn="l" defTabSz="2400117" rtl="0" eaLnBrk="1" latinLnBrk="0" hangingPunct="1">
+        <a:defRPr sz="4725" kern="1200">
           <a:solidFill>
             <a:schemeClr val="tx1"/>
           </a:solidFill>
@@ -3854,7 +3511,7 @@
         </p:nvCxnSpPr>
         <p:spPr>
           <a:xfrm>
-            <a:off x="265378" y="4699538"/>
+            <a:off x="6730728" y="5593720"/>
             <a:ext cx="5601694" cy="0"/>
           </a:xfrm>
           <a:prstGeom prst="line">
@@ -3890,7 +3547,7 @@
         </p:nvSpPr>
         <p:spPr>
           <a:xfrm>
-            <a:off x="5382982" y="3743279"/>
+            <a:off x="11848337" y="4637461"/>
             <a:ext cx="370541" cy="940332"/>
           </a:xfrm>
           <a:prstGeom prst="rect">
@@ -3938,7 +3595,7 @@
         </p:nvCxnSpPr>
         <p:spPr>
           <a:xfrm>
-            <a:off x="4129879" y="4482487"/>
+            <a:off x="10595234" y="5376669"/>
             <a:ext cx="608107" cy="0"/>
           </a:xfrm>
           <a:prstGeom prst="line">
@@ -3980,7 +3637,7 @@
         </p:nvSpPr>
         <p:spPr>
           <a:xfrm>
-            <a:off x="4935451" y="4519066"/>
+            <a:off x="11400801" y="5413248"/>
             <a:ext cx="168298" cy="168298"/>
           </a:xfrm>
           <a:prstGeom prst="ellipse">
@@ -4026,7 +3683,7 @@
         </p:nvSpPr>
         <p:spPr>
           <a:xfrm>
-            <a:off x="399460" y="4221005"/>
+            <a:off x="6864815" y="5115192"/>
             <a:ext cx="464093" cy="464093"/>
           </a:xfrm>
           <a:prstGeom prst="ellipse">
@@ -4072,7 +3729,7 @@
         </p:nvSpPr>
         <p:spPr>
           <a:xfrm>
-            <a:off x="4835250" y="4327699"/>
+            <a:off x="11300605" y="5221886"/>
             <a:ext cx="355691" cy="355691"/>
           </a:xfrm>
           <a:prstGeom prst="ellipse">
@@ -4124,7 +3781,7 @@
         </p:nvCxnSpPr>
         <p:spPr>
           <a:xfrm flipV="1">
-            <a:off x="5003558" y="4331666"/>
+            <a:off x="11468908" y="5225853"/>
             <a:ext cx="0" cy="178775"/>
           </a:xfrm>
           <a:prstGeom prst="straightConnector1">
@@ -4169,7 +3826,7 @@
         </p:nvCxnSpPr>
         <p:spPr>
           <a:xfrm rot="-1200000" flipH="1" flipV="1">
-            <a:off x="4867463" y="4411596"/>
+            <a:off x="11332818" y="5305778"/>
             <a:ext cx="91841" cy="146290"/>
           </a:xfrm>
           <a:prstGeom prst="straightConnector1">
@@ -4214,7 +3871,7 @@
         </p:nvCxnSpPr>
         <p:spPr>
           <a:xfrm rot="1200000" flipV="1">
-            <a:off x="5108254" y="4376462"/>
+            <a:off x="11573604" y="5270649"/>
             <a:ext cx="0" cy="178775"/>
           </a:xfrm>
           <a:prstGeom prst="straightConnector1">
@@ -4257,7 +3914,7 @@
         </p:nvSpPr>
         <p:spPr>
           <a:xfrm>
-            <a:off x="3647429" y="4327699"/>
+            <a:off x="10112784" y="5221886"/>
             <a:ext cx="355691" cy="355691"/>
           </a:xfrm>
           <a:prstGeom prst="ellipse">
@@ -4307,7 +3964,7 @@
         </p:nvSpPr>
         <p:spPr>
           <a:xfrm>
-            <a:off x="261572" y="3960239"/>
+            <a:off x="6726927" y="4854426"/>
             <a:ext cx="739299" cy="739299"/>
           </a:xfrm>
           <a:prstGeom prst="ellipse">
@@ -4359,7 +4016,7 @@
         </p:nvCxnSpPr>
         <p:spPr>
           <a:xfrm flipH="1" flipV="1">
-            <a:off x="615318" y="3976142"/>
+            <a:off x="7080668" y="4870324"/>
             <a:ext cx="4420" cy="234000"/>
           </a:xfrm>
           <a:prstGeom prst="straightConnector1">
@@ -4404,7 +4061,7 @@
         </p:nvCxnSpPr>
         <p:spPr>
           <a:xfrm rot="3000000" flipH="1" flipV="1">
-            <a:off x="863358" y="4099613"/>
+            <a:off x="7328708" y="4993795"/>
             <a:ext cx="4420" cy="198000"/>
           </a:xfrm>
           <a:prstGeom prst="straightConnector1">
@@ -4449,7 +4106,7 @@
         </p:nvCxnSpPr>
         <p:spPr>
           <a:xfrm rot="-3000000" flipH="1" flipV="1">
-            <a:off x="397249" y="4107565"/>
+            <a:off x="6862599" y="5001747"/>
             <a:ext cx="4420" cy="198000"/>
           </a:xfrm>
           <a:prstGeom prst="straightConnector1">
@@ -4494,7 +4151,7 @@
         </p:nvCxnSpPr>
         <p:spPr>
           <a:xfrm>
-            <a:off x="261572" y="6500999"/>
+            <a:off x="6726922" y="7395181"/>
             <a:ext cx="5601694" cy="0"/>
           </a:xfrm>
           <a:prstGeom prst="line">
@@ -4530,7 +4187,7 @@
         </p:nvSpPr>
         <p:spPr>
           <a:xfrm>
-            <a:off x="5379176" y="5544740"/>
+            <a:off x="11844531" y="6438922"/>
             <a:ext cx="370541" cy="940332"/>
           </a:xfrm>
           <a:prstGeom prst="rect">
@@ -4576,7 +4233,7 @@
         </p:nvSpPr>
         <p:spPr>
           <a:xfrm>
-            <a:off x="2044041" y="5314154"/>
+            <a:off x="8509396" y="6208336"/>
             <a:ext cx="1786965" cy="985828"/>
           </a:xfrm>
           <a:custGeom>
@@ -4663,7 +4320,7 @@
         </p:nvCxnSpPr>
         <p:spPr>
           <a:xfrm>
-            <a:off x="3831006" y="6283948"/>
+            <a:off x="10296356" y="7178130"/>
             <a:ext cx="903174" cy="0"/>
           </a:xfrm>
           <a:prstGeom prst="line">
@@ -4699,12 +4356,14 @@
               </a:ext>
             </a:extLst>
           </p:cNvPr>
-          <p:cNvCxnSpPr/>
+          <p:cNvCxnSpPr>
+            <a:cxnSpLocks/>
+          </p:cNvCxnSpPr>
           <p:nvPr/>
         </p:nvCxnSpPr>
         <p:spPr>
           <a:xfrm>
-            <a:off x="4129879" y="6188792"/>
+            <a:off x="10595229" y="7082974"/>
             <a:ext cx="508884" cy="0"/>
           </a:xfrm>
           <a:prstGeom prst="straightConnector1">
@@ -4749,7 +4408,7 @@
         </p:nvCxnSpPr>
         <p:spPr>
           <a:xfrm rot="10800000">
-            <a:off x="4129879" y="6365798"/>
+            <a:off x="10595229" y="7259980"/>
             <a:ext cx="508884" cy="0"/>
           </a:xfrm>
           <a:prstGeom prst="straightConnector1">
@@ -4795,7 +4454,7 @@
         </p:nvCxnSpPr>
         <p:spPr>
           <a:xfrm flipH="1" flipV="1">
-            <a:off x="1466194" y="6283948"/>
+            <a:off x="7931549" y="7178130"/>
             <a:ext cx="577847" cy="16034"/>
           </a:xfrm>
           <a:prstGeom prst="straightConnector1">
@@ -4837,7 +4496,7 @@
         </p:nvSpPr>
         <p:spPr>
           <a:xfrm>
-            <a:off x="4831444" y="6129160"/>
+            <a:off x="11296799" y="7023347"/>
             <a:ext cx="355691" cy="355691"/>
           </a:xfrm>
           <a:prstGeom prst="ellipse">
@@ -4892,7 +4551,7 @@
         </p:nvSpPr>
         <p:spPr>
           <a:xfrm>
-            <a:off x="3643623" y="6129160"/>
+            <a:off x="10108978" y="7023347"/>
             <a:ext cx="355691" cy="355691"/>
           </a:xfrm>
           <a:prstGeom prst="ellipse">
@@ -4942,7 +4601,7 @@
         </p:nvSpPr>
         <p:spPr>
           <a:xfrm>
-            <a:off x="1100139" y="6129159"/>
+            <a:off x="7565494" y="7023346"/>
             <a:ext cx="355691" cy="355691"/>
           </a:xfrm>
           <a:prstGeom prst="ellipse">
@@ -4992,7 +4651,7 @@
         </p:nvSpPr>
         <p:spPr>
           <a:xfrm>
-            <a:off x="257766" y="5761700"/>
+            <a:off x="6723121" y="6655887"/>
             <a:ext cx="739299" cy="739299"/>
           </a:xfrm>
           <a:prstGeom prst="ellipse">
@@ -5049,7 +4708,7 @@
         </p:nvCxnSpPr>
         <p:spPr>
           <a:xfrm>
-            <a:off x="272990" y="1510510"/>
+            <a:off x="917889" y="5593720"/>
             <a:ext cx="5601694" cy="0"/>
           </a:xfrm>
           <a:prstGeom prst="line">
@@ -5085,7 +4744,7 @@
         </p:nvSpPr>
         <p:spPr>
           <a:xfrm>
-            <a:off x="2774973" y="554251"/>
+            <a:off x="3419877" y="4637461"/>
             <a:ext cx="370541" cy="940332"/>
           </a:xfrm>
           <a:prstGeom prst="rect">
@@ -5133,7 +4792,7 @@
         </p:nvCxnSpPr>
         <p:spPr>
           <a:xfrm>
-            <a:off x="4137491" y="1293459"/>
+            <a:off x="4782395" y="5376669"/>
             <a:ext cx="608107" cy="0"/>
           </a:xfrm>
           <a:prstGeom prst="line">
@@ -5175,7 +4834,7 @@
         </p:nvSpPr>
         <p:spPr>
           <a:xfrm>
-            <a:off x="4943063" y="1330038"/>
+            <a:off x="5587962" y="5413248"/>
             <a:ext cx="168298" cy="168298"/>
           </a:xfrm>
           <a:prstGeom prst="ellipse">
@@ -5221,7 +4880,7 @@
         </p:nvSpPr>
         <p:spPr>
           <a:xfrm>
-            <a:off x="407072" y="1031977"/>
+            <a:off x="1051976" y="5115192"/>
             <a:ext cx="464093" cy="464093"/>
           </a:xfrm>
           <a:prstGeom prst="ellipse">
@@ -5267,7 +4926,7 @@
         </p:nvSpPr>
         <p:spPr>
           <a:xfrm>
-            <a:off x="4842862" y="1138671"/>
+            <a:off x="5487766" y="5221886"/>
             <a:ext cx="355691" cy="355691"/>
           </a:xfrm>
           <a:prstGeom prst="ellipse">
@@ -5319,7 +4978,7 @@
         </p:nvCxnSpPr>
         <p:spPr>
           <a:xfrm flipV="1">
-            <a:off x="5011170" y="1142638"/>
+            <a:off x="5656069" y="5225853"/>
             <a:ext cx="0" cy="178775"/>
           </a:xfrm>
           <a:prstGeom prst="straightConnector1">
@@ -5364,7 +5023,7 @@
         </p:nvCxnSpPr>
         <p:spPr>
           <a:xfrm rot="-1200000" flipH="1" flipV="1">
-            <a:off x="4875075" y="1222568"/>
+            <a:off x="5519979" y="5305778"/>
             <a:ext cx="91841" cy="146290"/>
           </a:xfrm>
           <a:prstGeom prst="straightConnector1">
@@ -5409,7 +5068,7 @@
         </p:nvCxnSpPr>
         <p:spPr>
           <a:xfrm rot="1200000" flipV="1">
-            <a:off x="5115866" y="1187434"/>
+            <a:off x="5760765" y="5270649"/>
             <a:ext cx="0" cy="178775"/>
           </a:xfrm>
           <a:prstGeom prst="straightConnector1">
@@ -5452,7 +5111,7 @@
         </p:nvSpPr>
         <p:spPr>
           <a:xfrm>
-            <a:off x="3655041" y="1138671"/>
+            <a:off x="4299945" y="5221886"/>
             <a:ext cx="355691" cy="355691"/>
           </a:xfrm>
           <a:prstGeom prst="ellipse">
@@ -5502,7 +5161,7 @@
         </p:nvSpPr>
         <p:spPr>
           <a:xfrm>
-            <a:off x="269184" y="771211"/>
+            <a:off x="914088" y="4854426"/>
             <a:ext cx="739299" cy="739299"/>
           </a:xfrm>
           <a:prstGeom prst="ellipse">
@@ -5554,7 +5213,7 @@
         </p:nvCxnSpPr>
         <p:spPr>
           <a:xfrm flipH="1" flipV="1">
-            <a:off x="622930" y="787114"/>
+            <a:off x="1267829" y="4870324"/>
             <a:ext cx="4420" cy="234000"/>
           </a:xfrm>
           <a:prstGeom prst="straightConnector1">
@@ -5599,7 +5258,7 @@
         </p:nvCxnSpPr>
         <p:spPr>
           <a:xfrm rot="3000000" flipH="1" flipV="1">
-            <a:off x="870970" y="910585"/>
+            <a:off x="1515869" y="4993795"/>
             <a:ext cx="4420" cy="198000"/>
           </a:xfrm>
           <a:prstGeom prst="straightConnector1">
@@ -5644,7 +5303,7 @@
         </p:nvCxnSpPr>
         <p:spPr>
           <a:xfrm rot="-3000000" flipH="1" flipV="1">
-            <a:off x="404861" y="918537"/>
+            <a:off x="1049760" y="5001747"/>
             <a:ext cx="4420" cy="198000"/>
           </a:xfrm>
           <a:prstGeom prst="straightConnector1">
@@ -5689,7 +5348,7 @@
         </p:nvCxnSpPr>
         <p:spPr>
           <a:xfrm>
-            <a:off x="269184" y="3311971"/>
+            <a:off x="914083" y="7395181"/>
             <a:ext cx="5601694" cy="0"/>
           </a:xfrm>
           <a:prstGeom prst="line">
@@ -5725,7 +5384,7 @@
         </p:nvSpPr>
         <p:spPr>
           <a:xfrm>
-            <a:off x="2771167" y="2355712"/>
+            <a:off x="3416071" y="6438922"/>
             <a:ext cx="370541" cy="940332"/>
           </a:xfrm>
           <a:prstGeom prst="rect">
@@ -5771,7 +5430,7 @@
         </p:nvSpPr>
         <p:spPr>
           <a:xfrm>
-            <a:off x="2051653" y="2125126"/>
+            <a:off x="2696557" y="6208336"/>
             <a:ext cx="1786965" cy="985828"/>
           </a:xfrm>
           <a:custGeom>
@@ -5858,7 +5517,7 @@
         </p:nvCxnSpPr>
         <p:spPr>
           <a:xfrm>
-            <a:off x="3838618" y="3094920"/>
+            <a:off x="4483517" y="7178130"/>
             <a:ext cx="903174" cy="0"/>
           </a:xfrm>
           <a:prstGeom prst="line">
@@ -5894,12 +5553,14 @@
               </a:ext>
             </a:extLst>
           </p:cNvPr>
-          <p:cNvCxnSpPr/>
+          <p:cNvCxnSpPr>
+            <a:cxnSpLocks/>
+          </p:cNvCxnSpPr>
           <p:nvPr/>
         </p:nvCxnSpPr>
         <p:spPr>
           <a:xfrm>
-            <a:off x="4137491" y="2999764"/>
+            <a:off x="4782390" y="7082974"/>
             <a:ext cx="508884" cy="0"/>
           </a:xfrm>
           <a:prstGeom prst="straightConnector1">
@@ -5944,7 +5605,7 @@
         </p:nvCxnSpPr>
         <p:spPr>
           <a:xfrm rot="10800000">
-            <a:off x="4137491" y="3176770"/>
+            <a:off x="4782390" y="7259980"/>
             <a:ext cx="508884" cy="0"/>
           </a:xfrm>
           <a:prstGeom prst="straightConnector1">
@@ -5990,7 +5651,7 @@
         </p:nvCxnSpPr>
         <p:spPr>
           <a:xfrm flipH="1" flipV="1">
-            <a:off x="1473806" y="3094920"/>
+            <a:off x="2118710" y="7178130"/>
             <a:ext cx="577847" cy="16034"/>
           </a:xfrm>
           <a:prstGeom prst="straightConnector1">
@@ -6032,7 +5693,7 @@
         </p:nvSpPr>
         <p:spPr>
           <a:xfrm>
-            <a:off x="4839056" y="2940132"/>
+            <a:off x="5483960" y="7023347"/>
             <a:ext cx="355691" cy="355691"/>
           </a:xfrm>
           <a:prstGeom prst="ellipse">
@@ -6087,7 +5748,7 @@
         </p:nvSpPr>
         <p:spPr>
           <a:xfrm>
-            <a:off x="3651235" y="2940132"/>
+            <a:off x="4296139" y="7023347"/>
             <a:ext cx="355691" cy="355691"/>
           </a:xfrm>
           <a:prstGeom prst="ellipse">
@@ -6137,7 +5798,7 @@
         </p:nvSpPr>
         <p:spPr>
           <a:xfrm>
-            <a:off x="1107751" y="2940131"/>
+            <a:off x="1752655" y="7023346"/>
             <a:ext cx="355691" cy="355691"/>
           </a:xfrm>
           <a:prstGeom prst="ellipse">
@@ -6187,7 +5848,7 @@
         </p:nvSpPr>
         <p:spPr>
           <a:xfrm>
-            <a:off x="265378" y="2572672"/>
+            <a:off x="910282" y="6655887"/>
             <a:ext cx="739299" cy="739299"/>
           </a:xfrm>
           <a:prstGeom prst="ellipse">
@@ -6244,7 +5905,7 @@
         </p:nvCxnSpPr>
         <p:spPr>
           <a:xfrm>
-            <a:off x="6385039" y="4704382"/>
+            <a:off x="3929881" y="11301694"/>
             <a:ext cx="5601694" cy="0"/>
           </a:xfrm>
           <a:prstGeom prst="line">
@@ -6280,7 +5941,7 @@
         </p:nvSpPr>
         <p:spPr>
           <a:xfrm>
-            <a:off x="8167508" y="3517537"/>
+            <a:off x="5712355" y="10114849"/>
             <a:ext cx="1786965" cy="985828"/>
           </a:xfrm>
           <a:custGeom>
@@ -6367,7 +6028,7 @@
         </p:nvCxnSpPr>
         <p:spPr>
           <a:xfrm>
-            <a:off x="9954473" y="4487331"/>
+            <a:off x="7499315" y="11084643"/>
             <a:ext cx="903174" cy="0"/>
           </a:xfrm>
           <a:prstGeom prst="line">
@@ -6403,12 +6064,14 @@
               </a:ext>
             </a:extLst>
           </p:cNvPr>
-          <p:cNvCxnSpPr/>
+          <p:cNvCxnSpPr>
+            <a:cxnSpLocks/>
+          </p:cNvCxnSpPr>
           <p:nvPr/>
         </p:nvCxnSpPr>
         <p:spPr>
           <a:xfrm>
-            <a:off x="10253346" y="4392175"/>
+            <a:off x="7798188" y="10989487"/>
             <a:ext cx="508884" cy="0"/>
           </a:xfrm>
           <a:prstGeom prst="straightConnector1">
@@ -6453,7 +6116,7 @@
         </p:nvCxnSpPr>
         <p:spPr>
           <a:xfrm rot="10800000">
-            <a:off x="10253346" y="4569181"/>
+            <a:off x="7798188" y="11166493"/>
             <a:ext cx="508884" cy="0"/>
           </a:xfrm>
           <a:prstGeom prst="straightConnector1">
@@ -6499,7 +6162,7 @@
         </p:nvCxnSpPr>
         <p:spPr>
           <a:xfrm flipH="1" flipV="1">
-            <a:off x="7589661" y="4487331"/>
+            <a:off x="5134508" y="11084643"/>
             <a:ext cx="577847" cy="16034"/>
           </a:xfrm>
           <a:prstGeom prst="straightConnector1">
@@ -6541,7 +6204,7 @@
         </p:nvSpPr>
         <p:spPr>
           <a:xfrm>
-            <a:off x="10954911" y="4332543"/>
+            <a:off x="8499758" y="10929860"/>
             <a:ext cx="355691" cy="355691"/>
           </a:xfrm>
           <a:prstGeom prst="ellipse">
@@ -6596,7 +6259,7 @@
         </p:nvSpPr>
         <p:spPr>
           <a:xfrm>
-            <a:off x="7223606" y="4332542"/>
+            <a:off x="4768453" y="10929859"/>
             <a:ext cx="355691" cy="355691"/>
           </a:xfrm>
           <a:prstGeom prst="ellipse">
@@ -6646,7 +6309,7 @@
         </p:nvSpPr>
         <p:spPr>
           <a:xfrm>
-            <a:off x="6381233" y="3965083"/>
+            <a:off x="3926080" y="10562400"/>
             <a:ext cx="739299" cy="739299"/>
           </a:xfrm>
           <a:prstGeom prst="ellipse">
@@ -6703,7 +6366,7 @@
         </p:nvCxnSpPr>
         <p:spPr>
           <a:xfrm>
-            <a:off x="6385039" y="2714214"/>
+            <a:off x="3929881" y="9311526"/>
             <a:ext cx="5601694" cy="0"/>
           </a:xfrm>
           <a:prstGeom prst="line">
@@ -6739,7 +6402,7 @@
         </p:nvSpPr>
         <p:spPr>
           <a:xfrm>
-            <a:off x="10954911" y="2342375"/>
+            <a:off x="8499758" y="8939692"/>
             <a:ext cx="355691" cy="355691"/>
           </a:xfrm>
           <a:prstGeom prst="ellipse">
@@ -6794,7 +6457,7 @@
         </p:nvSpPr>
         <p:spPr>
           <a:xfrm>
-            <a:off x="7223606" y="2342374"/>
+            <a:off x="4768453" y="8939691"/>
             <a:ext cx="355691" cy="355691"/>
           </a:xfrm>
           <a:prstGeom prst="ellipse">
@@ -6844,7 +6507,7 @@
         </p:nvSpPr>
         <p:spPr>
           <a:xfrm>
-            <a:off x="6381233" y="1974915"/>
+            <a:off x="3926080" y="8572232"/>
             <a:ext cx="739299" cy="739299"/>
           </a:xfrm>
           <a:prstGeom prst="ellipse">
@@ -6894,12 +6557,14 @@
               </a:ext>
             </a:extLst>
           </p:cNvPr>
-          <p:cNvCxnSpPr/>
+          <p:cNvCxnSpPr>
+            <a:cxnSpLocks/>
+          </p:cNvCxnSpPr>
           <p:nvPr/>
         </p:nvCxnSpPr>
         <p:spPr>
           <a:xfrm flipH="1">
-            <a:off x="7702272" y="2520219"/>
+            <a:off x="5247114" y="9117531"/>
             <a:ext cx="3143624" cy="0"/>
           </a:xfrm>
           <a:prstGeom prst="straightConnector1">
@@ -6924,6 +6589,6071 @@
           </a:fontRef>
         </p:style>
       </p:cxnSp>
+      <p:pic>
+        <p:nvPicPr>
+          <p:cNvPr id="5" name="Picture 4">
+            <a:extLst>
+              <a:ext uri="{FF2B5EF4-FFF2-40B4-BE49-F238E27FC236}">
+                <a16:creationId xmlns:a16="http://schemas.microsoft.com/office/drawing/2014/main" id="{74DD54ED-C52C-DEC8-DEBE-BFB0A2D9EFAB}"/>
+              </a:ext>
+            </a:extLst>
+          </p:cNvPr>
+          <p:cNvPicPr>
+            <a:picLocks noChangeAspect="1"/>
+          </p:cNvPicPr>
+          <p:nvPr/>
+        </p:nvPicPr>
+        <p:blipFill>
+          <a:blip r:embed="rId3">
+            <a:extLst>
+              <a:ext uri="{28A0092B-C50C-407E-A947-70E740481C1C}">
+                <a14:useLocalDpi xmlns:a14="http://schemas.microsoft.com/office/drawing/2010/main" val="0"/>
+              </a:ext>
+            </a:extLst>
+          </a:blip>
+          <a:stretch>
+            <a:fillRect/>
+          </a:stretch>
+        </p:blipFill>
+        <p:spPr>
+          <a:xfrm>
+            <a:off x="2052563" y="13156658"/>
+            <a:ext cx="9234135" cy="4617068"/>
+          </a:xfrm>
+          <a:prstGeom prst="rect">
+            <a:avLst/>
+          </a:prstGeom>
+        </p:spPr>
+      </p:pic>
+      <p:sp>
+        <p:nvSpPr>
+          <p:cNvPr id="57" name="TextBox 56">
+            <a:extLst>
+              <a:ext uri="{FF2B5EF4-FFF2-40B4-BE49-F238E27FC236}">
+                <a16:creationId xmlns:a16="http://schemas.microsoft.com/office/drawing/2014/main" id="{D910A694-0452-D890-2298-46E93A3FA6E6}"/>
+              </a:ext>
+            </a:extLst>
+          </p:cNvPr>
+          <p:cNvSpPr txBox="1"/>
+          <p:nvPr/>
+        </p:nvSpPr>
+        <p:spPr>
+          <a:xfrm>
+            <a:off x="1266845" y="2027318"/>
+            <a:ext cx="5128327" cy="707886"/>
+          </a:xfrm>
+          <a:prstGeom prst="rect">
+            <a:avLst/>
+          </a:prstGeom>
+          <a:noFill/>
+        </p:spPr>
+        <p:txBody>
+          <a:bodyPr wrap="none" rtlCol="0">
+            <a:spAutoFit/>
+          </a:bodyPr>
+          <a:lstStyle/>
+          <a:p>
+            <a:r>
+              <a:rPr lang="en-US" sz="4000" dirty="0">
+                <a:latin typeface="Times New Roman" panose="02020603050405020304" pitchFamily="18" charset="0"/>
+                <a:cs typeface="Times New Roman" panose="02020603050405020304" pitchFamily="18" charset="0"/>
+              </a:rPr>
+              <a:t>Experimental Condition</a:t>
+            </a:r>
+          </a:p>
+        </p:txBody>
+      </p:sp>
+      <p:sp>
+        <p:nvSpPr>
+          <p:cNvPr id="61" name="TextBox 60">
+            <a:extLst>
+              <a:ext uri="{FF2B5EF4-FFF2-40B4-BE49-F238E27FC236}">
+                <a16:creationId xmlns:a16="http://schemas.microsoft.com/office/drawing/2014/main" id="{0B3B3412-5331-59CE-2C13-AFEA26D1924A}"/>
+              </a:ext>
+            </a:extLst>
+          </p:cNvPr>
+          <p:cNvSpPr txBox="1"/>
+          <p:nvPr/>
+        </p:nvSpPr>
+        <p:spPr>
+          <a:xfrm>
+            <a:off x="7215479" y="2023685"/>
+            <a:ext cx="3932487" cy="707886"/>
+          </a:xfrm>
+          <a:prstGeom prst="rect">
+            <a:avLst/>
+          </a:prstGeom>
+          <a:noFill/>
+        </p:spPr>
+        <p:txBody>
+          <a:bodyPr wrap="none" rtlCol="0">
+            <a:spAutoFit/>
+          </a:bodyPr>
+          <a:lstStyle/>
+          <a:p>
+            <a:r>
+              <a:rPr lang="en-US" sz="4000" dirty="0">
+                <a:latin typeface="Times New Roman" panose="02020603050405020304" pitchFamily="18" charset="0"/>
+                <a:cs typeface="Times New Roman" panose="02020603050405020304" pitchFamily="18" charset="0"/>
+              </a:rPr>
+              <a:t>Control Condition</a:t>
+            </a:r>
+          </a:p>
+        </p:txBody>
+      </p:sp>
+      <p:sp>
+        <p:nvSpPr>
+          <p:cNvPr id="62" name="TextBox 61">
+            <a:extLst>
+              <a:ext uri="{FF2B5EF4-FFF2-40B4-BE49-F238E27FC236}">
+                <a16:creationId xmlns:a16="http://schemas.microsoft.com/office/drawing/2014/main" id="{7F268A1A-8883-D15F-EB50-0E4CEED89FE8}"/>
+              </a:ext>
+            </a:extLst>
+          </p:cNvPr>
+          <p:cNvSpPr txBox="1"/>
+          <p:nvPr/>
+        </p:nvSpPr>
+        <p:spPr>
+          <a:xfrm>
+            <a:off x="1184860" y="2585768"/>
+            <a:ext cx="5484771" cy="707886"/>
+          </a:xfrm>
+          <a:prstGeom prst="rect">
+            <a:avLst/>
+          </a:prstGeom>
+          <a:noFill/>
+        </p:spPr>
+        <p:txBody>
+          <a:bodyPr wrap="none" rtlCol="0">
+            <a:spAutoFit/>
+          </a:bodyPr>
+          <a:lstStyle/>
+          <a:p>
+            <a:r>
+              <a:rPr lang="en-US" sz="4000" dirty="0">
+                <a:latin typeface="Times New Roman" panose="02020603050405020304" pitchFamily="18" charset="0"/>
+                <a:cs typeface="Times New Roman" panose="02020603050405020304" pitchFamily="18" charset="0"/>
+              </a:rPr>
+              <a:t>Constrained Action Event</a:t>
+            </a:r>
+          </a:p>
+        </p:txBody>
+      </p:sp>
+      <p:sp>
+        <p:nvSpPr>
+          <p:cNvPr id="63" name="TextBox 62">
+            <a:extLst>
+              <a:ext uri="{FF2B5EF4-FFF2-40B4-BE49-F238E27FC236}">
+                <a16:creationId xmlns:a16="http://schemas.microsoft.com/office/drawing/2014/main" id="{0038E604-13BB-CDAB-4266-50D9A6AB224B}"/>
+              </a:ext>
+            </a:extLst>
+          </p:cNvPr>
+          <p:cNvSpPr txBox="1"/>
+          <p:nvPr/>
+        </p:nvSpPr>
+        <p:spPr>
+          <a:xfrm>
+            <a:off x="6846997" y="2580986"/>
+            <a:ext cx="5997732" cy="707886"/>
+          </a:xfrm>
+          <a:prstGeom prst="rect">
+            <a:avLst/>
+          </a:prstGeom>
+          <a:noFill/>
+        </p:spPr>
+        <p:txBody>
+          <a:bodyPr wrap="none" rtlCol="0">
+            <a:spAutoFit/>
+          </a:bodyPr>
+          <a:lstStyle/>
+          <a:p>
+            <a:r>
+              <a:rPr lang="en-US" sz="4000" dirty="0">
+                <a:latin typeface="Times New Roman" panose="02020603050405020304" pitchFamily="18" charset="0"/>
+                <a:cs typeface="Times New Roman" panose="02020603050405020304" pitchFamily="18" charset="0"/>
+              </a:rPr>
+              <a:t>Unconstrained Action Event</a:t>
+            </a:r>
+          </a:p>
+        </p:txBody>
+      </p:sp>
+      <p:sp>
+        <p:nvSpPr>
+          <p:cNvPr id="64" name="TextBox 63">
+            <a:extLst>
+              <a:ext uri="{FF2B5EF4-FFF2-40B4-BE49-F238E27FC236}">
+                <a16:creationId xmlns:a16="http://schemas.microsoft.com/office/drawing/2014/main" id="{45D44FB4-E070-8EC4-5821-BF1A141D571D}"/>
+              </a:ext>
+            </a:extLst>
+          </p:cNvPr>
+          <p:cNvSpPr txBox="1"/>
+          <p:nvPr/>
+        </p:nvSpPr>
+        <p:spPr>
+          <a:xfrm>
+            <a:off x="15349577" y="-46052"/>
+            <a:ext cx="9950224" cy="707886"/>
+          </a:xfrm>
+          <a:prstGeom prst="rect">
+            <a:avLst/>
+          </a:prstGeom>
+          <a:noFill/>
+        </p:spPr>
+        <p:txBody>
+          <a:bodyPr wrap="none" rtlCol="0">
+            <a:spAutoFit/>
+          </a:bodyPr>
+          <a:lstStyle/>
+          <a:p>
+            <a:r>
+              <a:rPr lang="en-US" sz="4000" dirty="0">
+                <a:latin typeface="Times New Roman" panose="02020603050405020304" pitchFamily="18" charset="0"/>
+                <a:cs typeface="Times New Roman" panose="02020603050405020304" pitchFamily="18" charset="0"/>
+              </a:rPr>
+              <a:t>Paradigms Underlying the Five Target Findings</a:t>
+            </a:r>
+          </a:p>
+        </p:txBody>
+      </p:sp>
+      <p:sp>
+        <p:nvSpPr>
+          <p:cNvPr id="65" name="TextBox 64">
+            <a:extLst>
+              <a:ext uri="{FF2B5EF4-FFF2-40B4-BE49-F238E27FC236}">
+                <a16:creationId xmlns:a16="http://schemas.microsoft.com/office/drawing/2014/main" id="{D3F888E5-1EEF-20D6-EDBB-ADA88381C5C8}"/>
+              </a:ext>
+            </a:extLst>
+          </p:cNvPr>
+          <p:cNvSpPr txBox="1"/>
+          <p:nvPr/>
+        </p:nvSpPr>
+        <p:spPr>
+          <a:xfrm>
+            <a:off x="1583192" y="826884"/>
+            <a:ext cx="10021590" cy="1323439"/>
+          </a:xfrm>
+          <a:prstGeom prst="rect">
+            <a:avLst/>
+          </a:prstGeom>
+          <a:noFill/>
+        </p:spPr>
+        <p:txBody>
+          <a:bodyPr wrap="none" rtlCol="0">
+            <a:spAutoFit/>
+          </a:bodyPr>
+          <a:lstStyle/>
+          <a:p>
+            <a:pPr algn="ctr"/>
+            <a:r>
+              <a:rPr lang="en-US" sz="4000" dirty="0">
+                <a:latin typeface="Times New Roman" panose="02020603050405020304" pitchFamily="18" charset="0"/>
+                <a:cs typeface="Times New Roman" panose="02020603050405020304" pitchFamily="18" charset="0"/>
+              </a:rPr>
+              <a:t>Target Finding 1: </a:t>
+            </a:r>
+          </a:p>
+          <a:p>
+            <a:pPr algn="ctr"/>
+            <a:r>
+              <a:rPr lang="en-US" sz="4000" dirty="0">
+                <a:latin typeface="Times New Roman" panose="02020603050405020304" pitchFamily="18" charset="0"/>
+                <a:cs typeface="Times New Roman" panose="02020603050405020304" pitchFamily="18" charset="0"/>
+              </a:rPr>
+              <a:t>Selective Longer Looking to Inefficient Actions</a:t>
+            </a:r>
+          </a:p>
+        </p:txBody>
+      </p:sp>
+      <p:cxnSp>
+        <p:nvCxnSpPr>
+          <p:cNvPr id="66" name="Straight Connector 65">
+            <a:extLst>
+              <a:ext uri="{FF2B5EF4-FFF2-40B4-BE49-F238E27FC236}">
+                <a16:creationId xmlns:a16="http://schemas.microsoft.com/office/drawing/2014/main" id="{3D057A84-EBBF-6876-48ED-6A6536F54FEE}"/>
+              </a:ext>
+            </a:extLst>
+          </p:cNvPr>
+          <p:cNvCxnSpPr>
+            <a:cxnSpLocks/>
+          </p:cNvCxnSpPr>
+          <p:nvPr/>
+        </p:nvCxnSpPr>
+        <p:spPr>
+          <a:xfrm>
+            <a:off x="19341608" y="5652169"/>
+            <a:ext cx="5601694" cy="0"/>
+          </a:xfrm>
+          <a:prstGeom prst="line">
+            <a:avLst/>
+          </a:prstGeom>
+        </p:spPr>
+        <p:style>
+          <a:lnRef idx="2">
+            <a:schemeClr val="dk1"/>
+          </a:lnRef>
+          <a:fillRef idx="0">
+            <a:schemeClr val="dk1"/>
+          </a:fillRef>
+          <a:effectRef idx="1">
+            <a:schemeClr val="dk1"/>
+          </a:effectRef>
+          <a:fontRef idx="minor">
+            <a:schemeClr val="tx1"/>
+          </a:fontRef>
+        </p:style>
+      </p:cxnSp>
+      <p:sp>
+        <p:nvSpPr>
+          <p:cNvPr id="67" name="Rectangle 66">
+            <a:extLst>
+              <a:ext uri="{FF2B5EF4-FFF2-40B4-BE49-F238E27FC236}">
+                <a16:creationId xmlns:a16="http://schemas.microsoft.com/office/drawing/2014/main" id="{2FDE2742-B6C5-9A39-3F9E-D44979502174}"/>
+              </a:ext>
+            </a:extLst>
+          </p:cNvPr>
+          <p:cNvSpPr/>
+          <p:nvPr/>
+        </p:nvSpPr>
+        <p:spPr>
+          <a:xfrm>
+            <a:off x="24459217" y="4695910"/>
+            <a:ext cx="370541" cy="940332"/>
+          </a:xfrm>
+          <a:prstGeom prst="rect">
+            <a:avLst/>
+          </a:prstGeom>
+        </p:spPr>
+        <p:style>
+          <a:lnRef idx="2">
+            <a:schemeClr val="dk1">
+              <a:shade val="15000"/>
+            </a:schemeClr>
+          </a:lnRef>
+          <a:fillRef idx="1">
+            <a:schemeClr val="dk1"/>
+          </a:fillRef>
+          <a:effectRef idx="0">
+            <a:schemeClr val="dk1"/>
+          </a:effectRef>
+          <a:fontRef idx="minor">
+            <a:schemeClr val="lt1"/>
+          </a:fontRef>
+        </p:style>
+        <p:txBody>
+          <a:bodyPr rtlCol="0" anchor="ctr"/>
+          <a:lstStyle/>
+          <a:p>
+            <a:pPr algn="ctr"/>
+            <a:endParaRPr lang="en-US"/>
+          </a:p>
+        </p:txBody>
+      </p:sp>
+      <p:cxnSp>
+        <p:nvCxnSpPr>
+          <p:cNvPr id="68" name="Straight Connector 67">
+            <a:extLst>
+              <a:ext uri="{FF2B5EF4-FFF2-40B4-BE49-F238E27FC236}">
+                <a16:creationId xmlns:a16="http://schemas.microsoft.com/office/drawing/2014/main" id="{F3121D8D-F09F-F643-AA03-F0DA7F7F322D}"/>
+              </a:ext>
+            </a:extLst>
+          </p:cNvPr>
+          <p:cNvCxnSpPr>
+            <a:cxnSpLocks/>
+          </p:cNvCxnSpPr>
+          <p:nvPr/>
+        </p:nvCxnSpPr>
+        <p:spPr>
+          <a:xfrm>
+            <a:off x="23206114" y="5435118"/>
+            <a:ext cx="608107" cy="0"/>
+          </a:xfrm>
+          <a:prstGeom prst="line">
+            <a:avLst/>
+          </a:prstGeom>
+          <a:ln>
+            <a:solidFill>
+              <a:schemeClr val="tx1"/>
+            </a:solidFill>
+            <a:headEnd type="triangle"/>
+          </a:ln>
+        </p:spPr>
+        <p:style>
+          <a:lnRef idx="2">
+            <a:schemeClr val="accent1"/>
+          </a:lnRef>
+          <a:fillRef idx="0">
+            <a:schemeClr val="accent1"/>
+          </a:fillRef>
+          <a:effectRef idx="1">
+            <a:schemeClr val="accent1"/>
+          </a:effectRef>
+          <a:fontRef idx="minor">
+            <a:schemeClr val="tx1"/>
+          </a:fontRef>
+        </p:style>
+      </p:cxnSp>
+      <p:sp>
+        <p:nvSpPr>
+          <p:cNvPr id="75" name="Oval 74">
+            <a:extLst>
+              <a:ext uri="{FF2B5EF4-FFF2-40B4-BE49-F238E27FC236}">
+                <a16:creationId xmlns:a16="http://schemas.microsoft.com/office/drawing/2014/main" id="{234D586E-5209-2693-2BAF-8D1D12A86A88}"/>
+              </a:ext>
+            </a:extLst>
+          </p:cNvPr>
+          <p:cNvSpPr/>
+          <p:nvPr/>
+        </p:nvSpPr>
+        <p:spPr>
+          <a:xfrm>
+            <a:off x="22723664" y="5280335"/>
+            <a:ext cx="355691" cy="355691"/>
+          </a:xfrm>
+          <a:prstGeom prst="ellipse">
+            <a:avLst/>
+          </a:prstGeom>
+          <a:noFill/>
+          <a:ln>
+            <a:prstDash val="sysDot"/>
+          </a:ln>
+        </p:spPr>
+        <p:style>
+          <a:lnRef idx="2">
+            <a:schemeClr val="dk1">
+              <a:shade val="15000"/>
+            </a:schemeClr>
+          </a:lnRef>
+          <a:fillRef idx="1">
+            <a:schemeClr val="dk1"/>
+          </a:fillRef>
+          <a:effectRef idx="0">
+            <a:schemeClr val="dk1"/>
+          </a:effectRef>
+          <a:fontRef idx="minor">
+            <a:schemeClr val="lt1"/>
+          </a:fontRef>
+        </p:style>
+        <p:txBody>
+          <a:bodyPr rtlCol="0" anchor="ctr"/>
+          <a:lstStyle/>
+          <a:p>
+            <a:pPr algn="ctr"/>
+            <a:endParaRPr lang="en-US"/>
+          </a:p>
+        </p:txBody>
+      </p:sp>
+      <p:cxnSp>
+        <p:nvCxnSpPr>
+          <p:cNvPr id="80" name="Straight Connector 79">
+            <a:extLst>
+              <a:ext uri="{FF2B5EF4-FFF2-40B4-BE49-F238E27FC236}">
+                <a16:creationId xmlns:a16="http://schemas.microsoft.com/office/drawing/2014/main" id="{C642AA98-8D33-0C5A-2CA5-1FE42C01FC58}"/>
+              </a:ext>
+            </a:extLst>
+          </p:cNvPr>
+          <p:cNvCxnSpPr>
+            <a:cxnSpLocks/>
+          </p:cNvCxnSpPr>
+          <p:nvPr/>
+        </p:nvCxnSpPr>
+        <p:spPr>
+          <a:xfrm>
+            <a:off x="19337802" y="7453630"/>
+            <a:ext cx="5601694" cy="0"/>
+          </a:xfrm>
+          <a:prstGeom prst="line">
+            <a:avLst/>
+          </a:prstGeom>
+        </p:spPr>
+        <p:style>
+          <a:lnRef idx="2">
+            <a:schemeClr val="dk1"/>
+          </a:lnRef>
+          <a:fillRef idx="0">
+            <a:schemeClr val="dk1"/>
+          </a:fillRef>
+          <a:effectRef idx="1">
+            <a:schemeClr val="dk1"/>
+          </a:effectRef>
+          <a:fontRef idx="minor">
+            <a:schemeClr val="tx1"/>
+          </a:fontRef>
+        </p:style>
+      </p:cxnSp>
+      <p:sp>
+        <p:nvSpPr>
+          <p:cNvPr id="81" name="Rectangle 80">
+            <a:extLst>
+              <a:ext uri="{FF2B5EF4-FFF2-40B4-BE49-F238E27FC236}">
+                <a16:creationId xmlns:a16="http://schemas.microsoft.com/office/drawing/2014/main" id="{31404B3A-DB6E-0421-F38B-A2EB03C58D9A}"/>
+              </a:ext>
+            </a:extLst>
+          </p:cNvPr>
+          <p:cNvSpPr/>
+          <p:nvPr/>
+        </p:nvSpPr>
+        <p:spPr>
+          <a:xfrm>
+            <a:off x="24455411" y="6497371"/>
+            <a:ext cx="370541" cy="940332"/>
+          </a:xfrm>
+          <a:prstGeom prst="rect">
+            <a:avLst/>
+          </a:prstGeom>
+        </p:spPr>
+        <p:style>
+          <a:lnRef idx="2">
+            <a:schemeClr val="dk1">
+              <a:shade val="15000"/>
+            </a:schemeClr>
+          </a:lnRef>
+          <a:fillRef idx="1">
+            <a:schemeClr val="dk1"/>
+          </a:fillRef>
+          <a:effectRef idx="0">
+            <a:schemeClr val="dk1"/>
+          </a:effectRef>
+          <a:fontRef idx="minor">
+            <a:schemeClr val="lt1"/>
+          </a:fontRef>
+        </p:style>
+        <p:txBody>
+          <a:bodyPr rtlCol="0" anchor="ctr"/>
+          <a:lstStyle/>
+          <a:p>
+            <a:pPr algn="ctr"/>
+            <a:endParaRPr lang="en-US"/>
+          </a:p>
+        </p:txBody>
+      </p:sp>
+      <p:sp>
+        <p:nvSpPr>
+          <p:cNvPr id="82" name="Freeform: Shape 81">
+            <a:extLst>
+              <a:ext uri="{FF2B5EF4-FFF2-40B4-BE49-F238E27FC236}">
+                <a16:creationId xmlns:a16="http://schemas.microsoft.com/office/drawing/2014/main" id="{74482F6E-0F53-C081-6951-EEE33FC970A1}"/>
+              </a:ext>
+            </a:extLst>
+          </p:cNvPr>
+          <p:cNvSpPr/>
+          <p:nvPr/>
+        </p:nvSpPr>
+        <p:spPr>
+          <a:xfrm>
+            <a:off x="21120276" y="6266785"/>
+            <a:ext cx="1786965" cy="985828"/>
+          </a:xfrm>
+          <a:custGeom>
+            <a:avLst/>
+            <a:gdLst>
+              <a:gd name="csX0" fmla="*/ 0 w 1786965"/>
+              <a:gd name="csY0" fmla="*/ 1093699 h 1093699"/>
+              <a:gd name="csX1" fmla="*/ 908424 w 1786965"/>
+              <a:gd name="csY1" fmla="*/ 5 h 1093699"/>
+              <a:gd name="csX2" fmla="*/ 1786965 w 1786965"/>
+              <a:gd name="csY2" fmla="*/ 1081746 h 1093699"/>
+            </a:gdLst>
+            <a:ahLst/>
+            <a:cxnLst>
+              <a:cxn ang="0">
+                <a:pos x="csX0" y="csY0"/>
+              </a:cxn>
+              <a:cxn ang="0">
+                <a:pos x="csX1" y="csY1"/>
+              </a:cxn>
+              <a:cxn ang="0">
+                <a:pos x="csX2" y="csY2"/>
+              </a:cxn>
+            </a:cxnLst>
+            <a:rect l="l" t="t" r="r" b="b"/>
+            <a:pathLst>
+              <a:path w="1786965" h="1093699">
+                <a:moveTo>
+                  <a:pt x="0" y="1093699"/>
+                </a:moveTo>
+                <a:cubicBezTo>
+                  <a:pt x="305298" y="547848"/>
+                  <a:pt x="610597" y="1997"/>
+                  <a:pt x="908424" y="5"/>
+                </a:cubicBezTo>
+                <a:cubicBezTo>
+                  <a:pt x="1206251" y="-1987"/>
+                  <a:pt x="1496608" y="539879"/>
+                  <a:pt x="1786965" y="1081746"/>
+                </a:cubicBezTo>
+              </a:path>
+            </a:pathLst>
+          </a:custGeom>
+          <a:noFill/>
+        </p:spPr>
+        <p:style>
+          <a:lnRef idx="2">
+            <a:schemeClr val="accent1">
+              <a:shade val="15000"/>
+            </a:schemeClr>
+          </a:lnRef>
+          <a:fillRef idx="1">
+            <a:schemeClr val="accent1"/>
+          </a:fillRef>
+          <a:effectRef idx="0">
+            <a:schemeClr val="accent1"/>
+          </a:effectRef>
+          <a:fontRef idx="minor">
+            <a:schemeClr val="lt1"/>
+          </a:fontRef>
+        </p:style>
+        <p:txBody>
+          <a:bodyPr rtlCol="0" anchor="ctr"/>
+          <a:lstStyle/>
+          <a:p>
+            <a:pPr algn="ctr"/>
+            <a:endParaRPr lang="en-US"/>
+          </a:p>
+        </p:txBody>
+      </p:sp>
+      <p:cxnSp>
+        <p:nvCxnSpPr>
+          <p:cNvPr id="83" name="Straight Connector 82">
+            <a:extLst>
+              <a:ext uri="{FF2B5EF4-FFF2-40B4-BE49-F238E27FC236}">
+                <a16:creationId xmlns:a16="http://schemas.microsoft.com/office/drawing/2014/main" id="{50BDA6E0-10FB-6414-36BE-D82949F5E963}"/>
+              </a:ext>
+            </a:extLst>
+          </p:cNvPr>
+          <p:cNvCxnSpPr>
+            <a:cxnSpLocks/>
+          </p:cNvCxnSpPr>
+          <p:nvPr/>
+        </p:nvCxnSpPr>
+        <p:spPr>
+          <a:xfrm>
+            <a:off x="22907236" y="7236579"/>
+            <a:ext cx="903174" cy="0"/>
+          </a:xfrm>
+          <a:prstGeom prst="line">
+            <a:avLst/>
+          </a:prstGeom>
+          <a:ln>
+            <a:solidFill>
+              <a:schemeClr val="tx1"/>
+            </a:solidFill>
+          </a:ln>
+        </p:spPr>
+        <p:style>
+          <a:lnRef idx="2">
+            <a:schemeClr val="accent1"/>
+          </a:lnRef>
+          <a:fillRef idx="0">
+            <a:schemeClr val="accent1"/>
+          </a:fillRef>
+          <a:effectRef idx="1">
+            <a:schemeClr val="accent1"/>
+          </a:effectRef>
+          <a:fontRef idx="minor">
+            <a:schemeClr val="tx1"/>
+          </a:fontRef>
+        </p:style>
+      </p:cxnSp>
+      <p:cxnSp>
+        <p:nvCxnSpPr>
+          <p:cNvPr id="118" name="Straight Arrow Connector 117">
+            <a:extLst>
+              <a:ext uri="{FF2B5EF4-FFF2-40B4-BE49-F238E27FC236}">
+                <a16:creationId xmlns:a16="http://schemas.microsoft.com/office/drawing/2014/main" id="{2171ED95-20C8-7ECA-23E9-01A724B703B6}"/>
+              </a:ext>
+            </a:extLst>
+          </p:cNvPr>
+          <p:cNvCxnSpPr>
+            <a:cxnSpLocks/>
+            <a:stCxn id="82" idx="0"/>
+          </p:cNvCxnSpPr>
+          <p:nvPr/>
+        </p:nvCxnSpPr>
+        <p:spPr>
+          <a:xfrm flipH="1" flipV="1">
+            <a:off x="20542429" y="7236579"/>
+            <a:ext cx="577847" cy="16034"/>
+          </a:xfrm>
+          <a:prstGeom prst="straightConnector1">
+            <a:avLst/>
+          </a:prstGeom>
+          <a:ln>
+            <a:solidFill>
+              <a:schemeClr val="tx1"/>
+            </a:solidFill>
+            <a:tailEnd type="triangle"/>
+          </a:ln>
+        </p:spPr>
+        <p:style>
+          <a:lnRef idx="2">
+            <a:schemeClr val="accent1"/>
+          </a:lnRef>
+          <a:fillRef idx="0">
+            <a:schemeClr val="accent1"/>
+          </a:fillRef>
+          <a:effectRef idx="1">
+            <a:schemeClr val="accent1"/>
+          </a:effectRef>
+          <a:fontRef idx="minor">
+            <a:schemeClr val="tx1"/>
+          </a:fontRef>
+        </p:style>
+      </p:cxnSp>
+      <p:sp>
+        <p:nvSpPr>
+          <p:cNvPr id="122" name="Oval 121">
+            <a:extLst>
+              <a:ext uri="{FF2B5EF4-FFF2-40B4-BE49-F238E27FC236}">
+                <a16:creationId xmlns:a16="http://schemas.microsoft.com/office/drawing/2014/main" id="{B8F70C28-B29B-41A1-6C1F-90BA9AB3DBC5}"/>
+              </a:ext>
+            </a:extLst>
+          </p:cNvPr>
+          <p:cNvSpPr/>
+          <p:nvPr/>
+        </p:nvSpPr>
+        <p:spPr>
+          <a:xfrm>
+            <a:off x="23907679" y="7081796"/>
+            <a:ext cx="355691" cy="355691"/>
+          </a:xfrm>
+          <a:prstGeom prst="ellipse">
+            <a:avLst/>
+          </a:prstGeom>
+          <a:solidFill>
+            <a:schemeClr val="tx1"/>
+          </a:solidFill>
+          <a:ln>
+            <a:solidFill>
+              <a:schemeClr val="tx1"/>
+            </a:solidFill>
+            <a:prstDash val="solid"/>
+          </a:ln>
+        </p:spPr>
+        <p:style>
+          <a:lnRef idx="2">
+            <a:schemeClr val="dk1">
+              <a:shade val="15000"/>
+            </a:schemeClr>
+          </a:lnRef>
+          <a:fillRef idx="1">
+            <a:schemeClr val="dk1"/>
+          </a:fillRef>
+          <a:effectRef idx="0">
+            <a:schemeClr val="dk1"/>
+          </a:effectRef>
+          <a:fontRef idx="minor">
+            <a:schemeClr val="lt1"/>
+          </a:fontRef>
+        </p:style>
+        <p:txBody>
+          <a:bodyPr rtlCol="0" anchor="ctr"/>
+          <a:lstStyle/>
+          <a:p>
+            <a:pPr algn="ctr"/>
+            <a:endParaRPr lang="en-US"/>
+          </a:p>
+        </p:txBody>
+      </p:sp>
+      <p:sp>
+        <p:nvSpPr>
+          <p:cNvPr id="123" name="Oval 122">
+            <a:extLst>
+              <a:ext uri="{FF2B5EF4-FFF2-40B4-BE49-F238E27FC236}">
+                <a16:creationId xmlns:a16="http://schemas.microsoft.com/office/drawing/2014/main" id="{F70F9A9C-059F-B6FC-CD39-0BD4F41F7743}"/>
+              </a:ext>
+            </a:extLst>
+          </p:cNvPr>
+          <p:cNvSpPr/>
+          <p:nvPr/>
+        </p:nvSpPr>
+        <p:spPr>
+          <a:xfrm>
+            <a:off x="22719858" y="7081796"/>
+            <a:ext cx="355691" cy="355691"/>
+          </a:xfrm>
+          <a:prstGeom prst="ellipse">
+            <a:avLst/>
+          </a:prstGeom>
+          <a:noFill/>
+          <a:ln>
+            <a:prstDash val="sysDot"/>
+          </a:ln>
+        </p:spPr>
+        <p:style>
+          <a:lnRef idx="2">
+            <a:schemeClr val="dk1">
+              <a:shade val="15000"/>
+            </a:schemeClr>
+          </a:lnRef>
+          <a:fillRef idx="1">
+            <a:schemeClr val="dk1"/>
+          </a:fillRef>
+          <a:effectRef idx="0">
+            <a:schemeClr val="dk1"/>
+          </a:effectRef>
+          <a:fontRef idx="minor">
+            <a:schemeClr val="lt1"/>
+          </a:fontRef>
+        </p:style>
+        <p:txBody>
+          <a:bodyPr rtlCol="0" anchor="ctr"/>
+          <a:lstStyle/>
+          <a:p>
+            <a:pPr algn="ctr"/>
+            <a:endParaRPr lang="en-US"/>
+          </a:p>
+        </p:txBody>
+      </p:sp>
+      <p:sp>
+        <p:nvSpPr>
+          <p:cNvPr id="124" name="Oval 123">
+            <a:extLst>
+              <a:ext uri="{FF2B5EF4-FFF2-40B4-BE49-F238E27FC236}">
+                <a16:creationId xmlns:a16="http://schemas.microsoft.com/office/drawing/2014/main" id="{D52F7FA9-3ADC-6D14-5100-405A14C04959}"/>
+              </a:ext>
+            </a:extLst>
+          </p:cNvPr>
+          <p:cNvSpPr/>
+          <p:nvPr/>
+        </p:nvSpPr>
+        <p:spPr>
+          <a:xfrm>
+            <a:off x="20176374" y="7081795"/>
+            <a:ext cx="355691" cy="355691"/>
+          </a:xfrm>
+          <a:prstGeom prst="ellipse">
+            <a:avLst/>
+          </a:prstGeom>
+          <a:noFill/>
+          <a:ln>
+            <a:prstDash val="sysDot"/>
+          </a:ln>
+        </p:spPr>
+        <p:style>
+          <a:lnRef idx="2">
+            <a:schemeClr val="dk1">
+              <a:shade val="15000"/>
+            </a:schemeClr>
+          </a:lnRef>
+          <a:fillRef idx="1">
+            <a:schemeClr val="dk1"/>
+          </a:fillRef>
+          <a:effectRef idx="0">
+            <a:schemeClr val="dk1"/>
+          </a:effectRef>
+          <a:fontRef idx="minor">
+            <a:schemeClr val="lt1"/>
+          </a:fontRef>
+        </p:style>
+        <p:txBody>
+          <a:bodyPr rtlCol="0" anchor="ctr"/>
+          <a:lstStyle/>
+          <a:p>
+            <a:pPr algn="ctr"/>
+            <a:endParaRPr lang="en-US"/>
+          </a:p>
+        </p:txBody>
+      </p:sp>
+      <p:sp>
+        <p:nvSpPr>
+          <p:cNvPr id="125" name="Oval 124">
+            <a:extLst>
+              <a:ext uri="{FF2B5EF4-FFF2-40B4-BE49-F238E27FC236}">
+                <a16:creationId xmlns:a16="http://schemas.microsoft.com/office/drawing/2014/main" id="{F5F86ED4-7FD5-5BE7-7450-CBEEC772F97B}"/>
+              </a:ext>
+            </a:extLst>
+          </p:cNvPr>
+          <p:cNvSpPr/>
+          <p:nvPr/>
+        </p:nvSpPr>
+        <p:spPr>
+          <a:xfrm>
+            <a:off x="19334001" y="6714336"/>
+            <a:ext cx="739299" cy="739299"/>
+          </a:xfrm>
+          <a:prstGeom prst="ellipse">
+            <a:avLst/>
+          </a:prstGeom>
+          <a:solidFill>
+            <a:schemeClr val="tx1"/>
+          </a:solidFill>
+          <a:ln>
+            <a:solidFill>
+              <a:schemeClr val="tx1"/>
+            </a:solidFill>
+            <a:prstDash val="solid"/>
+          </a:ln>
+        </p:spPr>
+        <p:style>
+          <a:lnRef idx="2">
+            <a:schemeClr val="dk1">
+              <a:shade val="15000"/>
+            </a:schemeClr>
+          </a:lnRef>
+          <a:fillRef idx="1">
+            <a:schemeClr val="dk1"/>
+          </a:fillRef>
+          <a:effectRef idx="0">
+            <a:schemeClr val="dk1"/>
+          </a:effectRef>
+          <a:fontRef idx="minor">
+            <a:schemeClr val="lt1"/>
+          </a:fontRef>
+        </p:style>
+        <p:txBody>
+          <a:bodyPr rtlCol="0" anchor="ctr"/>
+          <a:lstStyle/>
+          <a:p>
+            <a:pPr algn="ctr"/>
+            <a:endParaRPr lang="en-US"/>
+          </a:p>
+        </p:txBody>
+      </p:sp>
+      <p:cxnSp>
+        <p:nvCxnSpPr>
+          <p:cNvPr id="126" name="Straight Connector 125">
+            <a:extLst>
+              <a:ext uri="{FF2B5EF4-FFF2-40B4-BE49-F238E27FC236}">
+                <a16:creationId xmlns:a16="http://schemas.microsoft.com/office/drawing/2014/main" id="{116D10A9-35DC-56A0-E794-95700D8E4D08}"/>
+              </a:ext>
+            </a:extLst>
+          </p:cNvPr>
+          <p:cNvCxnSpPr>
+            <a:cxnSpLocks/>
+          </p:cNvCxnSpPr>
+          <p:nvPr/>
+        </p:nvCxnSpPr>
+        <p:spPr>
+          <a:xfrm>
+            <a:off x="13528769" y="5652169"/>
+            <a:ext cx="5601694" cy="0"/>
+          </a:xfrm>
+          <a:prstGeom prst="line">
+            <a:avLst/>
+          </a:prstGeom>
+        </p:spPr>
+        <p:style>
+          <a:lnRef idx="2">
+            <a:schemeClr val="dk1"/>
+          </a:lnRef>
+          <a:fillRef idx="0">
+            <a:schemeClr val="dk1"/>
+          </a:fillRef>
+          <a:effectRef idx="1">
+            <a:schemeClr val="dk1"/>
+          </a:effectRef>
+          <a:fontRef idx="minor">
+            <a:schemeClr val="tx1"/>
+          </a:fontRef>
+        </p:style>
+      </p:cxnSp>
+      <p:sp>
+        <p:nvSpPr>
+          <p:cNvPr id="128" name="Rectangle 127">
+            <a:extLst>
+              <a:ext uri="{FF2B5EF4-FFF2-40B4-BE49-F238E27FC236}">
+                <a16:creationId xmlns:a16="http://schemas.microsoft.com/office/drawing/2014/main" id="{3AB85B92-4BDD-9D0F-306E-E36314C89391}"/>
+              </a:ext>
+            </a:extLst>
+          </p:cNvPr>
+          <p:cNvSpPr/>
+          <p:nvPr/>
+        </p:nvSpPr>
+        <p:spPr>
+          <a:xfrm>
+            <a:off x="16030757" y="4695910"/>
+            <a:ext cx="370541" cy="940332"/>
+          </a:xfrm>
+          <a:prstGeom prst="rect">
+            <a:avLst/>
+          </a:prstGeom>
+        </p:spPr>
+        <p:style>
+          <a:lnRef idx="2">
+            <a:schemeClr val="dk1">
+              <a:shade val="15000"/>
+            </a:schemeClr>
+          </a:lnRef>
+          <a:fillRef idx="1">
+            <a:schemeClr val="dk1"/>
+          </a:fillRef>
+          <a:effectRef idx="0">
+            <a:schemeClr val="dk1"/>
+          </a:effectRef>
+          <a:fontRef idx="minor">
+            <a:schemeClr val="lt1"/>
+          </a:fontRef>
+        </p:style>
+        <p:txBody>
+          <a:bodyPr rtlCol="0" anchor="ctr"/>
+          <a:lstStyle/>
+          <a:p>
+            <a:pPr algn="ctr"/>
+            <a:endParaRPr lang="en-US"/>
+          </a:p>
+        </p:txBody>
+      </p:sp>
+      <p:cxnSp>
+        <p:nvCxnSpPr>
+          <p:cNvPr id="131" name="Straight Connector 130">
+            <a:extLst>
+              <a:ext uri="{FF2B5EF4-FFF2-40B4-BE49-F238E27FC236}">
+                <a16:creationId xmlns:a16="http://schemas.microsoft.com/office/drawing/2014/main" id="{84F934BA-4C2A-6C16-AD42-685C31B452E5}"/>
+              </a:ext>
+            </a:extLst>
+          </p:cNvPr>
+          <p:cNvCxnSpPr>
+            <a:cxnSpLocks/>
+          </p:cNvCxnSpPr>
+          <p:nvPr/>
+        </p:nvCxnSpPr>
+        <p:spPr>
+          <a:xfrm>
+            <a:off x="17393275" y="5435118"/>
+            <a:ext cx="608107" cy="0"/>
+          </a:xfrm>
+          <a:prstGeom prst="line">
+            <a:avLst/>
+          </a:prstGeom>
+          <a:ln>
+            <a:solidFill>
+              <a:schemeClr val="tx1"/>
+            </a:solidFill>
+            <a:headEnd type="triangle"/>
+          </a:ln>
+        </p:spPr>
+        <p:style>
+          <a:lnRef idx="2">
+            <a:schemeClr val="accent1"/>
+          </a:lnRef>
+          <a:fillRef idx="0">
+            <a:schemeClr val="accent1"/>
+          </a:fillRef>
+          <a:effectRef idx="1">
+            <a:schemeClr val="accent1"/>
+          </a:effectRef>
+          <a:fontRef idx="minor">
+            <a:schemeClr val="tx1"/>
+          </a:fontRef>
+        </p:style>
+      </p:cxnSp>
+      <p:sp>
+        <p:nvSpPr>
+          <p:cNvPr id="139" name="Oval 138">
+            <a:extLst>
+              <a:ext uri="{FF2B5EF4-FFF2-40B4-BE49-F238E27FC236}">
+                <a16:creationId xmlns:a16="http://schemas.microsoft.com/office/drawing/2014/main" id="{E7305ACB-27DF-6560-0EB7-073F0CFACB8D}"/>
+              </a:ext>
+            </a:extLst>
+          </p:cNvPr>
+          <p:cNvSpPr/>
+          <p:nvPr/>
+        </p:nvSpPr>
+        <p:spPr>
+          <a:xfrm>
+            <a:off x="16910825" y="5280335"/>
+            <a:ext cx="355691" cy="355691"/>
+          </a:xfrm>
+          <a:prstGeom prst="ellipse">
+            <a:avLst/>
+          </a:prstGeom>
+          <a:noFill/>
+          <a:ln>
+            <a:prstDash val="sysDot"/>
+          </a:ln>
+        </p:spPr>
+        <p:style>
+          <a:lnRef idx="2">
+            <a:schemeClr val="dk1">
+              <a:shade val="15000"/>
+            </a:schemeClr>
+          </a:lnRef>
+          <a:fillRef idx="1">
+            <a:schemeClr val="dk1"/>
+          </a:fillRef>
+          <a:effectRef idx="0">
+            <a:schemeClr val="dk1"/>
+          </a:effectRef>
+          <a:fontRef idx="minor">
+            <a:schemeClr val="lt1"/>
+          </a:fontRef>
+        </p:style>
+        <p:txBody>
+          <a:bodyPr rtlCol="0" anchor="ctr"/>
+          <a:lstStyle/>
+          <a:p>
+            <a:pPr algn="ctr"/>
+            <a:endParaRPr lang="en-US"/>
+          </a:p>
+        </p:txBody>
+      </p:sp>
+      <p:cxnSp>
+        <p:nvCxnSpPr>
+          <p:cNvPr id="144" name="Straight Connector 143">
+            <a:extLst>
+              <a:ext uri="{FF2B5EF4-FFF2-40B4-BE49-F238E27FC236}">
+                <a16:creationId xmlns:a16="http://schemas.microsoft.com/office/drawing/2014/main" id="{984A4B3B-1708-C3DC-7334-5C25372C76D7}"/>
+              </a:ext>
+            </a:extLst>
+          </p:cNvPr>
+          <p:cNvCxnSpPr>
+            <a:cxnSpLocks/>
+          </p:cNvCxnSpPr>
+          <p:nvPr/>
+        </p:nvCxnSpPr>
+        <p:spPr>
+          <a:xfrm>
+            <a:off x="13524963" y="7453630"/>
+            <a:ext cx="5601694" cy="0"/>
+          </a:xfrm>
+          <a:prstGeom prst="line">
+            <a:avLst/>
+          </a:prstGeom>
+        </p:spPr>
+        <p:style>
+          <a:lnRef idx="2">
+            <a:schemeClr val="dk1"/>
+          </a:lnRef>
+          <a:fillRef idx="0">
+            <a:schemeClr val="dk1"/>
+          </a:fillRef>
+          <a:effectRef idx="1">
+            <a:schemeClr val="dk1"/>
+          </a:effectRef>
+          <a:fontRef idx="minor">
+            <a:schemeClr val="tx1"/>
+          </a:fontRef>
+        </p:style>
+      </p:cxnSp>
+      <p:sp>
+        <p:nvSpPr>
+          <p:cNvPr id="145" name="Rectangle 144">
+            <a:extLst>
+              <a:ext uri="{FF2B5EF4-FFF2-40B4-BE49-F238E27FC236}">
+                <a16:creationId xmlns:a16="http://schemas.microsoft.com/office/drawing/2014/main" id="{1E7F1A34-F3E4-C58D-3654-E059DEF03945}"/>
+              </a:ext>
+            </a:extLst>
+          </p:cNvPr>
+          <p:cNvSpPr/>
+          <p:nvPr/>
+        </p:nvSpPr>
+        <p:spPr>
+          <a:xfrm>
+            <a:off x="16026951" y="6497371"/>
+            <a:ext cx="370541" cy="940332"/>
+          </a:xfrm>
+          <a:prstGeom prst="rect">
+            <a:avLst/>
+          </a:prstGeom>
+        </p:spPr>
+        <p:style>
+          <a:lnRef idx="2">
+            <a:schemeClr val="dk1">
+              <a:shade val="15000"/>
+            </a:schemeClr>
+          </a:lnRef>
+          <a:fillRef idx="1">
+            <a:schemeClr val="dk1"/>
+          </a:fillRef>
+          <a:effectRef idx="0">
+            <a:schemeClr val="dk1"/>
+          </a:effectRef>
+          <a:fontRef idx="minor">
+            <a:schemeClr val="lt1"/>
+          </a:fontRef>
+        </p:style>
+        <p:txBody>
+          <a:bodyPr rtlCol="0" anchor="ctr"/>
+          <a:lstStyle/>
+          <a:p>
+            <a:pPr algn="ctr"/>
+            <a:endParaRPr lang="en-US"/>
+          </a:p>
+        </p:txBody>
+      </p:sp>
+      <p:sp>
+        <p:nvSpPr>
+          <p:cNvPr id="146" name="Freeform: Shape 145">
+            <a:extLst>
+              <a:ext uri="{FF2B5EF4-FFF2-40B4-BE49-F238E27FC236}">
+                <a16:creationId xmlns:a16="http://schemas.microsoft.com/office/drawing/2014/main" id="{1B8919A6-5529-70C3-B922-74FEDE71F3EB}"/>
+              </a:ext>
+            </a:extLst>
+          </p:cNvPr>
+          <p:cNvSpPr/>
+          <p:nvPr/>
+        </p:nvSpPr>
+        <p:spPr>
+          <a:xfrm>
+            <a:off x="15307437" y="6266785"/>
+            <a:ext cx="1786965" cy="985828"/>
+          </a:xfrm>
+          <a:custGeom>
+            <a:avLst/>
+            <a:gdLst>
+              <a:gd name="csX0" fmla="*/ 0 w 1786965"/>
+              <a:gd name="csY0" fmla="*/ 1093699 h 1093699"/>
+              <a:gd name="csX1" fmla="*/ 908424 w 1786965"/>
+              <a:gd name="csY1" fmla="*/ 5 h 1093699"/>
+              <a:gd name="csX2" fmla="*/ 1786965 w 1786965"/>
+              <a:gd name="csY2" fmla="*/ 1081746 h 1093699"/>
+            </a:gdLst>
+            <a:ahLst/>
+            <a:cxnLst>
+              <a:cxn ang="0">
+                <a:pos x="csX0" y="csY0"/>
+              </a:cxn>
+              <a:cxn ang="0">
+                <a:pos x="csX1" y="csY1"/>
+              </a:cxn>
+              <a:cxn ang="0">
+                <a:pos x="csX2" y="csY2"/>
+              </a:cxn>
+            </a:cxnLst>
+            <a:rect l="l" t="t" r="r" b="b"/>
+            <a:pathLst>
+              <a:path w="1786965" h="1093699">
+                <a:moveTo>
+                  <a:pt x="0" y="1093699"/>
+                </a:moveTo>
+                <a:cubicBezTo>
+                  <a:pt x="305298" y="547848"/>
+                  <a:pt x="610597" y="1997"/>
+                  <a:pt x="908424" y="5"/>
+                </a:cubicBezTo>
+                <a:cubicBezTo>
+                  <a:pt x="1206251" y="-1987"/>
+                  <a:pt x="1496608" y="539879"/>
+                  <a:pt x="1786965" y="1081746"/>
+                </a:cubicBezTo>
+              </a:path>
+            </a:pathLst>
+          </a:custGeom>
+          <a:noFill/>
+        </p:spPr>
+        <p:style>
+          <a:lnRef idx="2">
+            <a:schemeClr val="accent1">
+              <a:shade val="15000"/>
+            </a:schemeClr>
+          </a:lnRef>
+          <a:fillRef idx="1">
+            <a:schemeClr val="accent1"/>
+          </a:fillRef>
+          <a:effectRef idx="0">
+            <a:schemeClr val="accent1"/>
+          </a:effectRef>
+          <a:fontRef idx="minor">
+            <a:schemeClr val="lt1"/>
+          </a:fontRef>
+        </p:style>
+        <p:txBody>
+          <a:bodyPr rtlCol="0" anchor="ctr"/>
+          <a:lstStyle/>
+          <a:p>
+            <a:pPr algn="ctr"/>
+            <a:endParaRPr lang="en-US"/>
+          </a:p>
+        </p:txBody>
+      </p:sp>
+      <p:cxnSp>
+        <p:nvCxnSpPr>
+          <p:cNvPr id="147" name="Straight Connector 146">
+            <a:extLst>
+              <a:ext uri="{FF2B5EF4-FFF2-40B4-BE49-F238E27FC236}">
+                <a16:creationId xmlns:a16="http://schemas.microsoft.com/office/drawing/2014/main" id="{99BEC867-5264-6458-A26D-F7765D22D509}"/>
+              </a:ext>
+            </a:extLst>
+          </p:cNvPr>
+          <p:cNvCxnSpPr>
+            <a:cxnSpLocks/>
+          </p:cNvCxnSpPr>
+          <p:nvPr/>
+        </p:nvCxnSpPr>
+        <p:spPr>
+          <a:xfrm>
+            <a:off x="17094397" y="7236579"/>
+            <a:ext cx="903174" cy="0"/>
+          </a:xfrm>
+          <a:prstGeom prst="line">
+            <a:avLst/>
+          </a:prstGeom>
+          <a:ln>
+            <a:solidFill>
+              <a:schemeClr val="tx1"/>
+            </a:solidFill>
+          </a:ln>
+        </p:spPr>
+        <p:style>
+          <a:lnRef idx="2">
+            <a:schemeClr val="accent1"/>
+          </a:lnRef>
+          <a:fillRef idx="0">
+            <a:schemeClr val="accent1"/>
+          </a:fillRef>
+          <a:effectRef idx="1">
+            <a:schemeClr val="accent1"/>
+          </a:effectRef>
+          <a:fontRef idx="minor">
+            <a:schemeClr val="tx1"/>
+          </a:fontRef>
+        </p:style>
+      </p:cxnSp>
+      <p:cxnSp>
+        <p:nvCxnSpPr>
+          <p:cNvPr id="150" name="Straight Arrow Connector 149">
+            <a:extLst>
+              <a:ext uri="{FF2B5EF4-FFF2-40B4-BE49-F238E27FC236}">
+                <a16:creationId xmlns:a16="http://schemas.microsoft.com/office/drawing/2014/main" id="{4A524302-0595-9245-091E-9C009C7151CA}"/>
+              </a:ext>
+            </a:extLst>
+          </p:cNvPr>
+          <p:cNvCxnSpPr>
+            <a:cxnSpLocks/>
+            <a:stCxn id="146" idx="0"/>
+          </p:cNvCxnSpPr>
+          <p:nvPr/>
+        </p:nvCxnSpPr>
+        <p:spPr>
+          <a:xfrm flipH="1" flipV="1">
+            <a:off x="14729590" y="7236579"/>
+            <a:ext cx="577847" cy="16034"/>
+          </a:xfrm>
+          <a:prstGeom prst="straightConnector1">
+            <a:avLst/>
+          </a:prstGeom>
+          <a:ln>
+            <a:solidFill>
+              <a:schemeClr val="tx1"/>
+            </a:solidFill>
+            <a:tailEnd type="triangle"/>
+          </a:ln>
+        </p:spPr>
+        <p:style>
+          <a:lnRef idx="2">
+            <a:schemeClr val="accent1"/>
+          </a:lnRef>
+          <a:fillRef idx="0">
+            <a:schemeClr val="accent1"/>
+          </a:fillRef>
+          <a:effectRef idx="1">
+            <a:schemeClr val="accent1"/>
+          </a:effectRef>
+          <a:fontRef idx="minor">
+            <a:schemeClr val="tx1"/>
+          </a:fontRef>
+        </p:style>
+      </p:cxnSp>
+      <p:sp>
+        <p:nvSpPr>
+          <p:cNvPr id="151" name="Oval 150">
+            <a:extLst>
+              <a:ext uri="{FF2B5EF4-FFF2-40B4-BE49-F238E27FC236}">
+                <a16:creationId xmlns:a16="http://schemas.microsoft.com/office/drawing/2014/main" id="{3CECB18C-C12A-327B-88BA-64AC20DEC2CF}"/>
+              </a:ext>
+            </a:extLst>
+          </p:cNvPr>
+          <p:cNvSpPr/>
+          <p:nvPr/>
+        </p:nvSpPr>
+        <p:spPr>
+          <a:xfrm>
+            <a:off x="18094840" y="7081796"/>
+            <a:ext cx="355691" cy="355691"/>
+          </a:xfrm>
+          <a:prstGeom prst="ellipse">
+            <a:avLst/>
+          </a:prstGeom>
+          <a:solidFill>
+            <a:schemeClr val="tx1"/>
+          </a:solidFill>
+          <a:ln>
+            <a:solidFill>
+              <a:schemeClr val="tx1"/>
+            </a:solidFill>
+            <a:prstDash val="solid"/>
+          </a:ln>
+        </p:spPr>
+        <p:style>
+          <a:lnRef idx="2">
+            <a:schemeClr val="dk1">
+              <a:shade val="15000"/>
+            </a:schemeClr>
+          </a:lnRef>
+          <a:fillRef idx="1">
+            <a:schemeClr val="dk1"/>
+          </a:fillRef>
+          <a:effectRef idx="0">
+            <a:schemeClr val="dk1"/>
+          </a:effectRef>
+          <a:fontRef idx="minor">
+            <a:schemeClr val="lt1"/>
+          </a:fontRef>
+        </p:style>
+        <p:txBody>
+          <a:bodyPr rtlCol="0" anchor="ctr"/>
+          <a:lstStyle/>
+          <a:p>
+            <a:pPr algn="ctr"/>
+            <a:endParaRPr lang="en-US"/>
+          </a:p>
+        </p:txBody>
+      </p:sp>
+      <p:sp>
+        <p:nvSpPr>
+          <p:cNvPr id="152" name="Oval 151">
+            <a:extLst>
+              <a:ext uri="{FF2B5EF4-FFF2-40B4-BE49-F238E27FC236}">
+                <a16:creationId xmlns:a16="http://schemas.microsoft.com/office/drawing/2014/main" id="{769C8F7E-8F67-2DD8-AF9F-649B91A73EA1}"/>
+              </a:ext>
+            </a:extLst>
+          </p:cNvPr>
+          <p:cNvSpPr/>
+          <p:nvPr/>
+        </p:nvSpPr>
+        <p:spPr>
+          <a:xfrm>
+            <a:off x="16907019" y="7081796"/>
+            <a:ext cx="355691" cy="355691"/>
+          </a:xfrm>
+          <a:prstGeom prst="ellipse">
+            <a:avLst/>
+          </a:prstGeom>
+          <a:noFill/>
+          <a:ln>
+            <a:prstDash val="sysDot"/>
+          </a:ln>
+        </p:spPr>
+        <p:style>
+          <a:lnRef idx="2">
+            <a:schemeClr val="dk1">
+              <a:shade val="15000"/>
+            </a:schemeClr>
+          </a:lnRef>
+          <a:fillRef idx="1">
+            <a:schemeClr val="dk1"/>
+          </a:fillRef>
+          <a:effectRef idx="0">
+            <a:schemeClr val="dk1"/>
+          </a:effectRef>
+          <a:fontRef idx="minor">
+            <a:schemeClr val="lt1"/>
+          </a:fontRef>
+        </p:style>
+        <p:txBody>
+          <a:bodyPr rtlCol="0" anchor="ctr"/>
+          <a:lstStyle/>
+          <a:p>
+            <a:pPr algn="ctr"/>
+            <a:endParaRPr lang="en-US"/>
+          </a:p>
+        </p:txBody>
+      </p:sp>
+      <p:sp>
+        <p:nvSpPr>
+          <p:cNvPr id="153" name="Oval 152">
+            <a:extLst>
+              <a:ext uri="{FF2B5EF4-FFF2-40B4-BE49-F238E27FC236}">
+                <a16:creationId xmlns:a16="http://schemas.microsoft.com/office/drawing/2014/main" id="{10237503-8A35-54A6-5208-B8A9CA7C2EDC}"/>
+              </a:ext>
+            </a:extLst>
+          </p:cNvPr>
+          <p:cNvSpPr/>
+          <p:nvPr/>
+        </p:nvSpPr>
+        <p:spPr>
+          <a:xfrm>
+            <a:off x="14363535" y="7081795"/>
+            <a:ext cx="355691" cy="355691"/>
+          </a:xfrm>
+          <a:prstGeom prst="ellipse">
+            <a:avLst/>
+          </a:prstGeom>
+          <a:noFill/>
+          <a:ln>
+            <a:prstDash val="sysDot"/>
+          </a:ln>
+        </p:spPr>
+        <p:style>
+          <a:lnRef idx="2">
+            <a:schemeClr val="dk1">
+              <a:shade val="15000"/>
+            </a:schemeClr>
+          </a:lnRef>
+          <a:fillRef idx="1">
+            <a:schemeClr val="dk1"/>
+          </a:fillRef>
+          <a:effectRef idx="0">
+            <a:schemeClr val="dk1"/>
+          </a:effectRef>
+          <a:fontRef idx="minor">
+            <a:schemeClr val="lt1"/>
+          </a:fontRef>
+        </p:style>
+        <p:txBody>
+          <a:bodyPr rtlCol="0" anchor="ctr"/>
+          <a:lstStyle/>
+          <a:p>
+            <a:pPr algn="ctr"/>
+            <a:endParaRPr lang="en-US"/>
+          </a:p>
+        </p:txBody>
+      </p:sp>
+      <p:sp>
+        <p:nvSpPr>
+          <p:cNvPr id="154" name="Oval 153">
+            <a:extLst>
+              <a:ext uri="{FF2B5EF4-FFF2-40B4-BE49-F238E27FC236}">
+                <a16:creationId xmlns:a16="http://schemas.microsoft.com/office/drawing/2014/main" id="{33B0DE4C-F494-707C-5A7D-A8C7072DE63B}"/>
+              </a:ext>
+            </a:extLst>
+          </p:cNvPr>
+          <p:cNvSpPr/>
+          <p:nvPr/>
+        </p:nvSpPr>
+        <p:spPr>
+          <a:xfrm>
+            <a:off x="13521162" y="6714336"/>
+            <a:ext cx="739299" cy="739299"/>
+          </a:xfrm>
+          <a:prstGeom prst="ellipse">
+            <a:avLst/>
+          </a:prstGeom>
+          <a:solidFill>
+            <a:schemeClr val="tx1"/>
+          </a:solidFill>
+          <a:ln>
+            <a:solidFill>
+              <a:schemeClr val="tx1"/>
+            </a:solidFill>
+            <a:prstDash val="solid"/>
+          </a:ln>
+        </p:spPr>
+        <p:style>
+          <a:lnRef idx="2">
+            <a:schemeClr val="dk1">
+              <a:shade val="15000"/>
+            </a:schemeClr>
+          </a:lnRef>
+          <a:fillRef idx="1">
+            <a:schemeClr val="dk1"/>
+          </a:fillRef>
+          <a:effectRef idx="0">
+            <a:schemeClr val="dk1"/>
+          </a:effectRef>
+          <a:fontRef idx="minor">
+            <a:schemeClr val="lt1"/>
+          </a:fontRef>
+        </p:style>
+        <p:txBody>
+          <a:bodyPr rtlCol="0" anchor="ctr"/>
+          <a:lstStyle/>
+          <a:p>
+            <a:pPr algn="ctr"/>
+            <a:endParaRPr lang="en-US"/>
+          </a:p>
+        </p:txBody>
+      </p:sp>
+      <p:cxnSp>
+        <p:nvCxnSpPr>
+          <p:cNvPr id="155" name="Straight Connector 154">
+            <a:extLst>
+              <a:ext uri="{FF2B5EF4-FFF2-40B4-BE49-F238E27FC236}">
+                <a16:creationId xmlns:a16="http://schemas.microsoft.com/office/drawing/2014/main" id="{7A06A7FE-840A-3844-BCAF-7090CABE0F96}"/>
+              </a:ext>
+            </a:extLst>
+          </p:cNvPr>
+          <p:cNvCxnSpPr>
+            <a:cxnSpLocks/>
+          </p:cNvCxnSpPr>
+          <p:nvPr/>
+        </p:nvCxnSpPr>
+        <p:spPr>
+          <a:xfrm>
+            <a:off x="16540761" y="11360143"/>
+            <a:ext cx="5601694" cy="0"/>
+          </a:xfrm>
+          <a:prstGeom prst="line">
+            <a:avLst/>
+          </a:prstGeom>
+        </p:spPr>
+        <p:style>
+          <a:lnRef idx="2">
+            <a:schemeClr val="dk1"/>
+          </a:lnRef>
+          <a:fillRef idx="0">
+            <a:schemeClr val="dk1"/>
+          </a:fillRef>
+          <a:effectRef idx="1">
+            <a:schemeClr val="dk1"/>
+          </a:effectRef>
+          <a:fontRef idx="minor">
+            <a:schemeClr val="tx1"/>
+          </a:fontRef>
+        </p:style>
+      </p:cxnSp>
+      <p:sp>
+        <p:nvSpPr>
+          <p:cNvPr id="156" name="Freeform: Shape 155">
+            <a:extLst>
+              <a:ext uri="{FF2B5EF4-FFF2-40B4-BE49-F238E27FC236}">
+                <a16:creationId xmlns:a16="http://schemas.microsoft.com/office/drawing/2014/main" id="{4026DCB8-EC68-B67C-0518-F42E1BB8884B}"/>
+              </a:ext>
+            </a:extLst>
+          </p:cNvPr>
+          <p:cNvSpPr/>
+          <p:nvPr/>
+        </p:nvSpPr>
+        <p:spPr>
+          <a:xfrm>
+            <a:off x="18323235" y="10173298"/>
+            <a:ext cx="1786965" cy="985828"/>
+          </a:xfrm>
+          <a:custGeom>
+            <a:avLst/>
+            <a:gdLst>
+              <a:gd name="csX0" fmla="*/ 0 w 1786965"/>
+              <a:gd name="csY0" fmla="*/ 1093699 h 1093699"/>
+              <a:gd name="csX1" fmla="*/ 908424 w 1786965"/>
+              <a:gd name="csY1" fmla="*/ 5 h 1093699"/>
+              <a:gd name="csX2" fmla="*/ 1786965 w 1786965"/>
+              <a:gd name="csY2" fmla="*/ 1081746 h 1093699"/>
+            </a:gdLst>
+            <a:ahLst/>
+            <a:cxnLst>
+              <a:cxn ang="0">
+                <a:pos x="csX0" y="csY0"/>
+              </a:cxn>
+              <a:cxn ang="0">
+                <a:pos x="csX1" y="csY1"/>
+              </a:cxn>
+              <a:cxn ang="0">
+                <a:pos x="csX2" y="csY2"/>
+              </a:cxn>
+            </a:cxnLst>
+            <a:rect l="l" t="t" r="r" b="b"/>
+            <a:pathLst>
+              <a:path w="1786965" h="1093699">
+                <a:moveTo>
+                  <a:pt x="0" y="1093699"/>
+                </a:moveTo>
+                <a:cubicBezTo>
+                  <a:pt x="305298" y="547848"/>
+                  <a:pt x="610597" y="1997"/>
+                  <a:pt x="908424" y="5"/>
+                </a:cubicBezTo>
+                <a:cubicBezTo>
+                  <a:pt x="1206251" y="-1987"/>
+                  <a:pt x="1496608" y="539879"/>
+                  <a:pt x="1786965" y="1081746"/>
+                </a:cubicBezTo>
+              </a:path>
+            </a:pathLst>
+          </a:custGeom>
+          <a:noFill/>
+        </p:spPr>
+        <p:style>
+          <a:lnRef idx="2">
+            <a:schemeClr val="accent1">
+              <a:shade val="15000"/>
+            </a:schemeClr>
+          </a:lnRef>
+          <a:fillRef idx="1">
+            <a:schemeClr val="accent1"/>
+          </a:fillRef>
+          <a:effectRef idx="0">
+            <a:schemeClr val="accent1"/>
+          </a:effectRef>
+          <a:fontRef idx="minor">
+            <a:schemeClr val="lt1"/>
+          </a:fontRef>
+        </p:style>
+        <p:txBody>
+          <a:bodyPr rtlCol="0" anchor="ctr"/>
+          <a:lstStyle/>
+          <a:p>
+            <a:pPr algn="ctr"/>
+            <a:endParaRPr lang="en-US"/>
+          </a:p>
+        </p:txBody>
+      </p:sp>
+      <p:cxnSp>
+        <p:nvCxnSpPr>
+          <p:cNvPr id="157" name="Straight Connector 156">
+            <a:extLst>
+              <a:ext uri="{FF2B5EF4-FFF2-40B4-BE49-F238E27FC236}">
+                <a16:creationId xmlns:a16="http://schemas.microsoft.com/office/drawing/2014/main" id="{8C54331E-8987-DBC6-A569-6D0A90D88F37}"/>
+              </a:ext>
+            </a:extLst>
+          </p:cNvPr>
+          <p:cNvCxnSpPr>
+            <a:cxnSpLocks/>
+          </p:cNvCxnSpPr>
+          <p:nvPr/>
+        </p:nvCxnSpPr>
+        <p:spPr>
+          <a:xfrm>
+            <a:off x="20110195" y="11143092"/>
+            <a:ext cx="903174" cy="0"/>
+          </a:xfrm>
+          <a:prstGeom prst="line">
+            <a:avLst/>
+          </a:prstGeom>
+          <a:ln>
+            <a:solidFill>
+              <a:schemeClr val="tx1"/>
+            </a:solidFill>
+          </a:ln>
+        </p:spPr>
+        <p:style>
+          <a:lnRef idx="2">
+            <a:schemeClr val="accent1"/>
+          </a:lnRef>
+          <a:fillRef idx="0">
+            <a:schemeClr val="accent1"/>
+          </a:fillRef>
+          <a:effectRef idx="1">
+            <a:schemeClr val="accent1"/>
+          </a:effectRef>
+          <a:fontRef idx="minor">
+            <a:schemeClr val="tx1"/>
+          </a:fontRef>
+        </p:style>
+      </p:cxnSp>
+      <p:cxnSp>
+        <p:nvCxnSpPr>
+          <p:cNvPr id="160" name="Straight Arrow Connector 159">
+            <a:extLst>
+              <a:ext uri="{FF2B5EF4-FFF2-40B4-BE49-F238E27FC236}">
+                <a16:creationId xmlns:a16="http://schemas.microsoft.com/office/drawing/2014/main" id="{A43AF2D1-EFB3-7EDC-6B8B-0735E30FF4EF}"/>
+              </a:ext>
+            </a:extLst>
+          </p:cNvPr>
+          <p:cNvCxnSpPr>
+            <a:cxnSpLocks/>
+            <a:stCxn id="156" idx="0"/>
+          </p:cNvCxnSpPr>
+          <p:nvPr/>
+        </p:nvCxnSpPr>
+        <p:spPr>
+          <a:xfrm flipH="1" flipV="1">
+            <a:off x="17745388" y="11143092"/>
+            <a:ext cx="577847" cy="16034"/>
+          </a:xfrm>
+          <a:prstGeom prst="straightConnector1">
+            <a:avLst/>
+          </a:prstGeom>
+          <a:ln>
+            <a:solidFill>
+              <a:schemeClr val="tx1"/>
+            </a:solidFill>
+            <a:tailEnd type="triangle"/>
+          </a:ln>
+        </p:spPr>
+        <p:style>
+          <a:lnRef idx="2">
+            <a:schemeClr val="accent1"/>
+          </a:lnRef>
+          <a:fillRef idx="0">
+            <a:schemeClr val="accent1"/>
+          </a:fillRef>
+          <a:effectRef idx="1">
+            <a:schemeClr val="accent1"/>
+          </a:effectRef>
+          <a:fontRef idx="minor">
+            <a:schemeClr val="tx1"/>
+          </a:fontRef>
+        </p:style>
+      </p:cxnSp>
+      <p:sp>
+        <p:nvSpPr>
+          <p:cNvPr id="161" name="Oval 160">
+            <a:extLst>
+              <a:ext uri="{FF2B5EF4-FFF2-40B4-BE49-F238E27FC236}">
+                <a16:creationId xmlns:a16="http://schemas.microsoft.com/office/drawing/2014/main" id="{1FE3C393-85E0-3C59-08D3-5D98E7358BC6}"/>
+              </a:ext>
+            </a:extLst>
+          </p:cNvPr>
+          <p:cNvSpPr/>
+          <p:nvPr/>
+        </p:nvSpPr>
+        <p:spPr>
+          <a:xfrm>
+            <a:off x="21110638" y="10988309"/>
+            <a:ext cx="355691" cy="355691"/>
+          </a:xfrm>
+          <a:prstGeom prst="ellipse">
+            <a:avLst/>
+          </a:prstGeom>
+          <a:solidFill>
+            <a:schemeClr val="tx1"/>
+          </a:solidFill>
+          <a:ln>
+            <a:solidFill>
+              <a:schemeClr val="tx1"/>
+            </a:solidFill>
+            <a:prstDash val="solid"/>
+          </a:ln>
+        </p:spPr>
+        <p:style>
+          <a:lnRef idx="2">
+            <a:schemeClr val="dk1">
+              <a:shade val="15000"/>
+            </a:schemeClr>
+          </a:lnRef>
+          <a:fillRef idx="1">
+            <a:schemeClr val="dk1"/>
+          </a:fillRef>
+          <a:effectRef idx="0">
+            <a:schemeClr val="dk1"/>
+          </a:effectRef>
+          <a:fontRef idx="minor">
+            <a:schemeClr val="lt1"/>
+          </a:fontRef>
+        </p:style>
+        <p:txBody>
+          <a:bodyPr rtlCol="0" anchor="ctr"/>
+          <a:lstStyle/>
+          <a:p>
+            <a:pPr algn="ctr"/>
+            <a:endParaRPr lang="en-US"/>
+          </a:p>
+        </p:txBody>
+      </p:sp>
+      <p:sp>
+        <p:nvSpPr>
+          <p:cNvPr id="162" name="Oval 161">
+            <a:extLst>
+              <a:ext uri="{FF2B5EF4-FFF2-40B4-BE49-F238E27FC236}">
+                <a16:creationId xmlns:a16="http://schemas.microsoft.com/office/drawing/2014/main" id="{FC016609-4C7D-AF10-C7D3-B83BEFE55A3F}"/>
+              </a:ext>
+            </a:extLst>
+          </p:cNvPr>
+          <p:cNvSpPr/>
+          <p:nvPr/>
+        </p:nvSpPr>
+        <p:spPr>
+          <a:xfrm>
+            <a:off x="17379333" y="10988308"/>
+            <a:ext cx="355691" cy="355691"/>
+          </a:xfrm>
+          <a:prstGeom prst="ellipse">
+            <a:avLst/>
+          </a:prstGeom>
+          <a:noFill/>
+          <a:ln>
+            <a:prstDash val="sysDot"/>
+          </a:ln>
+        </p:spPr>
+        <p:style>
+          <a:lnRef idx="2">
+            <a:schemeClr val="dk1">
+              <a:shade val="15000"/>
+            </a:schemeClr>
+          </a:lnRef>
+          <a:fillRef idx="1">
+            <a:schemeClr val="dk1"/>
+          </a:fillRef>
+          <a:effectRef idx="0">
+            <a:schemeClr val="dk1"/>
+          </a:effectRef>
+          <a:fontRef idx="minor">
+            <a:schemeClr val="lt1"/>
+          </a:fontRef>
+        </p:style>
+        <p:txBody>
+          <a:bodyPr rtlCol="0" anchor="ctr"/>
+          <a:lstStyle/>
+          <a:p>
+            <a:pPr algn="ctr"/>
+            <a:endParaRPr lang="en-US"/>
+          </a:p>
+        </p:txBody>
+      </p:sp>
+      <p:sp>
+        <p:nvSpPr>
+          <p:cNvPr id="163" name="Oval 162">
+            <a:extLst>
+              <a:ext uri="{FF2B5EF4-FFF2-40B4-BE49-F238E27FC236}">
+                <a16:creationId xmlns:a16="http://schemas.microsoft.com/office/drawing/2014/main" id="{1DB8F56C-FD2B-5D5C-6FC7-2FF707EFA41D}"/>
+              </a:ext>
+            </a:extLst>
+          </p:cNvPr>
+          <p:cNvSpPr/>
+          <p:nvPr/>
+        </p:nvSpPr>
+        <p:spPr>
+          <a:xfrm>
+            <a:off x="16536960" y="10620849"/>
+            <a:ext cx="739299" cy="739299"/>
+          </a:xfrm>
+          <a:prstGeom prst="ellipse">
+            <a:avLst/>
+          </a:prstGeom>
+          <a:solidFill>
+            <a:schemeClr val="tx1"/>
+          </a:solidFill>
+          <a:ln>
+            <a:solidFill>
+              <a:schemeClr val="tx1"/>
+            </a:solidFill>
+            <a:prstDash val="solid"/>
+          </a:ln>
+        </p:spPr>
+        <p:style>
+          <a:lnRef idx="2">
+            <a:schemeClr val="dk1">
+              <a:shade val="15000"/>
+            </a:schemeClr>
+          </a:lnRef>
+          <a:fillRef idx="1">
+            <a:schemeClr val="dk1"/>
+          </a:fillRef>
+          <a:effectRef idx="0">
+            <a:schemeClr val="dk1"/>
+          </a:effectRef>
+          <a:fontRef idx="minor">
+            <a:schemeClr val="lt1"/>
+          </a:fontRef>
+        </p:style>
+        <p:txBody>
+          <a:bodyPr rtlCol="0" anchor="ctr"/>
+          <a:lstStyle/>
+          <a:p>
+            <a:pPr algn="ctr"/>
+            <a:endParaRPr lang="en-US"/>
+          </a:p>
+        </p:txBody>
+      </p:sp>
+      <p:cxnSp>
+        <p:nvCxnSpPr>
+          <p:cNvPr id="164" name="Straight Connector 163">
+            <a:extLst>
+              <a:ext uri="{FF2B5EF4-FFF2-40B4-BE49-F238E27FC236}">
+                <a16:creationId xmlns:a16="http://schemas.microsoft.com/office/drawing/2014/main" id="{8F7C610B-B81B-CA11-8BBD-DD57CF62F6EB}"/>
+              </a:ext>
+            </a:extLst>
+          </p:cNvPr>
+          <p:cNvCxnSpPr>
+            <a:cxnSpLocks/>
+          </p:cNvCxnSpPr>
+          <p:nvPr/>
+        </p:nvCxnSpPr>
+        <p:spPr>
+          <a:xfrm>
+            <a:off x="16540761" y="9369975"/>
+            <a:ext cx="5601694" cy="0"/>
+          </a:xfrm>
+          <a:prstGeom prst="line">
+            <a:avLst/>
+          </a:prstGeom>
+        </p:spPr>
+        <p:style>
+          <a:lnRef idx="2">
+            <a:schemeClr val="dk1"/>
+          </a:lnRef>
+          <a:fillRef idx="0">
+            <a:schemeClr val="dk1"/>
+          </a:fillRef>
+          <a:effectRef idx="1">
+            <a:schemeClr val="dk1"/>
+          </a:effectRef>
+          <a:fontRef idx="minor">
+            <a:schemeClr val="tx1"/>
+          </a:fontRef>
+        </p:style>
+      </p:cxnSp>
+      <p:sp>
+        <p:nvSpPr>
+          <p:cNvPr id="165" name="Oval 164">
+            <a:extLst>
+              <a:ext uri="{FF2B5EF4-FFF2-40B4-BE49-F238E27FC236}">
+                <a16:creationId xmlns:a16="http://schemas.microsoft.com/office/drawing/2014/main" id="{8471D9F7-5D86-5AD3-D099-607449EB1356}"/>
+              </a:ext>
+            </a:extLst>
+          </p:cNvPr>
+          <p:cNvSpPr/>
+          <p:nvPr/>
+        </p:nvSpPr>
+        <p:spPr>
+          <a:xfrm>
+            <a:off x="21110638" y="8998141"/>
+            <a:ext cx="355691" cy="355691"/>
+          </a:xfrm>
+          <a:prstGeom prst="ellipse">
+            <a:avLst/>
+          </a:prstGeom>
+          <a:solidFill>
+            <a:schemeClr val="tx1"/>
+          </a:solidFill>
+          <a:ln>
+            <a:solidFill>
+              <a:schemeClr val="tx1"/>
+            </a:solidFill>
+            <a:prstDash val="solid"/>
+          </a:ln>
+        </p:spPr>
+        <p:style>
+          <a:lnRef idx="2">
+            <a:schemeClr val="dk1">
+              <a:shade val="15000"/>
+            </a:schemeClr>
+          </a:lnRef>
+          <a:fillRef idx="1">
+            <a:schemeClr val="dk1"/>
+          </a:fillRef>
+          <a:effectRef idx="0">
+            <a:schemeClr val="dk1"/>
+          </a:effectRef>
+          <a:fontRef idx="minor">
+            <a:schemeClr val="lt1"/>
+          </a:fontRef>
+        </p:style>
+        <p:txBody>
+          <a:bodyPr rtlCol="0" anchor="ctr"/>
+          <a:lstStyle/>
+          <a:p>
+            <a:pPr algn="ctr"/>
+            <a:endParaRPr lang="en-US"/>
+          </a:p>
+        </p:txBody>
+      </p:sp>
+      <p:sp>
+        <p:nvSpPr>
+          <p:cNvPr id="166" name="Oval 165">
+            <a:extLst>
+              <a:ext uri="{FF2B5EF4-FFF2-40B4-BE49-F238E27FC236}">
+                <a16:creationId xmlns:a16="http://schemas.microsoft.com/office/drawing/2014/main" id="{90CDC45A-97E9-2447-5CFA-B368F9D51DD2}"/>
+              </a:ext>
+            </a:extLst>
+          </p:cNvPr>
+          <p:cNvSpPr/>
+          <p:nvPr/>
+        </p:nvSpPr>
+        <p:spPr>
+          <a:xfrm>
+            <a:off x="17379333" y="8998140"/>
+            <a:ext cx="355691" cy="355691"/>
+          </a:xfrm>
+          <a:prstGeom prst="ellipse">
+            <a:avLst/>
+          </a:prstGeom>
+          <a:noFill/>
+          <a:ln>
+            <a:prstDash val="sysDot"/>
+          </a:ln>
+        </p:spPr>
+        <p:style>
+          <a:lnRef idx="2">
+            <a:schemeClr val="dk1">
+              <a:shade val="15000"/>
+            </a:schemeClr>
+          </a:lnRef>
+          <a:fillRef idx="1">
+            <a:schemeClr val="dk1"/>
+          </a:fillRef>
+          <a:effectRef idx="0">
+            <a:schemeClr val="dk1"/>
+          </a:effectRef>
+          <a:fontRef idx="minor">
+            <a:schemeClr val="lt1"/>
+          </a:fontRef>
+        </p:style>
+        <p:txBody>
+          <a:bodyPr rtlCol="0" anchor="ctr"/>
+          <a:lstStyle/>
+          <a:p>
+            <a:pPr algn="ctr"/>
+            <a:endParaRPr lang="en-US"/>
+          </a:p>
+        </p:txBody>
+      </p:sp>
+      <p:sp>
+        <p:nvSpPr>
+          <p:cNvPr id="167" name="Oval 166">
+            <a:extLst>
+              <a:ext uri="{FF2B5EF4-FFF2-40B4-BE49-F238E27FC236}">
+                <a16:creationId xmlns:a16="http://schemas.microsoft.com/office/drawing/2014/main" id="{63C1A847-630B-71FC-78E2-A4469E9B7421}"/>
+              </a:ext>
+            </a:extLst>
+          </p:cNvPr>
+          <p:cNvSpPr/>
+          <p:nvPr/>
+        </p:nvSpPr>
+        <p:spPr>
+          <a:xfrm>
+            <a:off x="16536960" y="8630681"/>
+            <a:ext cx="739299" cy="739299"/>
+          </a:xfrm>
+          <a:prstGeom prst="ellipse">
+            <a:avLst/>
+          </a:prstGeom>
+          <a:solidFill>
+            <a:schemeClr val="tx1"/>
+          </a:solidFill>
+          <a:ln>
+            <a:solidFill>
+              <a:schemeClr val="tx1"/>
+            </a:solidFill>
+            <a:prstDash val="solid"/>
+          </a:ln>
+        </p:spPr>
+        <p:style>
+          <a:lnRef idx="2">
+            <a:schemeClr val="dk1">
+              <a:shade val="15000"/>
+            </a:schemeClr>
+          </a:lnRef>
+          <a:fillRef idx="1">
+            <a:schemeClr val="dk1"/>
+          </a:fillRef>
+          <a:effectRef idx="0">
+            <a:schemeClr val="dk1"/>
+          </a:effectRef>
+          <a:fontRef idx="minor">
+            <a:schemeClr val="lt1"/>
+          </a:fontRef>
+        </p:style>
+        <p:txBody>
+          <a:bodyPr rtlCol="0" anchor="ctr"/>
+          <a:lstStyle/>
+          <a:p>
+            <a:pPr algn="ctr"/>
+            <a:endParaRPr lang="en-US"/>
+          </a:p>
+        </p:txBody>
+      </p:sp>
+      <p:cxnSp>
+        <p:nvCxnSpPr>
+          <p:cNvPr id="168" name="Straight Arrow Connector 167">
+            <a:extLst>
+              <a:ext uri="{FF2B5EF4-FFF2-40B4-BE49-F238E27FC236}">
+                <a16:creationId xmlns:a16="http://schemas.microsoft.com/office/drawing/2014/main" id="{B5965827-A1C8-F497-20CB-31EE5C01720B}"/>
+              </a:ext>
+            </a:extLst>
+          </p:cNvPr>
+          <p:cNvCxnSpPr>
+            <a:cxnSpLocks/>
+          </p:cNvCxnSpPr>
+          <p:nvPr/>
+        </p:nvCxnSpPr>
+        <p:spPr>
+          <a:xfrm flipH="1">
+            <a:off x="17857994" y="9175980"/>
+            <a:ext cx="3143624" cy="0"/>
+          </a:xfrm>
+          <a:prstGeom prst="straightConnector1">
+            <a:avLst/>
+          </a:prstGeom>
+          <a:ln>
+            <a:tailEnd type="triangle"/>
+          </a:ln>
+        </p:spPr>
+        <p:style>
+          <a:lnRef idx="2">
+            <a:schemeClr val="dk1"/>
+          </a:lnRef>
+          <a:fillRef idx="0">
+            <a:schemeClr val="dk1"/>
+          </a:fillRef>
+          <a:effectRef idx="1">
+            <a:schemeClr val="dk1"/>
+          </a:effectRef>
+          <a:fontRef idx="minor">
+            <a:schemeClr val="tx1"/>
+          </a:fontRef>
+        </p:style>
+      </p:cxnSp>
+      <p:sp>
+        <p:nvSpPr>
+          <p:cNvPr id="169" name="Oval 168">
+            <a:extLst>
+              <a:ext uri="{FF2B5EF4-FFF2-40B4-BE49-F238E27FC236}">
+                <a16:creationId xmlns:a16="http://schemas.microsoft.com/office/drawing/2014/main" id="{5C57FC76-4C56-B395-9A70-A17ED64DBE25}"/>
+              </a:ext>
+            </a:extLst>
+          </p:cNvPr>
+          <p:cNvSpPr/>
+          <p:nvPr/>
+        </p:nvSpPr>
+        <p:spPr>
+          <a:xfrm>
+            <a:off x="13530990" y="4908115"/>
+            <a:ext cx="739299" cy="739299"/>
+          </a:xfrm>
+          <a:prstGeom prst="ellipse">
+            <a:avLst/>
+          </a:prstGeom>
+          <a:solidFill>
+            <a:schemeClr val="tx1"/>
+          </a:solidFill>
+          <a:ln>
+            <a:solidFill>
+              <a:schemeClr val="tx1"/>
+            </a:solidFill>
+            <a:prstDash val="solid"/>
+          </a:ln>
+        </p:spPr>
+        <p:style>
+          <a:lnRef idx="2">
+            <a:schemeClr val="dk1">
+              <a:shade val="15000"/>
+            </a:schemeClr>
+          </a:lnRef>
+          <a:fillRef idx="1">
+            <a:schemeClr val="dk1"/>
+          </a:fillRef>
+          <a:effectRef idx="0">
+            <a:schemeClr val="dk1"/>
+          </a:effectRef>
+          <a:fontRef idx="minor">
+            <a:schemeClr val="lt1"/>
+          </a:fontRef>
+        </p:style>
+        <p:txBody>
+          <a:bodyPr rtlCol="0" anchor="ctr"/>
+          <a:lstStyle/>
+          <a:p>
+            <a:pPr algn="ctr"/>
+            <a:endParaRPr lang="en-US"/>
+          </a:p>
+        </p:txBody>
+      </p:sp>
+      <p:sp>
+        <p:nvSpPr>
+          <p:cNvPr id="170" name="Oval 169">
+            <a:extLst>
+              <a:ext uri="{FF2B5EF4-FFF2-40B4-BE49-F238E27FC236}">
+                <a16:creationId xmlns:a16="http://schemas.microsoft.com/office/drawing/2014/main" id="{7D6B9FDE-6728-BE52-F5C4-EBB504B6BCFE}"/>
+              </a:ext>
+            </a:extLst>
+          </p:cNvPr>
+          <p:cNvSpPr/>
+          <p:nvPr/>
+        </p:nvSpPr>
+        <p:spPr>
+          <a:xfrm>
+            <a:off x="18088953" y="5293933"/>
+            <a:ext cx="355691" cy="355691"/>
+          </a:xfrm>
+          <a:prstGeom prst="ellipse">
+            <a:avLst/>
+          </a:prstGeom>
+          <a:solidFill>
+            <a:schemeClr val="tx1"/>
+          </a:solidFill>
+          <a:ln>
+            <a:solidFill>
+              <a:schemeClr val="tx1"/>
+            </a:solidFill>
+            <a:prstDash val="solid"/>
+          </a:ln>
+        </p:spPr>
+        <p:style>
+          <a:lnRef idx="2">
+            <a:schemeClr val="dk1">
+              <a:shade val="15000"/>
+            </a:schemeClr>
+          </a:lnRef>
+          <a:fillRef idx="1">
+            <a:schemeClr val="dk1"/>
+          </a:fillRef>
+          <a:effectRef idx="0">
+            <a:schemeClr val="dk1"/>
+          </a:effectRef>
+          <a:fontRef idx="minor">
+            <a:schemeClr val="lt1"/>
+          </a:fontRef>
+        </p:style>
+        <p:txBody>
+          <a:bodyPr rtlCol="0" anchor="ctr"/>
+          <a:lstStyle/>
+          <a:p>
+            <a:pPr algn="ctr"/>
+            <a:endParaRPr lang="en-US"/>
+          </a:p>
+        </p:txBody>
+      </p:sp>
+      <p:sp>
+        <p:nvSpPr>
+          <p:cNvPr id="171" name="Oval 170">
+            <a:extLst>
+              <a:ext uri="{FF2B5EF4-FFF2-40B4-BE49-F238E27FC236}">
+                <a16:creationId xmlns:a16="http://schemas.microsoft.com/office/drawing/2014/main" id="{51C0A518-ED61-0D61-B937-623796D116B0}"/>
+              </a:ext>
+            </a:extLst>
+          </p:cNvPr>
+          <p:cNvSpPr/>
+          <p:nvPr/>
+        </p:nvSpPr>
+        <p:spPr>
+          <a:xfrm>
+            <a:off x="19341609" y="4904255"/>
+            <a:ext cx="739299" cy="739299"/>
+          </a:xfrm>
+          <a:prstGeom prst="ellipse">
+            <a:avLst/>
+          </a:prstGeom>
+          <a:solidFill>
+            <a:schemeClr val="tx1"/>
+          </a:solidFill>
+          <a:ln>
+            <a:solidFill>
+              <a:schemeClr val="tx1"/>
+            </a:solidFill>
+            <a:prstDash val="solid"/>
+          </a:ln>
+        </p:spPr>
+        <p:style>
+          <a:lnRef idx="2">
+            <a:schemeClr val="dk1">
+              <a:shade val="15000"/>
+            </a:schemeClr>
+          </a:lnRef>
+          <a:fillRef idx="1">
+            <a:schemeClr val="dk1"/>
+          </a:fillRef>
+          <a:effectRef idx="0">
+            <a:schemeClr val="dk1"/>
+          </a:effectRef>
+          <a:fontRef idx="minor">
+            <a:schemeClr val="lt1"/>
+          </a:fontRef>
+        </p:style>
+        <p:txBody>
+          <a:bodyPr rtlCol="0" anchor="ctr"/>
+          <a:lstStyle/>
+          <a:p>
+            <a:pPr algn="ctr"/>
+            <a:endParaRPr lang="en-US"/>
+          </a:p>
+        </p:txBody>
+      </p:sp>
+      <p:sp>
+        <p:nvSpPr>
+          <p:cNvPr id="172" name="Oval 171">
+            <a:extLst>
+              <a:ext uri="{FF2B5EF4-FFF2-40B4-BE49-F238E27FC236}">
+                <a16:creationId xmlns:a16="http://schemas.microsoft.com/office/drawing/2014/main" id="{A3C74038-C822-5C54-F0BB-506964A2DBB1}"/>
+              </a:ext>
+            </a:extLst>
+          </p:cNvPr>
+          <p:cNvSpPr/>
+          <p:nvPr/>
+        </p:nvSpPr>
+        <p:spPr>
+          <a:xfrm>
+            <a:off x="23907035" y="5285040"/>
+            <a:ext cx="355691" cy="355691"/>
+          </a:xfrm>
+          <a:prstGeom prst="ellipse">
+            <a:avLst/>
+          </a:prstGeom>
+          <a:solidFill>
+            <a:schemeClr val="tx1"/>
+          </a:solidFill>
+          <a:ln>
+            <a:solidFill>
+              <a:schemeClr val="tx1"/>
+            </a:solidFill>
+            <a:prstDash val="solid"/>
+          </a:ln>
+        </p:spPr>
+        <p:style>
+          <a:lnRef idx="2">
+            <a:schemeClr val="dk1">
+              <a:shade val="15000"/>
+            </a:schemeClr>
+          </a:lnRef>
+          <a:fillRef idx="1">
+            <a:schemeClr val="dk1"/>
+          </a:fillRef>
+          <a:effectRef idx="0">
+            <a:schemeClr val="dk1"/>
+          </a:effectRef>
+          <a:fontRef idx="minor">
+            <a:schemeClr val="lt1"/>
+          </a:fontRef>
+        </p:style>
+        <p:txBody>
+          <a:bodyPr rtlCol="0" anchor="ctr"/>
+          <a:lstStyle/>
+          <a:p>
+            <a:pPr algn="ctr"/>
+            <a:endParaRPr lang="en-US"/>
+          </a:p>
+        </p:txBody>
+      </p:sp>
+      <p:sp>
+        <p:nvSpPr>
+          <p:cNvPr id="174" name="TextBox 173">
+            <a:extLst>
+              <a:ext uri="{FF2B5EF4-FFF2-40B4-BE49-F238E27FC236}">
+                <a16:creationId xmlns:a16="http://schemas.microsoft.com/office/drawing/2014/main" id="{A4A5A051-25A0-D77D-6EF4-06DA594466AF}"/>
+              </a:ext>
+            </a:extLst>
+          </p:cNvPr>
+          <p:cNvSpPr txBox="1"/>
+          <p:nvPr/>
+        </p:nvSpPr>
+        <p:spPr>
+          <a:xfrm>
+            <a:off x="16526352" y="890545"/>
+            <a:ext cx="7294562" cy="1323439"/>
+          </a:xfrm>
+          <a:prstGeom prst="rect">
+            <a:avLst/>
+          </a:prstGeom>
+          <a:noFill/>
+        </p:spPr>
+        <p:txBody>
+          <a:bodyPr wrap="none" rtlCol="0">
+            <a:spAutoFit/>
+          </a:bodyPr>
+          <a:lstStyle/>
+          <a:p>
+            <a:pPr algn="ctr"/>
+            <a:r>
+              <a:rPr lang="en-US" sz="4000" dirty="0">
+                <a:latin typeface="Times New Roman" panose="02020603050405020304" pitchFamily="18" charset="0"/>
+                <a:cs typeface="Times New Roman" panose="02020603050405020304" pitchFamily="18" charset="0"/>
+              </a:rPr>
+              <a:t>Target Finding 2: </a:t>
+            </a:r>
+          </a:p>
+          <a:p>
+            <a:pPr algn="ctr"/>
+            <a:r>
+              <a:rPr lang="en-US" sz="4000" dirty="0">
+                <a:latin typeface="Times New Roman" panose="02020603050405020304" pitchFamily="18" charset="0"/>
+                <a:cs typeface="Times New Roman" panose="02020603050405020304" pitchFamily="18" charset="0"/>
+              </a:rPr>
+              <a:t>Independence from Animacy Cues</a:t>
+            </a:r>
+          </a:p>
+        </p:txBody>
+      </p:sp>
+      <p:sp>
+        <p:nvSpPr>
+          <p:cNvPr id="175" name="TextBox 174">
+            <a:extLst>
+              <a:ext uri="{FF2B5EF4-FFF2-40B4-BE49-F238E27FC236}">
+                <a16:creationId xmlns:a16="http://schemas.microsoft.com/office/drawing/2014/main" id="{E608B37A-AB0F-DF34-53AA-D59C64255135}"/>
+              </a:ext>
+            </a:extLst>
+          </p:cNvPr>
+          <p:cNvSpPr txBox="1"/>
+          <p:nvPr/>
+        </p:nvSpPr>
+        <p:spPr>
+          <a:xfrm>
+            <a:off x="13721917" y="2153955"/>
+            <a:ext cx="5128327" cy="707886"/>
+          </a:xfrm>
+          <a:prstGeom prst="rect">
+            <a:avLst/>
+          </a:prstGeom>
+          <a:noFill/>
+        </p:spPr>
+        <p:txBody>
+          <a:bodyPr wrap="none" rtlCol="0">
+            <a:spAutoFit/>
+          </a:bodyPr>
+          <a:lstStyle/>
+          <a:p>
+            <a:r>
+              <a:rPr lang="en-US" sz="4000" dirty="0">
+                <a:latin typeface="Times New Roman" panose="02020603050405020304" pitchFamily="18" charset="0"/>
+                <a:cs typeface="Times New Roman" panose="02020603050405020304" pitchFamily="18" charset="0"/>
+              </a:rPr>
+              <a:t>Experimental Condition</a:t>
+            </a:r>
+          </a:p>
+        </p:txBody>
+      </p:sp>
+      <p:sp>
+        <p:nvSpPr>
+          <p:cNvPr id="176" name="TextBox 175">
+            <a:extLst>
+              <a:ext uri="{FF2B5EF4-FFF2-40B4-BE49-F238E27FC236}">
+                <a16:creationId xmlns:a16="http://schemas.microsoft.com/office/drawing/2014/main" id="{B7C8AC0D-635F-2D73-C2EF-A03B8A77A2B5}"/>
+              </a:ext>
+            </a:extLst>
+          </p:cNvPr>
+          <p:cNvSpPr txBox="1"/>
+          <p:nvPr/>
+        </p:nvSpPr>
+        <p:spPr>
+          <a:xfrm>
+            <a:off x="19670551" y="2150322"/>
+            <a:ext cx="3932487" cy="707886"/>
+          </a:xfrm>
+          <a:prstGeom prst="rect">
+            <a:avLst/>
+          </a:prstGeom>
+          <a:noFill/>
+        </p:spPr>
+        <p:txBody>
+          <a:bodyPr wrap="none" rtlCol="0">
+            <a:spAutoFit/>
+          </a:bodyPr>
+          <a:lstStyle/>
+          <a:p>
+            <a:r>
+              <a:rPr lang="en-US" sz="4000" dirty="0">
+                <a:latin typeface="Times New Roman" panose="02020603050405020304" pitchFamily="18" charset="0"/>
+                <a:cs typeface="Times New Roman" panose="02020603050405020304" pitchFamily="18" charset="0"/>
+              </a:rPr>
+              <a:t>Control Condition</a:t>
+            </a:r>
+          </a:p>
+        </p:txBody>
+      </p:sp>
+      <p:sp>
+        <p:nvSpPr>
+          <p:cNvPr id="177" name="TextBox 176">
+            <a:extLst>
+              <a:ext uri="{FF2B5EF4-FFF2-40B4-BE49-F238E27FC236}">
+                <a16:creationId xmlns:a16="http://schemas.microsoft.com/office/drawing/2014/main" id="{9D5E120D-3726-7D5B-D1F9-A644F9D19FDD}"/>
+              </a:ext>
+            </a:extLst>
+          </p:cNvPr>
+          <p:cNvSpPr txBox="1"/>
+          <p:nvPr/>
+        </p:nvSpPr>
+        <p:spPr>
+          <a:xfrm>
+            <a:off x="13639932" y="2712405"/>
+            <a:ext cx="5484771" cy="707886"/>
+          </a:xfrm>
+          <a:prstGeom prst="rect">
+            <a:avLst/>
+          </a:prstGeom>
+          <a:noFill/>
+        </p:spPr>
+        <p:txBody>
+          <a:bodyPr wrap="none" rtlCol="0">
+            <a:spAutoFit/>
+          </a:bodyPr>
+          <a:lstStyle/>
+          <a:p>
+            <a:r>
+              <a:rPr lang="en-US" sz="4000" dirty="0">
+                <a:latin typeface="Times New Roman" panose="02020603050405020304" pitchFamily="18" charset="0"/>
+                <a:cs typeface="Times New Roman" panose="02020603050405020304" pitchFamily="18" charset="0"/>
+              </a:rPr>
+              <a:t>Constrained Action Event</a:t>
+            </a:r>
+          </a:p>
+        </p:txBody>
+      </p:sp>
+      <p:sp>
+        <p:nvSpPr>
+          <p:cNvPr id="178" name="TextBox 177">
+            <a:extLst>
+              <a:ext uri="{FF2B5EF4-FFF2-40B4-BE49-F238E27FC236}">
+                <a16:creationId xmlns:a16="http://schemas.microsoft.com/office/drawing/2014/main" id="{FC1308B3-B63A-B7FB-CBF5-BE98EBFCD3B5}"/>
+              </a:ext>
+            </a:extLst>
+          </p:cNvPr>
+          <p:cNvSpPr txBox="1"/>
+          <p:nvPr/>
+        </p:nvSpPr>
+        <p:spPr>
+          <a:xfrm>
+            <a:off x="19302069" y="2707623"/>
+            <a:ext cx="5997732" cy="707886"/>
+          </a:xfrm>
+          <a:prstGeom prst="rect">
+            <a:avLst/>
+          </a:prstGeom>
+          <a:noFill/>
+        </p:spPr>
+        <p:txBody>
+          <a:bodyPr wrap="none" rtlCol="0">
+            <a:spAutoFit/>
+          </a:bodyPr>
+          <a:lstStyle/>
+          <a:p>
+            <a:r>
+              <a:rPr lang="en-US" sz="4000" dirty="0">
+                <a:latin typeface="Times New Roman" panose="02020603050405020304" pitchFamily="18" charset="0"/>
+                <a:cs typeface="Times New Roman" panose="02020603050405020304" pitchFamily="18" charset="0"/>
+              </a:rPr>
+              <a:t>Unconstrained Action Event</a:t>
+            </a:r>
+          </a:p>
+        </p:txBody>
+      </p:sp>
+      <p:pic>
+        <p:nvPicPr>
+          <p:cNvPr id="179" name="Picture 178">
+            <a:extLst>
+              <a:ext uri="{FF2B5EF4-FFF2-40B4-BE49-F238E27FC236}">
+                <a16:creationId xmlns:a16="http://schemas.microsoft.com/office/drawing/2014/main" id="{5FA7213B-2B6E-513A-4555-B4F30F90A7A1}"/>
+              </a:ext>
+            </a:extLst>
+          </p:cNvPr>
+          <p:cNvPicPr>
+            <a:picLocks noChangeAspect="1"/>
+          </p:cNvPicPr>
+          <p:nvPr/>
+        </p:nvPicPr>
+        <p:blipFill>
+          <a:blip r:embed="rId3">
+            <a:extLst>
+              <a:ext uri="{28A0092B-C50C-407E-A947-70E740481C1C}">
+                <a14:useLocalDpi xmlns:a14="http://schemas.microsoft.com/office/drawing/2010/main" val="0"/>
+              </a:ext>
+            </a:extLst>
+          </a:blip>
+          <a:stretch>
+            <a:fillRect/>
+          </a:stretch>
+        </p:blipFill>
+        <p:spPr>
+          <a:xfrm>
+            <a:off x="14580086" y="13156658"/>
+            <a:ext cx="9234135" cy="4617068"/>
+          </a:xfrm>
+          <a:prstGeom prst="rect">
+            <a:avLst/>
+          </a:prstGeom>
+        </p:spPr>
+      </p:pic>
+      <p:cxnSp>
+        <p:nvCxnSpPr>
+          <p:cNvPr id="205" name="Straight Connector 204">
+            <a:extLst>
+              <a:ext uri="{FF2B5EF4-FFF2-40B4-BE49-F238E27FC236}">
+                <a16:creationId xmlns:a16="http://schemas.microsoft.com/office/drawing/2014/main" id="{D500EDAB-20EB-623B-9615-C0A88412BF94}"/>
+              </a:ext>
+            </a:extLst>
+          </p:cNvPr>
+          <p:cNvCxnSpPr>
+            <a:cxnSpLocks/>
+          </p:cNvCxnSpPr>
+          <p:nvPr/>
+        </p:nvCxnSpPr>
+        <p:spPr>
+          <a:xfrm>
+            <a:off x="27028648" y="5458514"/>
+            <a:ext cx="5601694" cy="0"/>
+          </a:xfrm>
+          <a:prstGeom prst="line">
+            <a:avLst/>
+          </a:prstGeom>
+        </p:spPr>
+        <p:style>
+          <a:lnRef idx="2">
+            <a:schemeClr val="dk1"/>
+          </a:lnRef>
+          <a:fillRef idx="0">
+            <a:schemeClr val="dk1"/>
+          </a:fillRef>
+          <a:effectRef idx="1">
+            <a:schemeClr val="dk1"/>
+          </a:effectRef>
+          <a:fontRef idx="minor">
+            <a:schemeClr val="tx1"/>
+          </a:fontRef>
+        </p:style>
+      </p:cxnSp>
+      <p:sp>
+        <p:nvSpPr>
+          <p:cNvPr id="206" name="Rectangle 205">
+            <a:extLst>
+              <a:ext uri="{FF2B5EF4-FFF2-40B4-BE49-F238E27FC236}">
+                <a16:creationId xmlns:a16="http://schemas.microsoft.com/office/drawing/2014/main" id="{2CFFE259-D7A7-0E08-44EE-C73302E15FC0}"/>
+              </a:ext>
+            </a:extLst>
+          </p:cNvPr>
+          <p:cNvSpPr/>
+          <p:nvPr/>
+        </p:nvSpPr>
+        <p:spPr>
+          <a:xfrm>
+            <a:off x="29530636" y="4502255"/>
+            <a:ext cx="370541" cy="940332"/>
+          </a:xfrm>
+          <a:prstGeom prst="rect">
+            <a:avLst/>
+          </a:prstGeom>
+        </p:spPr>
+        <p:style>
+          <a:lnRef idx="2">
+            <a:schemeClr val="dk1">
+              <a:shade val="15000"/>
+            </a:schemeClr>
+          </a:lnRef>
+          <a:fillRef idx="1">
+            <a:schemeClr val="dk1"/>
+          </a:fillRef>
+          <a:effectRef idx="0">
+            <a:schemeClr val="dk1"/>
+          </a:effectRef>
+          <a:fontRef idx="minor">
+            <a:schemeClr val="lt1"/>
+          </a:fontRef>
+        </p:style>
+        <p:txBody>
+          <a:bodyPr rtlCol="0" anchor="ctr"/>
+          <a:lstStyle/>
+          <a:p>
+            <a:pPr algn="ctr"/>
+            <a:endParaRPr lang="en-US"/>
+          </a:p>
+        </p:txBody>
+      </p:sp>
+      <p:sp>
+        <p:nvSpPr>
+          <p:cNvPr id="208" name="Oval 207">
+            <a:extLst>
+              <a:ext uri="{FF2B5EF4-FFF2-40B4-BE49-F238E27FC236}">
+                <a16:creationId xmlns:a16="http://schemas.microsoft.com/office/drawing/2014/main" id="{6E04EBCD-699D-8392-960D-B7A753B1D5F4}"/>
+              </a:ext>
+            </a:extLst>
+          </p:cNvPr>
+          <p:cNvSpPr/>
+          <p:nvPr/>
+        </p:nvSpPr>
+        <p:spPr>
+          <a:xfrm>
+            <a:off x="31698721" y="5278042"/>
+            <a:ext cx="168298" cy="168298"/>
+          </a:xfrm>
+          <a:prstGeom prst="ellipse">
+            <a:avLst/>
+          </a:prstGeom>
+        </p:spPr>
+        <p:style>
+          <a:lnRef idx="2">
+            <a:schemeClr val="dk1">
+              <a:shade val="15000"/>
+            </a:schemeClr>
+          </a:lnRef>
+          <a:fillRef idx="1">
+            <a:schemeClr val="dk1"/>
+          </a:fillRef>
+          <a:effectRef idx="0">
+            <a:schemeClr val="dk1"/>
+          </a:effectRef>
+          <a:fontRef idx="minor">
+            <a:schemeClr val="lt1"/>
+          </a:fontRef>
+        </p:style>
+        <p:txBody>
+          <a:bodyPr rtlCol="0" anchor="ctr"/>
+          <a:lstStyle/>
+          <a:p>
+            <a:pPr algn="ctr"/>
+            <a:endParaRPr lang="en-US"/>
+          </a:p>
+        </p:txBody>
+      </p:sp>
+      <p:sp>
+        <p:nvSpPr>
+          <p:cNvPr id="209" name="Oval 208">
+            <a:extLst>
+              <a:ext uri="{FF2B5EF4-FFF2-40B4-BE49-F238E27FC236}">
+                <a16:creationId xmlns:a16="http://schemas.microsoft.com/office/drawing/2014/main" id="{CF82B92B-39F1-5448-E7F8-559F895ACAE8}"/>
+              </a:ext>
+            </a:extLst>
+          </p:cNvPr>
+          <p:cNvSpPr/>
+          <p:nvPr/>
+        </p:nvSpPr>
+        <p:spPr>
+          <a:xfrm>
+            <a:off x="27162735" y="4979986"/>
+            <a:ext cx="464093" cy="464093"/>
+          </a:xfrm>
+          <a:prstGeom prst="ellipse">
+            <a:avLst/>
+          </a:prstGeom>
+        </p:spPr>
+        <p:style>
+          <a:lnRef idx="2">
+            <a:schemeClr val="dk1">
+              <a:shade val="15000"/>
+            </a:schemeClr>
+          </a:lnRef>
+          <a:fillRef idx="1">
+            <a:schemeClr val="dk1"/>
+          </a:fillRef>
+          <a:effectRef idx="0">
+            <a:schemeClr val="dk1"/>
+          </a:effectRef>
+          <a:fontRef idx="minor">
+            <a:schemeClr val="lt1"/>
+          </a:fontRef>
+        </p:style>
+        <p:txBody>
+          <a:bodyPr rtlCol="0" anchor="ctr"/>
+          <a:lstStyle/>
+          <a:p>
+            <a:pPr algn="ctr"/>
+            <a:endParaRPr lang="en-US"/>
+          </a:p>
+        </p:txBody>
+      </p:sp>
+      <p:sp>
+        <p:nvSpPr>
+          <p:cNvPr id="210" name="Oval 209">
+            <a:extLst>
+              <a:ext uri="{FF2B5EF4-FFF2-40B4-BE49-F238E27FC236}">
+                <a16:creationId xmlns:a16="http://schemas.microsoft.com/office/drawing/2014/main" id="{1EF6AB17-361E-7AA7-DF6F-6168873DA6D7}"/>
+              </a:ext>
+            </a:extLst>
+          </p:cNvPr>
+          <p:cNvSpPr/>
+          <p:nvPr/>
+        </p:nvSpPr>
+        <p:spPr>
+          <a:xfrm>
+            <a:off x="31598525" y="5086680"/>
+            <a:ext cx="355691" cy="355691"/>
+          </a:xfrm>
+          <a:prstGeom prst="ellipse">
+            <a:avLst/>
+          </a:prstGeom>
+          <a:noFill/>
+          <a:ln>
+            <a:prstDash val="sysDot"/>
+          </a:ln>
+        </p:spPr>
+        <p:style>
+          <a:lnRef idx="2">
+            <a:schemeClr val="dk1">
+              <a:shade val="15000"/>
+            </a:schemeClr>
+          </a:lnRef>
+          <a:fillRef idx="1">
+            <a:schemeClr val="dk1"/>
+          </a:fillRef>
+          <a:effectRef idx="0">
+            <a:schemeClr val="dk1"/>
+          </a:effectRef>
+          <a:fontRef idx="minor">
+            <a:schemeClr val="lt1"/>
+          </a:fontRef>
+        </p:style>
+        <p:txBody>
+          <a:bodyPr rtlCol="0" anchor="ctr"/>
+          <a:lstStyle/>
+          <a:p>
+            <a:pPr algn="ctr"/>
+            <a:endParaRPr lang="en-US"/>
+          </a:p>
+        </p:txBody>
+      </p:sp>
+      <p:cxnSp>
+        <p:nvCxnSpPr>
+          <p:cNvPr id="211" name="Straight Arrow Connector 210">
+            <a:extLst>
+              <a:ext uri="{FF2B5EF4-FFF2-40B4-BE49-F238E27FC236}">
+                <a16:creationId xmlns:a16="http://schemas.microsoft.com/office/drawing/2014/main" id="{27943083-D881-9DCF-D498-C389DC036A71}"/>
+              </a:ext>
+            </a:extLst>
+          </p:cNvPr>
+          <p:cNvCxnSpPr>
+            <a:cxnSpLocks/>
+          </p:cNvCxnSpPr>
+          <p:nvPr/>
+        </p:nvCxnSpPr>
+        <p:spPr>
+          <a:xfrm flipV="1">
+            <a:off x="31766828" y="5090647"/>
+            <a:ext cx="0" cy="178775"/>
+          </a:xfrm>
+          <a:prstGeom prst="straightConnector1">
+            <a:avLst/>
+          </a:prstGeom>
+          <a:ln>
+            <a:solidFill>
+              <a:schemeClr val="tx1"/>
+            </a:solidFill>
+            <a:headEnd type="triangle"/>
+            <a:tailEnd type="triangle"/>
+          </a:ln>
+        </p:spPr>
+        <p:style>
+          <a:lnRef idx="2">
+            <a:schemeClr val="accent1"/>
+          </a:lnRef>
+          <a:fillRef idx="0">
+            <a:schemeClr val="accent1"/>
+          </a:fillRef>
+          <a:effectRef idx="1">
+            <a:schemeClr val="accent1"/>
+          </a:effectRef>
+          <a:fontRef idx="minor">
+            <a:schemeClr val="tx1"/>
+          </a:fontRef>
+        </p:style>
+      </p:cxnSp>
+      <p:cxnSp>
+        <p:nvCxnSpPr>
+          <p:cNvPr id="212" name="Straight Arrow Connector 211">
+            <a:extLst>
+              <a:ext uri="{FF2B5EF4-FFF2-40B4-BE49-F238E27FC236}">
+                <a16:creationId xmlns:a16="http://schemas.microsoft.com/office/drawing/2014/main" id="{3CC0A23B-C51E-5734-89B0-E3C00659CC6B}"/>
+              </a:ext>
+            </a:extLst>
+          </p:cNvPr>
+          <p:cNvCxnSpPr>
+            <a:cxnSpLocks/>
+          </p:cNvCxnSpPr>
+          <p:nvPr/>
+        </p:nvCxnSpPr>
+        <p:spPr>
+          <a:xfrm rot="-1200000" flipH="1" flipV="1">
+            <a:off x="31630738" y="5170572"/>
+            <a:ext cx="91841" cy="146290"/>
+          </a:xfrm>
+          <a:prstGeom prst="straightConnector1">
+            <a:avLst/>
+          </a:prstGeom>
+          <a:ln>
+            <a:solidFill>
+              <a:schemeClr val="tx1"/>
+            </a:solidFill>
+            <a:headEnd type="triangle"/>
+            <a:tailEnd type="triangle"/>
+          </a:ln>
+        </p:spPr>
+        <p:style>
+          <a:lnRef idx="2">
+            <a:schemeClr val="accent1"/>
+          </a:lnRef>
+          <a:fillRef idx="0">
+            <a:schemeClr val="accent1"/>
+          </a:fillRef>
+          <a:effectRef idx="1">
+            <a:schemeClr val="accent1"/>
+          </a:effectRef>
+          <a:fontRef idx="minor">
+            <a:schemeClr val="tx1"/>
+          </a:fontRef>
+        </p:style>
+      </p:cxnSp>
+      <p:cxnSp>
+        <p:nvCxnSpPr>
+          <p:cNvPr id="213" name="Straight Arrow Connector 212">
+            <a:extLst>
+              <a:ext uri="{FF2B5EF4-FFF2-40B4-BE49-F238E27FC236}">
+                <a16:creationId xmlns:a16="http://schemas.microsoft.com/office/drawing/2014/main" id="{3D02CE3C-977A-46E5-F397-198859976C17}"/>
+              </a:ext>
+            </a:extLst>
+          </p:cNvPr>
+          <p:cNvCxnSpPr>
+            <a:cxnSpLocks/>
+          </p:cNvCxnSpPr>
+          <p:nvPr/>
+        </p:nvCxnSpPr>
+        <p:spPr>
+          <a:xfrm rot="1200000" flipV="1">
+            <a:off x="31871524" y="5135443"/>
+            <a:ext cx="0" cy="178775"/>
+          </a:xfrm>
+          <a:prstGeom prst="straightConnector1">
+            <a:avLst/>
+          </a:prstGeom>
+          <a:ln>
+            <a:solidFill>
+              <a:schemeClr val="tx1"/>
+            </a:solidFill>
+            <a:headEnd type="triangle"/>
+            <a:tailEnd type="triangle"/>
+          </a:ln>
+        </p:spPr>
+        <p:style>
+          <a:lnRef idx="2">
+            <a:schemeClr val="accent1"/>
+          </a:lnRef>
+          <a:fillRef idx="0">
+            <a:schemeClr val="accent1"/>
+          </a:fillRef>
+          <a:effectRef idx="1">
+            <a:schemeClr val="accent1"/>
+          </a:effectRef>
+          <a:fontRef idx="minor">
+            <a:schemeClr val="tx1"/>
+          </a:fontRef>
+        </p:style>
+      </p:cxnSp>
+      <p:sp>
+        <p:nvSpPr>
+          <p:cNvPr id="215" name="Oval 214">
+            <a:extLst>
+              <a:ext uri="{FF2B5EF4-FFF2-40B4-BE49-F238E27FC236}">
+                <a16:creationId xmlns:a16="http://schemas.microsoft.com/office/drawing/2014/main" id="{A89389D6-9810-EFB9-B651-612087672A21}"/>
+              </a:ext>
+            </a:extLst>
+          </p:cNvPr>
+          <p:cNvSpPr/>
+          <p:nvPr/>
+        </p:nvSpPr>
+        <p:spPr>
+          <a:xfrm>
+            <a:off x="27024847" y="4719220"/>
+            <a:ext cx="739299" cy="739299"/>
+          </a:xfrm>
+          <a:prstGeom prst="ellipse">
+            <a:avLst/>
+          </a:prstGeom>
+          <a:noFill/>
+          <a:ln>
+            <a:prstDash val="sysDot"/>
+          </a:ln>
+        </p:spPr>
+        <p:style>
+          <a:lnRef idx="2">
+            <a:schemeClr val="dk1">
+              <a:shade val="15000"/>
+            </a:schemeClr>
+          </a:lnRef>
+          <a:fillRef idx="1">
+            <a:schemeClr val="dk1"/>
+          </a:fillRef>
+          <a:effectRef idx="0">
+            <a:schemeClr val="dk1"/>
+          </a:effectRef>
+          <a:fontRef idx="minor">
+            <a:schemeClr val="lt1"/>
+          </a:fontRef>
+        </p:style>
+        <p:txBody>
+          <a:bodyPr rtlCol="0" anchor="ctr"/>
+          <a:lstStyle/>
+          <a:p>
+            <a:pPr algn="ctr"/>
+            <a:endParaRPr lang="en-US"/>
+          </a:p>
+        </p:txBody>
+      </p:sp>
+      <p:cxnSp>
+        <p:nvCxnSpPr>
+          <p:cNvPr id="216" name="Straight Arrow Connector 215">
+            <a:extLst>
+              <a:ext uri="{FF2B5EF4-FFF2-40B4-BE49-F238E27FC236}">
+                <a16:creationId xmlns:a16="http://schemas.microsoft.com/office/drawing/2014/main" id="{4BE19EC9-4FD4-2C79-7686-3D20674F28C8}"/>
+              </a:ext>
+            </a:extLst>
+          </p:cNvPr>
+          <p:cNvCxnSpPr>
+            <a:cxnSpLocks/>
+          </p:cNvCxnSpPr>
+          <p:nvPr/>
+        </p:nvCxnSpPr>
+        <p:spPr>
+          <a:xfrm flipH="1" flipV="1">
+            <a:off x="27378588" y="4735118"/>
+            <a:ext cx="4420" cy="234000"/>
+          </a:xfrm>
+          <a:prstGeom prst="straightConnector1">
+            <a:avLst/>
+          </a:prstGeom>
+          <a:ln>
+            <a:solidFill>
+              <a:schemeClr val="tx1"/>
+            </a:solidFill>
+            <a:headEnd type="triangle"/>
+            <a:tailEnd type="triangle"/>
+          </a:ln>
+        </p:spPr>
+        <p:style>
+          <a:lnRef idx="2">
+            <a:schemeClr val="accent1"/>
+          </a:lnRef>
+          <a:fillRef idx="0">
+            <a:schemeClr val="accent1"/>
+          </a:fillRef>
+          <a:effectRef idx="1">
+            <a:schemeClr val="accent1"/>
+          </a:effectRef>
+          <a:fontRef idx="minor">
+            <a:schemeClr val="tx1"/>
+          </a:fontRef>
+        </p:style>
+      </p:cxnSp>
+      <p:cxnSp>
+        <p:nvCxnSpPr>
+          <p:cNvPr id="217" name="Straight Arrow Connector 216">
+            <a:extLst>
+              <a:ext uri="{FF2B5EF4-FFF2-40B4-BE49-F238E27FC236}">
+                <a16:creationId xmlns:a16="http://schemas.microsoft.com/office/drawing/2014/main" id="{28BB2CC7-50E6-5484-E184-D4B65DE87292}"/>
+              </a:ext>
+            </a:extLst>
+          </p:cNvPr>
+          <p:cNvCxnSpPr>
+            <a:cxnSpLocks/>
+          </p:cNvCxnSpPr>
+          <p:nvPr/>
+        </p:nvCxnSpPr>
+        <p:spPr>
+          <a:xfrm rot="3000000" flipH="1" flipV="1">
+            <a:off x="27626628" y="4858589"/>
+            <a:ext cx="4420" cy="198000"/>
+          </a:xfrm>
+          <a:prstGeom prst="straightConnector1">
+            <a:avLst/>
+          </a:prstGeom>
+          <a:ln>
+            <a:solidFill>
+              <a:schemeClr val="tx1"/>
+            </a:solidFill>
+            <a:headEnd type="triangle"/>
+            <a:tailEnd type="triangle"/>
+          </a:ln>
+        </p:spPr>
+        <p:style>
+          <a:lnRef idx="2">
+            <a:schemeClr val="accent1"/>
+          </a:lnRef>
+          <a:fillRef idx="0">
+            <a:schemeClr val="accent1"/>
+          </a:fillRef>
+          <a:effectRef idx="1">
+            <a:schemeClr val="accent1"/>
+          </a:effectRef>
+          <a:fontRef idx="minor">
+            <a:schemeClr val="tx1"/>
+          </a:fontRef>
+        </p:style>
+      </p:cxnSp>
+      <p:cxnSp>
+        <p:nvCxnSpPr>
+          <p:cNvPr id="218" name="Straight Arrow Connector 217">
+            <a:extLst>
+              <a:ext uri="{FF2B5EF4-FFF2-40B4-BE49-F238E27FC236}">
+                <a16:creationId xmlns:a16="http://schemas.microsoft.com/office/drawing/2014/main" id="{8B5819E2-FDDC-5617-74CA-D9D1E6D7C877}"/>
+              </a:ext>
+            </a:extLst>
+          </p:cNvPr>
+          <p:cNvCxnSpPr>
+            <a:cxnSpLocks/>
+          </p:cNvCxnSpPr>
+          <p:nvPr/>
+        </p:nvCxnSpPr>
+        <p:spPr>
+          <a:xfrm rot="-3000000" flipH="1" flipV="1">
+            <a:off x="27160519" y="4866541"/>
+            <a:ext cx="4420" cy="198000"/>
+          </a:xfrm>
+          <a:prstGeom prst="straightConnector1">
+            <a:avLst/>
+          </a:prstGeom>
+          <a:ln>
+            <a:solidFill>
+              <a:schemeClr val="tx1"/>
+            </a:solidFill>
+            <a:headEnd type="triangle"/>
+            <a:tailEnd type="triangle"/>
+          </a:ln>
+        </p:spPr>
+        <p:style>
+          <a:lnRef idx="2">
+            <a:schemeClr val="accent1"/>
+          </a:lnRef>
+          <a:fillRef idx="0">
+            <a:schemeClr val="accent1"/>
+          </a:fillRef>
+          <a:effectRef idx="1">
+            <a:schemeClr val="accent1"/>
+          </a:effectRef>
+          <a:fontRef idx="minor">
+            <a:schemeClr val="tx1"/>
+          </a:fontRef>
+        </p:style>
+      </p:cxnSp>
+      <p:cxnSp>
+        <p:nvCxnSpPr>
+          <p:cNvPr id="219" name="Straight Connector 218">
+            <a:extLst>
+              <a:ext uri="{FF2B5EF4-FFF2-40B4-BE49-F238E27FC236}">
+                <a16:creationId xmlns:a16="http://schemas.microsoft.com/office/drawing/2014/main" id="{4812C859-6E1A-2FBE-8F72-2DE635CC45ED}"/>
+              </a:ext>
+            </a:extLst>
+          </p:cNvPr>
+          <p:cNvCxnSpPr>
+            <a:cxnSpLocks/>
+          </p:cNvCxnSpPr>
+          <p:nvPr/>
+        </p:nvCxnSpPr>
+        <p:spPr>
+          <a:xfrm>
+            <a:off x="27024842" y="7259975"/>
+            <a:ext cx="5601694" cy="0"/>
+          </a:xfrm>
+          <a:prstGeom prst="line">
+            <a:avLst/>
+          </a:prstGeom>
+        </p:spPr>
+        <p:style>
+          <a:lnRef idx="2">
+            <a:schemeClr val="dk1"/>
+          </a:lnRef>
+          <a:fillRef idx="0">
+            <a:schemeClr val="dk1"/>
+          </a:fillRef>
+          <a:effectRef idx="1">
+            <a:schemeClr val="dk1"/>
+          </a:effectRef>
+          <a:fontRef idx="minor">
+            <a:schemeClr val="tx1"/>
+          </a:fontRef>
+        </p:style>
+      </p:cxnSp>
+      <p:sp>
+        <p:nvSpPr>
+          <p:cNvPr id="220" name="Rectangle 219">
+            <a:extLst>
+              <a:ext uri="{FF2B5EF4-FFF2-40B4-BE49-F238E27FC236}">
+                <a16:creationId xmlns:a16="http://schemas.microsoft.com/office/drawing/2014/main" id="{D5655F57-1A7B-9A9B-26BD-17B9DC1FCAE8}"/>
+              </a:ext>
+            </a:extLst>
+          </p:cNvPr>
+          <p:cNvSpPr/>
+          <p:nvPr/>
+        </p:nvSpPr>
+        <p:spPr>
+          <a:xfrm>
+            <a:off x="29526830" y="6303716"/>
+            <a:ext cx="370541" cy="940332"/>
+          </a:xfrm>
+          <a:prstGeom prst="rect">
+            <a:avLst/>
+          </a:prstGeom>
+        </p:spPr>
+        <p:style>
+          <a:lnRef idx="2">
+            <a:schemeClr val="dk1">
+              <a:shade val="15000"/>
+            </a:schemeClr>
+          </a:lnRef>
+          <a:fillRef idx="1">
+            <a:schemeClr val="dk1"/>
+          </a:fillRef>
+          <a:effectRef idx="0">
+            <a:schemeClr val="dk1"/>
+          </a:effectRef>
+          <a:fontRef idx="minor">
+            <a:schemeClr val="lt1"/>
+          </a:fontRef>
+        </p:style>
+        <p:txBody>
+          <a:bodyPr rtlCol="0" anchor="ctr"/>
+          <a:lstStyle/>
+          <a:p>
+            <a:pPr algn="ctr"/>
+            <a:endParaRPr lang="en-US"/>
+          </a:p>
+        </p:txBody>
+      </p:sp>
+      <p:sp>
+        <p:nvSpPr>
+          <p:cNvPr id="221" name="Freeform: Shape 220">
+            <a:extLst>
+              <a:ext uri="{FF2B5EF4-FFF2-40B4-BE49-F238E27FC236}">
+                <a16:creationId xmlns:a16="http://schemas.microsoft.com/office/drawing/2014/main" id="{D4ACBE29-9A04-8131-6000-E09686D5350B}"/>
+              </a:ext>
+            </a:extLst>
+          </p:cNvPr>
+          <p:cNvSpPr/>
+          <p:nvPr/>
+        </p:nvSpPr>
+        <p:spPr>
+          <a:xfrm>
+            <a:off x="28807316" y="6073130"/>
+            <a:ext cx="1786965" cy="985828"/>
+          </a:xfrm>
+          <a:custGeom>
+            <a:avLst/>
+            <a:gdLst>
+              <a:gd name="csX0" fmla="*/ 0 w 1786965"/>
+              <a:gd name="csY0" fmla="*/ 1093699 h 1093699"/>
+              <a:gd name="csX1" fmla="*/ 908424 w 1786965"/>
+              <a:gd name="csY1" fmla="*/ 5 h 1093699"/>
+              <a:gd name="csX2" fmla="*/ 1786965 w 1786965"/>
+              <a:gd name="csY2" fmla="*/ 1081746 h 1093699"/>
+            </a:gdLst>
+            <a:ahLst/>
+            <a:cxnLst>
+              <a:cxn ang="0">
+                <a:pos x="csX0" y="csY0"/>
+              </a:cxn>
+              <a:cxn ang="0">
+                <a:pos x="csX1" y="csY1"/>
+              </a:cxn>
+              <a:cxn ang="0">
+                <a:pos x="csX2" y="csY2"/>
+              </a:cxn>
+            </a:cxnLst>
+            <a:rect l="l" t="t" r="r" b="b"/>
+            <a:pathLst>
+              <a:path w="1786965" h="1093699">
+                <a:moveTo>
+                  <a:pt x="0" y="1093699"/>
+                </a:moveTo>
+                <a:cubicBezTo>
+                  <a:pt x="305298" y="547848"/>
+                  <a:pt x="610597" y="1997"/>
+                  <a:pt x="908424" y="5"/>
+                </a:cubicBezTo>
+                <a:cubicBezTo>
+                  <a:pt x="1206251" y="-1987"/>
+                  <a:pt x="1496608" y="539879"/>
+                  <a:pt x="1786965" y="1081746"/>
+                </a:cubicBezTo>
+              </a:path>
+            </a:pathLst>
+          </a:custGeom>
+          <a:noFill/>
+        </p:spPr>
+        <p:style>
+          <a:lnRef idx="2">
+            <a:schemeClr val="accent1">
+              <a:shade val="15000"/>
+            </a:schemeClr>
+          </a:lnRef>
+          <a:fillRef idx="1">
+            <a:schemeClr val="accent1"/>
+          </a:fillRef>
+          <a:effectRef idx="0">
+            <a:schemeClr val="accent1"/>
+          </a:effectRef>
+          <a:fontRef idx="minor">
+            <a:schemeClr val="lt1"/>
+          </a:fontRef>
+        </p:style>
+        <p:txBody>
+          <a:bodyPr rtlCol="0" anchor="ctr"/>
+          <a:lstStyle/>
+          <a:p>
+            <a:pPr algn="ctr"/>
+            <a:endParaRPr lang="en-US"/>
+          </a:p>
+        </p:txBody>
+      </p:sp>
+      <p:cxnSp>
+        <p:nvCxnSpPr>
+          <p:cNvPr id="222" name="Straight Connector 221">
+            <a:extLst>
+              <a:ext uri="{FF2B5EF4-FFF2-40B4-BE49-F238E27FC236}">
+                <a16:creationId xmlns:a16="http://schemas.microsoft.com/office/drawing/2014/main" id="{D6303159-4618-F529-67BF-C5AF3FF381A8}"/>
+              </a:ext>
+            </a:extLst>
+          </p:cNvPr>
+          <p:cNvCxnSpPr>
+            <a:cxnSpLocks/>
+          </p:cNvCxnSpPr>
+          <p:nvPr/>
+        </p:nvCxnSpPr>
+        <p:spPr>
+          <a:xfrm>
+            <a:off x="30594276" y="7042924"/>
+            <a:ext cx="903174" cy="0"/>
+          </a:xfrm>
+          <a:prstGeom prst="line">
+            <a:avLst/>
+          </a:prstGeom>
+          <a:ln>
+            <a:solidFill>
+              <a:schemeClr val="tx1"/>
+            </a:solidFill>
+          </a:ln>
+        </p:spPr>
+        <p:style>
+          <a:lnRef idx="2">
+            <a:schemeClr val="accent1"/>
+          </a:lnRef>
+          <a:fillRef idx="0">
+            <a:schemeClr val="accent1"/>
+          </a:fillRef>
+          <a:effectRef idx="1">
+            <a:schemeClr val="accent1"/>
+          </a:effectRef>
+          <a:fontRef idx="minor">
+            <a:schemeClr val="tx1"/>
+          </a:fontRef>
+        </p:style>
+      </p:cxnSp>
+      <p:cxnSp>
+        <p:nvCxnSpPr>
+          <p:cNvPr id="225" name="Straight Arrow Connector 224">
+            <a:extLst>
+              <a:ext uri="{FF2B5EF4-FFF2-40B4-BE49-F238E27FC236}">
+                <a16:creationId xmlns:a16="http://schemas.microsoft.com/office/drawing/2014/main" id="{D259C0C2-D842-78C4-0703-79A50625BC95}"/>
+              </a:ext>
+            </a:extLst>
+          </p:cNvPr>
+          <p:cNvCxnSpPr>
+            <a:cxnSpLocks/>
+            <a:stCxn id="221" idx="0"/>
+          </p:cNvCxnSpPr>
+          <p:nvPr/>
+        </p:nvCxnSpPr>
+        <p:spPr>
+          <a:xfrm flipH="1" flipV="1">
+            <a:off x="28229469" y="7042924"/>
+            <a:ext cx="577847" cy="16034"/>
+          </a:xfrm>
+          <a:prstGeom prst="straightConnector1">
+            <a:avLst/>
+          </a:prstGeom>
+          <a:ln>
+            <a:solidFill>
+              <a:schemeClr val="tx1"/>
+            </a:solidFill>
+            <a:tailEnd type="triangle"/>
+          </a:ln>
+        </p:spPr>
+        <p:style>
+          <a:lnRef idx="2">
+            <a:schemeClr val="accent1"/>
+          </a:lnRef>
+          <a:fillRef idx="0">
+            <a:schemeClr val="accent1"/>
+          </a:fillRef>
+          <a:effectRef idx="1">
+            <a:schemeClr val="accent1"/>
+          </a:effectRef>
+          <a:fontRef idx="minor">
+            <a:schemeClr val="tx1"/>
+          </a:fontRef>
+        </p:style>
+      </p:cxnSp>
+      <p:sp>
+        <p:nvSpPr>
+          <p:cNvPr id="226" name="Oval 225">
+            <a:extLst>
+              <a:ext uri="{FF2B5EF4-FFF2-40B4-BE49-F238E27FC236}">
+                <a16:creationId xmlns:a16="http://schemas.microsoft.com/office/drawing/2014/main" id="{9C8A02C1-B573-6D84-EB1E-1EA07A6ECC90}"/>
+              </a:ext>
+            </a:extLst>
+          </p:cNvPr>
+          <p:cNvSpPr/>
+          <p:nvPr/>
+        </p:nvSpPr>
+        <p:spPr>
+          <a:xfrm>
+            <a:off x="31594719" y="6888141"/>
+            <a:ext cx="355691" cy="355691"/>
+          </a:xfrm>
+          <a:prstGeom prst="ellipse">
+            <a:avLst/>
+          </a:prstGeom>
+          <a:solidFill>
+            <a:schemeClr val="tx1"/>
+          </a:solidFill>
+          <a:ln>
+            <a:solidFill>
+              <a:schemeClr val="tx1"/>
+            </a:solidFill>
+            <a:prstDash val="solid"/>
+          </a:ln>
+        </p:spPr>
+        <p:style>
+          <a:lnRef idx="2">
+            <a:schemeClr val="dk1">
+              <a:shade val="15000"/>
+            </a:schemeClr>
+          </a:lnRef>
+          <a:fillRef idx="1">
+            <a:schemeClr val="dk1"/>
+          </a:fillRef>
+          <a:effectRef idx="0">
+            <a:schemeClr val="dk1"/>
+          </a:effectRef>
+          <a:fontRef idx="minor">
+            <a:schemeClr val="lt1"/>
+          </a:fontRef>
+        </p:style>
+        <p:txBody>
+          <a:bodyPr rtlCol="0" anchor="ctr"/>
+          <a:lstStyle/>
+          <a:p>
+            <a:pPr algn="ctr"/>
+            <a:endParaRPr lang="en-US"/>
+          </a:p>
+        </p:txBody>
+      </p:sp>
+      <p:sp>
+        <p:nvSpPr>
+          <p:cNvPr id="228" name="Oval 227">
+            <a:extLst>
+              <a:ext uri="{FF2B5EF4-FFF2-40B4-BE49-F238E27FC236}">
+                <a16:creationId xmlns:a16="http://schemas.microsoft.com/office/drawing/2014/main" id="{00689EA5-EA43-F51B-C9D2-BF0EB6F5F4EF}"/>
+              </a:ext>
+            </a:extLst>
+          </p:cNvPr>
+          <p:cNvSpPr/>
+          <p:nvPr/>
+        </p:nvSpPr>
+        <p:spPr>
+          <a:xfrm>
+            <a:off x="27863414" y="6888140"/>
+            <a:ext cx="355691" cy="355691"/>
+          </a:xfrm>
+          <a:prstGeom prst="ellipse">
+            <a:avLst/>
+          </a:prstGeom>
+          <a:noFill/>
+          <a:ln>
+            <a:prstDash val="sysDot"/>
+          </a:ln>
+        </p:spPr>
+        <p:style>
+          <a:lnRef idx="2">
+            <a:schemeClr val="dk1">
+              <a:shade val="15000"/>
+            </a:schemeClr>
+          </a:lnRef>
+          <a:fillRef idx="1">
+            <a:schemeClr val="dk1"/>
+          </a:fillRef>
+          <a:effectRef idx="0">
+            <a:schemeClr val="dk1"/>
+          </a:effectRef>
+          <a:fontRef idx="minor">
+            <a:schemeClr val="lt1"/>
+          </a:fontRef>
+        </p:style>
+        <p:txBody>
+          <a:bodyPr rtlCol="0" anchor="ctr"/>
+          <a:lstStyle/>
+          <a:p>
+            <a:pPr algn="ctr"/>
+            <a:endParaRPr lang="en-US"/>
+          </a:p>
+        </p:txBody>
+      </p:sp>
+      <p:sp>
+        <p:nvSpPr>
+          <p:cNvPr id="229" name="Oval 228">
+            <a:extLst>
+              <a:ext uri="{FF2B5EF4-FFF2-40B4-BE49-F238E27FC236}">
+                <a16:creationId xmlns:a16="http://schemas.microsoft.com/office/drawing/2014/main" id="{799B08F5-A478-D8EF-25E3-C2439E38459A}"/>
+              </a:ext>
+            </a:extLst>
+          </p:cNvPr>
+          <p:cNvSpPr/>
+          <p:nvPr/>
+        </p:nvSpPr>
+        <p:spPr>
+          <a:xfrm>
+            <a:off x="27021041" y="6520681"/>
+            <a:ext cx="739299" cy="739299"/>
+          </a:xfrm>
+          <a:prstGeom prst="ellipse">
+            <a:avLst/>
+          </a:prstGeom>
+          <a:solidFill>
+            <a:schemeClr val="tx1"/>
+          </a:solidFill>
+          <a:ln>
+            <a:solidFill>
+              <a:schemeClr val="tx1"/>
+            </a:solidFill>
+            <a:prstDash val="solid"/>
+          </a:ln>
+        </p:spPr>
+        <p:style>
+          <a:lnRef idx="2">
+            <a:schemeClr val="dk1">
+              <a:shade val="15000"/>
+            </a:schemeClr>
+          </a:lnRef>
+          <a:fillRef idx="1">
+            <a:schemeClr val="dk1"/>
+          </a:fillRef>
+          <a:effectRef idx="0">
+            <a:schemeClr val="dk1"/>
+          </a:effectRef>
+          <a:fontRef idx="minor">
+            <a:schemeClr val="lt1"/>
+          </a:fontRef>
+        </p:style>
+        <p:txBody>
+          <a:bodyPr rtlCol="0" anchor="ctr"/>
+          <a:lstStyle/>
+          <a:p>
+            <a:pPr algn="ctr"/>
+            <a:endParaRPr lang="en-US"/>
+          </a:p>
+        </p:txBody>
+      </p:sp>
+      <p:cxnSp>
+        <p:nvCxnSpPr>
+          <p:cNvPr id="230" name="Straight Connector 229">
+            <a:extLst>
+              <a:ext uri="{FF2B5EF4-FFF2-40B4-BE49-F238E27FC236}">
+                <a16:creationId xmlns:a16="http://schemas.microsoft.com/office/drawing/2014/main" id="{CAD6A43D-66A2-9B71-320A-F4E33B893D92}"/>
+              </a:ext>
+            </a:extLst>
+          </p:cNvPr>
+          <p:cNvCxnSpPr>
+            <a:cxnSpLocks/>
+          </p:cNvCxnSpPr>
+          <p:nvPr/>
+        </p:nvCxnSpPr>
+        <p:spPr>
+          <a:xfrm>
+            <a:off x="26988924" y="11387216"/>
+            <a:ext cx="5601694" cy="0"/>
+          </a:xfrm>
+          <a:prstGeom prst="line">
+            <a:avLst/>
+          </a:prstGeom>
+        </p:spPr>
+        <p:style>
+          <a:lnRef idx="2">
+            <a:schemeClr val="dk1"/>
+          </a:lnRef>
+          <a:fillRef idx="0">
+            <a:schemeClr val="dk1"/>
+          </a:fillRef>
+          <a:effectRef idx="1">
+            <a:schemeClr val="dk1"/>
+          </a:effectRef>
+          <a:fontRef idx="minor">
+            <a:schemeClr val="tx1"/>
+          </a:fontRef>
+        </p:style>
+      </p:cxnSp>
+      <p:sp>
+        <p:nvSpPr>
+          <p:cNvPr id="231" name="Freeform: Shape 230">
+            <a:extLst>
+              <a:ext uri="{FF2B5EF4-FFF2-40B4-BE49-F238E27FC236}">
+                <a16:creationId xmlns:a16="http://schemas.microsoft.com/office/drawing/2014/main" id="{DB2C6254-0196-2173-3837-7AD57BE9C615}"/>
+              </a:ext>
+            </a:extLst>
+          </p:cNvPr>
+          <p:cNvSpPr/>
+          <p:nvPr/>
+        </p:nvSpPr>
+        <p:spPr>
+          <a:xfrm>
+            <a:off x="28771398" y="10200371"/>
+            <a:ext cx="1786965" cy="985828"/>
+          </a:xfrm>
+          <a:custGeom>
+            <a:avLst/>
+            <a:gdLst>
+              <a:gd name="csX0" fmla="*/ 0 w 1786965"/>
+              <a:gd name="csY0" fmla="*/ 1093699 h 1093699"/>
+              <a:gd name="csX1" fmla="*/ 908424 w 1786965"/>
+              <a:gd name="csY1" fmla="*/ 5 h 1093699"/>
+              <a:gd name="csX2" fmla="*/ 1786965 w 1786965"/>
+              <a:gd name="csY2" fmla="*/ 1081746 h 1093699"/>
+            </a:gdLst>
+            <a:ahLst/>
+            <a:cxnLst>
+              <a:cxn ang="0">
+                <a:pos x="csX0" y="csY0"/>
+              </a:cxn>
+              <a:cxn ang="0">
+                <a:pos x="csX1" y="csY1"/>
+              </a:cxn>
+              <a:cxn ang="0">
+                <a:pos x="csX2" y="csY2"/>
+              </a:cxn>
+            </a:cxnLst>
+            <a:rect l="l" t="t" r="r" b="b"/>
+            <a:pathLst>
+              <a:path w="1786965" h="1093699">
+                <a:moveTo>
+                  <a:pt x="0" y="1093699"/>
+                </a:moveTo>
+                <a:cubicBezTo>
+                  <a:pt x="305298" y="547848"/>
+                  <a:pt x="610597" y="1997"/>
+                  <a:pt x="908424" y="5"/>
+                </a:cubicBezTo>
+                <a:cubicBezTo>
+                  <a:pt x="1206251" y="-1987"/>
+                  <a:pt x="1496608" y="539879"/>
+                  <a:pt x="1786965" y="1081746"/>
+                </a:cubicBezTo>
+              </a:path>
+            </a:pathLst>
+          </a:custGeom>
+          <a:noFill/>
+        </p:spPr>
+        <p:style>
+          <a:lnRef idx="2">
+            <a:schemeClr val="accent1">
+              <a:shade val="15000"/>
+            </a:schemeClr>
+          </a:lnRef>
+          <a:fillRef idx="1">
+            <a:schemeClr val="accent1"/>
+          </a:fillRef>
+          <a:effectRef idx="0">
+            <a:schemeClr val="accent1"/>
+          </a:effectRef>
+          <a:fontRef idx="minor">
+            <a:schemeClr val="lt1"/>
+          </a:fontRef>
+        </p:style>
+        <p:txBody>
+          <a:bodyPr rtlCol="0" anchor="ctr"/>
+          <a:lstStyle/>
+          <a:p>
+            <a:pPr algn="ctr"/>
+            <a:endParaRPr lang="en-US"/>
+          </a:p>
+        </p:txBody>
+      </p:sp>
+      <p:cxnSp>
+        <p:nvCxnSpPr>
+          <p:cNvPr id="232" name="Straight Connector 231">
+            <a:extLst>
+              <a:ext uri="{FF2B5EF4-FFF2-40B4-BE49-F238E27FC236}">
+                <a16:creationId xmlns:a16="http://schemas.microsoft.com/office/drawing/2014/main" id="{8C2993B2-8633-2ADB-A4E7-B5761E12466C}"/>
+              </a:ext>
+            </a:extLst>
+          </p:cNvPr>
+          <p:cNvCxnSpPr>
+            <a:cxnSpLocks/>
+          </p:cNvCxnSpPr>
+          <p:nvPr/>
+        </p:nvCxnSpPr>
+        <p:spPr>
+          <a:xfrm>
+            <a:off x="30558358" y="11170165"/>
+            <a:ext cx="903174" cy="0"/>
+          </a:xfrm>
+          <a:prstGeom prst="line">
+            <a:avLst/>
+          </a:prstGeom>
+          <a:ln>
+            <a:solidFill>
+              <a:schemeClr val="tx1"/>
+            </a:solidFill>
+          </a:ln>
+        </p:spPr>
+        <p:style>
+          <a:lnRef idx="2">
+            <a:schemeClr val="accent1"/>
+          </a:lnRef>
+          <a:fillRef idx="0">
+            <a:schemeClr val="accent1"/>
+          </a:fillRef>
+          <a:effectRef idx="1">
+            <a:schemeClr val="accent1"/>
+          </a:effectRef>
+          <a:fontRef idx="minor">
+            <a:schemeClr val="tx1"/>
+          </a:fontRef>
+        </p:style>
+      </p:cxnSp>
+      <p:cxnSp>
+        <p:nvCxnSpPr>
+          <p:cNvPr id="235" name="Straight Arrow Connector 234">
+            <a:extLst>
+              <a:ext uri="{FF2B5EF4-FFF2-40B4-BE49-F238E27FC236}">
+                <a16:creationId xmlns:a16="http://schemas.microsoft.com/office/drawing/2014/main" id="{C6A67D0E-5C99-CC30-2206-68E2AEA8A7A7}"/>
+              </a:ext>
+            </a:extLst>
+          </p:cNvPr>
+          <p:cNvCxnSpPr>
+            <a:cxnSpLocks/>
+            <a:stCxn id="231" idx="0"/>
+          </p:cNvCxnSpPr>
+          <p:nvPr/>
+        </p:nvCxnSpPr>
+        <p:spPr>
+          <a:xfrm flipH="1" flipV="1">
+            <a:off x="28193551" y="11170165"/>
+            <a:ext cx="577847" cy="16034"/>
+          </a:xfrm>
+          <a:prstGeom prst="straightConnector1">
+            <a:avLst/>
+          </a:prstGeom>
+          <a:ln>
+            <a:solidFill>
+              <a:schemeClr val="tx1"/>
+            </a:solidFill>
+            <a:tailEnd type="triangle"/>
+          </a:ln>
+        </p:spPr>
+        <p:style>
+          <a:lnRef idx="2">
+            <a:schemeClr val="accent1"/>
+          </a:lnRef>
+          <a:fillRef idx="0">
+            <a:schemeClr val="accent1"/>
+          </a:fillRef>
+          <a:effectRef idx="1">
+            <a:schemeClr val="accent1"/>
+          </a:effectRef>
+          <a:fontRef idx="minor">
+            <a:schemeClr val="tx1"/>
+          </a:fontRef>
+        </p:style>
+      </p:cxnSp>
+      <p:sp>
+        <p:nvSpPr>
+          <p:cNvPr id="236" name="Oval 235">
+            <a:extLst>
+              <a:ext uri="{FF2B5EF4-FFF2-40B4-BE49-F238E27FC236}">
+                <a16:creationId xmlns:a16="http://schemas.microsoft.com/office/drawing/2014/main" id="{E16C909A-7707-2937-379A-9D1F6D2B6E21}"/>
+              </a:ext>
+            </a:extLst>
+          </p:cNvPr>
+          <p:cNvSpPr/>
+          <p:nvPr/>
+        </p:nvSpPr>
+        <p:spPr>
+          <a:xfrm>
+            <a:off x="31558801" y="11015382"/>
+            <a:ext cx="355691" cy="355691"/>
+          </a:xfrm>
+          <a:prstGeom prst="ellipse">
+            <a:avLst/>
+          </a:prstGeom>
+          <a:solidFill>
+            <a:schemeClr val="tx1"/>
+          </a:solidFill>
+          <a:ln>
+            <a:solidFill>
+              <a:schemeClr val="tx1"/>
+            </a:solidFill>
+            <a:prstDash val="solid"/>
+          </a:ln>
+        </p:spPr>
+        <p:style>
+          <a:lnRef idx="2">
+            <a:schemeClr val="dk1">
+              <a:shade val="15000"/>
+            </a:schemeClr>
+          </a:lnRef>
+          <a:fillRef idx="1">
+            <a:schemeClr val="dk1"/>
+          </a:fillRef>
+          <a:effectRef idx="0">
+            <a:schemeClr val="dk1"/>
+          </a:effectRef>
+          <a:fontRef idx="minor">
+            <a:schemeClr val="lt1"/>
+          </a:fontRef>
+        </p:style>
+        <p:txBody>
+          <a:bodyPr rtlCol="0" anchor="ctr"/>
+          <a:lstStyle/>
+          <a:p>
+            <a:pPr algn="ctr"/>
+            <a:endParaRPr lang="en-US"/>
+          </a:p>
+        </p:txBody>
+      </p:sp>
+      <p:sp>
+        <p:nvSpPr>
+          <p:cNvPr id="237" name="Oval 236">
+            <a:extLst>
+              <a:ext uri="{FF2B5EF4-FFF2-40B4-BE49-F238E27FC236}">
+                <a16:creationId xmlns:a16="http://schemas.microsoft.com/office/drawing/2014/main" id="{009F71B0-9987-904F-247E-86D029952399}"/>
+              </a:ext>
+            </a:extLst>
+          </p:cNvPr>
+          <p:cNvSpPr/>
+          <p:nvPr/>
+        </p:nvSpPr>
+        <p:spPr>
+          <a:xfrm>
+            <a:off x="27827496" y="11015381"/>
+            <a:ext cx="355691" cy="355691"/>
+          </a:xfrm>
+          <a:prstGeom prst="ellipse">
+            <a:avLst/>
+          </a:prstGeom>
+          <a:noFill/>
+          <a:ln>
+            <a:prstDash val="sysDot"/>
+          </a:ln>
+        </p:spPr>
+        <p:style>
+          <a:lnRef idx="2">
+            <a:schemeClr val="dk1">
+              <a:shade val="15000"/>
+            </a:schemeClr>
+          </a:lnRef>
+          <a:fillRef idx="1">
+            <a:schemeClr val="dk1"/>
+          </a:fillRef>
+          <a:effectRef idx="0">
+            <a:schemeClr val="dk1"/>
+          </a:effectRef>
+          <a:fontRef idx="minor">
+            <a:schemeClr val="lt1"/>
+          </a:fontRef>
+        </p:style>
+        <p:txBody>
+          <a:bodyPr rtlCol="0" anchor="ctr"/>
+          <a:lstStyle/>
+          <a:p>
+            <a:pPr algn="ctr"/>
+            <a:endParaRPr lang="en-US"/>
+          </a:p>
+        </p:txBody>
+      </p:sp>
+      <p:sp>
+        <p:nvSpPr>
+          <p:cNvPr id="238" name="Oval 237">
+            <a:extLst>
+              <a:ext uri="{FF2B5EF4-FFF2-40B4-BE49-F238E27FC236}">
+                <a16:creationId xmlns:a16="http://schemas.microsoft.com/office/drawing/2014/main" id="{8BA67200-D3A5-A785-D597-99DC3D187643}"/>
+              </a:ext>
+            </a:extLst>
+          </p:cNvPr>
+          <p:cNvSpPr/>
+          <p:nvPr/>
+        </p:nvSpPr>
+        <p:spPr>
+          <a:xfrm>
+            <a:off x="26985123" y="10647922"/>
+            <a:ext cx="739299" cy="739299"/>
+          </a:xfrm>
+          <a:prstGeom prst="ellipse">
+            <a:avLst/>
+          </a:prstGeom>
+          <a:solidFill>
+            <a:schemeClr val="tx1"/>
+          </a:solidFill>
+          <a:ln>
+            <a:solidFill>
+              <a:schemeClr val="tx1"/>
+            </a:solidFill>
+            <a:prstDash val="solid"/>
+          </a:ln>
+        </p:spPr>
+        <p:style>
+          <a:lnRef idx="2">
+            <a:schemeClr val="dk1">
+              <a:shade val="15000"/>
+            </a:schemeClr>
+          </a:lnRef>
+          <a:fillRef idx="1">
+            <a:schemeClr val="dk1"/>
+          </a:fillRef>
+          <a:effectRef idx="0">
+            <a:schemeClr val="dk1"/>
+          </a:effectRef>
+          <a:fontRef idx="minor">
+            <a:schemeClr val="lt1"/>
+          </a:fontRef>
+        </p:style>
+        <p:txBody>
+          <a:bodyPr rtlCol="0" anchor="ctr"/>
+          <a:lstStyle/>
+          <a:p>
+            <a:pPr algn="ctr"/>
+            <a:endParaRPr lang="en-US"/>
+          </a:p>
+        </p:txBody>
+      </p:sp>
+      <p:sp>
+        <p:nvSpPr>
+          <p:cNvPr id="244" name="Rectangle 243">
+            <a:extLst>
+              <a:ext uri="{FF2B5EF4-FFF2-40B4-BE49-F238E27FC236}">
+                <a16:creationId xmlns:a16="http://schemas.microsoft.com/office/drawing/2014/main" id="{01C9AA31-F098-6060-2068-6DBADAD43911}"/>
+              </a:ext>
+            </a:extLst>
+          </p:cNvPr>
+          <p:cNvSpPr/>
+          <p:nvPr/>
+        </p:nvSpPr>
+        <p:spPr>
+          <a:xfrm>
+            <a:off x="29043747" y="6278048"/>
+            <a:ext cx="1338187" cy="985828"/>
+          </a:xfrm>
+          <a:prstGeom prst="rect">
+            <a:avLst/>
+          </a:prstGeom>
+          <a:solidFill>
+            <a:schemeClr val="bg1">
+              <a:lumMod val="65000"/>
+            </a:schemeClr>
+          </a:solidFill>
+          <a:ln>
+            <a:solidFill>
+              <a:schemeClr val="bg1">
+                <a:lumMod val="65000"/>
+              </a:schemeClr>
+            </a:solidFill>
+          </a:ln>
+        </p:spPr>
+        <p:style>
+          <a:lnRef idx="2">
+            <a:schemeClr val="accent1">
+              <a:shade val="15000"/>
+            </a:schemeClr>
+          </a:lnRef>
+          <a:fillRef idx="1">
+            <a:schemeClr val="accent1"/>
+          </a:fillRef>
+          <a:effectRef idx="0">
+            <a:schemeClr val="accent1"/>
+          </a:effectRef>
+          <a:fontRef idx="minor">
+            <a:schemeClr val="lt1"/>
+          </a:fontRef>
+        </p:style>
+        <p:txBody>
+          <a:bodyPr rtlCol="0" anchor="ctr"/>
+          <a:lstStyle/>
+          <a:p>
+            <a:pPr algn="ctr"/>
+            <a:endParaRPr lang="en-US"/>
+          </a:p>
+        </p:txBody>
+      </p:sp>
+      <p:sp>
+        <p:nvSpPr>
+          <p:cNvPr id="245" name="TextBox 244">
+            <a:extLst>
+              <a:ext uri="{FF2B5EF4-FFF2-40B4-BE49-F238E27FC236}">
+                <a16:creationId xmlns:a16="http://schemas.microsoft.com/office/drawing/2014/main" id="{DB9B4F4C-9744-1BD0-7679-30D20973A7C5}"/>
+              </a:ext>
+            </a:extLst>
+          </p:cNvPr>
+          <p:cNvSpPr txBox="1"/>
+          <p:nvPr/>
+        </p:nvSpPr>
+        <p:spPr>
+          <a:xfrm>
+            <a:off x="26399188" y="2227043"/>
+            <a:ext cx="6657592" cy="707886"/>
+          </a:xfrm>
+          <a:prstGeom prst="rect">
+            <a:avLst/>
+          </a:prstGeom>
+          <a:noFill/>
+        </p:spPr>
+        <p:txBody>
+          <a:bodyPr wrap="none" rtlCol="0">
+            <a:spAutoFit/>
+          </a:bodyPr>
+          <a:lstStyle/>
+          <a:p>
+            <a:r>
+              <a:rPr lang="en-US" sz="4000" dirty="0">
+                <a:latin typeface="Times New Roman" panose="02020603050405020304" pitchFamily="18" charset="0"/>
+                <a:cs typeface="Times New Roman" panose="02020603050405020304" pitchFamily="18" charset="0"/>
+              </a:rPr>
+              <a:t>Inferring Constraints Condition</a:t>
+            </a:r>
+          </a:p>
+        </p:txBody>
+      </p:sp>
+      <p:cxnSp>
+        <p:nvCxnSpPr>
+          <p:cNvPr id="248" name="Straight Connector 247">
+            <a:extLst>
+              <a:ext uri="{FF2B5EF4-FFF2-40B4-BE49-F238E27FC236}">
+                <a16:creationId xmlns:a16="http://schemas.microsoft.com/office/drawing/2014/main" id="{522BD94B-5183-E5D4-F4BC-3FD5EA6501D6}"/>
+              </a:ext>
+            </a:extLst>
+          </p:cNvPr>
+          <p:cNvCxnSpPr>
+            <a:cxnSpLocks/>
+          </p:cNvCxnSpPr>
+          <p:nvPr/>
+        </p:nvCxnSpPr>
+        <p:spPr>
+          <a:xfrm>
+            <a:off x="26982297" y="9534563"/>
+            <a:ext cx="5601694" cy="0"/>
+          </a:xfrm>
+          <a:prstGeom prst="line">
+            <a:avLst/>
+          </a:prstGeom>
+        </p:spPr>
+        <p:style>
+          <a:lnRef idx="2">
+            <a:schemeClr val="dk1"/>
+          </a:lnRef>
+          <a:fillRef idx="0">
+            <a:schemeClr val="dk1"/>
+          </a:fillRef>
+          <a:effectRef idx="1">
+            <a:schemeClr val="dk1"/>
+          </a:effectRef>
+          <a:fontRef idx="minor">
+            <a:schemeClr val="tx1"/>
+          </a:fontRef>
+        </p:style>
+      </p:cxnSp>
+      <p:sp>
+        <p:nvSpPr>
+          <p:cNvPr id="249" name="Freeform: Shape 248">
+            <a:extLst>
+              <a:ext uri="{FF2B5EF4-FFF2-40B4-BE49-F238E27FC236}">
+                <a16:creationId xmlns:a16="http://schemas.microsoft.com/office/drawing/2014/main" id="{A2992998-511F-A7BE-87F4-6CFA3951E5A3}"/>
+              </a:ext>
+            </a:extLst>
+          </p:cNvPr>
+          <p:cNvSpPr/>
+          <p:nvPr/>
+        </p:nvSpPr>
+        <p:spPr>
+          <a:xfrm>
+            <a:off x="28764771" y="8347718"/>
+            <a:ext cx="1786965" cy="985828"/>
+          </a:xfrm>
+          <a:custGeom>
+            <a:avLst/>
+            <a:gdLst>
+              <a:gd name="csX0" fmla="*/ 0 w 1786965"/>
+              <a:gd name="csY0" fmla="*/ 1093699 h 1093699"/>
+              <a:gd name="csX1" fmla="*/ 908424 w 1786965"/>
+              <a:gd name="csY1" fmla="*/ 5 h 1093699"/>
+              <a:gd name="csX2" fmla="*/ 1786965 w 1786965"/>
+              <a:gd name="csY2" fmla="*/ 1081746 h 1093699"/>
+            </a:gdLst>
+            <a:ahLst/>
+            <a:cxnLst>
+              <a:cxn ang="0">
+                <a:pos x="csX0" y="csY0"/>
+              </a:cxn>
+              <a:cxn ang="0">
+                <a:pos x="csX1" y="csY1"/>
+              </a:cxn>
+              <a:cxn ang="0">
+                <a:pos x="csX2" y="csY2"/>
+              </a:cxn>
+            </a:cxnLst>
+            <a:rect l="l" t="t" r="r" b="b"/>
+            <a:pathLst>
+              <a:path w="1786965" h="1093699">
+                <a:moveTo>
+                  <a:pt x="0" y="1093699"/>
+                </a:moveTo>
+                <a:cubicBezTo>
+                  <a:pt x="305298" y="547848"/>
+                  <a:pt x="610597" y="1997"/>
+                  <a:pt x="908424" y="5"/>
+                </a:cubicBezTo>
+                <a:cubicBezTo>
+                  <a:pt x="1206251" y="-1987"/>
+                  <a:pt x="1496608" y="539879"/>
+                  <a:pt x="1786965" y="1081746"/>
+                </a:cubicBezTo>
+              </a:path>
+            </a:pathLst>
+          </a:custGeom>
+          <a:noFill/>
+        </p:spPr>
+        <p:style>
+          <a:lnRef idx="2">
+            <a:schemeClr val="accent1">
+              <a:shade val="15000"/>
+            </a:schemeClr>
+          </a:lnRef>
+          <a:fillRef idx="1">
+            <a:schemeClr val="accent1"/>
+          </a:fillRef>
+          <a:effectRef idx="0">
+            <a:schemeClr val="accent1"/>
+          </a:effectRef>
+          <a:fontRef idx="minor">
+            <a:schemeClr val="lt1"/>
+          </a:fontRef>
+        </p:style>
+        <p:txBody>
+          <a:bodyPr rtlCol="0" anchor="ctr"/>
+          <a:lstStyle/>
+          <a:p>
+            <a:pPr algn="ctr"/>
+            <a:endParaRPr lang="en-US"/>
+          </a:p>
+        </p:txBody>
+      </p:sp>
+      <p:cxnSp>
+        <p:nvCxnSpPr>
+          <p:cNvPr id="250" name="Straight Connector 249">
+            <a:extLst>
+              <a:ext uri="{FF2B5EF4-FFF2-40B4-BE49-F238E27FC236}">
+                <a16:creationId xmlns:a16="http://schemas.microsoft.com/office/drawing/2014/main" id="{7A8AB2FC-7290-E7DC-A446-B33F3B3FC817}"/>
+              </a:ext>
+            </a:extLst>
+          </p:cNvPr>
+          <p:cNvCxnSpPr>
+            <a:cxnSpLocks/>
+          </p:cNvCxnSpPr>
+          <p:nvPr/>
+        </p:nvCxnSpPr>
+        <p:spPr>
+          <a:xfrm>
+            <a:off x="30551731" y="9317512"/>
+            <a:ext cx="903174" cy="0"/>
+          </a:xfrm>
+          <a:prstGeom prst="line">
+            <a:avLst/>
+          </a:prstGeom>
+          <a:ln>
+            <a:solidFill>
+              <a:schemeClr val="tx1"/>
+            </a:solidFill>
+          </a:ln>
+        </p:spPr>
+        <p:style>
+          <a:lnRef idx="2">
+            <a:schemeClr val="accent1"/>
+          </a:lnRef>
+          <a:fillRef idx="0">
+            <a:schemeClr val="accent1"/>
+          </a:fillRef>
+          <a:effectRef idx="1">
+            <a:schemeClr val="accent1"/>
+          </a:effectRef>
+          <a:fontRef idx="minor">
+            <a:schemeClr val="tx1"/>
+          </a:fontRef>
+        </p:style>
+      </p:cxnSp>
+      <p:cxnSp>
+        <p:nvCxnSpPr>
+          <p:cNvPr id="253" name="Straight Arrow Connector 252">
+            <a:extLst>
+              <a:ext uri="{FF2B5EF4-FFF2-40B4-BE49-F238E27FC236}">
+                <a16:creationId xmlns:a16="http://schemas.microsoft.com/office/drawing/2014/main" id="{8857C0A4-6430-C235-D96B-C0DE3820771A}"/>
+              </a:ext>
+            </a:extLst>
+          </p:cNvPr>
+          <p:cNvCxnSpPr>
+            <a:cxnSpLocks/>
+            <a:stCxn id="249" idx="0"/>
+          </p:cNvCxnSpPr>
+          <p:nvPr/>
+        </p:nvCxnSpPr>
+        <p:spPr>
+          <a:xfrm flipH="1" flipV="1">
+            <a:off x="28186924" y="9317512"/>
+            <a:ext cx="577847" cy="16034"/>
+          </a:xfrm>
+          <a:prstGeom prst="straightConnector1">
+            <a:avLst/>
+          </a:prstGeom>
+          <a:ln>
+            <a:solidFill>
+              <a:schemeClr val="tx1"/>
+            </a:solidFill>
+            <a:tailEnd type="triangle"/>
+          </a:ln>
+        </p:spPr>
+        <p:style>
+          <a:lnRef idx="2">
+            <a:schemeClr val="accent1"/>
+          </a:lnRef>
+          <a:fillRef idx="0">
+            <a:schemeClr val="accent1"/>
+          </a:fillRef>
+          <a:effectRef idx="1">
+            <a:schemeClr val="accent1"/>
+          </a:effectRef>
+          <a:fontRef idx="minor">
+            <a:schemeClr val="tx1"/>
+          </a:fontRef>
+        </p:style>
+      </p:cxnSp>
+      <p:sp>
+        <p:nvSpPr>
+          <p:cNvPr id="254" name="Oval 253">
+            <a:extLst>
+              <a:ext uri="{FF2B5EF4-FFF2-40B4-BE49-F238E27FC236}">
+                <a16:creationId xmlns:a16="http://schemas.microsoft.com/office/drawing/2014/main" id="{9B9434D8-1EE7-8E08-9671-49095A94AF0F}"/>
+              </a:ext>
+            </a:extLst>
+          </p:cNvPr>
+          <p:cNvSpPr/>
+          <p:nvPr/>
+        </p:nvSpPr>
+        <p:spPr>
+          <a:xfrm>
+            <a:off x="31552174" y="9162729"/>
+            <a:ext cx="355691" cy="355691"/>
+          </a:xfrm>
+          <a:prstGeom prst="ellipse">
+            <a:avLst/>
+          </a:prstGeom>
+          <a:solidFill>
+            <a:schemeClr val="tx1"/>
+          </a:solidFill>
+          <a:ln>
+            <a:solidFill>
+              <a:schemeClr val="tx1"/>
+            </a:solidFill>
+            <a:prstDash val="solid"/>
+          </a:ln>
+        </p:spPr>
+        <p:style>
+          <a:lnRef idx="2">
+            <a:schemeClr val="dk1">
+              <a:shade val="15000"/>
+            </a:schemeClr>
+          </a:lnRef>
+          <a:fillRef idx="1">
+            <a:schemeClr val="dk1"/>
+          </a:fillRef>
+          <a:effectRef idx="0">
+            <a:schemeClr val="dk1"/>
+          </a:effectRef>
+          <a:fontRef idx="minor">
+            <a:schemeClr val="lt1"/>
+          </a:fontRef>
+        </p:style>
+        <p:txBody>
+          <a:bodyPr rtlCol="0" anchor="ctr"/>
+          <a:lstStyle/>
+          <a:p>
+            <a:pPr algn="ctr"/>
+            <a:endParaRPr lang="en-US"/>
+          </a:p>
+        </p:txBody>
+      </p:sp>
+      <p:sp>
+        <p:nvSpPr>
+          <p:cNvPr id="255" name="Oval 254">
+            <a:extLst>
+              <a:ext uri="{FF2B5EF4-FFF2-40B4-BE49-F238E27FC236}">
+                <a16:creationId xmlns:a16="http://schemas.microsoft.com/office/drawing/2014/main" id="{138BD3E6-FE51-3E67-4710-8B42747499B9}"/>
+              </a:ext>
+            </a:extLst>
+          </p:cNvPr>
+          <p:cNvSpPr/>
+          <p:nvPr/>
+        </p:nvSpPr>
+        <p:spPr>
+          <a:xfrm>
+            <a:off x="27820869" y="9162728"/>
+            <a:ext cx="355691" cy="355691"/>
+          </a:xfrm>
+          <a:prstGeom prst="ellipse">
+            <a:avLst/>
+          </a:prstGeom>
+          <a:noFill/>
+          <a:ln>
+            <a:prstDash val="sysDot"/>
+          </a:ln>
+        </p:spPr>
+        <p:style>
+          <a:lnRef idx="2">
+            <a:schemeClr val="dk1">
+              <a:shade val="15000"/>
+            </a:schemeClr>
+          </a:lnRef>
+          <a:fillRef idx="1">
+            <a:schemeClr val="dk1"/>
+          </a:fillRef>
+          <a:effectRef idx="0">
+            <a:schemeClr val="dk1"/>
+          </a:effectRef>
+          <a:fontRef idx="minor">
+            <a:schemeClr val="lt1"/>
+          </a:fontRef>
+        </p:style>
+        <p:txBody>
+          <a:bodyPr rtlCol="0" anchor="ctr"/>
+          <a:lstStyle/>
+          <a:p>
+            <a:pPr algn="ctr"/>
+            <a:endParaRPr lang="en-US"/>
+          </a:p>
+        </p:txBody>
+      </p:sp>
+      <p:sp>
+        <p:nvSpPr>
+          <p:cNvPr id="256" name="Oval 255">
+            <a:extLst>
+              <a:ext uri="{FF2B5EF4-FFF2-40B4-BE49-F238E27FC236}">
+                <a16:creationId xmlns:a16="http://schemas.microsoft.com/office/drawing/2014/main" id="{C1724B39-B735-0D49-E3D0-81F8C6BF8F17}"/>
+              </a:ext>
+            </a:extLst>
+          </p:cNvPr>
+          <p:cNvSpPr/>
+          <p:nvPr/>
+        </p:nvSpPr>
+        <p:spPr>
+          <a:xfrm>
+            <a:off x="26978496" y="8795269"/>
+            <a:ext cx="739299" cy="739299"/>
+          </a:xfrm>
+          <a:prstGeom prst="ellipse">
+            <a:avLst/>
+          </a:prstGeom>
+          <a:solidFill>
+            <a:schemeClr val="tx1"/>
+          </a:solidFill>
+          <a:ln>
+            <a:solidFill>
+              <a:schemeClr val="tx1"/>
+            </a:solidFill>
+            <a:prstDash val="solid"/>
+          </a:ln>
+        </p:spPr>
+        <p:style>
+          <a:lnRef idx="2">
+            <a:schemeClr val="dk1">
+              <a:shade val="15000"/>
+            </a:schemeClr>
+          </a:lnRef>
+          <a:fillRef idx="1">
+            <a:schemeClr val="dk1"/>
+          </a:fillRef>
+          <a:effectRef idx="0">
+            <a:schemeClr val="dk1"/>
+          </a:effectRef>
+          <a:fontRef idx="minor">
+            <a:schemeClr val="lt1"/>
+          </a:fontRef>
+        </p:style>
+        <p:txBody>
+          <a:bodyPr rtlCol="0" anchor="ctr"/>
+          <a:lstStyle/>
+          <a:p>
+            <a:pPr algn="ctr"/>
+            <a:endParaRPr lang="en-US"/>
+          </a:p>
+        </p:txBody>
+      </p:sp>
+      <p:sp>
+        <p:nvSpPr>
+          <p:cNvPr id="257" name="Rectangle 256">
+            <a:extLst>
+              <a:ext uri="{FF2B5EF4-FFF2-40B4-BE49-F238E27FC236}">
+                <a16:creationId xmlns:a16="http://schemas.microsoft.com/office/drawing/2014/main" id="{8562B3F2-9AC5-C9BD-292B-3D3430AADFFF}"/>
+              </a:ext>
+            </a:extLst>
+          </p:cNvPr>
+          <p:cNvSpPr/>
+          <p:nvPr/>
+        </p:nvSpPr>
+        <p:spPr>
+          <a:xfrm>
+            <a:off x="29483712" y="8594236"/>
+            <a:ext cx="370541" cy="940332"/>
+          </a:xfrm>
+          <a:prstGeom prst="rect">
+            <a:avLst/>
+          </a:prstGeom>
+        </p:spPr>
+        <p:style>
+          <a:lnRef idx="2">
+            <a:schemeClr val="dk1">
+              <a:shade val="15000"/>
+            </a:schemeClr>
+          </a:lnRef>
+          <a:fillRef idx="1">
+            <a:schemeClr val="dk1"/>
+          </a:fillRef>
+          <a:effectRef idx="0">
+            <a:schemeClr val="dk1"/>
+          </a:effectRef>
+          <a:fontRef idx="minor">
+            <a:schemeClr val="lt1"/>
+          </a:fontRef>
+        </p:style>
+        <p:txBody>
+          <a:bodyPr rtlCol="0" anchor="ctr"/>
+          <a:lstStyle/>
+          <a:p>
+            <a:pPr algn="ctr"/>
+            <a:endParaRPr lang="en-US"/>
+          </a:p>
+        </p:txBody>
+      </p:sp>
+      <p:cxnSp>
+        <p:nvCxnSpPr>
+          <p:cNvPr id="258" name="Straight Connector 257">
+            <a:extLst>
+              <a:ext uri="{FF2B5EF4-FFF2-40B4-BE49-F238E27FC236}">
+                <a16:creationId xmlns:a16="http://schemas.microsoft.com/office/drawing/2014/main" id="{90F37305-2B9C-90A6-032C-A4B409220866}"/>
+              </a:ext>
+            </a:extLst>
+          </p:cNvPr>
+          <p:cNvCxnSpPr>
+            <a:cxnSpLocks/>
+          </p:cNvCxnSpPr>
+          <p:nvPr/>
+        </p:nvCxnSpPr>
+        <p:spPr>
+          <a:xfrm>
+            <a:off x="33159032" y="5474225"/>
+            <a:ext cx="6800530" cy="0"/>
+          </a:xfrm>
+          <a:prstGeom prst="line">
+            <a:avLst/>
+          </a:prstGeom>
+        </p:spPr>
+        <p:style>
+          <a:lnRef idx="2">
+            <a:schemeClr val="dk1"/>
+          </a:lnRef>
+          <a:fillRef idx="0">
+            <a:schemeClr val="dk1"/>
+          </a:fillRef>
+          <a:effectRef idx="1">
+            <a:schemeClr val="dk1"/>
+          </a:effectRef>
+          <a:fontRef idx="minor">
+            <a:schemeClr val="tx1"/>
+          </a:fontRef>
+        </p:style>
+      </p:cxnSp>
+      <p:sp>
+        <p:nvSpPr>
+          <p:cNvPr id="259" name="Rectangle 258">
+            <a:extLst>
+              <a:ext uri="{FF2B5EF4-FFF2-40B4-BE49-F238E27FC236}">
+                <a16:creationId xmlns:a16="http://schemas.microsoft.com/office/drawing/2014/main" id="{CCE06B3C-D811-27C5-2D5C-B6D59E1C7236}"/>
+              </a:ext>
+            </a:extLst>
+          </p:cNvPr>
+          <p:cNvSpPr/>
+          <p:nvPr/>
+        </p:nvSpPr>
+        <p:spPr>
+          <a:xfrm>
+            <a:off x="36859856" y="4517966"/>
+            <a:ext cx="370541" cy="940332"/>
+          </a:xfrm>
+          <a:prstGeom prst="rect">
+            <a:avLst/>
+          </a:prstGeom>
+        </p:spPr>
+        <p:style>
+          <a:lnRef idx="2">
+            <a:schemeClr val="dk1">
+              <a:shade val="15000"/>
+            </a:schemeClr>
+          </a:lnRef>
+          <a:fillRef idx="1">
+            <a:schemeClr val="dk1"/>
+          </a:fillRef>
+          <a:effectRef idx="0">
+            <a:schemeClr val="dk1"/>
+          </a:effectRef>
+          <a:fontRef idx="minor">
+            <a:schemeClr val="lt1"/>
+          </a:fontRef>
+        </p:style>
+        <p:txBody>
+          <a:bodyPr rtlCol="0" anchor="ctr"/>
+          <a:lstStyle/>
+          <a:p>
+            <a:pPr algn="ctr"/>
+            <a:endParaRPr lang="en-US"/>
+          </a:p>
+        </p:txBody>
+      </p:sp>
+      <p:sp>
+        <p:nvSpPr>
+          <p:cNvPr id="260" name="Oval 259">
+            <a:extLst>
+              <a:ext uri="{FF2B5EF4-FFF2-40B4-BE49-F238E27FC236}">
+                <a16:creationId xmlns:a16="http://schemas.microsoft.com/office/drawing/2014/main" id="{6297FA99-FEE3-A979-EB86-E99E6E6F27F5}"/>
+              </a:ext>
+            </a:extLst>
+          </p:cNvPr>
+          <p:cNvSpPr/>
+          <p:nvPr/>
+        </p:nvSpPr>
+        <p:spPr>
+          <a:xfrm>
+            <a:off x="39027941" y="5293753"/>
+            <a:ext cx="168298" cy="168298"/>
+          </a:xfrm>
+          <a:prstGeom prst="ellipse">
+            <a:avLst/>
+          </a:prstGeom>
+        </p:spPr>
+        <p:style>
+          <a:lnRef idx="2">
+            <a:schemeClr val="dk1">
+              <a:shade val="15000"/>
+            </a:schemeClr>
+          </a:lnRef>
+          <a:fillRef idx="1">
+            <a:schemeClr val="dk1"/>
+          </a:fillRef>
+          <a:effectRef idx="0">
+            <a:schemeClr val="dk1"/>
+          </a:effectRef>
+          <a:fontRef idx="minor">
+            <a:schemeClr val="lt1"/>
+          </a:fontRef>
+        </p:style>
+        <p:txBody>
+          <a:bodyPr rtlCol="0" anchor="ctr"/>
+          <a:lstStyle/>
+          <a:p>
+            <a:pPr algn="ctr"/>
+            <a:endParaRPr lang="en-US"/>
+          </a:p>
+        </p:txBody>
+      </p:sp>
+      <p:sp>
+        <p:nvSpPr>
+          <p:cNvPr id="261" name="Oval 260">
+            <a:extLst>
+              <a:ext uri="{FF2B5EF4-FFF2-40B4-BE49-F238E27FC236}">
+                <a16:creationId xmlns:a16="http://schemas.microsoft.com/office/drawing/2014/main" id="{A56B9055-B817-E7E4-FB4B-8128B3F214DA}"/>
+              </a:ext>
+            </a:extLst>
+          </p:cNvPr>
+          <p:cNvSpPr/>
+          <p:nvPr/>
+        </p:nvSpPr>
+        <p:spPr>
+          <a:xfrm>
+            <a:off x="33216608" y="4995697"/>
+            <a:ext cx="464093" cy="464093"/>
+          </a:xfrm>
+          <a:prstGeom prst="ellipse">
+            <a:avLst/>
+          </a:prstGeom>
+        </p:spPr>
+        <p:style>
+          <a:lnRef idx="2">
+            <a:schemeClr val="dk1">
+              <a:shade val="15000"/>
+            </a:schemeClr>
+          </a:lnRef>
+          <a:fillRef idx="1">
+            <a:schemeClr val="dk1"/>
+          </a:fillRef>
+          <a:effectRef idx="0">
+            <a:schemeClr val="dk1"/>
+          </a:effectRef>
+          <a:fontRef idx="minor">
+            <a:schemeClr val="lt1"/>
+          </a:fontRef>
+        </p:style>
+        <p:txBody>
+          <a:bodyPr rtlCol="0" anchor="ctr"/>
+          <a:lstStyle/>
+          <a:p>
+            <a:pPr algn="ctr"/>
+            <a:endParaRPr lang="en-US"/>
+          </a:p>
+        </p:txBody>
+      </p:sp>
+      <p:sp>
+        <p:nvSpPr>
+          <p:cNvPr id="262" name="Oval 261">
+            <a:extLst>
+              <a:ext uri="{FF2B5EF4-FFF2-40B4-BE49-F238E27FC236}">
+                <a16:creationId xmlns:a16="http://schemas.microsoft.com/office/drawing/2014/main" id="{D9811C96-9332-AEE1-C275-D3AA6DF38A43}"/>
+              </a:ext>
+            </a:extLst>
+          </p:cNvPr>
+          <p:cNvSpPr/>
+          <p:nvPr/>
+        </p:nvSpPr>
+        <p:spPr>
+          <a:xfrm>
+            <a:off x="38927745" y="5102391"/>
+            <a:ext cx="355691" cy="355691"/>
+          </a:xfrm>
+          <a:prstGeom prst="ellipse">
+            <a:avLst/>
+          </a:prstGeom>
+          <a:noFill/>
+          <a:ln>
+            <a:prstDash val="sysDot"/>
+          </a:ln>
+        </p:spPr>
+        <p:style>
+          <a:lnRef idx="2">
+            <a:schemeClr val="dk1">
+              <a:shade val="15000"/>
+            </a:schemeClr>
+          </a:lnRef>
+          <a:fillRef idx="1">
+            <a:schemeClr val="dk1"/>
+          </a:fillRef>
+          <a:effectRef idx="0">
+            <a:schemeClr val="dk1"/>
+          </a:effectRef>
+          <a:fontRef idx="minor">
+            <a:schemeClr val="lt1"/>
+          </a:fontRef>
+        </p:style>
+        <p:txBody>
+          <a:bodyPr rtlCol="0" anchor="ctr"/>
+          <a:lstStyle/>
+          <a:p>
+            <a:pPr algn="ctr"/>
+            <a:endParaRPr lang="en-US"/>
+          </a:p>
+        </p:txBody>
+      </p:sp>
+      <p:cxnSp>
+        <p:nvCxnSpPr>
+          <p:cNvPr id="263" name="Straight Arrow Connector 262">
+            <a:extLst>
+              <a:ext uri="{FF2B5EF4-FFF2-40B4-BE49-F238E27FC236}">
+                <a16:creationId xmlns:a16="http://schemas.microsoft.com/office/drawing/2014/main" id="{A192415F-9450-5649-83E7-E04A66072051}"/>
+              </a:ext>
+            </a:extLst>
+          </p:cNvPr>
+          <p:cNvCxnSpPr>
+            <a:cxnSpLocks/>
+          </p:cNvCxnSpPr>
+          <p:nvPr/>
+        </p:nvCxnSpPr>
+        <p:spPr>
+          <a:xfrm flipV="1">
+            <a:off x="39096048" y="5106358"/>
+            <a:ext cx="0" cy="178775"/>
+          </a:xfrm>
+          <a:prstGeom prst="straightConnector1">
+            <a:avLst/>
+          </a:prstGeom>
+          <a:ln>
+            <a:solidFill>
+              <a:schemeClr val="tx1"/>
+            </a:solidFill>
+            <a:headEnd type="triangle"/>
+            <a:tailEnd type="triangle"/>
+          </a:ln>
+        </p:spPr>
+        <p:style>
+          <a:lnRef idx="2">
+            <a:schemeClr val="accent1"/>
+          </a:lnRef>
+          <a:fillRef idx="0">
+            <a:schemeClr val="accent1"/>
+          </a:fillRef>
+          <a:effectRef idx="1">
+            <a:schemeClr val="accent1"/>
+          </a:effectRef>
+          <a:fontRef idx="minor">
+            <a:schemeClr val="tx1"/>
+          </a:fontRef>
+        </p:style>
+      </p:cxnSp>
+      <p:cxnSp>
+        <p:nvCxnSpPr>
+          <p:cNvPr id="264" name="Straight Arrow Connector 263">
+            <a:extLst>
+              <a:ext uri="{FF2B5EF4-FFF2-40B4-BE49-F238E27FC236}">
+                <a16:creationId xmlns:a16="http://schemas.microsoft.com/office/drawing/2014/main" id="{ED1DAB49-B56B-41BD-C377-05FE79054FD9}"/>
+              </a:ext>
+            </a:extLst>
+          </p:cNvPr>
+          <p:cNvCxnSpPr>
+            <a:cxnSpLocks/>
+          </p:cNvCxnSpPr>
+          <p:nvPr/>
+        </p:nvCxnSpPr>
+        <p:spPr>
+          <a:xfrm flipH="1" flipV="1">
+            <a:off x="38937710" y="5206400"/>
+            <a:ext cx="136337" cy="106056"/>
+          </a:xfrm>
+          <a:prstGeom prst="straightConnector1">
+            <a:avLst/>
+          </a:prstGeom>
+          <a:ln>
+            <a:solidFill>
+              <a:schemeClr val="tx1"/>
+            </a:solidFill>
+            <a:headEnd type="triangle"/>
+            <a:tailEnd type="triangle"/>
+          </a:ln>
+        </p:spPr>
+        <p:style>
+          <a:lnRef idx="2">
+            <a:schemeClr val="accent1"/>
+          </a:lnRef>
+          <a:fillRef idx="0">
+            <a:schemeClr val="accent1"/>
+          </a:fillRef>
+          <a:effectRef idx="1">
+            <a:schemeClr val="accent1"/>
+          </a:effectRef>
+          <a:fontRef idx="minor">
+            <a:schemeClr val="tx1"/>
+          </a:fontRef>
+        </p:style>
+      </p:cxnSp>
+      <p:cxnSp>
+        <p:nvCxnSpPr>
+          <p:cNvPr id="265" name="Straight Arrow Connector 264">
+            <a:extLst>
+              <a:ext uri="{FF2B5EF4-FFF2-40B4-BE49-F238E27FC236}">
+                <a16:creationId xmlns:a16="http://schemas.microsoft.com/office/drawing/2014/main" id="{2863C08E-EE7A-BC52-95DD-7691A60232A9}"/>
+              </a:ext>
+            </a:extLst>
+          </p:cNvPr>
+          <p:cNvCxnSpPr>
+            <a:cxnSpLocks/>
+          </p:cNvCxnSpPr>
+          <p:nvPr/>
+        </p:nvCxnSpPr>
+        <p:spPr>
+          <a:xfrm flipV="1">
+            <a:off x="39170172" y="5156545"/>
+            <a:ext cx="61144" cy="167993"/>
+          </a:xfrm>
+          <a:prstGeom prst="straightConnector1">
+            <a:avLst/>
+          </a:prstGeom>
+          <a:ln>
+            <a:solidFill>
+              <a:schemeClr val="tx1"/>
+            </a:solidFill>
+            <a:headEnd type="triangle"/>
+            <a:tailEnd type="triangle"/>
+          </a:ln>
+        </p:spPr>
+        <p:style>
+          <a:lnRef idx="2">
+            <a:schemeClr val="accent1"/>
+          </a:lnRef>
+          <a:fillRef idx="0">
+            <a:schemeClr val="accent1"/>
+          </a:fillRef>
+          <a:effectRef idx="1">
+            <a:schemeClr val="accent1"/>
+          </a:effectRef>
+          <a:fontRef idx="minor">
+            <a:schemeClr val="tx1"/>
+          </a:fontRef>
+        </p:style>
+      </p:cxnSp>
+      <p:sp>
+        <p:nvSpPr>
+          <p:cNvPr id="266" name="Oval 265">
+            <a:extLst>
+              <a:ext uri="{FF2B5EF4-FFF2-40B4-BE49-F238E27FC236}">
+                <a16:creationId xmlns:a16="http://schemas.microsoft.com/office/drawing/2014/main" id="{E66C2745-9C67-C695-8DA5-5C9D1438D50B}"/>
+              </a:ext>
+            </a:extLst>
+          </p:cNvPr>
+          <p:cNvSpPr/>
+          <p:nvPr/>
+        </p:nvSpPr>
+        <p:spPr>
+          <a:xfrm>
+            <a:off x="33078720" y="4734931"/>
+            <a:ext cx="739299" cy="739299"/>
+          </a:xfrm>
+          <a:prstGeom prst="ellipse">
+            <a:avLst/>
+          </a:prstGeom>
+          <a:noFill/>
+          <a:ln>
+            <a:prstDash val="sysDot"/>
+          </a:ln>
+        </p:spPr>
+        <p:style>
+          <a:lnRef idx="2">
+            <a:schemeClr val="dk1">
+              <a:shade val="15000"/>
+            </a:schemeClr>
+          </a:lnRef>
+          <a:fillRef idx="1">
+            <a:schemeClr val="dk1"/>
+          </a:fillRef>
+          <a:effectRef idx="0">
+            <a:schemeClr val="dk1"/>
+          </a:effectRef>
+          <a:fontRef idx="minor">
+            <a:schemeClr val="lt1"/>
+          </a:fontRef>
+        </p:style>
+        <p:txBody>
+          <a:bodyPr rtlCol="0" anchor="ctr"/>
+          <a:lstStyle/>
+          <a:p>
+            <a:pPr algn="ctr"/>
+            <a:endParaRPr lang="en-US"/>
+          </a:p>
+        </p:txBody>
+      </p:sp>
+      <p:cxnSp>
+        <p:nvCxnSpPr>
+          <p:cNvPr id="267" name="Straight Arrow Connector 266">
+            <a:extLst>
+              <a:ext uri="{FF2B5EF4-FFF2-40B4-BE49-F238E27FC236}">
+                <a16:creationId xmlns:a16="http://schemas.microsoft.com/office/drawing/2014/main" id="{06FD384C-A4B7-377F-04B8-13F07267156D}"/>
+              </a:ext>
+            </a:extLst>
+          </p:cNvPr>
+          <p:cNvCxnSpPr>
+            <a:cxnSpLocks/>
+          </p:cNvCxnSpPr>
+          <p:nvPr/>
+        </p:nvCxnSpPr>
+        <p:spPr>
+          <a:xfrm flipH="1" flipV="1">
+            <a:off x="33432461" y="4750829"/>
+            <a:ext cx="4420" cy="234000"/>
+          </a:xfrm>
+          <a:prstGeom prst="straightConnector1">
+            <a:avLst/>
+          </a:prstGeom>
+          <a:ln>
+            <a:solidFill>
+              <a:schemeClr val="tx1"/>
+            </a:solidFill>
+            <a:headEnd type="triangle"/>
+            <a:tailEnd type="triangle"/>
+          </a:ln>
+        </p:spPr>
+        <p:style>
+          <a:lnRef idx="2">
+            <a:schemeClr val="accent1"/>
+          </a:lnRef>
+          <a:fillRef idx="0">
+            <a:schemeClr val="accent1"/>
+          </a:fillRef>
+          <a:effectRef idx="1">
+            <a:schemeClr val="accent1"/>
+          </a:effectRef>
+          <a:fontRef idx="minor">
+            <a:schemeClr val="tx1"/>
+          </a:fontRef>
+        </p:style>
+      </p:cxnSp>
+      <p:cxnSp>
+        <p:nvCxnSpPr>
+          <p:cNvPr id="268" name="Straight Arrow Connector 267">
+            <a:extLst>
+              <a:ext uri="{FF2B5EF4-FFF2-40B4-BE49-F238E27FC236}">
+                <a16:creationId xmlns:a16="http://schemas.microsoft.com/office/drawing/2014/main" id="{4FD8F079-5CAC-7E0F-96F7-234BAE5F9580}"/>
+              </a:ext>
+            </a:extLst>
+          </p:cNvPr>
+          <p:cNvCxnSpPr>
+            <a:cxnSpLocks/>
+          </p:cNvCxnSpPr>
+          <p:nvPr/>
+        </p:nvCxnSpPr>
+        <p:spPr>
+          <a:xfrm flipV="1">
+            <a:off x="33608293" y="4907971"/>
+            <a:ext cx="148836" cy="130658"/>
+          </a:xfrm>
+          <a:prstGeom prst="straightConnector1">
+            <a:avLst/>
+          </a:prstGeom>
+          <a:ln>
+            <a:solidFill>
+              <a:schemeClr val="tx1"/>
+            </a:solidFill>
+            <a:headEnd type="triangle"/>
+            <a:tailEnd type="triangle"/>
+          </a:ln>
+        </p:spPr>
+        <p:style>
+          <a:lnRef idx="2">
+            <a:schemeClr val="accent1"/>
+          </a:lnRef>
+          <a:fillRef idx="0">
+            <a:schemeClr val="accent1"/>
+          </a:fillRef>
+          <a:effectRef idx="1">
+            <a:schemeClr val="accent1"/>
+          </a:effectRef>
+          <a:fontRef idx="minor">
+            <a:schemeClr val="tx1"/>
+          </a:fontRef>
+        </p:style>
+      </p:cxnSp>
+      <p:cxnSp>
+        <p:nvCxnSpPr>
+          <p:cNvPr id="269" name="Straight Arrow Connector 268">
+            <a:extLst>
+              <a:ext uri="{FF2B5EF4-FFF2-40B4-BE49-F238E27FC236}">
+                <a16:creationId xmlns:a16="http://schemas.microsoft.com/office/drawing/2014/main" id="{22698A5E-E3A3-B3B8-D015-8AE9189A168E}"/>
+              </a:ext>
+            </a:extLst>
+          </p:cNvPr>
+          <p:cNvCxnSpPr>
+            <a:cxnSpLocks/>
+          </p:cNvCxnSpPr>
+          <p:nvPr/>
+        </p:nvCxnSpPr>
+        <p:spPr>
+          <a:xfrm flipH="1" flipV="1">
+            <a:off x="33139343" y="4919309"/>
+            <a:ext cx="154518" cy="123886"/>
+          </a:xfrm>
+          <a:prstGeom prst="straightConnector1">
+            <a:avLst/>
+          </a:prstGeom>
+          <a:ln>
+            <a:solidFill>
+              <a:schemeClr val="tx1"/>
+            </a:solidFill>
+            <a:headEnd type="triangle"/>
+            <a:tailEnd type="triangle"/>
+          </a:ln>
+        </p:spPr>
+        <p:style>
+          <a:lnRef idx="2">
+            <a:schemeClr val="accent1"/>
+          </a:lnRef>
+          <a:fillRef idx="0">
+            <a:schemeClr val="accent1"/>
+          </a:fillRef>
+          <a:effectRef idx="1">
+            <a:schemeClr val="accent1"/>
+          </a:effectRef>
+          <a:fontRef idx="minor">
+            <a:schemeClr val="tx1"/>
+          </a:fontRef>
+        </p:style>
+      </p:cxnSp>
+      <p:cxnSp>
+        <p:nvCxnSpPr>
+          <p:cNvPr id="270" name="Straight Connector 269">
+            <a:extLst>
+              <a:ext uri="{FF2B5EF4-FFF2-40B4-BE49-F238E27FC236}">
+                <a16:creationId xmlns:a16="http://schemas.microsoft.com/office/drawing/2014/main" id="{8BBFB02A-8D4F-605A-CA07-4B75508FCB17}"/>
+              </a:ext>
+            </a:extLst>
+          </p:cNvPr>
+          <p:cNvCxnSpPr>
+            <a:cxnSpLocks/>
+          </p:cNvCxnSpPr>
+          <p:nvPr/>
+        </p:nvCxnSpPr>
+        <p:spPr>
+          <a:xfrm>
+            <a:off x="33102191" y="7275686"/>
+            <a:ext cx="6853565" cy="0"/>
+          </a:xfrm>
+          <a:prstGeom prst="line">
+            <a:avLst/>
+          </a:prstGeom>
+        </p:spPr>
+        <p:style>
+          <a:lnRef idx="2">
+            <a:schemeClr val="dk1"/>
+          </a:lnRef>
+          <a:fillRef idx="0">
+            <a:schemeClr val="dk1"/>
+          </a:fillRef>
+          <a:effectRef idx="1">
+            <a:schemeClr val="dk1"/>
+          </a:effectRef>
+          <a:fontRef idx="minor">
+            <a:schemeClr val="tx1"/>
+          </a:fontRef>
+        </p:style>
+      </p:cxnSp>
+      <p:sp>
+        <p:nvSpPr>
+          <p:cNvPr id="271" name="Rectangle 270">
+            <a:extLst>
+              <a:ext uri="{FF2B5EF4-FFF2-40B4-BE49-F238E27FC236}">
+                <a16:creationId xmlns:a16="http://schemas.microsoft.com/office/drawing/2014/main" id="{620AB40F-BA45-8398-A317-35E1AC3E67EB}"/>
+              </a:ext>
+            </a:extLst>
+          </p:cNvPr>
+          <p:cNvSpPr/>
+          <p:nvPr/>
+        </p:nvSpPr>
+        <p:spPr>
+          <a:xfrm>
+            <a:off x="36856050" y="6319427"/>
+            <a:ext cx="370541" cy="940332"/>
+          </a:xfrm>
+          <a:prstGeom prst="rect">
+            <a:avLst/>
+          </a:prstGeom>
+        </p:spPr>
+        <p:style>
+          <a:lnRef idx="2">
+            <a:schemeClr val="dk1">
+              <a:shade val="15000"/>
+            </a:schemeClr>
+          </a:lnRef>
+          <a:fillRef idx="1">
+            <a:schemeClr val="dk1"/>
+          </a:fillRef>
+          <a:effectRef idx="0">
+            <a:schemeClr val="dk1"/>
+          </a:effectRef>
+          <a:fontRef idx="minor">
+            <a:schemeClr val="lt1"/>
+          </a:fontRef>
+        </p:style>
+        <p:txBody>
+          <a:bodyPr rtlCol="0" anchor="ctr"/>
+          <a:lstStyle/>
+          <a:p>
+            <a:pPr algn="ctr"/>
+            <a:endParaRPr lang="en-US"/>
+          </a:p>
+        </p:txBody>
+      </p:sp>
+      <p:sp>
+        <p:nvSpPr>
+          <p:cNvPr id="272" name="Freeform: Shape 271">
+            <a:extLst>
+              <a:ext uri="{FF2B5EF4-FFF2-40B4-BE49-F238E27FC236}">
+                <a16:creationId xmlns:a16="http://schemas.microsoft.com/office/drawing/2014/main" id="{0F08FA08-D880-E714-CF4B-940024D9A46B}"/>
+              </a:ext>
+            </a:extLst>
+          </p:cNvPr>
+          <p:cNvSpPr/>
+          <p:nvPr/>
+        </p:nvSpPr>
+        <p:spPr>
+          <a:xfrm>
+            <a:off x="36136536" y="6088841"/>
+            <a:ext cx="1786965" cy="985828"/>
+          </a:xfrm>
+          <a:custGeom>
+            <a:avLst/>
+            <a:gdLst>
+              <a:gd name="csX0" fmla="*/ 0 w 1786965"/>
+              <a:gd name="csY0" fmla="*/ 1093699 h 1093699"/>
+              <a:gd name="csX1" fmla="*/ 908424 w 1786965"/>
+              <a:gd name="csY1" fmla="*/ 5 h 1093699"/>
+              <a:gd name="csX2" fmla="*/ 1786965 w 1786965"/>
+              <a:gd name="csY2" fmla="*/ 1081746 h 1093699"/>
+            </a:gdLst>
+            <a:ahLst/>
+            <a:cxnLst>
+              <a:cxn ang="0">
+                <a:pos x="csX0" y="csY0"/>
+              </a:cxn>
+              <a:cxn ang="0">
+                <a:pos x="csX1" y="csY1"/>
+              </a:cxn>
+              <a:cxn ang="0">
+                <a:pos x="csX2" y="csY2"/>
+              </a:cxn>
+            </a:cxnLst>
+            <a:rect l="l" t="t" r="r" b="b"/>
+            <a:pathLst>
+              <a:path w="1786965" h="1093699">
+                <a:moveTo>
+                  <a:pt x="0" y="1093699"/>
+                </a:moveTo>
+                <a:cubicBezTo>
+                  <a:pt x="305298" y="547848"/>
+                  <a:pt x="610597" y="1997"/>
+                  <a:pt x="908424" y="5"/>
+                </a:cubicBezTo>
+                <a:cubicBezTo>
+                  <a:pt x="1206251" y="-1987"/>
+                  <a:pt x="1496608" y="539879"/>
+                  <a:pt x="1786965" y="1081746"/>
+                </a:cubicBezTo>
+              </a:path>
+            </a:pathLst>
+          </a:custGeom>
+          <a:noFill/>
+        </p:spPr>
+        <p:style>
+          <a:lnRef idx="2">
+            <a:schemeClr val="accent1">
+              <a:shade val="15000"/>
+            </a:schemeClr>
+          </a:lnRef>
+          <a:fillRef idx="1">
+            <a:schemeClr val="accent1"/>
+          </a:fillRef>
+          <a:effectRef idx="0">
+            <a:schemeClr val="accent1"/>
+          </a:effectRef>
+          <a:fontRef idx="minor">
+            <a:schemeClr val="lt1"/>
+          </a:fontRef>
+        </p:style>
+        <p:txBody>
+          <a:bodyPr rtlCol="0" anchor="ctr"/>
+          <a:lstStyle/>
+          <a:p>
+            <a:pPr algn="ctr"/>
+            <a:endParaRPr lang="en-US"/>
+          </a:p>
+        </p:txBody>
+      </p:sp>
+      <p:cxnSp>
+        <p:nvCxnSpPr>
+          <p:cNvPr id="273" name="Straight Connector 272">
+            <a:extLst>
+              <a:ext uri="{FF2B5EF4-FFF2-40B4-BE49-F238E27FC236}">
+                <a16:creationId xmlns:a16="http://schemas.microsoft.com/office/drawing/2014/main" id="{441C8F37-F111-7474-EB28-0FBC4915FDD5}"/>
+              </a:ext>
+            </a:extLst>
+          </p:cNvPr>
+          <p:cNvCxnSpPr>
+            <a:cxnSpLocks/>
+          </p:cNvCxnSpPr>
+          <p:nvPr/>
+        </p:nvCxnSpPr>
+        <p:spPr>
+          <a:xfrm>
+            <a:off x="37923496" y="7058635"/>
+            <a:ext cx="903174" cy="0"/>
+          </a:xfrm>
+          <a:prstGeom prst="line">
+            <a:avLst/>
+          </a:prstGeom>
+          <a:ln>
+            <a:solidFill>
+              <a:schemeClr val="tx1"/>
+            </a:solidFill>
+          </a:ln>
+        </p:spPr>
+        <p:style>
+          <a:lnRef idx="2">
+            <a:schemeClr val="accent1"/>
+          </a:lnRef>
+          <a:fillRef idx="0">
+            <a:schemeClr val="accent1"/>
+          </a:fillRef>
+          <a:effectRef idx="1">
+            <a:schemeClr val="accent1"/>
+          </a:effectRef>
+          <a:fontRef idx="minor">
+            <a:schemeClr val="tx1"/>
+          </a:fontRef>
+        </p:style>
+      </p:cxnSp>
+      <p:cxnSp>
+        <p:nvCxnSpPr>
+          <p:cNvPr id="274" name="Straight Arrow Connector 273">
+            <a:extLst>
+              <a:ext uri="{FF2B5EF4-FFF2-40B4-BE49-F238E27FC236}">
+                <a16:creationId xmlns:a16="http://schemas.microsoft.com/office/drawing/2014/main" id="{920B3C0F-DD1F-9693-B01A-EBC589CB516F}"/>
+              </a:ext>
+            </a:extLst>
+          </p:cNvPr>
+          <p:cNvCxnSpPr>
+            <a:cxnSpLocks/>
+            <a:stCxn id="272" idx="0"/>
+          </p:cNvCxnSpPr>
+          <p:nvPr/>
+        </p:nvCxnSpPr>
+        <p:spPr>
+          <a:xfrm flipH="1" flipV="1">
+            <a:off x="35558689" y="7058635"/>
+            <a:ext cx="577847" cy="16034"/>
+          </a:xfrm>
+          <a:prstGeom prst="straightConnector1">
+            <a:avLst/>
+          </a:prstGeom>
+          <a:ln>
+            <a:solidFill>
+              <a:schemeClr val="tx1"/>
+            </a:solidFill>
+            <a:tailEnd type="triangle"/>
+          </a:ln>
+        </p:spPr>
+        <p:style>
+          <a:lnRef idx="2">
+            <a:schemeClr val="accent1"/>
+          </a:lnRef>
+          <a:fillRef idx="0">
+            <a:schemeClr val="accent1"/>
+          </a:fillRef>
+          <a:effectRef idx="1">
+            <a:schemeClr val="accent1"/>
+          </a:effectRef>
+          <a:fontRef idx="minor">
+            <a:schemeClr val="tx1"/>
+          </a:fontRef>
+        </p:style>
+      </p:cxnSp>
+      <p:sp>
+        <p:nvSpPr>
+          <p:cNvPr id="275" name="Oval 274">
+            <a:extLst>
+              <a:ext uri="{FF2B5EF4-FFF2-40B4-BE49-F238E27FC236}">
+                <a16:creationId xmlns:a16="http://schemas.microsoft.com/office/drawing/2014/main" id="{2505E572-A8AC-4347-71D3-BD2E53AC2D96}"/>
+              </a:ext>
+            </a:extLst>
+          </p:cNvPr>
+          <p:cNvSpPr/>
+          <p:nvPr/>
+        </p:nvSpPr>
+        <p:spPr>
+          <a:xfrm>
+            <a:off x="38923939" y="6903852"/>
+            <a:ext cx="355691" cy="355691"/>
+          </a:xfrm>
+          <a:prstGeom prst="ellipse">
+            <a:avLst/>
+          </a:prstGeom>
+          <a:solidFill>
+            <a:schemeClr val="tx1"/>
+          </a:solidFill>
+          <a:ln>
+            <a:solidFill>
+              <a:schemeClr val="tx1"/>
+            </a:solidFill>
+            <a:prstDash val="solid"/>
+          </a:ln>
+        </p:spPr>
+        <p:style>
+          <a:lnRef idx="2">
+            <a:schemeClr val="dk1">
+              <a:shade val="15000"/>
+            </a:schemeClr>
+          </a:lnRef>
+          <a:fillRef idx="1">
+            <a:schemeClr val="dk1"/>
+          </a:fillRef>
+          <a:effectRef idx="0">
+            <a:schemeClr val="dk1"/>
+          </a:effectRef>
+          <a:fontRef idx="minor">
+            <a:schemeClr val="lt1"/>
+          </a:fontRef>
+        </p:style>
+        <p:txBody>
+          <a:bodyPr rtlCol="0" anchor="ctr"/>
+          <a:lstStyle/>
+          <a:p>
+            <a:pPr algn="ctr"/>
+            <a:endParaRPr lang="en-US"/>
+          </a:p>
+        </p:txBody>
+      </p:sp>
+      <p:sp>
+        <p:nvSpPr>
+          <p:cNvPr id="276" name="Oval 275">
+            <a:extLst>
+              <a:ext uri="{FF2B5EF4-FFF2-40B4-BE49-F238E27FC236}">
+                <a16:creationId xmlns:a16="http://schemas.microsoft.com/office/drawing/2014/main" id="{B4E53940-ED22-0342-2EFA-27AE3ECCE744}"/>
+              </a:ext>
+            </a:extLst>
+          </p:cNvPr>
+          <p:cNvSpPr/>
+          <p:nvPr/>
+        </p:nvSpPr>
+        <p:spPr>
+          <a:xfrm>
+            <a:off x="35192634" y="6903851"/>
+            <a:ext cx="355691" cy="355691"/>
+          </a:xfrm>
+          <a:prstGeom prst="ellipse">
+            <a:avLst/>
+          </a:prstGeom>
+          <a:noFill/>
+          <a:ln>
+            <a:prstDash val="sysDot"/>
+          </a:ln>
+        </p:spPr>
+        <p:style>
+          <a:lnRef idx="2">
+            <a:schemeClr val="dk1">
+              <a:shade val="15000"/>
+            </a:schemeClr>
+          </a:lnRef>
+          <a:fillRef idx="1">
+            <a:schemeClr val="dk1"/>
+          </a:fillRef>
+          <a:effectRef idx="0">
+            <a:schemeClr val="dk1"/>
+          </a:effectRef>
+          <a:fontRef idx="minor">
+            <a:schemeClr val="lt1"/>
+          </a:fontRef>
+        </p:style>
+        <p:txBody>
+          <a:bodyPr rtlCol="0" anchor="ctr"/>
+          <a:lstStyle/>
+          <a:p>
+            <a:pPr algn="ctr"/>
+            <a:endParaRPr lang="en-US"/>
+          </a:p>
+        </p:txBody>
+      </p:sp>
+      <p:sp>
+        <p:nvSpPr>
+          <p:cNvPr id="277" name="Oval 276">
+            <a:extLst>
+              <a:ext uri="{FF2B5EF4-FFF2-40B4-BE49-F238E27FC236}">
+                <a16:creationId xmlns:a16="http://schemas.microsoft.com/office/drawing/2014/main" id="{BCC8FAD2-E329-36DF-9209-44EDB7D0A320}"/>
+              </a:ext>
+            </a:extLst>
+          </p:cNvPr>
+          <p:cNvSpPr/>
+          <p:nvPr/>
+        </p:nvSpPr>
+        <p:spPr>
+          <a:xfrm>
+            <a:off x="33135067" y="6536392"/>
+            <a:ext cx="739299" cy="739299"/>
+          </a:xfrm>
+          <a:prstGeom prst="ellipse">
+            <a:avLst/>
+          </a:prstGeom>
+          <a:solidFill>
+            <a:schemeClr val="tx1"/>
+          </a:solidFill>
+          <a:ln>
+            <a:solidFill>
+              <a:schemeClr val="tx1"/>
+            </a:solidFill>
+            <a:prstDash val="solid"/>
+          </a:ln>
+        </p:spPr>
+        <p:style>
+          <a:lnRef idx="2">
+            <a:schemeClr val="dk1">
+              <a:shade val="15000"/>
+            </a:schemeClr>
+          </a:lnRef>
+          <a:fillRef idx="1">
+            <a:schemeClr val="dk1"/>
+          </a:fillRef>
+          <a:effectRef idx="0">
+            <a:schemeClr val="dk1"/>
+          </a:effectRef>
+          <a:fontRef idx="minor">
+            <a:schemeClr val="lt1"/>
+          </a:fontRef>
+        </p:style>
+        <p:txBody>
+          <a:bodyPr rtlCol="0" anchor="ctr"/>
+          <a:lstStyle/>
+          <a:p>
+            <a:pPr algn="ctr"/>
+            <a:endParaRPr lang="en-US"/>
+          </a:p>
+        </p:txBody>
+      </p:sp>
+      <p:sp>
+        <p:nvSpPr>
+          <p:cNvPr id="278" name="Rectangle 277">
+            <a:extLst>
+              <a:ext uri="{FF2B5EF4-FFF2-40B4-BE49-F238E27FC236}">
+                <a16:creationId xmlns:a16="http://schemas.microsoft.com/office/drawing/2014/main" id="{912D2320-AADB-2E0D-2761-E745D9E8F17B}"/>
+              </a:ext>
+            </a:extLst>
+          </p:cNvPr>
+          <p:cNvSpPr/>
+          <p:nvPr/>
+        </p:nvSpPr>
+        <p:spPr>
+          <a:xfrm>
+            <a:off x="33091661" y="6858000"/>
+            <a:ext cx="2858698" cy="401980"/>
+          </a:xfrm>
+          <a:prstGeom prst="rect">
+            <a:avLst/>
+          </a:prstGeom>
+          <a:solidFill>
+            <a:schemeClr val="bg1">
+              <a:lumMod val="65000"/>
+            </a:schemeClr>
+          </a:solidFill>
+          <a:ln>
+            <a:solidFill>
+              <a:schemeClr val="bg1">
+                <a:lumMod val="65000"/>
+              </a:schemeClr>
+            </a:solidFill>
+          </a:ln>
+        </p:spPr>
+        <p:style>
+          <a:lnRef idx="2">
+            <a:schemeClr val="accent1">
+              <a:shade val="15000"/>
+            </a:schemeClr>
+          </a:lnRef>
+          <a:fillRef idx="1">
+            <a:schemeClr val="accent1"/>
+          </a:fillRef>
+          <a:effectRef idx="0">
+            <a:schemeClr val="accent1"/>
+          </a:effectRef>
+          <a:fontRef idx="minor">
+            <a:schemeClr val="lt1"/>
+          </a:fontRef>
+        </p:style>
+        <p:txBody>
+          <a:bodyPr rtlCol="0" anchor="ctr"/>
+          <a:lstStyle/>
+          <a:p>
+            <a:pPr algn="ctr"/>
+            <a:endParaRPr lang="en-US"/>
+          </a:p>
+        </p:txBody>
+      </p:sp>
+      <p:cxnSp>
+        <p:nvCxnSpPr>
+          <p:cNvPr id="290" name="Straight Connector 289">
+            <a:extLst>
+              <a:ext uri="{FF2B5EF4-FFF2-40B4-BE49-F238E27FC236}">
+                <a16:creationId xmlns:a16="http://schemas.microsoft.com/office/drawing/2014/main" id="{E3B42647-D5CA-9CC9-A69C-D047C1711FEE}"/>
+              </a:ext>
+            </a:extLst>
+          </p:cNvPr>
+          <p:cNvCxnSpPr>
+            <a:cxnSpLocks/>
+          </p:cNvCxnSpPr>
+          <p:nvPr/>
+        </p:nvCxnSpPr>
+        <p:spPr>
+          <a:xfrm>
+            <a:off x="32941770" y="9535217"/>
+            <a:ext cx="6853565" cy="0"/>
+          </a:xfrm>
+          <a:prstGeom prst="line">
+            <a:avLst/>
+          </a:prstGeom>
+        </p:spPr>
+        <p:style>
+          <a:lnRef idx="2">
+            <a:schemeClr val="dk1"/>
+          </a:lnRef>
+          <a:fillRef idx="0">
+            <a:schemeClr val="dk1"/>
+          </a:fillRef>
+          <a:effectRef idx="1">
+            <a:schemeClr val="dk1"/>
+          </a:effectRef>
+          <a:fontRef idx="minor">
+            <a:schemeClr val="tx1"/>
+          </a:fontRef>
+        </p:style>
+      </p:cxnSp>
+      <p:sp>
+        <p:nvSpPr>
+          <p:cNvPr id="295" name="Oval 294">
+            <a:extLst>
+              <a:ext uri="{FF2B5EF4-FFF2-40B4-BE49-F238E27FC236}">
+                <a16:creationId xmlns:a16="http://schemas.microsoft.com/office/drawing/2014/main" id="{BC1FC30B-36BB-A012-0A20-A33557C4B10A}"/>
+              </a:ext>
+            </a:extLst>
+          </p:cNvPr>
+          <p:cNvSpPr/>
+          <p:nvPr/>
+        </p:nvSpPr>
+        <p:spPr>
+          <a:xfrm>
+            <a:off x="38763518" y="9163383"/>
+            <a:ext cx="355691" cy="355691"/>
+          </a:xfrm>
+          <a:prstGeom prst="ellipse">
+            <a:avLst/>
+          </a:prstGeom>
+          <a:solidFill>
+            <a:schemeClr val="tx1"/>
+          </a:solidFill>
+          <a:ln>
+            <a:solidFill>
+              <a:schemeClr val="tx1"/>
+            </a:solidFill>
+            <a:prstDash val="solid"/>
+          </a:ln>
+        </p:spPr>
+        <p:style>
+          <a:lnRef idx="2">
+            <a:schemeClr val="dk1">
+              <a:shade val="15000"/>
+            </a:schemeClr>
+          </a:lnRef>
+          <a:fillRef idx="1">
+            <a:schemeClr val="dk1"/>
+          </a:fillRef>
+          <a:effectRef idx="0">
+            <a:schemeClr val="dk1"/>
+          </a:effectRef>
+          <a:fontRef idx="minor">
+            <a:schemeClr val="lt1"/>
+          </a:fontRef>
+        </p:style>
+        <p:txBody>
+          <a:bodyPr rtlCol="0" anchor="ctr"/>
+          <a:lstStyle/>
+          <a:p>
+            <a:pPr algn="ctr"/>
+            <a:endParaRPr lang="en-US"/>
+          </a:p>
+        </p:txBody>
+      </p:sp>
+      <p:sp>
+        <p:nvSpPr>
+          <p:cNvPr id="296" name="Oval 295">
+            <a:extLst>
+              <a:ext uri="{FF2B5EF4-FFF2-40B4-BE49-F238E27FC236}">
+                <a16:creationId xmlns:a16="http://schemas.microsoft.com/office/drawing/2014/main" id="{90F1128F-DDE0-F903-C5F4-04B7326BE60E}"/>
+              </a:ext>
+            </a:extLst>
+          </p:cNvPr>
+          <p:cNvSpPr/>
+          <p:nvPr/>
+        </p:nvSpPr>
+        <p:spPr>
+          <a:xfrm>
+            <a:off x="33768897" y="9163382"/>
+            <a:ext cx="355691" cy="355691"/>
+          </a:xfrm>
+          <a:prstGeom prst="ellipse">
+            <a:avLst/>
+          </a:prstGeom>
+          <a:noFill/>
+          <a:ln>
+            <a:prstDash val="sysDot"/>
+          </a:ln>
+        </p:spPr>
+        <p:style>
+          <a:lnRef idx="2">
+            <a:schemeClr val="dk1">
+              <a:shade val="15000"/>
+            </a:schemeClr>
+          </a:lnRef>
+          <a:fillRef idx="1">
+            <a:schemeClr val="dk1"/>
+          </a:fillRef>
+          <a:effectRef idx="0">
+            <a:schemeClr val="dk1"/>
+          </a:effectRef>
+          <a:fontRef idx="minor">
+            <a:schemeClr val="lt1"/>
+          </a:fontRef>
+        </p:style>
+        <p:txBody>
+          <a:bodyPr rtlCol="0" anchor="ctr"/>
+          <a:lstStyle/>
+          <a:p>
+            <a:pPr algn="ctr"/>
+            <a:endParaRPr lang="en-US"/>
+          </a:p>
+        </p:txBody>
+      </p:sp>
+      <p:sp>
+        <p:nvSpPr>
+          <p:cNvPr id="297" name="Oval 296">
+            <a:extLst>
+              <a:ext uri="{FF2B5EF4-FFF2-40B4-BE49-F238E27FC236}">
+                <a16:creationId xmlns:a16="http://schemas.microsoft.com/office/drawing/2014/main" id="{3457C597-B67E-C670-BAA9-6D1901474BA9}"/>
+              </a:ext>
+            </a:extLst>
+          </p:cNvPr>
+          <p:cNvSpPr/>
+          <p:nvPr/>
+        </p:nvSpPr>
+        <p:spPr>
+          <a:xfrm>
+            <a:off x="32974646" y="8795923"/>
+            <a:ext cx="739299" cy="739299"/>
+          </a:xfrm>
+          <a:prstGeom prst="ellipse">
+            <a:avLst/>
+          </a:prstGeom>
+          <a:solidFill>
+            <a:schemeClr val="tx1"/>
+          </a:solidFill>
+          <a:ln>
+            <a:solidFill>
+              <a:schemeClr val="tx1"/>
+            </a:solidFill>
+            <a:prstDash val="solid"/>
+          </a:ln>
+        </p:spPr>
+        <p:style>
+          <a:lnRef idx="2">
+            <a:schemeClr val="dk1">
+              <a:shade val="15000"/>
+            </a:schemeClr>
+          </a:lnRef>
+          <a:fillRef idx="1">
+            <a:schemeClr val="dk1"/>
+          </a:fillRef>
+          <a:effectRef idx="0">
+            <a:schemeClr val="dk1"/>
+          </a:effectRef>
+          <a:fontRef idx="minor">
+            <a:schemeClr val="lt1"/>
+          </a:fontRef>
+        </p:style>
+        <p:txBody>
+          <a:bodyPr rtlCol="0" anchor="ctr"/>
+          <a:lstStyle/>
+          <a:p>
+            <a:pPr algn="ctr"/>
+            <a:endParaRPr lang="en-US"/>
+          </a:p>
+        </p:txBody>
+      </p:sp>
+      <p:cxnSp>
+        <p:nvCxnSpPr>
+          <p:cNvPr id="299" name="Straight Arrow Connector 298">
+            <a:extLst>
+              <a:ext uri="{FF2B5EF4-FFF2-40B4-BE49-F238E27FC236}">
+                <a16:creationId xmlns:a16="http://schemas.microsoft.com/office/drawing/2014/main" id="{63C36323-E46F-DF03-0C01-6E42DEE546D2}"/>
+              </a:ext>
+            </a:extLst>
+          </p:cNvPr>
+          <p:cNvCxnSpPr>
+            <a:cxnSpLocks/>
+          </p:cNvCxnSpPr>
+          <p:nvPr/>
+        </p:nvCxnSpPr>
+        <p:spPr>
+          <a:xfrm flipH="1">
+            <a:off x="34277088" y="9311526"/>
+            <a:ext cx="4211933" cy="0"/>
+          </a:xfrm>
+          <a:prstGeom prst="straightConnector1">
+            <a:avLst/>
+          </a:prstGeom>
+          <a:ln>
+            <a:tailEnd type="triangle"/>
+          </a:ln>
+        </p:spPr>
+        <p:style>
+          <a:lnRef idx="2">
+            <a:schemeClr val="dk1"/>
+          </a:lnRef>
+          <a:fillRef idx="0">
+            <a:schemeClr val="dk1"/>
+          </a:fillRef>
+          <a:effectRef idx="1">
+            <a:schemeClr val="dk1"/>
+          </a:effectRef>
+          <a:fontRef idx="minor">
+            <a:schemeClr val="tx1"/>
+          </a:fontRef>
+        </p:style>
+      </p:cxnSp>
+      <p:cxnSp>
+        <p:nvCxnSpPr>
+          <p:cNvPr id="301" name="Straight Connector 300">
+            <a:extLst>
+              <a:ext uri="{FF2B5EF4-FFF2-40B4-BE49-F238E27FC236}">
+                <a16:creationId xmlns:a16="http://schemas.microsoft.com/office/drawing/2014/main" id="{6E795A84-84A9-2DC5-DC3B-7B8AAB0A0DDE}"/>
+              </a:ext>
+            </a:extLst>
+          </p:cNvPr>
+          <p:cNvCxnSpPr>
+            <a:cxnSpLocks/>
+          </p:cNvCxnSpPr>
+          <p:nvPr/>
+        </p:nvCxnSpPr>
+        <p:spPr>
+          <a:xfrm>
+            <a:off x="32884934" y="11390184"/>
+            <a:ext cx="6853565" cy="0"/>
+          </a:xfrm>
+          <a:prstGeom prst="line">
+            <a:avLst/>
+          </a:prstGeom>
+        </p:spPr>
+        <p:style>
+          <a:lnRef idx="2">
+            <a:schemeClr val="dk1"/>
+          </a:lnRef>
+          <a:fillRef idx="0">
+            <a:schemeClr val="dk1"/>
+          </a:fillRef>
+          <a:effectRef idx="1">
+            <a:schemeClr val="dk1"/>
+          </a:effectRef>
+          <a:fontRef idx="minor">
+            <a:schemeClr val="tx1"/>
+          </a:fontRef>
+        </p:style>
+      </p:cxnSp>
+      <p:sp>
+        <p:nvSpPr>
+          <p:cNvPr id="302" name="Oval 301">
+            <a:extLst>
+              <a:ext uri="{FF2B5EF4-FFF2-40B4-BE49-F238E27FC236}">
+                <a16:creationId xmlns:a16="http://schemas.microsoft.com/office/drawing/2014/main" id="{3439BCE3-6B2B-156C-9EF7-9F8971FBD5E2}"/>
+              </a:ext>
+            </a:extLst>
+          </p:cNvPr>
+          <p:cNvSpPr/>
+          <p:nvPr/>
+        </p:nvSpPr>
+        <p:spPr>
+          <a:xfrm>
+            <a:off x="38706682" y="11018350"/>
+            <a:ext cx="355691" cy="355691"/>
+          </a:xfrm>
+          <a:prstGeom prst="ellipse">
+            <a:avLst/>
+          </a:prstGeom>
+          <a:solidFill>
+            <a:schemeClr val="tx1"/>
+          </a:solidFill>
+          <a:ln>
+            <a:solidFill>
+              <a:schemeClr val="tx1"/>
+            </a:solidFill>
+            <a:prstDash val="solid"/>
+          </a:ln>
+        </p:spPr>
+        <p:style>
+          <a:lnRef idx="2">
+            <a:schemeClr val="dk1">
+              <a:shade val="15000"/>
+            </a:schemeClr>
+          </a:lnRef>
+          <a:fillRef idx="1">
+            <a:schemeClr val="dk1"/>
+          </a:fillRef>
+          <a:effectRef idx="0">
+            <a:schemeClr val="dk1"/>
+          </a:effectRef>
+          <a:fontRef idx="minor">
+            <a:schemeClr val="lt1"/>
+          </a:fontRef>
+        </p:style>
+        <p:txBody>
+          <a:bodyPr rtlCol="0" anchor="ctr"/>
+          <a:lstStyle/>
+          <a:p>
+            <a:pPr algn="ctr"/>
+            <a:endParaRPr lang="en-US"/>
+          </a:p>
+        </p:txBody>
+      </p:sp>
+      <p:sp>
+        <p:nvSpPr>
+          <p:cNvPr id="303" name="Oval 302">
+            <a:extLst>
+              <a:ext uri="{FF2B5EF4-FFF2-40B4-BE49-F238E27FC236}">
+                <a16:creationId xmlns:a16="http://schemas.microsoft.com/office/drawing/2014/main" id="{576248D3-95DF-12EA-1C0D-620F4B99CEF0}"/>
+              </a:ext>
+            </a:extLst>
+          </p:cNvPr>
+          <p:cNvSpPr/>
+          <p:nvPr/>
+        </p:nvSpPr>
+        <p:spPr>
+          <a:xfrm>
+            <a:off x="35252106" y="11018349"/>
+            <a:ext cx="355691" cy="355691"/>
+          </a:xfrm>
+          <a:prstGeom prst="ellipse">
+            <a:avLst/>
+          </a:prstGeom>
+          <a:noFill/>
+          <a:ln>
+            <a:prstDash val="sysDot"/>
+          </a:ln>
+        </p:spPr>
+        <p:style>
+          <a:lnRef idx="2">
+            <a:schemeClr val="dk1">
+              <a:shade val="15000"/>
+            </a:schemeClr>
+          </a:lnRef>
+          <a:fillRef idx="1">
+            <a:schemeClr val="dk1"/>
+          </a:fillRef>
+          <a:effectRef idx="0">
+            <a:schemeClr val="dk1"/>
+          </a:effectRef>
+          <a:fontRef idx="minor">
+            <a:schemeClr val="lt1"/>
+          </a:fontRef>
+        </p:style>
+        <p:txBody>
+          <a:bodyPr rtlCol="0" anchor="ctr"/>
+          <a:lstStyle/>
+          <a:p>
+            <a:pPr algn="ctr"/>
+            <a:endParaRPr lang="en-US"/>
+          </a:p>
+        </p:txBody>
+      </p:sp>
+      <p:sp>
+        <p:nvSpPr>
+          <p:cNvPr id="304" name="Oval 303">
+            <a:extLst>
+              <a:ext uri="{FF2B5EF4-FFF2-40B4-BE49-F238E27FC236}">
+                <a16:creationId xmlns:a16="http://schemas.microsoft.com/office/drawing/2014/main" id="{494EA55B-E5CD-5366-7690-0661D802983B}"/>
+              </a:ext>
+            </a:extLst>
+          </p:cNvPr>
+          <p:cNvSpPr/>
+          <p:nvPr/>
+        </p:nvSpPr>
+        <p:spPr>
+          <a:xfrm>
+            <a:off x="32917810" y="10650890"/>
+            <a:ext cx="739299" cy="739299"/>
+          </a:xfrm>
+          <a:prstGeom prst="ellipse">
+            <a:avLst/>
+          </a:prstGeom>
+          <a:solidFill>
+            <a:schemeClr val="tx1"/>
+          </a:solidFill>
+          <a:ln>
+            <a:solidFill>
+              <a:schemeClr val="tx1"/>
+            </a:solidFill>
+            <a:prstDash val="solid"/>
+          </a:ln>
+        </p:spPr>
+        <p:style>
+          <a:lnRef idx="2">
+            <a:schemeClr val="dk1">
+              <a:shade val="15000"/>
+            </a:schemeClr>
+          </a:lnRef>
+          <a:fillRef idx="1">
+            <a:schemeClr val="dk1"/>
+          </a:fillRef>
+          <a:effectRef idx="0">
+            <a:schemeClr val="dk1"/>
+          </a:effectRef>
+          <a:fontRef idx="minor">
+            <a:schemeClr val="lt1"/>
+          </a:fontRef>
+        </p:style>
+        <p:txBody>
+          <a:bodyPr rtlCol="0" anchor="ctr"/>
+          <a:lstStyle/>
+          <a:p>
+            <a:pPr algn="ctr"/>
+            <a:endParaRPr lang="en-US"/>
+          </a:p>
+        </p:txBody>
+      </p:sp>
+      <p:cxnSp>
+        <p:nvCxnSpPr>
+          <p:cNvPr id="305" name="Straight Arrow Connector 304">
+            <a:extLst>
+              <a:ext uri="{FF2B5EF4-FFF2-40B4-BE49-F238E27FC236}">
+                <a16:creationId xmlns:a16="http://schemas.microsoft.com/office/drawing/2014/main" id="{D45B5769-39B9-6AC9-5A4E-A37CD3B8A55D}"/>
+              </a:ext>
+            </a:extLst>
+          </p:cNvPr>
+          <p:cNvCxnSpPr>
+            <a:cxnSpLocks/>
+          </p:cNvCxnSpPr>
+          <p:nvPr/>
+        </p:nvCxnSpPr>
+        <p:spPr>
+          <a:xfrm flipH="1">
+            <a:off x="35685663" y="11166493"/>
+            <a:ext cx="2746522" cy="0"/>
+          </a:xfrm>
+          <a:prstGeom prst="straightConnector1">
+            <a:avLst/>
+          </a:prstGeom>
+          <a:ln>
+            <a:tailEnd type="triangle"/>
+          </a:ln>
+        </p:spPr>
+        <p:style>
+          <a:lnRef idx="2">
+            <a:schemeClr val="dk1"/>
+          </a:lnRef>
+          <a:fillRef idx="0">
+            <a:schemeClr val="dk1"/>
+          </a:fillRef>
+          <a:effectRef idx="1">
+            <a:schemeClr val="dk1"/>
+          </a:effectRef>
+          <a:fontRef idx="minor">
+            <a:schemeClr val="tx1"/>
+          </a:fontRef>
+        </p:style>
+      </p:cxnSp>
+      <p:sp>
+        <p:nvSpPr>
+          <p:cNvPr id="307" name="TextBox 306">
+            <a:extLst>
+              <a:ext uri="{FF2B5EF4-FFF2-40B4-BE49-F238E27FC236}">
+                <a16:creationId xmlns:a16="http://schemas.microsoft.com/office/drawing/2014/main" id="{F4C2BA63-9D74-C9AD-2F67-82F71AF7D124}"/>
+              </a:ext>
+            </a:extLst>
+          </p:cNvPr>
+          <p:cNvSpPr txBox="1"/>
+          <p:nvPr/>
+        </p:nvSpPr>
+        <p:spPr>
+          <a:xfrm>
+            <a:off x="33902887" y="2227043"/>
+            <a:ext cx="5516254" cy="707886"/>
+          </a:xfrm>
+          <a:prstGeom prst="rect">
+            <a:avLst/>
+          </a:prstGeom>
+          <a:noFill/>
+        </p:spPr>
+        <p:txBody>
+          <a:bodyPr wrap="none" rtlCol="0">
+            <a:spAutoFit/>
+          </a:bodyPr>
+          <a:lstStyle/>
+          <a:p>
+            <a:r>
+              <a:rPr lang="en-US" sz="4000" dirty="0">
+                <a:latin typeface="Times New Roman" panose="02020603050405020304" pitchFamily="18" charset="0"/>
+                <a:cs typeface="Times New Roman" panose="02020603050405020304" pitchFamily="18" charset="0"/>
+              </a:rPr>
+              <a:t>Inferring Goals Condition</a:t>
+            </a:r>
+          </a:p>
+        </p:txBody>
+      </p:sp>
+      <p:sp>
+        <p:nvSpPr>
+          <p:cNvPr id="308" name="TextBox 307">
+            <a:extLst>
+              <a:ext uri="{FF2B5EF4-FFF2-40B4-BE49-F238E27FC236}">
+                <a16:creationId xmlns:a16="http://schemas.microsoft.com/office/drawing/2014/main" id="{35A881EA-DA28-9FC6-5DDF-0E07339DCCCF}"/>
+              </a:ext>
+            </a:extLst>
+          </p:cNvPr>
+          <p:cNvSpPr txBox="1"/>
+          <p:nvPr/>
+        </p:nvSpPr>
+        <p:spPr>
+          <a:xfrm>
+            <a:off x="27066566" y="834291"/>
+            <a:ext cx="13012473" cy="1323439"/>
+          </a:xfrm>
+          <a:prstGeom prst="rect">
+            <a:avLst/>
+          </a:prstGeom>
+          <a:noFill/>
+        </p:spPr>
+        <p:txBody>
+          <a:bodyPr wrap="none" rtlCol="0">
+            <a:spAutoFit/>
+          </a:bodyPr>
+          <a:lstStyle/>
+          <a:p>
+            <a:pPr algn="ctr"/>
+            <a:r>
+              <a:rPr lang="en-US" sz="4000" dirty="0">
+                <a:latin typeface="Times New Roman" panose="02020603050405020304" pitchFamily="18" charset="0"/>
+                <a:cs typeface="Times New Roman" panose="02020603050405020304" pitchFamily="18" charset="0"/>
+              </a:rPr>
+              <a:t>Target Finding 3: </a:t>
+            </a:r>
+          </a:p>
+          <a:p>
+            <a:pPr algn="ctr"/>
+            <a:r>
+              <a:rPr lang="en-US" sz="4000" dirty="0">
+                <a:latin typeface="Times New Roman" panose="02020603050405020304" pitchFamily="18" charset="0"/>
+                <a:cs typeface="Times New Roman" panose="02020603050405020304" pitchFamily="18" charset="0"/>
+              </a:rPr>
+              <a:t>Bidirectional Inferences about Actions, Goals, and Constraints</a:t>
+            </a:r>
+          </a:p>
+        </p:txBody>
+      </p:sp>
     </p:spTree>
     <p:extLst>
       <p:ext uri="{BB962C8B-B14F-4D97-AF65-F5344CB8AC3E}">
@@ -6940,7 +12670,7 @@
 <file path=ppt/theme/theme1.xml><?xml version="1.0" encoding="utf-8"?>
 <a:theme xmlns:a="http://schemas.openxmlformats.org/drawingml/2006/main" name="Office Theme">
   <a:themeElements>
-    <a:clrScheme name="Office">
+    <a:clrScheme name="Office Theme">
       <a:dk1>
         <a:sysClr val="windowText" lastClr="000000"/>
       </a:dk1>
@@ -6978,7 +12708,7 @@
         <a:srgbClr val="96607D"/>
       </a:folHlink>
     </a:clrScheme>
-    <a:fontScheme name="Office">
+    <a:fontScheme name="Office Theme">
       <a:majorFont>
         <a:latin typeface="Aptos Display" panose="02110004020202020204"/>
         <a:ea typeface=""/>
@@ -7084,7 +12814,7 @@
         <a:font script="Tfng" typeface="Ebrima"/>
       </a:minorFont>
     </a:fontScheme>
-    <a:fmtScheme name="Office">
+    <a:fmtScheme name="Office Theme">
       <a:fillStyleLst>
         <a:solidFill>
           <a:schemeClr val="phClr"/>
@@ -7568,6 +13298,15 @@
 </file>
 
 <file path=customXml/item1.xml><?xml version="1.0" encoding="utf-8"?>
+<?mso-contentType ?>
+<FormTemplates xmlns="http://schemas.microsoft.com/sharepoint/v3/contenttype/forms">
+  <Display>DocumentLibraryForm</Display>
+  <Edit>DocumentLibraryForm</Edit>
+  <New>DocumentLibraryForm</New>
+</FormTemplates>
+</file>
+
+<file path=customXml/item2.xml><?xml version="1.0" encoding="utf-8"?>
 <ct:contentTypeSchema xmlns:ct="http://schemas.microsoft.com/office/2006/metadata/contentType" xmlns:ma="http://schemas.microsoft.com/office/2006/metadata/properties/metaAttributes" ct:_="" ma:_="" ma:contentTypeName="Document" ma:contentTypeID="0x0101003D700C8CE122D6468A01E7E6F602FC93" ma:contentTypeVersion="15" ma:contentTypeDescription="Create a new document." ma:contentTypeScope="" ma:versionID="78a361b573735f4e8f7ea36d196d1741">
   <xsd:schema xmlns:xsd="http://www.w3.org/2001/XMLSchema" xmlns:xs="http://www.w3.org/2001/XMLSchema" xmlns:p="http://schemas.microsoft.com/office/2006/metadata/properties" xmlns:ns3="4668150b-da18-493d-a040-cbc02bf476e5" xmlns:ns4="e584c313-2618-4b13-ba4c-e296ab8c40d5" targetNamespace="http://schemas.microsoft.com/office/2006/metadata/properties" ma:root="true" ma:fieldsID="aacb3e30d10ecf7b0bc1959e7f1d2dde" ns3:_="" ns4:_="">
     <xsd:import namespace="4668150b-da18-493d-a040-cbc02bf476e5"/>
@@ -7798,15 +13537,6 @@
 </ct:contentTypeSchema>
 </file>
 
-<file path=customXml/item2.xml><?xml version="1.0" encoding="utf-8"?>
-<?mso-contentType ?>
-<FormTemplates xmlns="http://schemas.microsoft.com/sharepoint/v3/contenttype/forms">
-  <Display>DocumentLibraryForm</Display>
-  <Edit>DocumentLibraryForm</Edit>
-  <New>DocumentLibraryForm</New>
-</FormTemplates>
-</file>
-
 <file path=customXml/item3.xml><?xml version="1.0" encoding="utf-8"?>
 <p:properties xmlns:p="http://schemas.microsoft.com/office/2006/metadata/properties" xmlns:xsi="http://www.w3.org/2001/XMLSchema-instance" xmlns:pc="http://schemas.microsoft.com/office/infopath/2007/PartnerControls">
   <documentManagement>
@@ -7816,6 +13546,14 @@
 </file>
 
 <file path=customXml/itemProps1.xml><?xml version="1.0" encoding="utf-8"?>
+<ds:datastoreItem xmlns:ds="http://schemas.openxmlformats.org/officeDocument/2006/customXml" ds:itemID="{F2F1528F-C631-4170-A5E1-A10CC58FFF8F}">
+  <ds:schemaRefs>
+    <ds:schemaRef ds:uri="http://schemas.microsoft.com/sharepoint/v3/contenttype/forms"/>
+  </ds:schemaRefs>
+</ds:datastoreItem>
+</file>
+
+<file path=customXml/itemProps2.xml><?xml version="1.0" encoding="utf-8"?>
 <ds:datastoreItem xmlns:ds="http://schemas.openxmlformats.org/officeDocument/2006/customXml" ds:itemID="{9028DA92-C8DA-4342-B357-E9B52241A81B}">
   <ds:schemaRefs>
     <ds:schemaRef ds:uri="http://schemas.microsoft.com/office/2006/metadata/contentType"/>
@@ -7830,14 +13568,6 @@
     <ds:schemaRef ds:uri="http://purl.org/dc/elements/1.1/"/>
     <ds:schemaRef ds:uri="http://purl.org/dc/terms/"/>
     <ds:schemaRef ds:uri="http://schemas.microsoft.com/internal/obd"/>
-  </ds:schemaRefs>
-</ds:datastoreItem>
-</file>
-
-<file path=customXml/itemProps2.xml><?xml version="1.0" encoding="utf-8"?>
-<ds:datastoreItem xmlns:ds="http://schemas.openxmlformats.org/officeDocument/2006/customXml" ds:itemID="{F2F1528F-C631-4170-A5E1-A10CC58FFF8F}">
-  <ds:schemaRefs>
-    <ds:schemaRef ds:uri="http://schemas.microsoft.com/sharepoint/v3/contenttype/forms"/>
   </ds:schemaRefs>
 </ds:datastoreItem>
 </file>

--- a/psychologicalReview/figures/targetFindingFigNEW.pptx
+++ b/psychologicalReview/figures/targetFindingFigNEW.pptx
@@ -200,7 +200,7 @@
           <a:p>
             <a:fld id="{BF03B432-A659-47A9-A622-F1F1FE223EE8}" type="datetimeFigureOut">
               <a:rPr lang="en-US" smtClean="0"/>
-              <a:t>6/12/2026</a:t>
+              <a:t>6/13/2026</a:t>
             </a:fld>
             <a:endParaRPr lang="en-US"/>
           </a:p>
@@ -913,7 +913,7 @@
           <a:p>
             <a:fld id="{7744C1DF-C9B9-4C32-9FF4-A604B0E589BF}" type="datetimeFigureOut">
               <a:rPr lang="en-US" smtClean="0"/>
-              <a:t>6/12/2026</a:t>
+              <a:t>6/13/2026</a:t>
             </a:fld>
             <a:endParaRPr lang="en-US"/>
           </a:p>
@@ -1083,7 +1083,7 @@
           <a:p>
             <a:fld id="{7744C1DF-C9B9-4C32-9FF4-A604B0E589BF}" type="datetimeFigureOut">
               <a:rPr lang="en-US" smtClean="0"/>
-              <a:t>6/12/2026</a:t>
+              <a:t>6/13/2026</a:t>
             </a:fld>
             <a:endParaRPr lang="en-US"/>
           </a:p>
@@ -1263,7 +1263,7 @@
           <a:p>
             <a:fld id="{7744C1DF-C9B9-4C32-9FF4-A604B0E589BF}" type="datetimeFigureOut">
               <a:rPr lang="en-US" smtClean="0"/>
-              <a:t>6/12/2026</a:t>
+              <a:t>6/13/2026</a:t>
             </a:fld>
             <a:endParaRPr lang="en-US"/>
           </a:p>
@@ -1433,7 +1433,7 @@
           <a:p>
             <a:fld id="{7744C1DF-C9B9-4C32-9FF4-A604B0E589BF}" type="datetimeFigureOut">
               <a:rPr lang="en-US" smtClean="0"/>
-              <a:t>6/12/2026</a:t>
+              <a:t>6/13/2026</a:t>
             </a:fld>
             <a:endParaRPr lang="en-US"/>
           </a:p>
@@ -1679,7 +1679,7 @@
           <a:p>
             <a:fld id="{7744C1DF-C9B9-4C32-9FF4-A604B0E589BF}" type="datetimeFigureOut">
               <a:rPr lang="en-US" smtClean="0"/>
-              <a:t>6/12/2026</a:t>
+              <a:t>6/13/2026</a:t>
             </a:fld>
             <a:endParaRPr lang="en-US"/>
           </a:p>
@@ -1911,7 +1911,7 @@
           <a:p>
             <a:fld id="{7744C1DF-C9B9-4C32-9FF4-A604B0E589BF}" type="datetimeFigureOut">
               <a:rPr lang="en-US" smtClean="0"/>
-              <a:t>6/12/2026</a:t>
+              <a:t>6/13/2026</a:t>
             </a:fld>
             <a:endParaRPr lang="en-US"/>
           </a:p>
@@ -2278,7 +2278,7 @@
           <a:p>
             <a:fld id="{7744C1DF-C9B9-4C32-9FF4-A604B0E589BF}" type="datetimeFigureOut">
               <a:rPr lang="en-US" smtClean="0"/>
-              <a:t>6/12/2026</a:t>
+              <a:t>6/13/2026</a:t>
             </a:fld>
             <a:endParaRPr lang="en-US"/>
           </a:p>
@@ -2396,7 +2396,7 @@
           <a:p>
             <a:fld id="{7744C1DF-C9B9-4C32-9FF4-A604B0E589BF}" type="datetimeFigureOut">
               <a:rPr lang="en-US" smtClean="0"/>
-              <a:t>6/12/2026</a:t>
+              <a:t>6/13/2026</a:t>
             </a:fld>
             <a:endParaRPr lang="en-US"/>
           </a:p>
@@ -2491,7 +2491,7 @@
           <a:p>
             <a:fld id="{7744C1DF-C9B9-4C32-9FF4-A604B0E589BF}" type="datetimeFigureOut">
               <a:rPr lang="en-US" smtClean="0"/>
-              <a:t>6/12/2026</a:t>
+              <a:t>6/13/2026</a:t>
             </a:fld>
             <a:endParaRPr lang="en-US"/>
           </a:p>
@@ -2768,7 +2768,7 @@
           <a:p>
             <a:fld id="{7744C1DF-C9B9-4C32-9FF4-A604B0E589BF}" type="datetimeFigureOut">
               <a:rPr lang="en-US" smtClean="0"/>
-              <a:t>6/12/2026</a:t>
+              <a:t>6/13/2026</a:t>
             </a:fld>
             <a:endParaRPr lang="en-US"/>
           </a:p>
@@ -3025,7 +3025,7 @@
           <a:p>
             <a:fld id="{7744C1DF-C9B9-4C32-9FF4-A604B0E589BF}" type="datetimeFigureOut">
               <a:rPr lang="en-US" smtClean="0"/>
-              <a:t>6/12/2026</a:t>
+              <a:t>6/13/2026</a:t>
             </a:fld>
             <a:endParaRPr lang="en-US"/>
           </a:p>
@@ -3238,7 +3238,7 @@
           <a:p>
             <a:fld id="{7744C1DF-C9B9-4C32-9FF4-A604B0E589BF}" type="datetimeFigureOut">
               <a:rPr lang="en-US" smtClean="0"/>
-              <a:t>6/12/2026</a:t>
+              <a:t>6/13/2026</a:t>
             </a:fld>
             <a:endParaRPr lang="en-US"/>
           </a:p>
@@ -14752,7 +14752,7 @@
         </p:nvCxnSpPr>
         <p:spPr>
           <a:xfrm>
-            <a:off x="9790102" y="7451603"/>
+            <a:off x="9792803" y="6276850"/>
             <a:ext cx="5601691" cy="0"/>
           </a:xfrm>
           <a:prstGeom prst="line">
@@ -14788,7 +14788,7 @@
         </p:nvSpPr>
         <p:spPr>
           <a:xfrm>
-            <a:off x="14907711" y="6495349"/>
+            <a:off x="14910412" y="5320596"/>
             <a:ext cx="370541" cy="940335"/>
           </a:xfrm>
           <a:prstGeom prst="rect">
@@ -14836,7 +14836,7 @@
         </p:nvCxnSpPr>
         <p:spPr>
           <a:xfrm>
-            <a:off x="13654609" y="7234545"/>
+            <a:off x="13657310" y="6059792"/>
             <a:ext cx="608106" cy="0"/>
           </a:xfrm>
           <a:prstGeom prst="line">
@@ -14878,7 +14878,7 @@
         </p:nvSpPr>
         <p:spPr>
           <a:xfrm>
-            <a:off x="13172154" y="7079772"/>
+            <a:off x="13174855" y="5905019"/>
             <a:ext cx="355688" cy="355688"/>
           </a:xfrm>
           <a:prstGeom prst="ellipse">
@@ -14930,7 +14930,7 @@
         </p:nvCxnSpPr>
         <p:spPr>
           <a:xfrm>
-            <a:off x="9786297" y="9253061"/>
+            <a:off x="9788998" y="8078308"/>
             <a:ext cx="5601691" cy="0"/>
           </a:xfrm>
           <a:prstGeom prst="line">
@@ -14966,7 +14966,7 @@
         </p:nvSpPr>
         <p:spPr>
           <a:xfrm>
-            <a:off x="14903904" y="8296808"/>
+            <a:off x="14906605" y="7122055"/>
             <a:ext cx="370541" cy="940335"/>
           </a:xfrm>
           <a:prstGeom prst="rect">
@@ -15012,7 +15012,7 @@
         </p:nvSpPr>
         <p:spPr>
           <a:xfrm>
-            <a:off x="11568772" y="8066221"/>
+            <a:off x="11571473" y="6891468"/>
             <a:ext cx="1786965" cy="985829"/>
           </a:xfrm>
           <a:custGeom>
@@ -15099,7 +15099,7 @@
         </p:nvCxnSpPr>
         <p:spPr>
           <a:xfrm>
-            <a:off x="13355723" y="9036009"/>
+            <a:off x="13358424" y="7861256"/>
             <a:ext cx="903176" cy="0"/>
           </a:xfrm>
           <a:prstGeom prst="line">
@@ -15143,7 +15143,7 @@
         </p:nvCxnSpPr>
         <p:spPr>
           <a:xfrm flipH="1" flipV="1">
-            <a:off x="10990918" y="9036030"/>
+            <a:off x="10993619" y="7861277"/>
             <a:ext cx="577846" cy="16033"/>
           </a:xfrm>
           <a:prstGeom prst="straightConnector1">
@@ -15185,7 +15185,7 @@
         </p:nvSpPr>
         <p:spPr>
           <a:xfrm>
-            <a:off x="14356167" y="8881229"/>
+            <a:off x="14358868" y="7706476"/>
             <a:ext cx="355688" cy="355688"/>
           </a:xfrm>
           <a:prstGeom prst="ellipse">
@@ -15240,7 +15240,7 @@
         </p:nvSpPr>
         <p:spPr>
           <a:xfrm>
-            <a:off x="13168349" y="8881229"/>
+            <a:off x="13171050" y="7706476"/>
             <a:ext cx="355688" cy="355688"/>
           </a:xfrm>
           <a:prstGeom prst="ellipse">
@@ -15290,7 +15290,7 @@
         </p:nvSpPr>
         <p:spPr>
           <a:xfrm>
-            <a:off x="10624865" y="8881229"/>
+            <a:off x="10627566" y="7706476"/>
             <a:ext cx="355688" cy="355688"/>
           </a:xfrm>
           <a:prstGeom prst="ellipse">
@@ -15340,7 +15340,7 @@
         </p:nvSpPr>
         <p:spPr>
           <a:xfrm>
-            <a:off x="9782487" y="8513771"/>
+            <a:off x="9785188" y="7339018"/>
             <a:ext cx="739298" cy="739298"/>
           </a:xfrm>
           <a:prstGeom prst="ellipse">
@@ -15397,7 +15397,7 @@
         </p:nvCxnSpPr>
         <p:spPr>
           <a:xfrm>
-            <a:off x="1602700" y="7451603"/>
+            <a:off x="1605401" y="6276850"/>
             <a:ext cx="5601691" cy="0"/>
           </a:xfrm>
           <a:prstGeom prst="line">
@@ -15433,7 +15433,7 @@
         </p:nvSpPr>
         <p:spPr>
           <a:xfrm>
-            <a:off x="4104683" y="6495347"/>
+            <a:off x="4107384" y="5320594"/>
             <a:ext cx="370541" cy="940335"/>
           </a:xfrm>
           <a:prstGeom prst="rect">
@@ -15481,7 +15481,7 @@
         </p:nvCxnSpPr>
         <p:spPr>
           <a:xfrm>
-            <a:off x="5467205" y="7234545"/>
+            <a:off x="5469906" y="6059792"/>
             <a:ext cx="608106" cy="0"/>
           </a:xfrm>
           <a:prstGeom prst="line">
@@ -15523,7 +15523,7 @@
         </p:nvSpPr>
         <p:spPr>
           <a:xfrm>
-            <a:off x="4984758" y="7079772"/>
+            <a:off x="4987459" y="5905019"/>
             <a:ext cx="355688" cy="355688"/>
           </a:xfrm>
           <a:prstGeom prst="ellipse">
@@ -15575,7 +15575,7 @@
         </p:nvCxnSpPr>
         <p:spPr>
           <a:xfrm>
-            <a:off x="1598895" y="9253061"/>
+            <a:off x="1601596" y="8078308"/>
             <a:ext cx="5601691" cy="0"/>
           </a:xfrm>
           <a:prstGeom prst="line">
@@ -15611,7 +15611,7 @@
         </p:nvSpPr>
         <p:spPr>
           <a:xfrm>
-            <a:off x="4100883" y="8296806"/>
+            <a:off x="4103584" y="7122053"/>
             <a:ext cx="370541" cy="940335"/>
           </a:xfrm>
           <a:prstGeom prst="rect">
@@ -15657,7 +15657,7 @@
         </p:nvSpPr>
         <p:spPr>
           <a:xfrm>
-            <a:off x="3381365" y="8066217"/>
+            <a:off x="3384066" y="6891464"/>
             <a:ext cx="1786965" cy="985829"/>
           </a:xfrm>
           <a:custGeom>
@@ -15744,7 +15744,7 @@
         </p:nvCxnSpPr>
         <p:spPr>
           <a:xfrm>
-            <a:off x="5168320" y="9036009"/>
+            <a:off x="5171021" y="7861256"/>
             <a:ext cx="903176" cy="0"/>
           </a:xfrm>
           <a:prstGeom prst="line">
@@ -15788,7 +15788,7 @@
         </p:nvCxnSpPr>
         <p:spPr>
           <a:xfrm flipH="1" flipV="1">
-            <a:off x="2803515" y="9036026"/>
+            <a:off x="2806216" y="7861273"/>
             <a:ext cx="577846" cy="16033"/>
           </a:xfrm>
           <a:prstGeom prst="straightConnector1">
@@ -15830,7 +15830,7 @@
         </p:nvSpPr>
         <p:spPr>
           <a:xfrm>
-            <a:off x="6168771" y="8881229"/>
+            <a:off x="6171472" y="7706476"/>
             <a:ext cx="355688" cy="355688"/>
           </a:xfrm>
           <a:prstGeom prst="ellipse">
@@ -15885,7 +15885,7 @@
         </p:nvSpPr>
         <p:spPr>
           <a:xfrm>
-            <a:off x="4980952" y="8881229"/>
+            <a:off x="4983653" y="7706476"/>
             <a:ext cx="355688" cy="355688"/>
           </a:xfrm>
           <a:prstGeom prst="ellipse">
@@ -15935,7 +15935,7 @@
         </p:nvSpPr>
         <p:spPr>
           <a:xfrm>
-            <a:off x="2437462" y="8881229"/>
+            <a:off x="2440163" y="7706476"/>
             <a:ext cx="355688" cy="355688"/>
           </a:xfrm>
           <a:prstGeom prst="ellipse">
@@ -15985,7 +15985,7 @@
         </p:nvSpPr>
         <p:spPr>
           <a:xfrm>
-            <a:off x="1595090" y="8513771"/>
+            <a:off x="1597791" y="7339018"/>
             <a:ext cx="739298" cy="739298"/>
           </a:xfrm>
           <a:prstGeom prst="ellipse">
@@ -16650,7 +16650,7 @@
         </p:nvSpPr>
         <p:spPr>
           <a:xfrm>
-            <a:off x="1604916" y="6707546"/>
+            <a:off x="1607617" y="5532793"/>
             <a:ext cx="739298" cy="739298"/>
           </a:xfrm>
           <a:prstGeom prst="ellipse">
@@ -16705,7 +16705,7 @@
         </p:nvSpPr>
         <p:spPr>
           <a:xfrm>
-            <a:off x="6162883" y="7093370"/>
+            <a:off x="6165584" y="5918617"/>
             <a:ext cx="355688" cy="355688"/>
           </a:xfrm>
           <a:prstGeom prst="ellipse">
@@ -16760,7 +16760,7 @@
         </p:nvSpPr>
         <p:spPr>
           <a:xfrm>
-            <a:off x="9790100" y="6703686"/>
+            <a:off x="9792801" y="5528933"/>
             <a:ext cx="739298" cy="739298"/>
           </a:xfrm>
           <a:prstGeom prst="ellipse">
@@ -16815,7 +16815,7 @@
         </p:nvSpPr>
         <p:spPr>
           <a:xfrm>
-            <a:off x="14355526" y="7084477"/>
+            <a:off x="14358227" y="5909724"/>
             <a:ext cx="355688" cy="355688"/>
           </a:xfrm>
           <a:prstGeom prst="ellipse">
@@ -16872,7 +16872,7 @@
         </p:nvCxnSpPr>
         <p:spPr>
           <a:xfrm>
-            <a:off x="22766766" y="7345451"/>
+            <a:off x="22953382" y="6263099"/>
             <a:ext cx="5601691" cy="0"/>
           </a:xfrm>
           <a:prstGeom prst="line">
@@ -16908,7 +16908,7 @@
         </p:nvSpPr>
         <p:spPr>
           <a:xfrm>
-            <a:off x="25268745" y="6389199"/>
+            <a:off x="25455361" y="5306847"/>
             <a:ext cx="370541" cy="940335"/>
           </a:xfrm>
           <a:prstGeom prst="rect">
@@ -16954,7 +16954,7 @@
         </p:nvSpPr>
         <p:spPr>
           <a:xfrm>
-            <a:off x="27436828" y="7164989"/>
+            <a:off x="27623444" y="6082637"/>
             <a:ext cx="168298" cy="168298"/>
           </a:xfrm>
           <a:prstGeom prst="ellipse">
@@ -17000,7 +17000,7 @@
         </p:nvSpPr>
         <p:spPr>
           <a:xfrm>
-            <a:off x="22900845" y="6866928"/>
+            <a:off x="23087461" y="5784576"/>
             <a:ext cx="464094" cy="464094"/>
           </a:xfrm>
           <a:prstGeom prst="ellipse">
@@ -17046,7 +17046,7 @@
         </p:nvSpPr>
         <p:spPr>
           <a:xfrm>
-            <a:off x="27336629" y="6973619"/>
+            <a:off x="27523245" y="5891267"/>
             <a:ext cx="355688" cy="355688"/>
           </a:xfrm>
           <a:prstGeom prst="ellipse">
@@ -17098,7 +17098,7 @@
         </p:nvCxnSpPr>
         <p:spPr>
           <a:xfrm flipV="1">
-            <a:off x="27504931" y="6977593"/>
+            <a:off x="27691547" y="5895241"/>
             <a:ext cx="0" cy="178778"/>
           </a:xfrm>
           <a:prstGeom prst="straightConnector1">
@@ -17143,7 +17143,7 @@
         </p:nvCxnSpPr>
         <p:spPr>
           <a:xfrm rot="-1200000" flipH="1" flipV="1">
-            <a:off x="27368853" y="7057510"/>
+            <a:off x="27555469" y="5975158"/>
             <a:ext cx="91839" cy="146292"/>
           </a:xfrm>
           <a:prstGeom prst="straightConnector1">
@@ -17188,7 +17188,7 @@
         </p:nvCxnSpPr>
         <p:spPr>
           <a:xfrm rot="1200000" flipV="1">
-            <a:off x="27609630" y="7022386"/>
+            <a:off x="27796246" y="5940034"/>
             <a:ext cx="0" cy="178778"/>
           </a:xfrm>
           <a:prstGeom prst="straightConnector1">
@@ -17231,7 +17231,7 @@
         </p:nvSpPr>
         <p:spPr>
           <a:xfrm>
-            <a:off x="22762949" y="6606161"/>
+            <a:off x="22949565" y="5523809"/>
             <a:ext cx="739298" cy="739298"/>
           </a:xfrm>
           <a:prstGeom prst="ellipse">
@@ -17283,7 +17283,7 @@
         </p:nvCxnSpPr>
         <p:spPr>
           <a:xfrm flipH="1" flipV="1">
-            <a:off x="23116702" y="6622063"/>
+            <a:off x="23303318" y="5539711"/>
             <a:ext cx="4420" cy="233997"/>
           </a:xfrm>
           <a:prstGeom prst="straightConnector1">
@@ -17328,7 +17328,7 @@
         </p:nvCxnSpPr>
         <p:spPr>
           <a:xfrm rot="3000000" flipH="1" flipV="1">
-            <a:off x="23364732" y="6745533"/>
+            <a:off x="23551348" y="5663181"/>
             <a:ext cx="4420" cy="197997"/>
           </a:xfrm>
           <a:prstGeom prst="straightConnector1">
@@ -17373,7 +17373,7 @@
         </p:nvCxnSpPr>
         <p:spPr>
           <a:xfrm rot="-3000000" flipH="1" flipV="1">
-            <a:off x="22898633" y="6753487"/>
+            <a:off x="23085249" y="5671135"/>
             <a:ext cx="4420" cy="197997"/>
           </a:xfrm>
           <a:prstGeom prst="straightConnector1">
@@ -17418,7 +17418,7 @@
         </p:nvCxnSpPr>
         <p:spPr>
           <a:xfrm>
-            <a:off x="22762958" y="9291286"/>
+            <a:off x="22949574" y="8208934"/>
             <a:ext cx="5601691" cy="0"/>
           </a:xfrm>
           <a:prstGeom prst="line">
@@ -17454,7 +17454,7 @@
         </p:nvSpPr>
         <p:spPr>
           <a:xfrm>
-            <a:off x="25264938" y="8335040"/>
+            <a:off x="25451554" y="7252688"/>
             <a:ext cx="370541" cy="940335"/>
           </a:xfrm>
           <a:prstGeom prst="rect">
@@ -17500,7 +17500,7 @@
         </p:nvSpPr>
         <p:spPr>
           <a:xfrm>
-            <a:off x="24545428" y="8104448"/>
+            <a:off x="24732044" y="7022096"/>
             <a:ext cx="1786965" cy="985829"/>
           </a:xfrm>
           <a:custGeom>
@@ -17587,7 +17587,7 @@
         </p:nvCxnSpPr>
         <p:spPr>
           <a:xfrm>
-            <a:off x="26332378" y="9074237"/>
+            <a:off x="26518994" y="7991885"/>
             <a:ext cx="903176" cy="0"/>
           </a:xfrm>
           <a:prstGeom prst="line">
@@ -17631,7 +17631,7 @@
         </p:nvCxnSpPr>
         <p:spPr>
           <a:xfrm flipH="1" flipV="1">
-            <a:off x="23967575" y="9074257"/>
+            <a:off x="24154191" y="7991905"/>
             <a:ext cx="577846" cy="16033"/>
           </a:xfrm>
           <a:prstGeom prst="straightConnector1">
@@ -17673,7 +17673,7 @@
         </p:nvSpPr>
         <p:spPr>
           <a:xfrm>
-            <a:off x="27332831" y="8919463"/>
+            <a:off x="27519447" y="7837111"/>
             <a:ext cx="355688" cy="355688"/>
           </a:xfrm>
           <a:prstGeom prst="ellipse">
@@ -17728,7 +17728,7 @@
         </p:nvSpPr>
         <p:spPr>
           <a:xfrm>
-            <a:off x="23601522" y="8919463"/>
+            <a:off x="23788138" y="7837111"/>
             <a:ext cx="355688" cy="355688"/>
           </a:xfrm>
           <a:prstGeom prst="ellipse">
@@ -17778,7 +17778,7 @@
         </p:nvSpPr>
         <p:spPr>
           <a:xfrm>
-            <a:off x="22759141" y="8551996"/>
+            <a:off x="22945757" y="7469644"/>
             <a:ext cx="739298" cy="739298"/>
           </a:xfrm>
           <a:prstGeom prst="ellipse">
@@ -18204,7 +18204,7 @@
         </p:nvSpPr>
         <p:spPr>
           <a:xfrm>
-            <a:off x="24781855" y="8309372"/>
+            <a:off x="24968471" y="7227020"/>
             <a:ext cx="1338190" cy="985829"/>
           </a:xfrm>
           <a:prstGeom prst="rect">
@@ -18262,7 +18262,7 @@
         </p:nvSpPr>
         <p:spPr>
           <a:xfrm>
-            <a:off x="21988013" y="4315483"/>
+            <a:off x="21988013" y="2915895"/>
             <a:ext cx="6808274" cy="1015663"/>
           </a:xfrm>
           <a:prstGeom prst="rect">
@@ -18719,7 +18719,7 @@
         </p:nvCxnSpPr>
         <p:spPr>
           <a:xfrm>
-            <a:off x="29558084" y="7129281"/>
+            <a:off x="29744700" y="6046929"/>
             <a:ext cx="6800531" cy="0"/>
           </a:xfrm>
           <a:prstGeom prst="line">
@@ -18755,7 +18755,7 @@
         </p:nvSpPr>
         <p:spPr>
           <a:xfrm>
-            <a:off x="33258913" y="6173026"/>
+            <a:off x="33445529" y="5090674"/>
             <a:ext cx="370541" cy="940335"/>
           </a:xfrm>
           <a:prstGeom prst="rect">
@@ -18801,7 +18801,7 @@
         </p:nvSpPr>
         <p:spPr>
           <a:xfrm>
-            <a:off x="35426992" y="6948806"/>
+            <a:off x="35613608" y="5866454"/>
             <a:ext cx="168298" cy="168298"/>
           </a:xfrm>
           <a:prstGeom prst="ellipse">
@@ -18847,7 +18847,7 @@
         </p:nvSpPr>
         <p:spPr>
           <a:xfrm>
-            <a:off x="29615671" y="6650764"/>
+            <a:off x="29802287" y="5568412"/>
             <a:ext cx="464094" cy="464094"/>
           </a:xfrm>
           <a:prstGeom prst="ellipse">
@@ -18893,7 +18893,7 @@
         </p:nvSpPr>
         <p:spPr>
           <a:xfrm>
-            <a:off x="35326800" y="6757449"/>
+            <a:off x="35513416" y="5675097"/>
             <a:ext cx="355688" cy="355688"/>
           </a:xfrm>
           <a:prstGeom prst="ellipse">
@@ -18945,7 +18945,7 @@
         </p:nvCxnSpPr>
         <p:spPr>
           <a:xfrm flipV="1">
-            <a:off x="35495095" y="6761423"/>
+            <a:off x="35681711" y="5679071"/>
             <a:ext cx="0" cy="178778"/>
           </a:xfrm>
           <a:prstGeom prst="straightConnector1">
@@ -18990,7 +18990,7 @@
         </p:nvCxnSpPr>
         <p:spPr>
           <a:xfrm flipH="1" flipV="1">
-            <a:off x="35336764" y="6861467"/>
+            <a:off x="35523380" y="5779115"/>
             <a:ext cx="136339" cy="106059"/>
           </a:xfrm>
           <a:prstGeom prst="straightConnector1">
@@ -19035,7 +19035,7 @@
         </p:nvCxnSpPr>
         <p:spPr>
           <a:xfrm flipV="1">
-            <a:off x="35569221" y="6811612"/>
+            <a:off x="35755837" y="5729260"/>
             <a:ext cx="61146" cy="167992"/>
           </a:xfrm>
           <a:prstGeom prst="straightConnector1">
@@ -19078,7 +19078,7 @@
         </p:nvSpPr>
         <p:spPr>
           <a:xfrm>
-            <a:off x="29477769" y="6389984"/>
+            <a:off x="29664385" y="5307632"/>
             <a:ext cx="739298" cy="739298"/>
           </a:xfrm>
           <a:prstGeom prst="ellipse">
@@ -19130,7 +19130,7 @@
         </p:nvCxnSpPr>
         <p:spPr>
           <a:xfrm flipH="1" flipV="1">
-            <a:off x="29831514" y="6405889"/>
+            <a:off x="30018130" y="5323537"/>
             <a:ext cx="4420" cy="233997"/>
           </a:xfrm>
           <a:prstGeom prst="straightConnector1">
@@ -19175,7 +19175,7 @@
         </p:nvCxnSpPr>
         <p:spPr>
           <a:xfrm flipV="1">
-            <a:off x="30007344" y="6563024"/>
+            <a:off x="30193960" y="5480672"/>
             <a:ext cx="148836" cy="130658"/>
           </a:xfrm>
           <a:prstGeom prst="straightConnector1">
@@ -19220,7 +19220,7 @@
         </p:nvCxnSpPr>
         <p:spPr>
           <a:xfrm flipH="1" flipV="1">
-            <a:off x="29538393" y="6574379"/>
+            <a:off x="29725009" y="5492027"/>
             <a:ext cx="154518" cy="123885"/>
           </a:xfrm>
           <a:prstGeom prst="straightConnector1">
@@ -19265,7 +19265,7 @@
         </p:nvCxnSpPr>
         <p:spPr>
           <a:xfrm>
-            <a:off x="29501260" y="9075116"/>
+            <a:off x="29687876" y="7992764"/>
             <a:ext cx="6853563" cy="0"/>
           </a:xfrm>
           <a:prstGeom prst="line">
@@ -19301,7 +19301,7 @@
         </p:nvSpPr>
         <p:spPr>
           <a:xfrm>
-            <a:off x="33255107" y="8118862"/>
+            <a:off x="33441723" y="7036510"/>
             <a:ext cx="370541" cy="940335"/>
           </a:xfrm>
           <a:prstGeom prst="rect">
@@ -19347,7 +19347,7 @@
         </p:nvSpPr>
         <p:spPr>
           <a:xfrm>
-            <a:off x="32535591" y="7888275"/>
+            <a:off x="32722207" y="6805923"/>
             <a:ext cx="1786965" cy="985829"/>
           </a:xfrm>
           <a:custGeom>
@@ -19434,7 +19434,7 @@
         </p:nvCxnSpPr>
         <p:spPr>
           <a:xfrm>
-            <a:off x="34322543" y="8858066"/>
+            <a:off x="34509159" y="7775714"/>
             <a:ext cx="903176" cy="0"/>
           </a:xfrm>
           <a:prstGeom prst="line">
@@ -19478,7 +19478,7 @@
         </p:nvCxnSpPr>
         <p:spPr>
           <a:xfrm flipH="1" flipV="1">
-            <a:off x="31957738" y="8858086"/>
+            <a:off x="32144354" y="7775734"/>
             <a:ext cx="577846" cy="16033"/>
           </a:xfrm>
           <a:prstGeom prst="straightConnector1">
@@ -19520,7 +19520,7 @@
         </p:nvSpPr>
         <p:spPr>
           <a:xfrm>
-            <a:off x="35322993" y="8703291"/>
+            <a:off x="35509609" y="7620939"/>
             <a:ext cx="355688" cy="355688"/>
           </a:xfrm>
           <a:prstGeom prst="ellipse">
@@ -19575,7 +19575,7 @@
         </p:nvSpPr>
         <p:spPr>
           <a:xfrm>
-            <a:off x="31591685" y="8703284"/>
+            <a:off x="31778301" y="7620932"/>
             <a:ext cx="355688" cy="355688"/>
           </a:xfrm>
           <a:prstGeom prst="ellipse">
@@ -19625,7 +19625,7 @@
         </p:nvSpPr>
         <p:spPr>
           <a:xfrm>
-            <a:off x="29534122" y="8335825"/>
+            <a:off x="29720738" y="7253473"/>
             <a:ext cx="739298" cy="739298"/>
           </a:xfrm>
           <a:prstGeom prst="ellipse">
@@ -19680,7 +19680,7 @@
         </p:nvSpPr>
         <p:spPr>
           <a:xfrm>
-            <a:off x="29490710" y="8657430"/>
+            <a:off x="29677326" y="7575078"/>
             <a:ext cx="2858698" cy="401982"/>
           </a:xfrm>
           <a:prstGeom prst="rect">
@@ -20216,7 +20216,7 @@
         </p:nvSpPr>
         <p:spPr>
           <a:xfrm>
-            <a:off x="30791219" y="4355082"/>
+            <a:off x="30791219" y="2955494"/>
             <a:ext cx="4907113" cy="1015663"/>
           </a:xfrm>
           <a:prstGeom prst="rect">
@@ -21098,8 +21098,8 @@
         </p:nvSpPr>
         <p:spPr>
           <a:xfrm>
-            <a:off x="5239964" y="577385"/>
-            <a:ext cx="8099077" cy="1323311"/>
+            <a:off x="4622456" y="-19773"/>
+            <a:ext cx="9334095" cy="1323311"/>
           </a:xfrm>
           <a:prstGeom prst="rect">
             <a:avLst/>
@@ -21118,7 +21118,7 @@
                 <a:latin typeface="Times New Roman" panose="02020603050405020304" pitchFamily="18" charset="0"/>
                 <a:cs typeface="Times New Roman" panose="02020603050405020304" pitchFamily="18" charset="0"/>
               </a:rPr>
-              <a:t>Target Finding 2: </a:t>
+              <a:t>A. Target Finding 2: </a:t>
             </a:r>
           </a:p>
         </p:txBody>
@@ -21137,8 +21137,8 @@
         </p:nvSpPr>
         <p:spPr>
           <a:xfrm>
-            <a:off x="25840864" y="592276"/>
-            <a:ext cx="8099077" cy="1323311"/>
+            <a:off x="25251409" y="-4882"/>
+            <a:ext cx="9277989" cy="1323311"/>
           </a:xfrm>
           <a:prstGeom prst="rect">
             <a:avLst/>
@@ -21157,7 +21157,7 @@
                 <a:latin typeface="Times New Roman" panose="02020603050405020304" pitchFamily="18" charset="0"/>
                 <a:cs typeface="Times New Roman" panose="02020603050405020304" pitchFamily="18" charset="0"/>
               </a:rPr>
-              <a:t>Target Finding 3: </a:t>
+              <a:t>B. Target Finding 3: </a:t>
             </a:r>
           </a:p>
         </p:txBody>
@@ -21176,7 +21176,7 @@
         </p:nvSpPr>
         <p:spPr>
           <a:xfrm>
-            <a:off x="2663997" y="2042320"/>
+            <a:off x="2663997" y="1445162"/>
             <a:ext cx="13730108" cy="1092607"/>
           </a:xfrm>
           <a:prstGeom prst="rect">
@@ -21215,7 +21215,7 @@
         </p:nvSpPr>
         <p:spPr>
           <a:xfrm>
-            <a:off x="18117345" y="2010013"/>
+            <a:off x="18117345" y="1412855"/>
             <a:ext cx="22020004" cy="1092607"/>
           </a:xfrm>
           <a:prstGeom prst="rect">
@@ -21254,7 +21254,7 @@
         </p:nvSpPr>
         <p:spPr>
           <a:xfrm>
-            <a:off x="1740070" y="4373898"/>
+            <a:off x="1740070" y="2974310"/>
             <a:ext cx="6145465" cy="1015663"/>
           </a:xfrm>
           <a:prstGeom prst="rect">
@@ -21292,7 +21292,7 @@
         </p:nvSpPr>
         <p:spPr>
           <a:xfrm>
-            <a:off x="9233306" y="4381217"/>
+            <a:off x="9233306" y="2981629"/>
             <a:ext cx="6914906" cy="1015663"/>
           </a:xfrm>
           <a:prstGeom prst="rect">
@@ -21316,6 +21316,394 @@
           </a:p>
         </p:txBody>
       </p:sp>
+      <p:sp>
+        <p:nvSpPr>
+          <p:cNvPr id="3" name="TextBox 2">
+            <a:extLst>
+              <a:ext uri="{FF2B5EF4-FFF2-40B4-BE49-F238E27FC236}">
+                <a16:creationId xmlns:a16="http://schemas.microsoft.com/office/drawing/2014/main" id="{A4FF89BB-69D2-8ABC-A77C-2DC298B46CE9}"/>
+              </a:ext>
+            </a:extLst>
+          </p:cNvPr>
+          <p:cNvSpPr txBox="1"/>
+          <p:nvPr/>
+        </p:nvSpPr>
+        <p:spPr>
+          <a:xfrm>
+            <a:off x="2834854" y="4115938"/>
+            <a:ext cx="3494867" cy="861774"/>
+          </a:xfrm>
+          <a:prstGeom prst="rect">
+            <a:avLst/>
+          </a:prstGeom>
+          <a:noFill/>
+        </p:spPr>
+        <p:txBody>
+          <a:bodyPr wrap="none" rtlCol="0">
+            <a:spAutoFit/>
+          </a:bodyPr>
+          <a:lstStyle/>
+          <a:p>
+            <a:r>
+              <a:rPr lang="en-US" sz="5000" b="1" dirty="0">
+                <a:latin typeface="Times New Roman" panose="02020603050405020304" pitchFamily="18" charset="0"/>
+                <a:cs typeface="Times New Roman" panose="02020603050405020304" pitchFamily="18" charset="0"/>
+              </a:rPr>
+              <a:t>Habituation</a:t>
+            </a:r>
+          </a:p>
+        </p:txBody>
+      </p:sp>
+      <p:sp>
+        <p:nvSpPr>
+          <p:cNvPr id="5" name="TextBox 4">
+            <a:extLst>
+              <a:ext uri="{FF2B5EF4-FFF2-40B4-BE49-F238E27FC236}">
+                <a16:creationId xmlns:a16="http://schemas.microsoft.com/office/drawing/2014/main" id="{6077C8C7-F111-9F06-A371-B331FE5C70FF}"/>
+              </a:ext>
+            </a:extLst>
+          </p:cNvPr>
+          <p:cNvSpPr txBox="1"/>
+          <p:nvPr/>
+        </p:nvSpPr>
+        <p:spPr>
+          <a:xfrm>
+            <a:off x="10738633" y="4123257"/>
+            <a:ext cx="3494867" cy="861774"/>
+          </a:xfrm>
+          <a:prstGeom prst="rect">
+            <a:avLst/>
+          </a:prstGeom>
+          <a:noFill/>
+        </p:spPr>
+        <p:txBody>
+          <a:bodyPr wrap="none" rtlCol="0">
+            <a:spAutoFit/>
+          </a:bodyPr>
+          <a:lstStyle/>
+          <a:p>
+            <a:r>
+              <a:rPr lang="en-US" sz="5000" b="1" dirty="0">
+                <a:latin typeface="Times New Roman" panose="02020603050405020304" pitchFamily="18" charset="0"/>
+                <a:cs typeface="Times New Roman" panose="02020603050405020304" pitchFamily="18" charset="0"/>
+              </a:rPr>
+              <a:t>Habituation</a:t>
+            </a:r>
+          </a:p>
+        </p:txBody>
+      </p:sp>
+      <p:sp>
+        <p:nvSpPr>
+          <p:cNvPr id="7" name="TextBox 6">
+            <a:extLst>
+              <a:ext uri="{FF2B5EF4-FFF2-40B4-BE49-F238E27FC236}">
+                <a16:creationId xmlns:a16="http://schemas.microsoft.com/office/drawing/2014/main" id="{212CA53C-A90C-C5C6-DDD9-9FB101987D4B}"/>
+              </a:ext>
+            </a:extLst>
+          </p:cNvPr>
+          <p:cNvSpPr txBox="1"/>
+          <p:nvPr/>
+        </p:nvSpPr>
+        <p:spPr>
+          <a:xfrm>
+            <a:off x="3733705" y="9101591"/>
+            <a:ext cx="1302408" cy="861774"/>
+          </a:xfrm>
+          <a:prstGeom prst="rect">
+            <a:avLst/>
+          </a:prstGeom>
+          <a:noFill/>
+        </p:spPr>
+        <p:txBody>
+          <a:bodyPr wrap="none" rtlCol="0">
+            <a:spAutoFit/>
+          </a:bodyPr>
+          <a:lstStyle/>
+          <a:p>
+            <a:r>
+              <a:rPr lang="en-US" sz="5000" b="1" dirty="0">
+                <a:latin typeface="Times New Roman" panose="02020603050405020304" pitchFamily="18" charset="0"/>
+                <a:cs typeface="Times New Roman" panose="02020603050405020304" pitchFamily="18" charset="0"/>
+              </a:rPr>
+              <a:t>Test</a:t>
+            </a:r>
+          </a:p>
+        </p:txBody>
+      </p:sp>
+      <p:sp>
+        <p:nvSpPr>
+          <p:cNvPr id="9" name="TextBox 8">
+            <a:extLst>
+              <a:ext uri="{FF2B5EF4-FFF2-40B4-BE49-F238E27FC236}">
+                <a16:creationId xmlns:a16="http://schemas.microsoft.com/office/drawing/2014/main" id="{7DB79F00-4CD6-D8B2-FBF6-72D3BC08B9E5}"/>
+              </a:ext>
+            </a:extLst>
+          </p:cNvPr>
+          <p:cNvSpPr txBox="1"/>
+          <p:nvPr/>
+        </p:nvSpPr>
+        <p:spPr>
+          <a:xfrm>
+            <a:off x="11842755" y="9108910"/>
+            <a:ext cx="1302408" cy="861774"/>
+          </a:xfrm>
+          <a:prstGeom prst="rect">
+            <a:avLst/>
+          </a:prstGeom>
+          <a:noFill/>
+        </p:spPr>
+        <p:txBody>
+          <a:bodyPr wrap="none" rtlCol="0">
+            <a:spAutoFit/>
+          </a:bodyPr>
+          <a:lstStyle/>
+          <a:p>
+            <a:r>
+              <a:rPr lang="en-US" sz="5000" b="1" dirty="0">
+                <a:latin typeface="Times New Roman" panose="02020603050405020304" pitchFamily="18" charset="0"/>
+                <a:cs typeface="Times New Roman" panose="02020603050405020304" pitchFamily="18" charset="0"/>
+              </a:rPr>
+              <a:t>Test</a:t>
+            </a:r>
+          </a:p>
+        </p:txBody>
+      </p:sp>
+      <p:sp>
+        <p:nvSpPr>
+          <p:cNvPr id="11" name="TextBox 10">
+            <a:extLst>
+              <a:ext uri="{FF2B5EF4-FFF2-40B4-BE49-F238E27FC236}">
+                <a16:creationId xmlns:a16="http://schemas.microsoft.com/office/drawing/2014/main" id="{D57FB8D6-1277-58BE-8D5F-409DAD697EC2}"/>
+              </a:ext>
+            </a:extLst>
+          </p:cNvPr>
+          <p:cNvSpPr txBox="1"/>
+          <p:nvPr/>
+        </p:nvSpPr>
+        <p:spPr>
+          <a:xfrm>
+            <a:off x="23626546" y="4137711"/>
+            <a:ext cx="3494867" cy="861774"/>
+          </a:xfrm>
+          <a:prstGeom prst="rect">
+            <a:avLst/>
+          </a:prstGeom>
+          <a:noFill/>
+        </p:spPr>
+        <p:txBody>
+          <a:bodyPr wrap="none" rtlCol="0">
+            <a:spAutoFit/>
+          </a:bodyPr>
+          <a:lstStyle/>
+          <a:p>
+            <a:r>
+              <a:rPr lang="en-US" sz="5000" b="1" dirty="0">
+                <a:latin typeface="Times New Roman" panose="02020603050405020304" pitchFamily="18" charset="0"/>
+                <a:cs typeface="Times New Roman" panose="02020603050405020304" pitchFamily="18" charset="0"/>
+              </a:rPr>
+              <a:t>Habituation</a:t>
+            </a:r>
+          </a:p>
+        </p:txBody>
+      </p:sp>
+      <p:sp>
+        <p:nvSpPr>
+          <p:cNvPr id="13" name="TextBox 12">
+            <a:extLst>
+              <a:ext uri="{FF2B5EF4-FFF2-40B4-BE49-F238E27FC236}">
+                <a16:creationId xmlns:a16="http://schemas.microsoft.com/office/drawing/2014/main" id="{6CC57BF0-030F-4309-BD70-AE609C7ACBCB}"/>
+              </a:ext>
+            </a:extLst>
+          </p:cNvPr>
+          <p:cNvSpPr txBox="1"/>
+          <p:nvPr/>
+        </p:nvSpPr>
+        <p:spPr>
+          <a:xfrm>
+            <a:off x="31530325" y="4145030"/>
+            <a:ext cx="3494867" cy="861774"/>
+          </a:xfrm>
+          <a:prstGeom prst="rect">
+            <a:avLst/>
+          </a:prstGeom>
+          <a:noFill/>
+        </p:spPr>
+        <p:txBody>
+          <a:bodyPr wrap="none" rtlCol="0">
+            <a:spAutoFit/>
+          </a:bodyPr>
+          <a:lstStyle/>
+          <a:p>
+            <a:r>
+              <a:rPr lang="en-US" sz="5000" b="1" dirty="0">
+                <a:latin typeface="Times New Roman" panose="02020603050405020304" pitchFamily="18" charset="0"/>
+                <a:cs typeface="Times New Roman" panose="02020603050405020304" pitchFamily="18" charset="0"/>
+              </a:rPr>
+              <a:t>Habituation</a:t>
+            </a:r>
+          </a:p>
+        </p:txBody>
+      </p:sp>
+      <p:sp>
+        <p:nvSpPr>
+          <p:cNvPr id="16" name="TextBox 15">
+            <a:extLst>
+              <a:ext uri="{FF2B5EF4-FFF2-40B4-BE49-F238E27FC236}">
+                <a16:creationId xmlns:a16="http://schemas.microsoft.com/office/drawing/2014/main" id="{D91B1B43-B237-7C0D-A54F-4E8CA9CC5C76}"/>
+              </a:ext>
+            </a:extLst>
+          </p:cNvPr>
+          <p:cNvSpPr txBox="1"/>
+          <p:nvPr/>
+        </p:nvSpPr>
+        <p:spPr>
+          <a:xfrm>
+            <a:off x="24842637" y="9086042"/>
+            <a:ext cx="1302408" cy="861774"/>
+          </a:xfrm>
+          <a:prstGeom prst="rect">
+            <a:avLst/>
+          </a:prstGeom>
+          <a:noFill/>
+        </p:spPr>
+        <p:txBody>
+          <a:bodyPr wrap="none" rtlCol="0">
+            <a:spAutoFit/>
+          </a:bodyPr>
+          <a:lstStyle/>
+          <a:p>
+            <a:r>
+              <a:rPr lang="en-US" sz="5000" b="1" dirty="0">
+                <a:latin typeface="Times New Roman" panose="02020603050405020304" pitchFamily="18" charset="0"/>
+                <a:cs typeface="Times New Roman" panose="02020603050405020304" pitchFamily="18" charset="0"/>
+              </a:rPr>
+              <a:t>Test</a:t>
+            </a:r>
+          </a:p>
+        </p:txBody>
+      </p:sp>
+      <p:sp>
+        <p:nvSpPr>
+          <p:cNvPr id="19" name="TextBox 18">
+            <a:extLst>
+              <a:ext uri="{FF2B5EF4-FFF2-40B4-BE49-F238E27FC236}">
+                <a16:creationId xmlns:a16="http://schemas.microsoft.com/office/drawing/2014/main" id="{471839D4-B1E6-A5A2-F9D8-89FA9C229721}"/>
+              </a:ext>
+            </a:extLst>
+          </p:cNvPr>
+          <p:cNvSpPr txBox="1"/>
+          <p:nvPr/>
+        </p:nvSpPr>
+        <p:spPr>
+          <a:xfrm>
+            <a:off x="33007668" y="9093361"/>
+            <a:ext cx="1302408" cy="861774"/>
+          </a:xfrm>
+          <a:prstGeom prst="rect">
+            <a:avLst/>
+          </a:prstGeom>
+          <a:noFill/>
+        </p:spPr>
+        <p:txBody>
+          <a:bodyPr wrap="none" rtlCol="0">
+            <a:spAutoFit/>
+          </a:bodyPr>
+          <a:lstStyle/>
+          <a:p>
+            <a:r>
+              <a:rPr lang="en-US" sz="5000" b="1" dirty="0">
+                <a:latin typeface="Times New Roman" panose="02020603050405020304" pitchFamily="18" charset="0"/>
+                <a:cs typeface="Times New Roman" panose="02020603050405020304" pitchFamily="18" charset="0"/>
+              </a:rPr>
+              <a:t>Test</a:t>
+            </a:r>
+          </a:p>
+        </p:txBody>
+      </p:sp>
+      <p:cxnSp>
+        <p:nvCxnSpPr>
+          <p:cNvPr id="21" name="Straight Connector 20">
+            <a:extLst>
+              <a:ext uri="{FF2B5EF4-FFF2-40B4-BE49-F238E27FC236}">
+                <a16:creationId xmlns:a16="http://schemas.microsoft.com/office/drawing/2014/main" id="{4DDFCC6A-83B1-DAC2-B53D-262F495DF0E4}"/>
+              </a:ext>
+            </a:extLst>
+          </p:cNvPr>
+          <p:cNvCxnSpPr/>
+          <p:nvPr/>
+        </p:nvCxnSpPr>
+        <p:spPr>
+          <a:xfrm>
+            <a:off x="8434701" y="4027012"/>
+            <a:ext cx="0" cy="10205209"/>
+          </a:xfrm>
+          <a:prstGeom prst="line">
+            <a:avLst/>
+          </a:prstGeom>
+          <a:ln w="38100">
+            <a:solidFill>
+              <a:schemeClr val="tx1"/>
+            </a:solidFill>
+            <a:prstDash val="sysDash"/>
+          </a:ln>
+        </p:spPr>
+        <p:style>
+          <a:lnRef idx="2">
+            <a:schemeClr val="accent1"/>
+          </a:lnRef>
+          <a:fillRef idx="0">
+            <a:schemeClr val="accent1"/>
+          </a:fillRef>
+          <a:effectRef idx="1">
+            <a:schemeClr val="accent1"/>
+          </a:effectRef>
+          <a:fontRef idx="minor">
+            <a:schemeClr val="tx1"/>
+          </a:fontRef>
+        </p:style>
+      </p:cxnSp>
+      <p:cxnSp>
+        <p:nvCxnSpPr>
+          <p:cNvPr id="22" name="Straight Connector 21">
+            <a:extLst>
+              <a:ext uri="{FF2B5EF4-FFF2-40B4-BE49-F238E27FC236}">
+                <a16:creationId xmlns:a16="http://schemas.microsoft.com/office/drawing/2014/main" id="{B23A43C8-39F6-81D7-6B0F-ABBD8EF36426}"/>
+              </a:ext>
+            </a:extLst>
+          </p:cNvPr>
+          <p:cNvCxnSpPr/>
+          <p:nvPr/>
+        </p:nvCxnSpPr>
+        <p:spPr>
+          <a:xfrm>
+            <a:off x="29096668" y="4027012"/>
+            <a:ext cx="0" cy="10205209"/>
+          </a:xfrm>
+          <a:prstGeom prst="line">
+            <a:avLst/>
+          </a:prstGeom>
+          <a:ln w="38100">
+            <a:solidFill>
+              <a:schemeClr val="tx1"/>
+            </a:solidFill>
+            <a:prstDash val="sysDash"/>
+          </a:ln>
+        </p:spPr>
+        <p:style>
+          <a:lnRef idx="2">
+            <a:schemeClr val="accent1"/>
+          </a:lnRef>
+          <a:fillRef idx="0">
+            <a:schemeClr val="accent1"/>
+          </a:fillRef>
+          <a:effectRef idx="1">
+            <a:schemeClr val="accent1"/>
+          </a:effectRef>
+          <a:fontRef idx="minor">
+            <a:schemeClr val="tx1"/>
+          </a:fontRef>
+        </p:style>
+      </p:cxnSp>
     </p:spTree>
     <p:extLst>
       <p:ext uri="{BB962C8B-B14F-4D97-AF65-F5344CB8AC3E}">
@@ -35824,23 +36212,6 @@
 </file>
 
 <file path=customXml/item1.xml><?xml version="1.0" encoding="utf-8"?>
-<p:properties xmlns:p="http://schemas.microsoft.com/office/2006/metadata/properties" xmlns:xsi="http://www.w3.org/2001/XMLSchema-instance" xmlns:pc="http://schemas.microsoft.com/office/infopath/2007/PartnerControls">
-  <documentManagement>
-    <_activity xmlns="4668150b-da18-493d-a040-cbc02bf476e5" xsi:nil="true"/>
-  </documentManagement>
-</p:properties>
-</file>
-
-<file path=customXml/item2.xml><?xml version="1.0" encoding="utf-8"?>
-<?mso-contentType ?>
-<FormTemplates xmlns="http://schemas.microsoft.com/sharepoint/v3/contenttype/forms">
-  <Display>DocumentLibraryForm</Display>
-  <Edit>DocumentLibraryForm</Edit>
-  <New>DocumentLibraryForm</New>
-</FormTemplates>
-</file>
-
-<file path=customXml/item3.xml><?xml version="1.0" encoding="utf-8"?>
 <ct:contentTypeSchema xmlns:ct="http://schemas.microsoft.com/office/2006/metadata/contentType" xmlns:ma="http://schemas.microsoft.com/office/2006/metadata/properties/metaAttributes" ct:_="" ma:_="" ma:contentTypeName="Document" ma:contentTypeID="0x0101003D700C8CE122D6468A01E7E6F602FC93" ma:contentTypeVersion="15" ma:contentTypeDescription="Create a new document." ma:contentTypeScope="" ma:versionID="78a361b573735f4e8f7ea36d196d1741">
   <xsd:schema xmlns:xsd="http://www.w3.org/2001/XMLSchema" xmlns:xs="http://www.w3.org/2001/XMLSchema" xmlns:p="http://schemas.microsoft.com/office/2006/metadata/properties" xmlns:ns3="4668150b-da18-493d-a040-cbc02bf476e5" xmlns:ns4="e584c313-2618-4b13-ba4c-e296ab8c40d5" targetNamespace="http://schemas.microsoft.com/office/2006/metadata/properties" ma:root="true" ma:fieldsID="aacb3e30d10ecf7b0bc1959e7f1d2dde" ns3:_="" ns4:_="">
     <xsd:import namespace="4668150b-da18-493d-a040-cbc02bf476e5"/>
@@ -36071,32 +36442,24 @@
 </ct:contentTypeSchema>
 </file>
 
-<file path=customXml/itemProps1.xml><?xml version="1.0" encoding="utf-8"?>
-<ds:datastoreItem xmlns:ds="http://schemas.openxmlformats.org/officeDocument/2006/customXml" ds:itemID="{50738C8C-DF76-4388-8A52-04F66B29D512}">
-  <ds:schemaRefs>
-    <ds:schemaRef ds:uri="http://purl.org/dc/elements/1.1/"/>
-    <ds:schemaRef ds:uri="http://www.w3.org/XML/1998/namespace"/>
-    <ds:schemaRef ds:uri="http://schemas.microsoft.com/office/2006/documentManagement/types"/>
-    <ds:schemaRef ds:uri="e584c313-2618-4b13-ba4c-e296ab8c40d5"/>
-    <ds:schemaRef ds:uri="4668150b-da18-493d-a040-cbc02bf476e5"/>
-    <ds:schemaRef ds:uri="http://purl.org/dc/dcmitype/"/>
-    <ds:schemaRef ds:uri="http://schemas.microsoft.com/office/2006/metadata/properties"/>
-    <ds:schemaRef ds:uri="http://schemas.microsoft.com/office/infopath/2007/PartnerControls"/>
-    <ds:schemaRef ds:uri="http://schemas.openxmlformats.org/package/2006/metadata/core-properties"/>
-    <ds:schemaRef ds:uri="http://purl.org/dc/terms/"/>
-  </ds:schemaRefs>
-</ds:datastoreItem>
+<file path=customXml/item2.xml><?xml version="1.0" encoding="utf-8"?>
+<?mso-contentType ?>
+<FormTemplates xmlns="http://schemas.microsoft.com/sharepoint/v3/contenttype/forms">
+  <Display>DocumentLibraryForm</Display>
+  <Edit>DocumentLibraryForm</Edit>
+  <New>DocumentLibraryForm</New>
+</FormTemplates>
 </file>
 
-<file path=customXml/itemProps2.xml><?xml version="1.0" encoding="utf-8"?>
-<ds:datastoreItem xmlns:ds="http://schemas.openxmlformats.org/officeDocument/2006/customXml" ds:itemID="{F2F1528F-C631-4170-A5E1-A10CC58FFF8F}">
-  <ds:schemaRefs>
-    <ds:schemaRef ds:uri="http://schemas.microsoft.com/sharepoint/v3/contenttype/forms"/>
-  </ds:schemaRefs>
-</ds:datastoreItem>
+<file path=customXml/item3.xml><?xml version="1.0" encoding="utf-8"?>
+<p:properties xmlns:p="http://schemas.microsoft.com/office/2006/metadata/properties" xmlns:xsi="http://www.w3.org/2001/XMLSchema-instance" xmlns:pc="http://schemas.microsoft.com/office/infopath/2007/PartnerControls">
+  <documentManagement>
+    <_activity xmlns="4668150b-da18-493d-a040-cbc02bf476e5" xsi:nil="true"/>
+  </documentManagement>
+</p:properties>
 </file>
 
-<file path=customXml/itemProps3.xml><?xml version="1.0" encoding="utf-8"?>
+<file path=customXml/itemProps1.xml><?xml version="1.0" encoding="utf-8"?>
 <ds:datastoreItem xmlns:ds="http://schemas.openxmlformats.org/officeDocument/2006/customXml" ds:itemID="{9028DA92-C8DA-4342-B357-E9B52241A81B}">
   <ds:schemaRefs>
     <ds:schemaRef ds:uri="http://schemas.microsoft.com/office/2006/metadata/contentType"/>
@@ -36113,4 +36476,29 @@
     <ds:schemaRef ds:uri="http://schemas.microsoft.com/internal/obd"/>
   </ds:schemaRefs>
 </ds:datastoreItem>
+</file>
+
+<file path=customXml/itemProps2.xml><?xml version="1.0" encoding="utf-8"?>
+<ds:datastoreItem xmlns:ds="http://schemas.openxmlformats.org/officeDocument/2006/customXml" ds:itemID="{F2F1528F-C631-4170-A5E1-A10CC58FFF8F}">
+  <ds:schemaRefs>
+    <ds:schemaRef ds:uri="http://schemas.microsoft.com/sharepoint/v3/contenttype/forms"/>
+  </ds:schemaRefs>
+</ds:datastoreItem>
+</file>
+
+<file path=customXml/itemProps3.xml><?xml version="1.0" encoding="utf-8"?>
+<ds:datastoreItem xmlns:ds="http://schemas.openxmlformats.org/officeDocument/2006/customXml" ds:itemID="{50738C8C-DF76-4388-8A52-04F66B29D512}">
+  <ds:schemaRefs>
+    <ds:schemaRef ds:uri="http://purl.org/dc/elements/1.1/"/>
+    <ds:schemaRef ds:uri="http://www.w3.org/XML/1998/namespace"/>
+    <ds:schemaRef ds:uri="http://schemas.microsoft.com/office/2006/documentManagement/types"/>
+    <ds:schemaRef ds:uri="e584c313-2618-4b13-ba4c-e296ab8c40d5"/>
+    <ds:schemaRef ds:uri="4668150b-da18-493d-a040-cbc02bf476e5"/>
+    <ds:schemaRef ds:uri="http://purl.org/dc/dcmitype/"/>
+    <ds:schemaRef ds:uri="http://schemas.microsoft.com/office/2006/metadata/properties"/>
+    <ds:schemaRef ds:uri="http://schemas.microsoft.com/office/infopath/2007/PartnerControls"/>
+    <ds:schemaRef ds:uri="http://schemas.openxmlformats.org/package/2006/metadata/core-properties"/>
+    <ds:schemaRef ds:uri="http://purl.org/dc/terms/"/>
+  </ds:schemaRefs>
+</ds:datastoreItem>
 </file>